--- a/research_documentation/soft_limb_progress_update_working.pptx
+++ b/research_documentation/soft_limb_progress_update_working.pptx
@@ -18,6 +18,9 @@
     <p:sldId id="266" r:id="rId13"/>
     <p:sldId id="267" r:id="rId14"/>
     <p:sldId id="268" r:id="rId15"/>
+    <p:sldId id="269" r:id="rId16"/>
+    <p:sldId id="270" r:id="rId17"/>
+    <p:sldId id="271" r:id="rId18"/>
   </p:sldIdLst>
   <p:sldSz cx="12192000" cy="6858000"/>
   <p:notesSz cx="7772400" cy="10058400"/>
@@ -75,7 +78,7 @@
         <p:txBody>
           <a:bodyPr/>
           <a:p>
-            <a:fld id="{1C5F3256-4005-4115-A60D-AA33E6154F9A}" type="slidenum">
+            <a:fld id="{CFB18620-351E-49BD-8DAC-35CAEBF33AA4}" type="slidenum">
               <a:t>&lt;#&gt;</a:t>
             </a:fld>
           </a:p>
@@ -263,7 +266,7 @@
         <p:txBody>
           <a:bodyPr/>
           <a:p>
-            <a:fld id="{1DC0C3E6-634F-46CF-A6C8-CFE6127EB696}" type="slidenum">
+            <a:fld id="{32328E50-6A23-4A0E-B725-DCB6EA7236E5}" type="slidenum">
               <a:t>&lt;#&gt;</a:t>
             </a:fld>
           </a:p>
@@ -519,7 +522,7 @@
         <p:txBody>
           <a:bodyPr/>
           <a:p>
-            <a:fld id="{68BF432A-EAD1-4EE2-80CB-C58D83D365B3}" type="slidenum">
+            <a:fld id="{49294720-93ED-477B-BFFF-3F68A9F8A57A}" type="slidenum">
               <a:t>&lt;#&gt;</a:t>
             </a:fld>
           </a:p>
@@ -843,7 +846,7 @@
         <p:txBody>
           <a:bodyPr/>
           <a:p>
-            <a:fld id="{712BAC02-09D2-44BF-AC55-0EF8C663952A}" type="slidenum">
+            <a:fld id="{72E27208-F871-4490-9A4B-685FA6DA54B3}" type="slidenum">
               <a:t>&lt;#&gt;</a:t>
             </a:fld>
           </a:p>
@@ -1000,7 +1003,7 @@
         <p:txBody>
           <a:bodyPr/>
           <a:p>
-            <a:fld id="{C6796165-F71F-4DCB-BBB8-4D5C94BAC3C5}" type="slidenum">
+            <a:fld id="{C4E5F0DA-1EE1-4BB3-A7A9-C432DB5242B6}" type="slidenum">
               <a:t>&lt;#&gt;</a:t>
             </a:fld>
           </a:p>
@@ -1154,7 +1157,7 @@
         <p:txBody>
           <a:bodyPr/>
           <a:p>
-            <a:fld id="{22A7E13B-B126-4146-9590-10E64C357295}" type="slidenum">
+            <a:fld id="{AF8BC977-4C56-4001-A5F9-C6CD6BEBB7CB}" type="slidenum">
               <a:t>&lt;#&gt;</a:t>
             </a:fld>
           </a:p>
@@ -1342,7 +1345,7 @@
         <p:txBody>
           <a:bodyPr/>
           <a:p>
-            <a:fld id="{D7EC96A5-F942-4E0C-8ED4-DE62272BBC30}" type="slidenum">
+            <a:fld id="{3D4191B5-473D-48AC-94B2-73894C063264}" type="slidenum">
               <a:t>&lt;#&gt;</a:t>
             </a:fld>
           </a:p>
@@ -1462,7 +1465,7 @@
         <p:txBody>
           <a:bodyPr/>
           <a:p>
-            <a:fld id="{361E08EF-F4DB-4241-B8DE-775AF1E7DCAE}" type="slidenum">
+            <a:fld id="{4B540548-A05B-4C3D-90DE-895AD08B1FA4}" type="slidenum">
               <a:t>&lt;#&gt;</a:t>
             </a:fld>
           </a:p>
@@ -1582,7 +1585,7 @@
         <p:txBody>
           <a:bodyPr/>
           <a:p>
-            <a:fld id="{9A8A405C-2808-45AD-AC55-AC98F6A04800}" type="slidenum">
+            <a:fld id="{CC9890F6-810E-4504-8C86-48F40FFED9EA}" type="slidenum">
               <a:t>&lt;#&gt;</a:t>
             </a:fld>
           </a:p>
@@ -1804,7 +1807,7 @@
         <p:txBody>
           <a:bodyPr/>
           <a:p>
-            <a:fld id="{628161AC-7132-4B9C-B2C4-AFDE31897AEA}" type="slidenum">
+            <a:fld id="{8ACBA6BA-523B-4636-928C-A988FB6B9661}" type="slidenum">
               <a:t>&lt;#&gt;</a:t>
             </a:fld>
           </a:p>
@@ -2026,7 +2029,7 @@
         <p:txBody>
           <a:bodyPr/>
           <a:p>
-            <a:fld id="{9B72E974-A10D-4C83-8D26-8260583E9BD1}" type="slidenum">
+            <a:fld id="{80B70D53-3A41-47CF-8C1B-2ECCEC1F00C4}" type="slidenum">
               <a:t>&lt;#&gt;</a:t>
             </a:fld>
           </a:p>
@@ -2248,7 +2251,7 @@
         <p:txBody>
           <a:bodyPr/>
           <a:p>
-            <a:fld id="{B0FD61AD-B807-4A59-8449-DB4F0012A454}" type="slidenum">
+            <a:fld id="{11AC929E-F02C-450B-83D0-4EFA98FBF751}" type="slidenum">
               <a:t>&lt;#&gt;</a:t>
             </a:fld>
           </a:p>
@@ -2660,7 +2663,7 @@
             <a:pPr algn="r">
               <a:buNone/>
             </a:pPr>
-            <a:fld id="{6B8417FF-1331-4554-90DB-FD86B6F6BE50}" type="slidenum">
+            <a:fld id="{8CAFB1A2-88D0-49A3-B2E6-DF6029BF15EA}" type="slidenum">
               <a:rPr b="0" lang="en-US" sz="1400" spc="-1" strike="noStrike">
                 <a:latin typeface="Times New Roman"/>
               </a:rPr>
@@ -5937,7 +5940,7 @@
                 </a:solidFill>
                 <a:latin typeface="Arial"/>
               </a:rPr>
-              <a:t>Next Research Steps</a:t>
+              <a:t>Third Objective: Three Modules in Series</a:t>
             </a:r>
             <a:endParaRPr b="1" lang="en-US" sz="2400" spc="-1" strike="noStrike">
               <a:solidFill>
@@ -6010,7 +6013,7 @@
                 </a:solidFill>
                 <a:latin typeface="Arial"/>
               </a:rPr>
-              <a:t>FORWARD PLAN</a:t>
+              <a:t>SOFT_3_WORKING</a:t>
             </a:r>
             <a:endParaRPr b="1" lang="en-US" sz="800" spc="-1" strike="noStrike">
               <a:solidFill>
@@ -6108,31 +6111,29 @@
           </a:p>
         </p:txBody>
       </p:sp>
-      <p:sp>
-        <p:nvSpPr>
-          <p:cNvPr id="315" name=""/>
-          <p:cNvSpPr/>
-          <p:nvPr/>
-        </p:nvSpPr>
-        <p:spPr>
-          <a:xfrm>
-            <a:off x="468000" y="954000"/>
-            <a:ext cx="720000" cy="630000"/>
-          </a:xfrm>
-          <a:prstGeom prst="roundRect">
-            <a:avLst/>
-          </a:prstGeom>
-          <a:solidFill>
-            <a:srgbClr val="500000"/>
-          </a:solidFill>
-          <a:ln w="7200">
-            <a:solidFill>
-              <a:srgbClr val="500000"/>
-            </a:solidFill>
-            <a:round/>
-          </a:ln>
-        </p:spPr>
-      </p:sp>
+      <p:pic>
+        <p:nvPicPr>
+          <p:cNvPr id="315" name="" descr=""/>
+          <p:cNvPicPr/>
+          <p:nvPr/>
+        </p:nvPicPr>
+        <p:blipFill>
+          <a:blip r:embed="rId1"/>
+          <a:stretch/>
+        </p:blipFill>
+        <p:spPr>
+          <a:xfrm>
+            <a:off x="396000" y="846000"/>
+            <a:ext cx="4932000" cy="4932000"/>
+          </a:xfrm>
+          <a:prstGeom prst="rect">
+            <a:avLst/>
+          </a:prstGeom>
+          <a:ln w="0">
+            <a:noFill/>
+          </a:ln>
+        </p:spPr>
+      </p:pic>
       <p:sp>
         <p:nvSpPr>
           <p:cNvPr id="316" name=""/>
@@ -6141,37 +6142,34 @@
         </p:nvSpPr>
         <p:spPr>
           <a:xfrm>
-            <a:off x="486000" y="1090800"/>
-            <a:ext cx="684000" cy="384120"/>
-          </a:xfrm>
-          <a:prstGeom prst="rect">
-            <a:avLst/>
-          </a:prstGeom>
-          <a:noFill/>
-          <a:ln w="0">
-            <a:noFill/>
-          </a:ln>
-        </p:spPr>
-        <p:txBody>
-          <a:bodyPr lIns="43200" rIns="43200" tIns="43200" bIns="43200" anchor="t">
-            <a:noAutofit/>
-          </a:bodyPr>
-          <a:p>
-            <a:pPr algn="r">
-              <a:buNone/>
-            </a:pPr>
-            <a:r>
-              <a:rPr b="1" lang="en-US" sz="2100" spc="-1" strike="noStrike">
-                <a:solidFill>
-                  <a:srgbClr val="ffffff"/>
-                </a:solidFill>
-                <a:latin typeface="Arial"/>
-              </a:rPr>
-              <a:t>01</a:t>
-            </a:r>
-            <a:endParaRPr b="1" lang="en-US" sz="2100" spc="-1" strike="noStrike">
-              <a:solidFill>
-                <a:srgbClr val="ffffff"/>
+            <a:off x="5652000" y="918000"/>
+            <a:ext cx="5328000" cy="354960"/>
+          </a:xfrm>
+          <a:prstGeom prst="rect">
+            <a:avLst/>
+          </a:prstGeom>
+          <a:noFill/>
+          <a:ln w="0">
+            <a:noFill/>
+          </a:ln>
+        </p:spPr>
+        <p:txBody>
+          <a:bodyPr lIns="43200" rIns="43200" tIns="43200" bIns="43200" anchor="t">
+            <a:noAutofit/>
+          </a:bodyPr>
+          <a:p>
+            <a:r>
+              <a:rPr b="1" lang="en-US" sz="1900" spc="-1" strike="noStrike">
+                <a:solidFill>
+                  <a:srgbClr val="500000"/>
+                </a:solidFill>
+                <a:latin typeface="Arial"/>
+              </a:rPr>
+              <a:t>soft_3_working architecture</a:t>
+            </a:r>
+            <a:endParaRPr b="1" lang="en-US" sz="1900" spc="-1" strike="noStrike">
+              <a:solidFill>
+                <a:srgbClr val="500000"/>
               </a:solidFill>
               <a:latin typeface="Arial"/>
             </a:endParaRPr>
@@ -6186,34 +6184,34 @@
         </p:nvSpPr>
         <p:spPr>
           <a:xfrm>
-            <a:off x="1368000" y="997200"/>
-            <a:ext cx="2592000" cy="446400"/>
-          </a:xfrm>
-          <a:prstGeom prst="rect">
-            <a:avLst/>
-          </a:prstGeom>
-          <a:noFill/>
-          <a:ln w="0">
-            <a:noFill/>
-          </a:ln>
-        </p:spPr>
-        <p:txBody>
-          <a:bodyPr lIns="43200" rIns="43200" tIns="43200" bIns="43200" anchor="t">
-            <a:noAutofit/>
-          </a:bodyPr>
-          <a:p>
-            <a:r>
-              <a:rPr b="1" lang="en-US" sz="1450" spc="-1" strike="noStrike">
-                <a:solidFill>
-                  <a:srgbClr val="500000"/>
-                </a:solidFill>
-                <a:latin typeface="Arial"/>
-              </a:rPr>
-              <a:t>Physical gauge selection</a:t>
-            </a:r>
-            <a:endParaRPr b="1" lang="en-US" sz="1450" spc="-1" strike="noStrike">
-              <a:solidFill>
-                <a:srgbClr val="500000"/>
+            <a:off x="5652000" y="1292400"/>
+            <a:ext cx="180000" cy="245520"/>
+          </a:xfrm>
+          <a:prstGeom prst="rect">
+            <a:avLst/>
+          </a:prstGeom>
+          <a:noFill/>
+          <a:ln w="0">
+            <a:noFill/>
+          </a:ln>
+        </p:spPr>
+        <p:txBody>
+          <a:bodyPr lIns="43200" rIns="43200" tIns="43200" bIns="43200" anchor="t">
+            <a:noAutofit/>
+          </a:bodyPr>
+          <a:p>
+            <a:r>
+              <a:rPr b="1" lang="en-US" sz="1120" spc="-1" strike="noStrike">
+                <a:solidFill>
+                  <a:srgbClr val="167d8d"/>
+                </a:solidFill>
+                <a:latin typeface="Arial"/>
+              </a:rPr>
+              <a:t>●</a:t>
+            </a:r>
+            <a:endParaRPr b="1" lang="en-US" sz="1120" spc="-1" strike="noStrike">
+              <a:solidFill>
+                <a:srgbClr val="167d8d"/>
               </a:solidFill>
               <a:latin typeface="Arial"/>
             </a:endParaRPr>
@@ -6228,32 +6226,32 @@
         </p:nvSpPr>
         <p:spPr>
           <a:xfrm>
-            <a:off x="4104000" y="997200"/>
-            <a:ext cx="7164000" cy="464400"/>
-          </a:xfrm>
-          <a:prstGeom prst="rect">
-            <a:avLst/>
-          </a:prstGeom>
-          <a:noFill/>
-          <a:ln w="0">
-            <a:noFill/>
-          </a:ln>
-        </p:spPr>
-        <p:txBody>
-          <a:bodyPr lIns="43200" rIns="43200" tIns="43200" bIns="43200" anchor="t">
-            <a:noAutofit/>
-          </a:bodyPr>
-          <a:p>
-            <a:r>
-              <a:rPr b="0" lang="en-US" sz="1200" spc="-1" strike="noStrike">
+            <a:off x="5850000" y="1278000"/>
+            <a:ext cx="5490000" cy="464400"/>
+          </a:xfrm>
+          <a:prstGeom prst="rect">
+            <a:avLst/>
+          </a:prstGeom>
+          <a:noFill/>
+          <a:ln w="0">
+            <a:noFill/>
+          </a:ln>
+        </p:spPr>
+        <p:txBody>
+          <a:bodyPr lIns="43200" rIns="43200" tIns="43200" bIns="43200" anchor="t">
+            <a:noAutofit/>
+          </a:bodyPr>
+          <a:p>
+            <a:r>
+              <a:rPr b="0" lang="en-US" sz="1320" spc="-1" strike="noStrike">
                 <a:solidFill>
                   <a:srgbClr val="17212b"/>
                 </a:solidFill>
                 <a:latin typeface="Arial"/>
               </a:rPr>
-              <a:t>Choose a commercial gauge, substrate, adhesive, and temperature compensation strategy.</a:t>
-            </a:r>
-            <a:endParaRPr b="0" lang="en-US" sz="1200" spc="-1" strike="noStrike">
+              <a:t>Three serial six-disc modules: 18 physical discs</a:t>
+            </a:r>
+            <a:endParaRPr b="0" lang="en-US" sz="1320" spc="-1" strike="noStrike">
               <a:solidFill>
                 <a:srgbClr val="17212b"/>
               </a:solidFill>
@@ -6265,27 +6263,44 @@
       <p:sp>
         <p:nvSpPr>
           <p:cNvPr id="319" name=""/>
-          <p:cNvSpPr/>
-          <p:nvPr/>
-        </p:nvSpPr>
-        <p:spPr>
-          <a:xfrm>
-            <a:off x="468000" y="1944000"/>
-            <a:ext cx="720000" cy="630000"/>
-          </a:xfrm>
-          <a:prstGeom prst="roundRect">
-            <a:avLst/>
-          </a:prstGeom>
-          <a:solidFill>
-            <a:srgbClr val="500000"/>
-          </a:solidFill>
-          <a:ln w="7200">
-            <a:solidFill>
-              <a:srgbClr val="500000"/>
-            </a:solidFill>
-            <a:round/>
-          </a:ln>
-        </p:spPr>
+          <p:cNvSpPr txBox="1"/>
+          <p:nvPr/>
+        </p:nvSpPr>
+        <p:spPr>
+          <a:xfrm>
+            <a:off x="5652000" y="1760400"/>
+            <a:ext cx="180000" cy="245520"/>
+          </a:xfrm>
+          <a:prstGeom prst="rect">
+            <a:avLst/>
+          </a:prstGeom>
+          <a:noFill/>
+          <a:ln w="0">
+            <a:noFill/>
+          </a:ln>
+        </p:spPr>
+        <p:txBody>
+          <a:bodyPr lIns="43200" rIns="43200" tIns="43200" bIns="43200" anchor="t">
+            <a:noAutofit/>
+          </a:bodyPr>
+          <a:p>
+            <a:r>
+              <a:rPr b="1" lang="en-US" sz="1120" spc="-1" strike="noStrike">
+                <a:solidFill>
+                  <a:srgbClr val="167d8d"/>
+                </a:solidFill>
+                <a:latin typeface="Arial"/>
+              </a:rPr>
+              <a:t>●</a:t>
+            </a:r>
+            <a:endParaRPr b="1" lang="en-US" sz="1120" spc="-1" strike="noStrike">
+              <a:solidFill>
+                <a:srgbClr val="167d8d"/>
+              </a:solidFill>
+              <a:latin typeface="Arial"/>
+            </a:endParaRPr>
+          </a:p>
+        </p:txBody>
       </p:sp>
       <p:sp>
         <p:nvSpPr>
@@ -6295,37 +6310,34 @@
         </p:nvSpPr>
         <p:spPr>
           <a:xfrm>
-            <a:off x="486000" y="2080800"/>
-            <a:ext cx="684000" cy="384120"/>
-          </a:xfrm>
-          <a:prstGeom prst="rect">
-            <a:avLst/>
-          </a:prstGeom>
-          <a:noFill/>
-          <a:ln w="0">
-            <a:noFill/>
-          </a:ln>
-        </p:spPr>
-        <p:txBody>
-          <a:bodyPr lIns="43200" rIns="43200" tIns="43200" bIns="43200" anchor="t">
-            <a:noAutofit/>
-          </a:bodyPr>
-          <a:p>
-            <a:pPr algn="r">
-              <a:buNone/>
-            </a:pPr>
-            <a:r>
-              <a:rPr b="1" lang="en-US" sz="2100" spc="-1" strike="noStrike">
-                <a:solidFill>
-                  <a:srgbClr val="ffffff"/>
-                </a:solidFill>
-                <a:latin typeface="Arial"/>
-              </a:rPr>
-              <a:t>02</a:t>
-            </a:r>
-            <a:endParaRPr b="1" lang="en-US" sz="2100" spc="-1" strike="noStrike">
-              <a:solidFill>
-                <a:srgbClr val="ffffff"/>
+            <a:off x="5850000" y="1746000"/>
+            <a:ext cx="5490000" cy="464400"/>
+          </a:xfrm>
+          <a:prstGeom prst="rect">
+            <a:avLst/>
+          </a:prstGeom>
+          <a:noFill/>
+          <a:ln w="0">
+            <a:noFill/>
+          </a:ln>
+        </p:spPr>
+        <p:txBody>
+          <a:bodyPr lIns="43200" rIns="43200" tIns="43200" bIns="43200" anchor="t">
+            <a:noAutofit/>
+          </a:bodyPr>
+          <a:p>
+            <a:r>
+              <a:rPr b="0" lang="en-US" sz="1320" spc="-1" strike="noStrike">
+                <a:solidFill>
+                  <a:srgbClr val="17212b"/>
+                </a:solidFill>
+                <a:latin typeface="Arial"/>
+              </a:rPr>
+              <a:t>Five actuated intervals per module: 15 total</a:t>
+            </a:r>
+            <a:endParaRPr b="0" lang="en-US" sz="1320" spc="-1" strike="noStrike">
+              <a:solidFill>
+                <a:srgbClr val="17212b"/>
               </a:solidFill>
               <a:latin typeface="Arial"/>
             </a:endParaRPr>
@@ -6340,34 +6352,34 @@
         </p:nvSpPr>
         <p:spPr>
           <a:xfrm>
-            <a:off x="1368000" y="1987200"/>
-            <a:ext cx="2592000" cy="446400"/>
-          </a:xfrm>
-          <a:prstGeom prst="rect">
-            <a:avLst/>
-          </a:prstGeom>
-          <a:noFill/>
-          <a:ln w="0">
-            <a:noFill/>
-          </a:ln>
-        </p:spPr>
-        <p:txBody>
-          <a:bodyPr lIns="43200" rIns="43200" tIns="43200" bIns="43200" anchor="t">
-            <a:noAutofit/>
-          </a:bodyPr>
-          <a:p>
-            <a:r>
-              <a:rPr b="1" lang="en-US" sz="1450" spc="-1" strike="noStrike">
-                <a:solidFill>
-                  <a:srgbClr val="500000"/>
-                </a:solidFill>
-                <a:latin typeface="Arial"/>
-              </a:rPr>
-              <a:t>Bench calibration</a:t>
-            </a:r>
-            <a:endParaRPr b="1" lang="en-US" sz="1450" spc="-1" strike="noStrike">
-              <a:solidFill>
-                <a:srgbClr val="500000"/>
+            <a:off x="5652000" y="2228400"/>
+            <a:ext cx="180000" cy="245520"/>
+          </a:xfrm>
+          <a:prstGeom prst="rect">
+            <a:avLst/>
+          </a:prstGeom>
+          <a:noFill/>
+          <a:ln w="0">
+            <a:noFill/>
+          </a:ln>
+        </p:spPr>
+        <p:txBody>
+          <a:bodyPr lIns="43200" rIns="43200" tIns="43200" bIns="43200" anchor="t">
+            <a:noAutofit/>
+          </a:bodyPr>
+          <a:p>
+            <a:r>
+              <a:rPr b="1" lang="en-US" sz="1120" spc="-1" strike="noStrike">
+                <a:solidFill>
+                  <a:srgbClr val="167d8d"/>
+                </a:solidFill>
+                <a:latin typeface="Arial"/>
+              </a:rPr>
+              <a:t>●</a:t>
+            </a:r>
+            <a:endParaRPr b="1" lang="en-US" sz="1120" spc="-1" strike="noStrike">
+              <a:solidFill>
+                <a:srgbClr val="167d8d"/>
               </a:solidFill>
               <a:latin typeface="Arial"/>
             </a:endParaRPr>
@@ -6382,32 +6394,32 @@
         </p:nvSpPr>
         <p:spPr>
           <a:xfrm>
-            <a:off x="4104000" y="1987200"/>
-            <a:ext cx="7164000" cy="464400"/>
-          </a:xfrm>
-          <a:prstGeom prst="rect">
-            <a:avLst/>
-          </a:prstGeom>
-          <a:noFill/>
-          <a:ln w="0">
-            <a:noFill/>
-          </a:ln>
-        </p:spPr>
-        <p:txBody>
-          <a:bodyPr lIns="43200" rIns="43200" tIns="43200" bIns="43200" anchor="t">
-            <a:noAutofit/>
-          </a:bodyPr>
-          <a:p>
-            <a:r>
-              <a:rPr b="0" lang="en-US" sz="1200" spc="-1" strike="noStrike">
+            <a:off x="5850000" y="2214000"/>
+            <a:ext cx="5490000" cy="464400"/>
+          </a:xfrm>
+          <a:prstGeom prst="rect">
+            <a:avLst/>
+          </a:prstGeom>
+          <a:noFill/>
+          <a:ln w="0">
+            <a:noFill/>
+          </a:ln>
+        </p:spPr>
+        <p:txBody>
+          <a:bodyPr lIns="43200" rIns="43200" tIns="43200" bIns="43200" anchor="t">
+            <a:noAutofit/>
+          </a:bodyPr>
+          <a:p>
+            <a:r>
+              <a:rPr b="0" lang="en-US" sz="1320" spc="-1" strike="noStrike">
                 <a:solidFill>
                   <a:srgbClr val="17212b"/>
                 </a:solidFill>
                 <a:latin typeface="Arial"/>
               </a:rPr>
-              <a:t>Measure real strain and bridge voltage against known curvature and loading.</a:t>
-            </a:r>
-            <a:endParaRPr b="0" lang="en-US" sz="1200" spc="-1" strike="noStrike">
+              <a:t>Two fixed connectors transmit pose between modules</a:t>
+            </a:r>
+            <a:endParaRPr b="0" lang="en-US" sz="1320" spc="-1" strike="noStrike">
               <a:solidFill>
                 <a:srgbClr val="17212b"/>
               </a:solidFill>
@@ -6419,27 +6431,44 @@
       <p:sp>
         <p:nvSpPr>
           <p:cNvPr id="323" name=""/>
-          <p:cNvSpPr/>
-          <p:nvPr/>
-        </p:nvSpPr>
-        <p:spPr>
-          <a:xfrm>
-            <a:off x="468000" y="2934000"/>
-            <a:ext cx="720000" cy="630000"/>
-          </a:xfrm>
-          <a:prstGeom prst="roundRect">
-            <a:avLst/>
-          </a:prstGeom>
-          <a:solidFill>
-            <a:srgbClr val="500000"/>
-          </a:solidFill>
-          <a:ln w="7200">
-            <a:solidFill>
-              <a:srgbClr val="500000"/>
-            </a:solidFill>
-            <a:round/>
-          </a:ln>
-        </p:spPr>
+          <p:cNvSpPr txBox="1"/>
+          <p:nvPr/>
+        </p:nvSpPr>
+        <p:spPr>
+          <a:xfrm>
+            <a:off x="5652000" y="2696400"/>
+            <a:ext cx="180000" cy="245520"/>
+          </a:xfrm>
+          <a:prstGeom prst="rect">
+            <a:avLst/>
+          </a:prstGeom>
+          <a:noFill/>
+          <a:ln w="0">
+            <a:noFill/>
+          </a:ln>
+        </p:spPr>
+        <p:txBody>
+          <a:bodyPr lIns="43200" rIns="43200" tIns="43200" bIns="43200" anchor="t">
+            <a:noAutofit/>
+          </a:bodyPr>
+          <a:p>
+            <a:r>
+              <a:rPr b="1" lang="en-US" sz="1120" spc="-1" strike="noStrike">
+                <a:solidFill>
+                  <a:srgbClr val="167d8d"/>
+                </a:solidFill>
+                <a:latin typeface="Arial"/>
+              </a:rPr>
+              <a:t>●</a:t>
+            </a:r>
+            <a:endParaRPr b="1" lang="en-US" sz="1120" spc="-1" strike="noStrike">
+              <a:solidFill>
+                <a:srgbClr val="167d8d"/>
+              </a:solidFill>
+              <a:latin typeface="Arial"/>
+            </a:endParaRPr>
+          </a:p>
+        </p:txBody>
       </p:sp>
       <p:sp>
         <p:nvSpPr>
@@ -6449,37 +6478,34 @@
         </p:nvSpPr>
         <p:spPr>
           <a:xfrm>
-            <a:off x="486000" y="3070800"/>
-            <a:ext cx="684000" cy="384120"/>
-          </a:xfrm>
-          <a:prstGeom prst="rect">
-            <a:avLst/>
-          </a:prstGeom>
-          <a:noFill/>
-          <a:ln w="0">
-            <a:noFill/>
-          </a:ln>
-        </p:spPr>
-        <p:txBody>
-          <a:bodyPr lIns="43200" rIns="43200" tIns="43200" bIns="43200" anchor="t">
-            <a:noAutofit/>
-          </a:bodyPr>
-          <a:p>
-            <a:pPr algn="r">
-              <a:buNone/>
-            </a:pPr>
-            <a:r>
-              <a:rPr b="1" lang="en-US" sz="2100" spc="-1" strike="noStrike">
-                <a:solidFill>
-                  <a:srgbClr val="ffffff"/>
-                </a:solidFill>
-                <a:latin typeface="Arial"/>
-              </a:rPr>
-              <a:t>03</a:t>
-            </a:r>
-            <a:endParaRPr b="1" lang="en-US" sz="2100" spc="-1" strike="noStrike">
-              <a:solidFill>
-                <a:srgbClr val="ffffff"/>
+            <a:off x="5850000" y="2682000"/>
+            <a:ext cx="5490000" cy="464400"/>
+          </a:xfrm>
+          <a:prstGeom prst="rect">
+            <a:avLst/>
+          </a:prstGeom>
+          <a:noFill/>
+          <a:ln w="0">
+            <a:noFill/>
+          </a:ln>
+        </p:spPr>
+        <p:txBody>
+          <a:bodyPr lIns="43200" rIns="43200" tIns="43200" bIns="43200" anchor="t">
+            <a:noAutofit/>
+          </a:bodyPr>
+          <a:p>
+            <a:r>
+              <a:rPr b="0" lang="en-US" sz="1320" spc="-1" strike="noStrike">
+                <a:solidFill>
+                  <a:srgbClr val="17212b"/>
+                </a:solidFill>
+                <a:latin typeface="Arial"/>
+              </a:rPr>
+              <a:t>The first disc is fixed in air; the chain hangs under gravity</a:t>
+            </a:r>
+            <a:endParaRPr b="0" lang="en-US" sz="1320" spc="-1" strike="noStrike">
+              <a:solidFill>
+                <a:srgbClr val="17212b"/>
               </a:solidFill>
               <a:latin typeface="Arial"/>
             </a:endParaRPr>
@@ -6494,34 +6520,34 @@
         </p:nvSpPr>
         <p:spPr>
           <a:xfrm>
-            <a:off x="1368000" y="2977200"/>
-            <a:ext cx="2592000" cy="501480"/>
-          </a:xfrm>
-          <a:prstGeom prst="rect">
-            <a:avLst/>
-          </a:prstGeom>
-          <a:noFill/>
-          <a:ln w="0">
-            <a:noFill/>
-          </a:ln>
-        </p:spPr>
-        <p:txBody>
-          <a:bodyPr lIns="43200" rIns="43200" tIns="43200" bIns="43200" anchor="t">
-            <a:noAutofit/>
-          </a:bodyPr>
-          <a:p>
-            <a:r>
-              <a:rPr b="1" lang="en-US" sz="1450" spc="-1" strike="noStrike">
-                <a:solidFill>
-                  <a:srgbClr val="500000"/>
-                </a:solidFill>
-                <a:latin typeface="Arial"/>
-              </a:rPr>
-              <a:t>Independent shape validation</a:t>
-            </a:r>
-            <a:endParaRPr b="1" lang="en-US" sz="1450" spc="-1" strike="noStrike">
-              <a:solidFill>
-                <a:srgbClr val="500000"/>
+            <a:off x="5652000" y="3164400"/>
+            <a:ext cx="180000" cy="245520"/>
+          </a:xfrm>
+          <a:prstGeom prst="rect">
+            <a:avLst/>
+          </a:prstGeom>
+          <a:noFill/>
+          <a:ln w="0">
+            <a:noFill/>
+          </a:ln>
+        </p:spPr>
+        <p:txBody>
+          <a:bodyPr lIns="43200" rIns="43200" tIns="43200" bIns="43200" anchor="t">
+            <a:noAutofit/>
+          </a:bodyPr>
+          <a:p>
+            <a:r>
+              <a:rPr b="1" lang="en-US" sz="1120" spc="-1" strike="noStrike">
+                <a:solidFill>
+                  <a:srgbClr val="167d8d"/>
+                </a:solidFill>
+                <a:latin typeface="Arial"/>
+              </a:rPr>
+              <a:t>●</a:t>
+            </a:r>
+            <a:endParaRPr b="1" lang="en-US" sz="1120" spc="-1" strike="noStrike">
+              <a:solidFill>
+                <a:srgbClr val="167d8d"/>
               </a:solidFill>
               <a:latin typeface="Arial"/>
             </a:endParaRPr>
@@ -6536,32 +6562,32 @@
         </p:nvSpPr>
         <p:spPr>
           <a:xfrm>
-            <a:off x="4104000" y="2977200"/>
-            <a:ext cx="7164000" cy="464400"/>
-          </a:xfrm>
-          <a:prstGeom prst="rect">
-            <a:avLst/>
-          </a:prstGeom>
-          <a:noFill/>
-          <a:ln w="0">
-            <a:noFill/>
-          </a:ln>
-        </p:spPr>
-        <p:txBody>
-          <a:bodyPr lIns="43200" rIns="43200" tIns="43200" bIns="43200" anchor="t">
-            <a:noAutofit/>
-          </a:bodyPr>
-          <a:p>
-            <a:r>
-              <a:rPr b="0" lang="en-US" sz="1200" spc="-1" strike="noStrike">
+            <a:off x="5850000" y="3150000"/>
+            <a:ext cx="5490000" cy="464400"/>
+          </a:xfrm>
+          <a:prstGeom prst="rect">
+            <a:avLst/>
+          </a:prstGeom>
+          <a:noFill/>
+          <a:ln w="0">
+            <a:noFill/>
+          </a:ln>
+        </p:spPr>
+        <p:txBody>
+          <a:bodyPr lIns="43200" rIns="43200" tIns="43200" bIns="43200" anchor="t">
+            <a:noAutofit/>
+          </a:bodyPr>
+          <a:p>
+            <a:r>
+              <a:rPr b="0" lang="en-US" sz="1320" spc="-1" strike="noStrike">
                 <a:solidFill>
                   <a:srgbClr val="17212b"/>
                 </a:solidFill>
                 <a:latin typeface="Arial"/>
               </a:rPr>
-              <a:t>Compare reconstructed curvature with motion capture or vision—not the same pose source.</a:t>
-            </a:r>
-            <a:endParaRPr b="0" lang="en-US" sz="1200" spc="-1" strike="noStrike">
+              <a:t>Three independent φ-torque commands</a:t>
+            </a:r>
+            <a:endParaRPr b="0" lang="en-US" sz="1320" spc="-1" strike="noStrike">
               <a:solidFill>
                 <a:srgbClr val="17212b"/>
               </a:solidFill>
@@ -6573,27 +6599,44 @@
       <p:sp>
         <p:nvSpPr>
           <p:cNvPr id="327" name=""/>
-          <p:cNvSpPr/>
-          <p:nvPr/>
-        </p:nvSpPr>
-        <p:spPr>
-          <a:xfrm>
-            <a:off x="468000" y="3924000"/>
-            <a:ext cx="720000" cy="630000"/>
-          </a:xfrm>
-          <a:prstGeom prst="roundRect">
-            <a:avLst/>
-          </a:prstGeom>
-          <a:solidFill>
-            <a:srgbClr val="500000"/>
-          </a:solidFill>
-          <a:ln w="7200">
-            <a:solidFill>
-              <a:srgbClr val="500000"/>
-            </a:solidFill>
-            <a:round/>
-          </a:ln>
-        </p:spPr>
+          <p:cNvSpPr txBox="1"/>
+          <p:nvPr/>
+        </p:nvSpPr>
+        <p:spPr>
+          <a:xfrm>
+            <a:off x="5652000" y="3632400"/>
+            <a:ext cx="180000" cy="245520"/>
+          </a:xfrm>
+          <a:prstGeom prst="rect">
+            <a:avLst/>
+          </a:prstGeom>
+          <a:noFill/>
+          <a:ln w="0">
+            <a:noFill/>
+          </a:ln>
+        </p:spPr>
+        <p:txBody>
+          <a:bodyPr lIns="43200" rIns="43200" tIns="43200" bIns="43200" anchor="t">
+            <a:noAutofit/>
+          </a:bodyPr>
+          <a:p>
+            <a:r>
+              <a:rPr b="1" lang="en-US" sz="1120" spc="-1" strike="noStrike">
+                <a:solidFill>
+                  <a:srgbClr val="167d8d"/>
+                </a:solidFill>
+                <a:latin typeface="Arial"/>
+              </a:rPr>
+              <a:t>●</a:t>
+            </a:r>
+            <a:endParaRPr b="1" lang="en-US" sz="1120" spc="-1" strike="noStrike">
+              <a:solidFill>
+                <a:srgbClr val="167d8d"/>
+              </a:solidFill>
+              <a:latin typeface="Arial"/>
+            </a:endParaRPr>
+          </a:p>
+        </p:txBody>
       </p:sp>
       <p:sp>
         <p:nvSpPr>
@@ -6603,37 +6646,34 @@
         </p:nvSpPr>
         <p:spPr>
           <a:xfrm>
-            <a:off x="486000" y="4060800"/>
-            <a:ext cx="684000" cy="384120"/>
-          </a:xfrm>
-          <a:prstGeom prst="rect">
-            <a:avLst/>
-          </a:prstGeom>
-          <a:noFill/>
-          <a:ln w="0">
-            <a:noFill/>
-          </a:ln>
-        </p:spPr>
-        <p:txBody>
-          <a:bodyPr lIns="43200" rIns="43200" tIns="43200" bIns="43200" anchor="t">
-            <a:noAutofit/>
-          </a:bodyPr>
-          <a:p>
-            <a:pPr algn="r">
-              <a:buNone/>
-            </a:pPr>
-            <a:r>
-              <a:rPr b="1" lang="en-US" sz="2100" spc="-1" strike="noStrike">
-                <a:solidFill>
-                  <a:srgbClr val="ffffff"/>
-                </a:solidFill>
-                <a:latin typeface="Arial"/>
-              </a:rPr>
-              <a:t>04</a:t>
-            </a:r>
-            <a:endParaRPr b="1" lang="en-US" sz="2100" spc="-1" strike="noStrike">
-              <a:solidFill>
-                <a:srgbClr val="ffffff"/>
+            <a:off x="5850000" y="3618000"/>
+            <a:ext cx="5490000" cy="464400"/>
+          </a:xfrm>
+          <a:prstGeom prst="rect">
+            <a:avLst/>
+          </a:prstGeom>
+          <a:noFill/>
+          <a:ln w="0">
+            <a:noFill/>
+          </a:ln>
+        </p:spPr>
+        <p:txBody>
+          <a:bodyPr lIns="43200" rIns="43200" tIns="43200" bIns="43200" anchor="t">
+            <a:noAutofit/>
+          </a:bodyPr>
+          <a:p>
+            <a:r>
+              <a:rPr b="0" lang="en-US" sz="1320" spc="-1" strike="noStrike">
+                <a:solidFill>
+                  <a:srgbClr val="17212b"/>
+                </a:solidFill>
+                <a:latin typeface="Arial"/>
+              </a:rPr>
+              <a:t>Three independent θ bending directions</a:t>
+            </a:r>
+            <a:endParaRPr b="0" lang="en-US" sz="1320" spc="-1" strike="noStrike">
+              <a:solidFill>
+                <a:srgbClr val="17212b"/>
               </a:solidFill>
               <a:latin typeface="Arial"/>
             </a:endParaRPr>
@@ -6648,34 +6688,34 @@
         </p:nvSpPr>
         <p:spPr>
           <a:xfrm>
-            <a:off x="1368000" y="3967200"/>
-            <a:ext cx="2592000" cy="501480"/>
-          </a:xfrm>
-          <a:prstGeom prst="rect">
-            <a:avLst/>
-          </a:prstGeom>
-          <a:noFill/>
-          <a:ln w="0">
-            <a:noFill/>
-          </a:ln>
-        </p:spPr>
-        <p:txBody>
-          <a:bodyPr lIns="43200" rIns="43200" tIns="43200" bIns="43200" anchor="t">
-            <a:noAutofit/>
-          </a:bodyPr>
-          <a:p>
-            <a:r>
-              <a:rPr b="1" lang="en-US" sz="1450" spc="-1" strike="noStrike">
-                <a:solidFill>
-                  <a:srgbClr val="500000"/>
-                </a:solidFill>
-                <a:latin typeface="Arial"/>
-              </a:rPr>
-              <a:t>Loaded and directional trials</a:t>
-            </a:r>
-            <a:endParaRPr b="1" lang="en-US" sz="1450" spc="-1" strike="noStrike">
-              <a:solidFill>
-                <a:srgbClr val="500000"/>
+            <a:off x="5652000" y="4100400"/>
+            <a:ext cx="180000" cy="245520"/>
+          </a:xfrm>
+          <a:prstGeom prst="rect">
+            <a:avLst/>
+          </a:prstGeom>
+          <a:noFill/>
+          <a:ln w="0">
+            <a:noFill/>
+          </a:ln>
+        </p:spPr>
+        <p:txBody>
+          <a:bodyPr lIns="43200" rIns="43200" tIns="43200" bIns="43200" anchor="t">
+            <a:noAutofit/>
+          </a:bodyPr>
+          <a:p>
+            <a:r>
+              <a:rPr b="1" lang="en-US" sz="1120" spc="-1" strike="noStrike">
+                <a:solidFill>
+                  <a:srgbClr val="167d8d"/>
+                </a:solidFill>
+                <a:latin typeface="Arial"/>
+              </a:rPr>
+              <a:t>●</a:t>
+            </a:r>
+            <a:endParaRPr b="1" lang="en-US" sz="1120" spc="-1" strike="noStrike">
+              <a:solidFill>
+                <a:srgbClr val="167d8d"/>
               </a:solidFill>
               <a:latin typeface="Arial"/>
             </a:endParaRPr>
@@ -6690,32 +6730,32 @@
         </p:nvSpPr>
         <p:spPr>
           <a:xfrm>
-            <a:off x="4104000" y="3967200"/>
-            <a:ext cx="7164000" cy="464400"/>
-          </a:xfrm>
-          <a:prstGeom prst="rect">
-            <a:avLst/>
-          </a:prstGeom>
-          <a:noFill/>
-          <a:ln w="0">
-            <a:noFill/>
-          </a:ln>
-        </p:spPr>
-        <p:txBody>
-          <a:bodyPr lIns="43200" rIns="43200" tIns="43200" bIns="43200" anchor="t">
-            <a:noAutofit/>
-          </a:bodyPr>
-          <a:p>
-            <a:r>
-              <a:rPr b="0" lang="en-US" sz="1200" spc="-1" strike="noStrike">
+            <a:off x="5850000" y="4086000"/>
+            <a:ext cx="5490000" cy="464400"/>
+          </a:xfrm>
+          <a:prstGeom prst="rect">
+            <a:avLst/>
+          </a:prstGeom>
+          <a:noFill/>
+          <a:ln w="0">
+            <a:noFill/>
+          </a:ln>
+        </p:spPr>
+        <p:txBody>
+          <a:bodyPr lIns="43200" rIns="43200" tIns="43200" bIns="43200" anchor="t">
+            <a:noAutofit/>
+          </a:bodyPr>
+          <a:p>
+            <a:r>
+              <a:rPr b="0" lang="en-US" sz="1320" spc="-1" strike="noStrike">
                 <a:solidFill>
                   <a:srgbClr val="17212b"/>
                 </a:solidFill>
                 <a:latin typeface="Arial"/>
               </a:rPr>
-              <a:t>Repeat across θ, negative torque, payloads, disturbances, and repeated cycles.</a:t>
-            </a:r>
-            <a:endParaRPr b="0" lang="en-US" sz="1200" spc="-1" strike="noStrike">
+              <a:t>Same synchronized constant-curvature target inside every module</a:t>
+            </a:r>
+            <a:endParaRPr b="0" lang="en-US" sz="1320" spc="-1" strike="noStrike">
               <a:solidFill>
                 <a:srgbClr val="17212b"/>
               </a:solidFill>
@@ -6727,27 +6767,44 @@
       <p:sp>
         <p:nvSpPr>
           <p:cNvPr id="331" name=""/>
-          <p:cNvSpPr/>
-          <p:nvPr/>
-        </p:nvSpPr>
-        <p:spPr>
-          <a:xfrm>
-            <a:off x="468000" y="4914000"/>
-            <a:ext cx="720000" cy="630000"/>
-          </a:xfrm>
-          <a:prstGeom prst="roundRect">
-            <a:avLst/>
-          </a:prstGeom>
-          <a:solidFill>
-            <a:srgbClr val="500000"/>
-          </a:solidFill>
-          <a:ln w="7200">
-            <a:solidFill>
-              <a:srgbClr val="500000"/>
-            </a:solidFill>
-            <a:round/>
-          </a:ln>
-        </p:spPr>
+          <p:cNvSpPr txBox="1"/>
+          <p:nvPr/>
+        </p:nvSpPr>
+        <p:spPr>
+          <a:xfrm>
+            <a:off x="5652000" y="4568400"/>
+            <a:ext cx="180000" cy="245520"/>
+          </a:xfrm>
+          <a:prstGeom prst="rect">
+            <a:avLst/>
+          </a:prstGeom>
+          <a:noFill/>
+          <a:ln w="0">
+            <a:noFill/>
+          </a:ln>
+        </p:spPr>
+        <p:txBody>
+          <a:bodyPr lIns="43200" rIns="43200" tIns="43200" bIns="43200" anchor="t">
+            <a:noAutofit/>
+          </a:bodyPr>
+          <a:p>
+            <a:r>
+              <a:rPr b="1" lang="en-US" sz="1120" spc="-1" strike="noStrike">
+                <a:solidFill>
+                  <a:srgbClr val="167d8d"/>
+                </a:solidFill>
+                <a:latin typeface="Arial"/>
+              </a:rPr>
+              <a:t>●</a:t>
+            </a:r>
+            <a:endParaRPr b="1" lang="en-US" sz="1120" spc="-1" strike="noStrike">
+              <a:solidFill>
+                <a:srgbClr val="167d8d"/>
+              </a:solidFill>
+              <a:latin typeface="Arial"/>
+            </a:endParaRPr>
+          </a:p>
+        </p:txBody>
       </p:sp>
       <p:sp>
         <p:nvSpPr>
@@ -6757,37 +6814,34 @@
         </p:nvSpPr>
         <p:spPr>
           <a:xfrm>
-            <a:off x="486000" y="5050800"/>
-            <a:ext cx="684000" cy="384120"/>
-          </a:xfrm>
-          <a:prstGeom prst="rect">
-            <a:avLst/>
-          </a:prstGeom>
-          <a:noFill/>
-          <a:ln w="0">
-            <a:noFill/>
-          </a:ln>
-        </p:spPr>
-        <p:txBody>
-          <a:bodyPr lIns="43200" rIns="43200" tIns="43200" bIns="43200" anchor="t">
-            <a:noAutofit/>
-          </a:bodyPr>
-          <a:p>
-            <a:pPr algn="r">
-              <a:buNone/>
-            </a:pPr>
-            <a:r>
-              <a:rPr b="1" lang="en-US" sz="2100" spc="-1" strike="noStrike">
-                <a:solidFill>
-                  <a:srgbClr val="ffffff"/>
-                </a:solidFill>
-                <a:latin typeface="Arial"/>
-              </a:rPr>
-              <a:t>05</a:t>
-            </a:r>
-            <a:endParaRPr b="1" lang="en-US" sz="2100" spc="-1" strike="noStrike">
-              <a:solidFill>
-                <a:srgbClr val="ffffff"/>
+            <a:off x="5850000" y="4554000"/>
+            <a:ext cx="5490000" cy="464400"/>
+          </a:xfrm>
+          <a:prstGeom prst="rect">
+            <a:avLst/>
+          </a:prstGeom>
+          <a:noFill/>
+          <a:ln w="0">
+            <a:noFill/>
+          </a:ln>
+        </p:spPr>
+        <p:txBody>
+          <a:bodyPr lIns="43200" rIns="43200" tIns="43200" bIns="43200" anchor="t">
+            <a:noAutofit/>
+          </a:bodyPr>
+          <a:p>
+            <a:r>
+              <a:rPr b="0" lang="en-US" sz="1320" spc="-1" strike="noStrike">
+                <a:solidFill>
+                  <a:srgbClr val="17212b"/>
+                </a:solidFill>
+                <a:latin typeface="Arial"/>
+              </a:rPr>
+              <a:t>Source, launch, control, plotting, verification, and USD files use the soft_3_working name</a:t>
+            </a:r>
+            <a:endParaRPr b="0" lang="en-US" sz="1320" spc="-1" strike="noStrike">
+              <a:solidFill>
+                <a:srgbClr val="17212b"/>
               </a:solidFill>
               <a:latin typeface="Arial"/>
             </a:endParaRPr>
@@ -6802,76 +6856,34 @@
         </p:nvSpPr>
         <p:spPr>
           <a:xfrm>
-            <a:off x="1368000" y="4957200"/>
-            <a:ext cx="2592000" cy="446400"/>
-          </a:xfrm>
-          <a:prstGeom prst="rect">
-            <a:avLst/>
-          </a:prstGeom>
-          <a:noFill/>
-          <a:ln w="0">
-            <a:noFill/>
-          </a:ln>
-        </p:spPr>
-        <p:txBody>
-          <a:bodyPr lIns="43200" rIns="43200" tIns="43200" bIns="43200" anchor="t">
-            <a:noAutofit/>
-          </a:bodyPr>
-          <a:p>
-            <a:r>
-              <a:rPr b="1" lang="en-US" sz="1450" spc="-1" strike="noStrike">
-                <a:solidFill>
-                  <a:srgbClr val="500000"/>
-                </a:solidFill>
-                <a:latin typeface="Arial"/>
-              </a:rPr>
-              <a:t>Uncertainty and statistics</a:t>
-            </a:r>
-            <a:endParaRPr b="1" lang="en-US" sz="1450" spc="-1" strike="noStrike">
-              <a:solidFill>
-                <a:srgbClr val="500000"/>
-              </a:solidFill>
-              <a:latin typeface="Arial"/>
-            </a:endParaRPr>
-          </a:p>
-        </p:txBody>
-      </p:sp>
-      <p:sp>
-        <p:nvSpPr>
-          <p:cNvPr id="334" name=""/>
-          <p:cNvSpPr txBox="1"/>
-          <p:nvPr/>
-        </p:nvSpPr>
-        <p:spPr>
-          <a:xfrm>
-            <a:off x="4104000" y="4957200"/>
-            <a:ext cx="7164000" cy="464400"/>
-          </a:xfrm>
-          <a:prstGeom prst="rect">
-            <a:avLst/>
-          </a:prstGeom>
-          <a:noFill/>
-          <a:ln w="0">
-            <a:noFill/>
-          </a:ln>
-        </p:spPr>
-        <p:txBody>
-          <a:bodyPr lIns="43200" rIns="43200" tIns="43200" bIns="43200" anchor="t">
-            <a:noAutofit/>
-          </a:bodyPr>
-          <a:p>
-            <a:r>
-              <a:rPr b="0" lang="en-US" sz="1200" spc="-1" strike="noStrike">
-                <a:solidFill>
-                  <a:srgbClr val="17212b"/>
-                </a:solidFill>
-                <a:latin typeface="Arial"/>
-              </a:rPr>
-              <a:t>Report repeatability, hysteresis, drift, confidence intervals, and failure limits.</a:t>
-            </a:r>
-            <a:endParaRPr b="0" lang="en-US" sz="1200" spc="-1" strike="noStrike">
-              <a:solidFill>
-                <a:srgbClr val="17212b"/>
+            <a:off x="5688000" y="5112000"/>
+            <a:ext cx="5472000" cy="536400"/>
+          </a:xfrm>
+          <a:prstGeom prst="rect">
+            <a:avLst/>
+          </a:prstGeom>
+          <a:noFill/>
+          <a:ln w="0">
+            <a:noFill/>
+          </a:ln>
+        </p:spPr>
+        <p:txBody>
+          <a:bodyPr lIns="43200" rIns="43200" tIns="43200" bIns="43200" anchor="t">
+            <a:noAutofit/>
+          </a:bodyPr>
+          <a:p>
+            <a:r>
+              <a:rPr b="0" lang="en-US" sz="1100" spc="-1" strike="noStrike">
+                <a:solidFill>
+                  <a:srgbClr val="44515e"/>
+                </a:solidFill>
+                <a:latin typeface="Arial"/>
+              </a:rPr>
+              <a:t>Live Isaac Sim capture using the Grey Studio light rig; overlapping discs reflect the commanded compound three-dimensional pose.</a:t>
+            </a:r>
+            <a:endParaRPr b="0" lang="en-US" sz="1100" spc="-1" strike="noStrike">
+              <a:solidFill>
+                <a:srgbClr val="44515e"/>
               </a:solidFill>
               <a:latin typeface="Arial"/>
             </a:endParaRPr>
@@ -6910,7 +6922,7 @@
       </p:grpSpPr>
       <p:sp>
         <p:nvSpPr>
-          <p:cNvPr id="335" name=""/>
+          <p:cNvPr id="334" name=""/>
           <p:cNvSpPr/>
           <p:nvPr/>
         </p:nvSpPr>
@@ -6935,7 +6947,7 @@
       </p:sp>
       <p:sp>
         <p:nvSpPr>
-          <p:cNvPr id="336" name=""/>
+          <p:cNvPr id="335" name=""/>
           <p:cNvSpPr/>
           <p:nvPr/>
         </p:nvSpPr>
@@ -6960,7 +6972,7 @@
       </p:sp>
       <p:sp>
         <p:nvSpPr>
-          <p:cNvPr id="337" name=""/>
+          <p:cNvPr id="336" name=""/>
           <p:cNvSpPr txBox="1"/>
           <p:nvPr/>
         </p:nvSpPr>
@@ -6989,7 +7001,7 @@
                 </a:solidFill>
                 <a:latin typeface="Arial"/>
               </a:rPr>
-              <a:t>Current Outcome</a:t>
+              <a:t>Independent Three-Module Control: Verified</a:t>
             </a:r>
             <a:endParaRPr b="1" lang="en-US" sz="2400" spc="-1" strike="noStrike">
               <a:solidFill>
@@ -7002,7 +7014,7 @@
       </p:sp>
       <p:sp>
         <p:nvSpPr>
-          <p:cNvPr id="338" name=""/>
+          <p:cNvPr id="337" name=""/>
           <p:cNvSpPr/>
           <p:nvPr/>
         </p:nvSpPr>
@@ -7030,7 +7042,7 @@
       </p:sp>
       <p:sp>
         <p:nvSpPr>
-          <p:cNvPr id="339" name=""/>
+          <p:cNvPr id="338" name=""/>
           <p:cNvSpPr txBox="1"/>
           <p:nvPr/>
         </p:nvSpPr>
@@ -7062,7 +7074,7 @@
                 </a:solidFill>
                 <a:latin typeface="Arial"/>
               </a:rPr>
-              <a:t>CONCLUSION</a:t>
+              <a:t>VALIDATION</a:t>
             </a:r>
             <a:endParaRPr b="1" lang="en-US" sz="800" spc="-1" strike="noStrike">
               <a:solidFill>
@@ -7075,7 +7087,7 @@
       </p:sp>
       <p:sp>
         <p:nvSpPr>
-          <p:cNvPr id="340" name=""/>
+          <p:cNvPr id="339" name=""/>
           <p:cNvSpPr txBox="1"/>
           <p:nvPr/>
         </p:nvSpPr>
@@ -7117,7 +7129,7 @@
       </p:sp>
       <p:sp>
         <p:nvSpPr>
-          <p:cNvPr id="341" name=""/>
+          <p:cNvPr id="340" name=""/>
           <p:cNvSpPr txBox="1"/>
           <p:nvPr/>
         </p:nvSpPr>
@@ -7162,150 +7174,1116 @@
       </p:sp>
       <p:sp>
         <p:nvSpPr>
-          <p:cNvPr id="342" name=""/>
-          <p:cNvSpPr txBox="1"/>
-          <p:nvPr/>
-        </p:nvSpPr>
-        <p:spPr>
-          <a:xfrm>
-            <a:off x="720000" y="1116000"/>
-            <a:ext cx="10620000" cy="440280"/>
-          </a:xfrm>
-          <a:prstGeom prst="rect">
-            <a:avLst/>
-          </a:prstGeom>
-          <a:noFill/>
-          <a:ln w="0">
-            <a:noFill/>
-          </a:ln>
-        </p:spPr>
-        <p:txBody>
-          <a:bodyPr lIns="43200" rIns="43200" tIns="43200" bIns="43200" anchor="t">
-            <a:noAutofit/>
-          </a:bodyPr>
-          <a:p>
-            <a:pPr algn="r">
-              <a:buNone/>
-            </a:pPr>
-            <a:r>
-              <a:rPr b="1" lang="en-US" sz="2500" spc="-1" strike="noStrike">
-                <a:solidFill>
-                  <a:srgbClr val="500000"/>
-                </a:solidFill>
-                <a:latin typeface="Arial"/>
-              </a:rPr>
-              <a:t>A reproducible six-disc research platform now connects</a:t>
-            </a:r>
-            <a:endParaRPr b="1" lang="en-US" sz="2500" spc="-1" strike="noStrike">
-              <a:solidFill>
-                <a:srgbClr val="500000"/>
-              </a:solidFill>
-              <a:latin typeface="Arial"/>
-            </a:endParaRPr>
-          </a:p>
-        </p:txBody>
-      </p:sp>
-      <p:sp>
-        <p:nvSpPr>
-          <p:cNvPr id="343" name=""/>
-          <p:cNvSpPr txBox="1"/>
-          <p:nvPr/>
-        </p:nvSpPr>
-        <p:spPr>
-          <a:xfrm>
-            <a:off x="1440000" y="1800000"/>
-            <a:ext cx="2160000" cy="257400"/>
-          </a:xfrm>
-          <a:prstGeom prst="rect">
-            <a:avLst/>
-          </a:prstGeom>
-          <a:noFill/>
-          <a:ln w="0">
-            <a:noFill/>
-          </a:ln>
-        </p:spPr>
-        <p:txBody>
-          <a:bodyPr lIns="43200" rIns="43200" tIns="43200" bIns="43200" anchor="t">
-            <a:noAutofit/>
-          </a:bodyPr>
-          <a:p>
-            <a:r>
-              <a:rPr b="1" lang="en-US" sz="1200" spc="-1" strike="noStrike">
-                <a:solidFill>
-                  <a:srgbClr val="167d8d"/>
-                </a:solidFill>
-                <a:latin typeface="Arial"/>
-              </a:rPr>
-              <a:t>CONTROL</a:t>
-            </a:r>
-            <a:endParaRPr b="1" lang="en-US" sz="1200" spc="-1" strike="noStrike">
-              <a:solidFill>
-                <a:srgbClr val="167d8d"/>
-              </a:solidFill>
-              <a:latin typeface="Arial"/>
-            </a:endParaRPr>
-          </a:p>
-        </p:txBody>
-      </p:sp>
-      <p:sp>
-        <p:nvSpPr>
-          <p:cNvPr id="344" name=""/>
-          <p:cNvSpPr txBox="1"/>
-          <p:nvPr/>
-        </p:nvSpPr>
-        <p:spPr>
-          <a:xfrm>
-            <a:off x="3672000" y="1771200"/>
-            <a:ext cx="6840000" cy="329040"/>
-          </a:xfrm>
-          <a:prstGeom prst="rect">
-            <a:avLst/>
-          </a:prstGeom>
-          <a:noFill/>
-          <a:ln w="0">
-            <a:noFill/>
-          </a:ln>
-        </p:spPr>
-        <p:txBody>
-          <a:bodyPr lIns="43200" rIns="43200" tIns="43200" bIns="43200" anchor="t">
-            <a:noAutofit/>
-          </a:bodyPr>
-          <a:p>
-            <a:r>
-              <a:rPr b="0" lang="en-US" sz="1700" spc="-1" strike="noStrike">
-                <a:solidFill>
-                  <a:srgbClr val="17212b"/>
-                </a:solidFill>
-                <a:latin typeface="Arial"/>
-              </a:rPr>
-              <a:t>Position + calibrated torque admittance</a:t>
-            </a:r>
-            <a:endParaRPr b="0" lang="en-US" sz="1700" spc="-1" strike="noStrike">
-              <a:solidFill>
-                <a:srgbClr val="17212b"/>
-              </a:solidFill>
-              <a:latin typeface="Arial"/>
-            </a:endParaRPr>
-          </a:p>
-        </p:txBody>
-      </p:sp>
-      <p:sp>
-        <p:nvSpPr>
-          <p:cNvPr id="345" name=""/>
+          <p:cNvPr id="341" name=""/>
           <p:cNvSpPr/>
           <p:nvPr/>
         </p:nvSpPr>
         <p:spPr>
           <a:xfrm>
-            <a:off x="1440000" y="2178000"/>
-            <a:ext cx="9072000" cy="0"/>
-          </a:xfrm>
-          <a:prstGeom prst="line">
-            <a:avLst/>
-          </a:prstGeom>
+            <a:off x="432000" y="972000"/>
+            <a:ext cx="3528000" cy="810000"/>
+          </a:xfrm>
+          <a:prstGeom prst="roundRect">
+            <a:avLst/>
+          </a:prstGeom>
+          <a:solidFill>
+            <a:srgbClr val="ffffff"/>
+          </a:solidFill>
           <a:ln w="7200">
             <a:solidFill>
               <a:srgbClr val="d7d2cc"/>
+            </a:solidFill>
+            <a:round/>
+          </a:ln>
+        </p:spPr>
+      </p:sp>
+      <p:sp>
+        <p:nvSpPr>
+          <p:cNvPr id="342" name=""/>
+          <p:cNvSpPr/>
+          <p:nvPr/>
+        </p:nvSpPr>
+        <p:spPr>
+          <a:xfrm>
+            <a:off x="432000" y="972000"/>
+            <a:ext cx="57600" cy="810000"/>
+          </a:xfrm>
+          <a:prstGeom prst="rect">
+            <a:avLst/>
+          </a:prstGeom>
+          <a:solidFill>
+            <a:srgbClr val="500000"/>
+          </a:solidFill>
+          <a:ln w="7200">
+            <a:solidFill>
+              <a:srgbClr val="500000"/>
+            </a:solidFill>
+            <a:round/>
+          </a:ln>
+        </p:spPr>
+      </p:sp>
+      <p:sp>
+        <p:nvSpPr>
+          <p:cNvPr id="343" name=""/>
+          <p:cNvSpPr txBox="1"/>
+          <p:nvPr/>
+        </p:nvSpPr>
+        <p:spPr>
+          <a:xfrm>
+            <a:off x="594000" y="1072800"/>
+            <a:ext cx="3294000" cy="414720"/>
+          </a:xfrm>
+          <a:prstGeom prst="rect">
+            <a:avLst/>
+          </a:prstGeom>
+          <a:noFill/>
+          <a:ln w="0">
+            <a:noFill/>
+          </a:ln>
+        </p:spPr>
+        <p:txBody>
+          <a:bodyPr lIns="43200" rIns="43200" tIns="43200" bIns="43200" anchor="t">
+            <a:noAutofit/>
+          </a:bodyPr>
+          <a:p>
+            <a:r>
+              <a:rPr b="1" lang="en-US" sz="2300" spc="-1" strike="noStrike">
+                <a:solidFill>
+                  <a:srgbClr val="500000"/>
+                </a:solidFill>
+                <a:latin typeface="Arial"/>
+              </a:rPr>
+              <a:t>90.0047°</a:t>
+            </a:r>
+            <a:endParaRPr b="1" lang="en-US" sz="2300" spc="-1" strike="noStrike">
+              <a:solidFill>
+                <a:srgbClr val="500000"/>
+              </a:solidFill>
+              <a:latin typeface="Arial"/>
+            </a:endParaRPr>
+          </a:p>
+        </p:txBody>
+      </p:sp>
+      <p:sp>
+        <p:nvSpPr>
+          <p:cNvPr id="344" name=""/>
+          <p:cNvSpPr txBox="1"/>
+          <p:nvPr/>
+        </p:nvSpPr>
+        <p:spPr>
+          <a:xfrm>
+            <a:off x="594000" y="1396800"/>
+            <a:ext cx="3294000" cy="234720"/>
+          </a:xfrm>
+          <a:prstGeom prst="rect">
+            <a:avLst/>
+          </a:prstGeom>
+          <a:noFill/>
+          <a:ln w="0">
+            <a:noFill/>
+          </a:ln>
+        </p:spPr>
+        <p:txBody>
+          <a:bodyPr lIns="43200" rIns="43200" tIns="43200" bIns="43200" anchor="t">
+            <a:noAutofit/>
+          </a:bodyPr>
+          <a:p>
+            <a:r>
+              <a:rPr b="0" lang="en-US" sz="1050" spc="-1" strike="noStrike">
+                <a:solidFill>
+                  <a:srgbClr val="44515e"/>
+                </a:solidFill>
+                <a:latin typeface="Arial"/>
+              </a:rPr>
+              <a:t>Module 1: 0.50 N·m, θ = 0°</a:t>
+            </a:r>
+            <a:endParaRPr b="0" lang="en-US" sz="1050" spc="-1" strike="noStrike">
+              <a:solidFill>
+                <a:srgbClr val="44515e"/>
+              </a:solidFill>
+              <a:latin typeface="Arial"/>
+            </a:endParaRPr>
+          </a:p>
+        </p:txBody>
+      </p:sp>
+      <p:sp>
+        <p:nvSpPr>
+          <p:cNvPr id="345" name=""/>
+          <p:cNvSpPr/>
+          <p:nvPr/>
+        </p:nvSpPr>
+        <p:spPr>
+          <a:xfrm>
+            <a:off x="4212000" y="972000"/>
+            <a:ext cx="3528000" cy="810000"/>
+          </a:xfrm>
+          <a:prstGeom prst="roundRect">
+            <a:avLst/>
+          </a:prstGeom>
+          <a:solidFill>
+            <a:srgbClr val="ffffff"/>
+          </a:solidFill>
+          <a:ln w="7200">
+            <a:solidFill>
+              <a:srgbClr val="d7d2cc"/>
+            </a:solidFill>
+            <a:round/>
+          </a:ln>
+        </p:spPr>
+      </p:sp>
+      <p:sp>
+        <p:nvSpPr>
+          <p:cNvPr id="346" name=""/>
+          <p:cNvSpPr/>
+          <p:nvPr/>
+        </p:nvSpPr>
+        <p:spPr>
+          <a:xfrm>
+            <a:off x="4212000" y="972000"/>
+            <a:ext cx="57600" cy="810000"/>
+          </a:xfrm>
+          <a:prstGeom prst="rect">
+            <a:avLst/>
+          </a:prstGeom>
+          <a:solidFill>
+            <a:srgbClr val="167d8d"/>
+          </a:solidFill>
+          <a:ln w="7200">
+            <a:solidFill>
+              <a:srgbClr val="167d8d"/>
+            </a:solidFill>
+            <a:round/>
+          </a:ln>
+        </p:spPr>
+      </p:sp>
+      <p:sp>
+        <p:nvSpPr>
+          <p:cNvPr id="347" name=""/>
+          <p:cNvSpPr txBox="1"/>
+          <p:nvPr/>
+        </p:nvSpPr>
+        <p:spPr>
+          <a:xfrm>
+            <a:off x="4374000" y="1072800"/>
+            <a:ext cx="3294000" cy="414720"/>
+          </a:xfrm>
+          <a:prstGeom prst="rect">
+            <a:avLst/>
+          </a:prstGeom>
+          <a:noFill/>
+          <a:ln w="0">
+            <a:noFill/>
+          </a:ln>
+        </p:spPr>
+        <p:txBody>
+          <a:bodyPr lIns="43200" rIns="43200" tIns="43200" bIns="43200" anchor="t">
+            <a:noAutofit/>
+          </a:bodyPr>
+          <a:p>
+            <a:r>
+              <a:rPr b="1" lang="en-US" sz="2300" spc="-1" strike="noStrike">
+                <a:solidFill>
+                  <a:srgbClr val="167d8d"/>
+                </a:solidFill>
+                <a:latin typeface="Arial"/>
+              </a:rPr>
+              <a:t>134.9999°</a:t>
+            </a:r>
+            <a:endParaRPr b="1" lang="en-US" sz="2300" spc="-1" strike="noStrike">
+              <a:solidFill>
+                <a:srgbClr val="167d8d"/>
+              </a:solidFill>
+              <a:latin typeface="Arial"/>
+            </a:endParaRPr>
+          </a:p>
+        </p:txBody>
+      </p:sp>
+      <p:sp>
+        <p:nvSpPr>
+          <p:cNvPr id="348" name=""/>
+          <p:cNvSpPr txBox="1"/>
+          <p:nvPr/>
+        </p:nvSpPr>
+        <p:spPr>
+          <a:xfrm>
+            <a:off x="4374000" y="1396800"/>
+            <a:ext cx="3294000" cy="234720"/>
+          </a:xfrm>
+          <a:prstGeom prst="rect">
+            <a:avLst/>
+          </a:prstGeom>
+          <a:noFill/>
+          <a:ln w="0">
+            <a:noFill/>
+          </a:ln>
+        </p:spPr>
+        <p:txBody>
+          <a:bodyPr lIns="43200" rIns="43200" tIns="43200" bIns="43200" anchor="t">
+            <a:noAutofit/>
+          </a:bodyPr>
+          <a:p>
+            <a:r>
+              <a:rPr b="0" lang="en-US" sz="1050" spc="-1" strike="noStrike">
+                <a:solidFill>
+                  <a:srgbClr val="44515e"/>
+                </a:solidFill>
+                <a:latin typeface="Arial"/>
+              </a:rPr>
+              <a:t>Module 2: 0.75 N·m, θ = 90°</a:t>
+            </a:r>
+            <a:endParaRPr b="0" lang="en-US" sz="1050" spc="-1" strike="noStrike">
+              <a:solidFill>
+                <a:srgbClr val="44515e"/>
+              </a:solidFill>
+              <a:latin typeface="Arial"/>
+            </a:endParaRPr>
+          </a:p>
+        </p:txBody>
+      </p:sp>
+      <p:sp>
+        <p:nvSpPr>
+          <p:cNvPr id="349" name=""/>
+          <p:cNvSpPr/>
+          <p:nvPr/>
+        </p:nvSpPr>
+        <p:spPr>
+          <a:xfrm>
+            <a:off x="7992000" y="972000"/>
+            <a:ext cx="3528000" cy="810000"/>
+          </a:xfrm>
+          <a:prstGeom prst="roundRect">
+            <a:avLst/>
+          </a:prstGeom>
+          <a:solidFill>
+            <a:srgbClr val="ffffff"/>
+          </a:solidFill>
+          <a:ln w="7200">
+            <a:solidFill>
+              <a:srgbClr val="d7d2cc"/>
+            </a:solidFill>
+            <a:round/>
+          </a:ln>
+        </p:spPr>
+      </p:sp>
+      <p:sp>
+        <p:nvSpPr>
+          <p:cNvPr id="350" name=""/>
+          <p:cNvSpPr/>
+          <p:nvPr/>
+        </p:nvSpPr>
+        <p:spPr>
+          <a:xfrm>
+            <a:off x="7992000" y="972000"/>
+            <a:ext cx="57600" cy="810000"/>
+          </a:xfrm>
+          <a:prstGeom prst="rect">
+            <a:avLst/>
+          </a:prstGeom>
+          <a:solidFill>
+            <a:srgbClr val="d6a84b"/>
+          </a:solidFill>
+          <a:ln w="7200">
+            <a:solidFill>
+              <a:srgbClr val="d6a84b"/>
+            </a:solidFill>
+            <a:round/>
+          </a:ln>
+        </p:spPr>
+      </p:sp>
+      <p:sp>
+        <p:nvSpPr>
+          <p:cNvPr id="351" name=""/>
+          <p:cNvSpPr txBox="1"/>
+          <p:nvPr/>
+        </p:nvSpPr>
+        <p:spPr>
+          <a:xfrm>
+            <a:off x="8154000" y="1072800"/>
+            <a:ext cx="3294000" cy="414720"/>
+          </a:xfrm>
+          <a:prstGeom prst="rect">
+            <a:avLst/>
+          </a:prstGeom>
+          <a:noFill/>
+          <a:ln w="0">
+            <a:noFill/>
+          </a:ln>
+        </p:spPr>
+        <p:txBody>
+          <a:bodyPr lIns="43200" rIns="43200" tIns="43200" bIns="43200" anchor="t">
+            <a:noAutofit/>
+          </a:bodyPr>
+          <a:p>
+            <a:r>
+              <a:rPr b="1" lang="en-US" sz="2300" spc="-1" strike="noStrike">
+                <a:solidFill>
+                  <a:srgbClr val="d6a84b"/>
+                </a:solidFill>
+                <a:latin typeface="Arial"/>
+              </a:rPr>
+              <a:t>179.9999°</a:t>
+            </a:r>
+            <a:endParaRPr b="1" lang="en-US" sz="2300" spc="-1" strike="noStrike">
+              <a:solidFill>
+                <a:srgbClr val="d6a84b"/>
+              </a:solidFill>
+              <a:latin typeface="Arial"/>
+            </a:endParaRPr>
+          </a:p>
+        </p:txBody>
+      </p:sp>
+      <p:sp>
+        <p:nvSpPr>
+          <p:cNvPr id="352" name=""/>
+          <p:cNvSpPr txBox="1"/>
+          <p:nvPr/>
+        </p:nvSpPr>
+        <p:spPr>
+          <a:xfrm>
+            <a:off x="8154000" y="1396800"/>
+            <a:ext cx="3294000" cy="234720"/>
+          </a:xfrm>
+          <a:prstGeom prst="rect">
+            <a:avLst/>
+          </a:prstGeom>
+          <a:noFill/>
+          <a:ln w="0">
+            <a:noFill/>
+          </a:ln>
+        </p:spPr>
+        <p:txBody>
+          <a:bodyPr lIns="43200" rIns="43200" tIns="43200" bIns="43200" anchor="t">
+            <a:noAutofit/>
+          </a:bodyPr>
+          <a:p>
+            <a:r>
+              <a:rPr b="0" lang="en-US" sz="1050" spc="-1" strike="noStrike">
+                <a:solidFill>
+                  <a:srgbClr val="44515e"/>
+                </a:solidFill>
+                <a:latin typeface="Arial"/>
+              </a:rPr>
+              <a:t>Module 3: 1.00 N·m, θ = −90°</a:t>
+            </a:r>
+            <a:endParaRPr b="0" lang="en-US" sz="1050" spc="-1" strike="noStrike">
+              <a:solidFill>
+                <a:srgbClr val="44515e"/>
+              </a:solidFill>
+              <a:latin typeface="Arial"/>
+            </a:endParaRPr>
+          </a:p>
+        </p:txBody>
+      </p:sp>
+      <p:sp>
+        <p:nvSpPr>
+          <p:cNvPr id="353" name=""/>
+          <p:cNvSpPr txBox="1"/>
+          <p:nvPr/>
+        </p:nvSpPr>
+        <p:spPr>
+          <a:xfrm>
+            <a:off x="504000" y="2178000"/>
+            <a:ext cx="4680000" cy="342720"/>
+          </a:xfrm>
+          <a:prstGeom prst="rect">
+            <a:avLst/>
+          </a:prstGeom>
+          <a:noFill/>
+          <a:ln w="0">
+            <a:noFill/>
+          </a:ln>
+        </p:spPr>
+        <p:txBody>
+          <a:bodyPr lIns="43200" rIns="43200" tIns="43200" bIns="43200" anchor="t">
+            <a:noAutofit/>
+          </a:bodyPr>
+          <a:p>
+            <a:r>
+              <a:rPr b="1" lang="en-US" sz="1800" spc="-1" strike="noStrike">
+                <a:solidFill>
+                  <a:srgbClr val="500000"/>
+                </a:solidFill>
+                <a:latin typeface="Arial"/>
+              </a:rPr>
+              <a:t>12-second headless regression</a:t>
+            </a:r>
+            <a:endParaRPr b="1" lang="en-US" sz="1800" spc="-1" strike="noStrike">
+              <a:solidFill>
+                <a:srgbClr val="500000"/>
+              </a:solidFill>
+              <a:latin typeface="Arial"/>
+            </a:endParaRPr>
+          </a:p>
+        </p:txBody>
+      </p:sp>
+      <p:sp>
+        <p:nvSpPr>
+          <p:cNvPr id="354" name=""/>
+          <p:cNvSpPr txBox="1"/>
+          <p:nvPr/>
+        </p:nvSpPr>
+        <p:spPr>
+          <a:xfrm>
+            <a:off x="504000" y="2588400"/>
+            <a:ext cx="180000" cy="263520"/>
+          </a:xfrm>
+          <a:prstGeom prst="rect">
+            <a:avLst/>
+          </a:prstGeom>
+          <a:noFill/>
+          <a:ln w="0">
+            <a:noFill/>
+          </a:ln>
+        </p:spPr>
+        <p:txBody>
+          <a:bodyPr lIns="43200" rIns="43200" tIns="43200" bIns="43200" anchor="t">
+            <a:noAutofit/>
+          </a:bodyPr>
+          <a:p>
+            <a:r>
+              <a:rPr b="1" lang="en-US" sz="1250" spc="-1" strike="noStrike">
+                <a:solidFill>
+                  <a:srgbClr val="167d8d"/>
+                </a:solidFill>
+                <a:latin typeface="Arial"/>
+              </a:rPr>
+              <a:t>●</a:t>
+            </a:r>
+            <a:endParaRPr b="1" lang="en-US" sz="1250" spc="-1" strike="noStrike">
+              <a:solidFill>
+                <a:srgbClr val="167d8d"/>
+              </a:solidFill>
+              <a:latin typeface="Arial"/>
+            </a:endParaRPr>
+          </a:p>
+        </p:txBody>
+      </p:sp>
+      <p:sp>
+        <p:nvSpPr>
+          <p:cNvPr id="355" name=""/>
+          <p:cNvSpPr txBox="1"/>
+          <p:nvPr/>
+        </p:nvSpPr>
+        <p:spPr>
+          <a:xfrm>
+            <a:off x="702000" y="2574000"/>
+            <a:ext cx="7002000" cy="554400"/>
+          </a:xfrm>
+          <a:prstGeom prst="rect">
+            <a:avLst/>
+          </a:prstGeom>
+          <a:noFill/>
+          <a:ln w="0">
+            <a:noFill/>
+          </a:ln>
+        </p:spPr>
+        <p:txBody>
+          <a:bodyPr lIns="43200" rIns="43200" tIns="43200" bIns="43200" anchor="t">
+            <a:noAutofit/>
+          </a:bodyPr>
+          <a:p>
+            <a:r>
+              <a:rPr b="0" lang="en-US" sz="1450" spc="-1" strike="noStrike">
+                <a:solidFill>
+                  <a:srgbClr val="17212b"/>
+                </a:solidFill>
+                <a:latin typeface="Arial"/>
+              </a:rPr>
+              <a:t>All five first-step interval targets matched within each module.</a:t>
+            </a:r>
+            <a:endParaRPr b="0" lang="en-US" sz="1450" spc="-1" strike="noStrike">
+              <a:solidFill>
+                <a:srgbClr val="17212b"/>
+              </a:solidFill>
+              <a:latin typeface="Arial"/>
+            </a:endParaRPr>
+          </a:p>
+        </p:txBody>
+      </p:sp>
+      <p:sp>
+        <p:nvSpPr>
+          <p:cNvPr id="356" name=""/>
+          <p:cNvSpPr txBox="1"/>
+          <p:nvPr/>
+        </p:nvSpPr>
+        <p:spPr>
+          <a:xfrm>
+            <a:off x="504000" y="3146400"/>
+            <a:ext cx="180000" cy="263520"/>
+          </a:xfrm>
+          <a:prstGeom prst="rect">
+            <a:avLst/>
+          </a:prstGeom>
+          <a:noFill/>
+          <a:ln w="0">
+            <a:noFill/>
+          </a:ln>
+        </p:spPr>
+        <p:txBody>
+          <a:bodyPr lIns="43200" rIns="43200" tIns="43200" bIns="43200" anchor="t">
+            <a:noAutofit/>
+          </a:bodyPr>
+          <a:p>
+            <a:r>
+              <a:rPr b="1" lang="en-US" sz="1250" spc="-1" strike="noStrike">
+                <a:solidFill>
+                  <a:srgbClr val="167d8d"/>
+                </a:solidFill>
+                <a:latin typeface="Arial"/>
+              </a:rPr>
+              <a:t>●</a:t>
+            </a:r>
+            <a:endParaRPr b="1" lang="en-US" sz="1250" spc="-1" strike="noStrike">
+              <a:solidFill>
+                <a:srgbClr val="167d8d"/>
+              </a:solidFill>
+              <a:latin typeface="Arial"/>
+            </a:endParaRPr>
+          </a:p>
+        </p:txBody>
+      </p:sp>
+      <p:sp>
+        <p:nvSpPr>
+          <p:cNvPr id="357" name=""/>
+          <p:cNvSpPr txBox="1"/>
+          <p:nvPr/>
+        </p:nvSpPr>
+        <p:spPr>
+          <a:xfrm>
+            <a:off x="702000" y="3132000"/>
+            <a:ext cx="7002000" cy="554400"/>
+          </a:xfrm>
+          <a:prstGeom prst="rect">
+            <a:avLst/>
+          </a:prstGeom>
+          <a:noFill/>
+          <a:ln w="0">
+            <a:noFill/>
+          </a:ln>
+        </p:spPr>
+        <p:txBody>
+          <a:bodyPr lIns="43200" rIns="43200" tIns="43200" bIns="43200" anchor="t">
+            <a:noAutofit/>
+          </a:bodyPr>
+          <a:p>
+            <a:r>
+              <a:rPr b="0" lang="en-US" sz="1450" spc="-1" strike="noStrike">
+                <a:solidFill>
+                  <a:srgbClr val="17212b"/>
+                </a:solidFill>
+                <a:latin typeface="Arial"/>
+              </a:rPr>
+              <a:t>Final-second ranges: 0.0001642°, 0.0000568°, 0.0000713°.</a:t>
+            </a:r>
+            <a:endParaRPr b="0" lang="en-US" sz="1450" spc="-1" strike="noStrike">
+              <a:solidFill>
+                <a:srgbClr val="17212b"/>
+              </a:solidFill>
+              <a:latin typeface="Arial"/>
+            </a:endParaRPr>
+          </a:p>
+        </p:txBody>
+      </p:sp>
+      <p:sp>
+        <p:nvSpPr>
+          <p:cNvPr id="358" name=""/>
+          <p:cNvSpPr txBox="1"/>
+          <p:nvPr/>
+        </p:nvSpPr>
+        <p:spPr>
+          <a:xfrm>
+            <a:off x="504000" y="3704400"/>
+            <a:ext cx="180000" cy="263520"/>
+          </a:xfrm>
+          <a:prstGeom prst="rect">
+            <a:avLst/>
+          </a:prstGeom>
+          <a:noFill/>
+          <a:ln w="0">
+            <a:noFill/>
+          </a:ln>
+        </p:spPr>
+        <p:txBody>
+          <a:bodyPr lIns="43200" rIns="43200" tIns="43200" bIns="43200" anchor="t">
+            <a:noAutofit/>
+          </a:bodyPr>
+          <a:p>
+            <a:r>
+              <a:rPr b="1" lang="en-US" sz="1250" spc="-1" strike="noStrike">
+                <a:solidFill>
+                  <a:srgbClr val="167d8d"/>
+                </a:solidFill>
+                <a:latin typeface="Arial"/>
+              </a:rPr>
+              <a:t>●</a:t>
+            </a:r>
+            <a:endParaRPr b="1" lang="en-US" sz="1250" spc="-1" strike="noStrike">
+              <a:solidFill>
+                <a:srgbClr val="167d8d"/>
+              </a:solidFill>
+              <a:latin typeface="Arial"/>
+            </a:endParaRPr>
+          </a:p>
+        </p:txBody>
+      </p:sp>
+      <p:sp>
+        <p:nvSpPr>
+          <p:cNvPr id="359" name=""/>
+          <p:cNvSpPr txBox="1"/>
+          <p:nvPr/>
+        </p:nvSpPr>
+        <p:spPr>
+          <a:xfrm>
+            <a:off x="702000" y="3690000"/>
+            <a:ext cx="7002000" cy="554400"/>
+          </a:xfrm>
+          <a:prstGeom prst="rect">
+            <a:avLst/>
+          </a:prstGeom>
+          <a:noFill/>
+          <a:ln w="0">
+            <a:noFill/>
+          </a:ln>
+        </p:spPr>
+        <p:txBody>
+          <a:bodyPr lIns="43200" rIns="43200" tIns="43200" bIns="43200" anchor="t">
+            <a:noAutofit/>
+          </a:bodyPr>
+          <a:p>
+            <a:r>
+              <a:rPr b="0" lang="en-US" sz="1450" spc="-1" strike="noStrike">
+                <a:solidFill>
+                  <a:srgbClr val="17212b"/>
+                </a:solidFill>
+                <a:latin typeface="Arial"/>
+              </a:rPr>
+              <a:t>Connector residual bends: 0.0000672° and 0.0000394°.</a:t>
+            </a:r>
+            <a:endParaRPr b="0" lang="en-US" sz="1450" spc="-1" strike="noStrike">
+              <a:solidFill>
+                <a:srgbClr val="17212b"/>
+              </a:solidFill>
+              <a:latin typeface="Arial"/>
+            </a:endParaRPr>
+          </a:p>
+        </p:txBody>
+      </p:sp>
+      <p:sp>
+        <p:nvSpPr>
+          <p:cNvPr id="360" name=""/>
+          <p:cNvSpPr txBox="1"/>
+          <p:nvPr/>
+        </p:nvSpPr>
+        <p:spPr>
+          <a:xfrm>
+            <a:off x="504000" y="4262400"/>
+            <a:ext cx="180000" cy="263520"/>
+          </a:xfrm>
+          <a:prstGeom prst="rect">
+            <a:avLst/>
+          </a:prstGeom>
+          <a:noFill/>
+          <a:ln w="0">
+            <a:noFill/>
+          </a:ln>
+        </p:spPr>
+        <p:txBody>
+          <a:bodyPr lIns="43200" rIns="43200" tIns="43200" bIns="43200" anchor="t">
+            <a:noAutofit/>
+          </a:bodyPr>
+          <a:p>
+            <a:r>
+              <a:rPr b="1" lang="en-US" sz="1250" spc="-1" strike="noStrike">
+                <a:solidFill>
+                  <a:srgbClr val="167d8d"/>
+                </a:solidFill>
+                <a:latin typeface="Arial"/>
+              </a:rPr>
+              <a:t>●</a:t>
+            </a:r>
+            <a:endParaRPr b="1" lang="en-US" sz="1250" spc="-1" strike="noStrike">
+              <a:solidFill>
+                <a:srgbClr val="167d8d"/>
+              </a:solidFill>
+              <a:latin typeface="Arial"/>
+            </a:endParaRPr>
+          </a:p>
+        </p:txBody>
+      </p:sp>
+      <p:sp>
+        <p:nvSpPr>
+          <p:cNvPr id="361" name=""/>
+          <p:cNvSpPr txBox="1"/>
+          <p:nvPr/>
+        </p:nvSpPr>
+        <p:spPr>
+          <a:xfrm>
+            <a:off x="702000" y="4248000"/>
+            <a:ext cx="7002000" cy="554400"/>
+          </a:xfrm>
+          <a:prstGeom prst="rect">
+            <a:avLst/>
+          </a:prstGeom>
+          <a:noFill/>
+          <a:ln w="0">
+            <a:noFill/>
+          </a:ln>
+        </p:spPr>
+        <p:txBody>
+          <a:bodyPr lIns="43200" rIns="43200" tIns="43200" bIns="43200" anchor="t">
+            <a:noAutofit/>
+          </a:bodyPr>
+          <a:p>
+            <a:r>
+              <a:rPr b="0" lang="en-US" sz="1450" spc="-1" strike="noStrike">
+                <a:solidFill>
+                  <a:srgbClr val="17212b"/>
+                </a:solidFill>
+                <a:latin typeface="Arial"/>
+              </a:rPr>
+              <a:t>Detected all 18 gauge publishers.</a:t>
+            </a:r>
+            <a:endParaRPr b="0" lang="en-US" sz="1450" spc="-1" strike="noStrike">
+              <a:solidFill>
+                <a:srgbClr val="17212b"/>
+              </a:solidFill>
+              <a:latin typeface="Arial"/>
+            </a:endParaRPr>
+          </a:p>
+        </p:txBody>
+      </p:sp>
+      <p:sp>
+        <p:nvSpPr>
+          <p:cNvPr id="362" name=""/>
+          <p:cNvSpPr txBox="1"/>
+          <p:nvPr/>
+        </p:nvSpPr>
+        <p:spPr>
+          <a:xfrm>
+            <a:off x="504000" y="4820400"/>
+            <a:ext cx="180000" cy="263520"/>
+          </a:xfrm>
+          <a:prstGeom prst="rect">
+            <a:avLst/>
+          </a:prstGeom>
+          <a:noFill/>
+          <a:ln w="0">
+            <a:noFill/>
+          </a:ln>
+        </p:spPr>
+        <p:txBody>
+          <a:bodyPr lIns="43200" rIns="43200" tIns="43200" bIns="43200" anchor="t">
+            <a:noAutofit/>
+          </a:bodyPr>
+          <a:p>
+            <a:r>
+              <a:rPr b="1" lang="en-US" sz="1250" spc="-1" strike="noStrike">
+                <a:solidFill>
+                  <a:srgbClr val="167d8d"/>
+                </a:solidFill>
+                <a:latin typeface="Arial"/>
+              </a:rPr>
+              <a:t>●</a:t>
+            </a:r>
+            <a:endParaRPr b="1" lang="en-US" sz="1250" spc="-1" strike="noStrike">
+              <a:solidFill>
+                <a:srgbClr val="167d8d"/>
+              </a:solidFill>
+              <a:latin typeface="Arial"/>
+            </a:endParaRPr>
+          </a:p>
+        </p:txBody>
+      </p:sp>
+      <p:sp>
+        <p:nvSpPr>
+          <p:cNvPr id="363" name=""/>
+          <p:cNvSpPr txBox="1"/>
+          <p:nvPr/>
+        </p:nvSpPr>
+        <p:spPr>
+          <a:xfrm>
+            <a:off x="702000" y="4806000"/>
+            <a:ext cx="7002000" cy="554400"/>
+          </a:xfrm>
+          <a:prstGeom prst="rect">
+            <a:avLst/>
+          </a:prstGeom>
+          <a:noFill/>
+          <a:ln w="0">
+            <a:noFill/>
+          </a:ln>
+        </p:spPr>
+        <p:txBody>
+          <a:bodyPr lIns="43200" rIns="43200" tIns="43200" bIns="43200" anchor="t">
+            <a:noAutofit/>
+          </a:bodyPr>
+          <a:p>
+            <a:r>
+              <a:rPr b="0" lang="en-US" sz="1450" spc="-1" strike="noStrike">
+                <a:solidFill>
+                  <a:srgbClr val="17212b"/>
+                </a:solidFill>
+                <a:latin typeface="Arial"/>
+              </a:rPr>
+              <a:t>Overall verifier result: PASS.</a:t>
+            </a:r>
+            <a:endParaRPr b="0" lang="en-US" sz="1450" spc="-1" strike="noStrike">
+              <a:solidFill>
+                <a:srgbClr val="17212b"/>
+              </a:solidFill>
+              <a:latin typeface="Arial"/>
+            </a:endParaRPr>
+          </a:p>
+        </p:txBody>
+      </p:sp>
+      <p:sp>
+        <p:nvSpPr>
+          <p:cNvPr id="364" name=""/>
+          <p:cNvSpPr/>
+          <p:nvPr/>
+        </p:nvSpPr>
+        <p:spPr>
+          <a:xfrm>
+            <a:off x="8064000" y="2196000"/>
+            <a:ext cx="3420000" cy="2952000"/>
+          </a:xfrm>
+          <a:prstGeom prst="roundRect">
+            <a:avLst/>
+          </a:prstGeom>
+          <a:solidFill>
+            <a:srgbClr val="ffffff"/>
+          </a:solidFill>
+          <a:ln w="7200">
+            <a:solidFill>
+              <a:srgbClr val="d7d2cc"/>
+            </a:solidFill>
+            <a:round/>
+          </a:ln>
+        </p:spPr>
+      </p:sp>
+      <p:sp>
+        <p:nvSpPr>
+          <p:cNvPr id="365" name=""/>
+          <p:cNvSpPr txBox="1"/>
+          <p:nvPr/>
+        </p:nvSpPr>
+        <p:spPr>
+          <a:xfrm>
+            <a:off x="8280000" y="2412000"/>
+            <a:ext cx="2952000" cy="329040"/>
+          </a:xfrm>
+          <a:prstGeom prst="rect">
+            <a:avLst/>
+          </a:prstGeom>
+          <a:noFill/>
+          <a:ln w="0">
+            <a:noFill/>
+          </a:ln>
+        </p:spPr>
+        <p:txBody>
+          <a:bodyPr lIns="43200" rIns="43200" tIns="43200" bIns="43200" anchor="t">
+            <a:noAutofit/>
+          </a:bodyPr>
+          <a:p>
+            <a:r>
+              <a:rPr b="1" lang="en-US" sz="1700" spc="-1" strike="noStrike">
+                <a:solidFill>
+                  <a:srgbClr val="500000"/>
+                </a:solidFill>
+                <a:latin typeface="Arial"/>
+              </a:rPr>
+              <a:t>Research boundary</a:t>
+            </a:r>
+            <a:endParaRPr b="1" lang="en-US" sz="1700" spc="-1" strike="noStrike">
+              <a:solidFill>
+                <a:srgbClr val="500000"/>
+              </a:solidFill>
+              <a:latin typeface="Arial"/>
+            </a:endParaRPr>
+          </a:p>
+        </p:txBody>
+      </p:sp>
+      <p:sp>
+        <p:nvSpPr>
+          <p:cNvPr id="366" name=""/>
+          <p:cNvSpPr txBox="1"/>
+          <p:nvPr/>
+        </p:nvSpPr>
+        <p:spPr>
+          <a:xfrm>
+            <a:off x="8280000" y="2808000"/>
+            <a:ext cx="2916000" cy="1724400"/>
+          </a:xfrm>
+          <a:prstGeom prst="rect">
+            <a:avLst/>
+          </a:prstGeom>
+          <a:noFill/>
+          <a:ln w="0">
+            <a:noFill/>
+          </a:ln>
+        </p:spPr>
+        <p:txBody>
+          <a:bodyPr lIns="43200" rIns="43200" tIns="43200" bIns="43200" anchor="t">
+            <a:noAutofit/>
+          </a:bodyPr>
+          <a:p>
+            <a:r>
+              <a:rPr b="0" lang="en-US" sz="1320" spc="-1" strike="noStrike">
+                <a:solidFill>
+                  <a:srgbClr val="17212b"/>
+                </a:solidFill>
+                <a:latin typeface="Arial"/>
+              </a:rPr>
+              <a:t>This validates independent software commands, synchronized interval targets, connector rigidity, and numerical stability. It does not calibrate physical torque, material response, or payload capacity.</a:t>
+            </a:r>
+            <a:endParaRPr b="0" lang="en-US" sz="1320" spc="-1" strike="noStrike">
+              <a:solidFill>
+                <a:srgbClr val="17212b"/>
+              </a:solidFill>
+              <a:latin typeface="Arial"/>
+            </a:endParaRPr>
+          </a:p>
+        </p:txBody>
+      </p:sp>
+    </p:spTree>
+  </p:cSld>
+  <mc:AlternateContent>
+    <mc:Choice Requires="p14">
+      <p:transition spd="slow" p14:dur="2000"/>
+    </mc:Choice>
+    <mc:Fallback>
+      <p:transition spd="slow"/>
+    </mc:Fallback>
+  </mc:AlternateContent>
+</p:sld>
+</file>
+
+<file path=ppt/slides/slide14.xml><?xml version="1.0" encoding="utf-8"?>
+<p:sld xmlns:a="http://schemas.openxmlformats.org/drawingml/2006/main" xmlns:p="http://schemas.openxmlformats.org/presentationml/2006/main" xmlns:r="http://schemas.openxmlformats.org/officeDocument/2006/relationships" xmlns:p14="http://schemas.microsoft.com/office/powerpoint/2010/main" xmlns:p15="http://schemas.microsoft.com/office/powerpoint/2012/main" xmlns:mc="http://schemas.openxmlformats.org/markup-compatibility/2006">
+  <p:cSld>
+    <p:spTree>
+      <p:nvGrpSpPr>
+        <p:cNvPr id="1" name=""/>
+        <p:cNvGrpSpPr/>
+        <p:nvPr/>
+      </p:nvGrpSpPr>
+      <p:grpSpPr>
+        <a:xfrm>
+          <a:off x="0" y="0"/>
+          <a:ext cx="0" cy="0"/>
+          <a:chOff x="0" y="0"/>
+          <a:chExt cx="0" cy="0"/>
+        </a:xfrm>
+      </p:grpSpPr>
+      <p:sp>
+        <p:nvSpPr>
+          <p:cNvPr id="367" name=""/>
+          <p:cNvSpPr/>
+          <p:nvPr/>
+        </p:nvSpPr>
+        <p:spPr>
+          <a:xfrm>
+            <a:off x="0" y="0"/>
+            <a:ext cx="12192120" cy="6858000"/>
+          </a:xfrm>
+          <a:prstGeom prst="rect">
+            <a:avLst/>
+          </a:prstGeom>
+          <a:solidFill>
+            <a:srgbClr val="f4f2ef"/>
+          </a:solidFill>
+          <a:ln w="7200">
+            <a:solidFill>
+              <a:srgbClr val="f4f2ef"/>
+            </a:solidFill>
+            <a:round/>
+          </a:ln>
+        </p:spPr>
+      </p:sp>
+      <p:sp>
+        <p:nvSpPr>
+          <p:cNvPr id="368" name=""/>
+          <p:cNvSpPr/>
+          <p:nvPr/>
+        </p:nvSpPr>
+        <p:spPr>
+          <a:xfrm>
+            <a:off x="0" y="0"/>
+            <a:ext cx="126000" cy="6858000"/>
+          </a:xfrm>
+          <a:prstGeom prst="rect">
+            <a:avLst/>
+          </a:prstGeom>
+          <a:solidFill>
+            <a:srgbClr val="500000"/>
+          </a:solidFill>
+          <a:ln w="7200">
+            <a:solidFill>
+              <a:srgbClr val="500000"/>
+            </a:solidFill>
+            <a:round/>
+          </a:ln>
+        </p:spPr>
+      </p:sp>
+      <p:sp>
+        <p:nvSpPr>
+          <p:cNvPr id="369" name=""/>
+          <p:cNvSpPr txBox="1"/>
+          <p:nvPr/>
+        </p:nvSpPr>
+        <p:spPr>
+          <a:xfrm>
+            <a:off x="414000" y="234000"/>
+            <a:ext cx="11052000" cy="426600"/>
+          </a:xfrm>
+          <a:prstGeom prst="rect">
+            <a:avLst/>
+          </a:prstGeom>
+          <a:noFill/>
+          <a:ln w="0">
+            <a:noFill/>
+          </a:ln>
+        </p:spPr>
+        <p:txBody>
+          <a:bodyPr lIns="43200" rIns="43200" tIns="43200" bIns="43200" anchor="t">
+            <a:noAutofit/>
+          </a:bodyPr>
+          <a:p>
+            <a:r>
+              <a:rPr b="1" lang="en-US" sz="2400" spc="-1" strike="noStrike">
+                <a:solidFill>
+                  <a:srgbClr val="500000"/>
+                </a:solidFill>
+                <a:latin typeface="Arial"/>
+              </a:rPr>
+              <a:t>Eighteen-Channel Bridge-Voltage Instrumentation</a:t>
+            </a:r>
+            <a:endParaRPr b="1" lang="en-US" sz="2400" spc="-1" strike="noStrike">
+              <a:solidFill>
+                <a:srgbClr val="500000"/>
+              </a:solidFill>
+              <a:latin typeface="Arial"/>
+            </a:endParaRPr>
+          </a:p>
+        </p:txBody>
+      </p:sp>
+      <p:sp>
+        <p:nvSpPr>
+          <p:cNvPr id="370" name=""/>
+          <p:cNvSpPr/>
+          <p:nvPr/>
+        </p:nvSpPr>
+        <p:spPr>
+          <a:xfrm>
+            <a:off x="414000" y="702000"/>
+            <a:ext cx="11178000" cy="0"/>
+          </a:xfrm>
+          <a:prstGeom prst="line">
+            <a:avLst/>
+          </a:prstGeom>
+          <a:ln w="14400">
+            <a:solidFill>
+              <a:srgbClr val="d6a84b"/>
             </a:solidFill>
             <a:round/>
           </a:ln>
@@ -7319,38 +8297,235 @@
       </p:sp>
       <p:sp>
         <p:nvSpPr>
-          <p:cNvPr id="346" name=""/>
-          <p:cNvSpPr txBox="1"/>
-          <p:nvPr/>
-        </p:nvSpPr>
-        <p:spPr>
-          <a:xfrm>
-            <a:off x="1440000" y="2538000"/>
-            <a:ext cx="2160000" cy="257400"/>
-          </a:xfrm>
-          <a:prstGeom prst="rect">
-            <a:avLst/>
-          </a:prstGeom>
-          <a:noFill/>
-          <a:ln w="0">
-            <a:noFill/>
-          </a:ln>
-        </p:spPr>
-        <p:txBody>
-          <a:bodyPr lIns="43200" rIns="43200" tIns="43200" bIns="43200" anchor="t">
-            <a:noAutofit/>
-          </a:bodyPr>
-          <a:p>
-            <a:r>
-              <a:rPr b="1" lang="en-US" sz="1200" spc="-1" strike="noStrike">
+          <p:cNvPr id="371" name=""/>
+          <p:cNvSpPr txBox="1"/>
+          <p:nvPr/>
+        </p:nvSpPr>
+        <p:spPr>
+          <a:xfrm>
+            <a:off x="9000000" y="90000"/>
+            <a:ext cx="2520000" cy="201240"/>
+          </a:xfrm>
+          <a:prstGeom prst="rect">
+            <a:avLst/>
+          </a:prstGeom>
+          <a:noFill/>
+          <a:ln w="0">
+            <a:noFill/>
+          </a:ln>
+        </p:spPr>
+        <p:txBody>
+          <a:bodyPr lIns="43200" rIns="43200" tIns="43200" bIns="43200" anchor="t">
+            <a:noAutofit/>
+          </a:bodyPr>
+          <a:p>
+            <a:pPr algn="just">
+              <a:buNone/>
+            </a:pPr>
+            <a:r>
+              <a:rPr b="1" lang="en-US" sz="800" spc="-1" strike="noStrike">
+                <a:solidFill>
+                  <a:srgbClr val="44515e"/>
+                </a:solidFill>
+                <a:latin typeface="Arial"/>
+              </a:rPr>
+              <a:t>SENSING</a:t>
+            </a:r>
+            <a:endParaRPr b="1" lang="en-US" sz="800" spc="-1" strike="noStrike">
+              <a:solidFill>
+                <a:srgbClr val="44515e"/>
+              </a:solidFill>
+              <a:latin typeface="Arial"/>
+            </a:endParaRPr>
+          </a:p>
+        </p:txBody>
+      </p:sp>
+      <p:sp>
+        <p:nvSpPr>
+          <p:cNvPr id="372" name=""/>
+          <p:cNvSpPr txBox="1"/>
+          <p:nvPr/>
+        </p:nvSpPr>
+        <p:spPr>
+          <a:xfrm>
+            <a:off x="414000" y="6642000"/>
+            <a:ext cx="7560000" cy="193320"/>
+          </a:xfrm>
+          <a:prstGeom prst="rect">
+            <a:avLst/>
+          </a:prstGeom>
+          <a:noFill/>
+          <a:ln w="0">
+            <a:noFill/>
+          </a:ln>
+        </p:spPr>
+        <p:txBody>
+          <a:bodyPr lIns="43200" rIns="43200" tIns="43200" bIns="43200" anchor="t">
+            <a:noAutofit/>
+          </a:bodyPr>
+          <a:p>
+            <a:r>
+              <a:rPr b="0" lang="en-US" sz="750" spc="-1" strike="noStrike">
+                <a:solidFill>
+                  <a:srgbClr val="44515e"/>
+                </a:solidFill>
+                <a:latin typeface="Arial"/>
+              </a:rPr>
+              <a:t>Soft continuum limb research progress  •  14</a:t>
+            </a:r>
+            <a:endParaRPr b="0" lang="en-US" sz="750" spc="-1" strike="noStrike">
+              <a:solidFill>
+                <a:srgbClr val="44515e"/>
+              </a:solidFill>
+              <a:latin typeface="Arial"/>
+            </a:endParaRPr>
+          </a:p>
+        </p:txBody>
+      </p:sp>
+      <p:sp>
+        <p:nvSpPr>
+          <p:cNvPr id="373" name=""/>
+          <p:cNvSpPr txBox="1"/>
+          <p:nvPr/>
+        </p:nvSpPr>
+        <p:spPr>
+          <a:xfrm>
+            <a:off x="9000000" y="6642000"/>
+            <a:ext cx="2556000" cy="193320"/>
+          </a:xfrm>
+          <a:prstGeom prst="rect">
+            <a:avLst/>
+          </a:prstGeom>
+          <a:noFill/>
+          <a:ln w="0">
+            <a:noFill/>
+          </a:ln>
+        </p:spPr>
+        <p:txBody>
+          <a:bodyPr lIns="43200" rIns="43200" tIns="43200" bIns="43200" anchor="t">
+            <a:noAutofit/>
+          </a:bodyPr>
+          <a:p>
+            <a:pPr algn="just">
+              <a:buNone/>
+            </a:pPr>
+            <a:r>
+              <a:rPr b="0" lang="en-US" sz="750" spc="-1" strike="noStrike">
+                <a:solidFill>
+                  <a:srgbClr val="44515e"/>
+                </a:solidFill>
+                <a:latin typeface="Arial"/>
+              </a:rPr>
+              <a:t>ETID / MSET research</a:t>
+            </a:r>
+            <a:endParaRPr b="0" lang="en-US" sz="750" spc="-1" strike="noStrike">
+              <a:solidFill>
+                <a:srgbClr val="44515e"/>
+              </a:solidFill>
+              <a:latin typeface="Arial"/>
+            </a:endParaRPr>
+          </a:p>
+        </p:txBody>
+      </p:sp>
+      <p:pic>
+        <p:nvPicPr>
+          <p:cNvPr id="374" name="" descr=""/>
+          <p:cNvPicPr/>
+          <p:nvPr/>
+        </p:nvPicPr>
+        <p:blipFill>
+          <a:blip r:embed="rId1"/>
+          <a:stretch/>
+        </p:blipFill>
+        <p:spPr>
+          <a:xfrm>
+            <a:off x="1362960" y="810000"/>
+            <a:ext cx="6886080" cy="5130000"/>
+          </a:xfrm>
+          <a:prstGeom prst="rect">
+            <a:avLst/>
+          </a:prstGeom>
+          <a:ln w="0">
+            <a:noFill/>
+          </a:ln>
+        </p:spPr>
+      </p:pic>
+      <p:sp>
+        <p:nvSpPr>
+          <p:cNvPr id="375" name=""/>
+          <p:cNvSpPr txBox="1"/>
+          <p:nvPr/>
+        </p:nvSpPr>
+        <p:spPr>
+          <a:xfrm>
+            <a:off x="9450000" y="918000"/>
+            <a:ext cx="2088000" cy="525960"/>
+          </a:xfrm>
+          <a:prstGeom prst="rect">
+            <a:avLst/>
+          </a:prstGeom>
+          <a:noFill/>
+          <a:ln w="0">
+            <a:noFill/>
+          </a:ln>
+        </p:spPr>
+        <p:txBody>
+          <a:bodyPr lIns="43200" rIns="43200" tIns="43200" bIns="43200" anchor="t">
+            <a:noAutofit/>
+          </a:bodyPr>
+          <a:p>
+            <a:r>
+              <a:rPr b="1" lang="en-US" sz="1550" spc="-1" strike="noStrike">
+                <a:solidFill>
+                  <a:srgbClr val="500000"/>
+                </a:solidFill>
+                <a:latin typeface="Arial"/>
+              </a:rPr>
+              <a:t>Repeated sensing layout</a:t>
+            </a:r>
+            <a:endParaRPr b="1" lang="en-US" sz="1550" spc="-1" strike="noStrike">
+              <a:solidFill>
+                <a:srgbClr val="500000"/>
+              </a:solidFill>
+              <a:latin typeface="Arial"/>
+            </a:endParaRPr>
+          </a:p>
+        </p:txBody>
+      </p:sp>
+      <p:sp>
+        <p:nvSpPr>
+          <p:cNvPr id="376" name=""/>
+          <p:cNvSpPr txBox="1"/>
+          <p:nvPr/>
+        </p:nvSpPr>
+        <p:spPr>
+          <a:xfrm>
+            <a:off x="9396000" y="1310400"/>
+            <a:ext cx="180000" cy="222480"/>
+          </a:xfrm>
+          <a:prstGeom prst="rect">
+            <a:avLst/>
+          </a:prstGeom>
+          <a:noFill/>
+          <a:ln w="0">
+            <a:noFill/>
+          </a:ln>
+        </p:spPr>
+        <p:txBody>
+          <a:bodyPr lIns="43200" rIns="43200" tIns="43200" bIns="43200" anchor="t">
+            <a:noAutofit/>
+          </a:bodyPr>
+          <a:p>
+            <a:r>
+              <a:rPr b="1" lang="en-US" sz="950" spc="-1" strike="noStrike">
                 <a:solidFill>
                   <a:srgbClr val="167d8d"/>
                 </a:solidFill>
                 <a:latin typeface="Arial"/>
               </a:rPr>
-              <a:t>SHAPE</a:t>
-            </a:r>
-            <a:endParaRPr b="1" lang="en-US" sz="1200" spc="-1" strike="noStrike">
+              <a:t>●</a:t>
+            </a:r>
+            <a:endParaRPr b="1" lang="en-US" sz="950" spc="-1" strike="noStrike">
               <a:solidFill>
                 <a:srgbClr val="167d8d"/>
               </a:solidFill>
@@ -7361,38 +8536,38 @@
       </p:sp>
       <p:sp>
         <p:nvSpPr>
-          <p:cNvPr id="347" name=""/>
-          <p:cNvSpPr txBox="1"/>
-          <p:nvPr/>
-        </p:nvSpPr>
-        <p:spPr>
-          <a:xfrm>
-            <a:off x="3672000" y="2509200"/>
-            <a:ext cx="6840000" cy="329040"/>
-          </a:xfrm>
-          <a:prstGeom prst="rect">
-            <a:avLst/>
-          </a:prstGeom>
-          <a:noFill/>
-          <a:ln w="0">
-            <a:noFill/>
-          </a:ln>
-        </p:spPr>
-        <p:txBody>
-          <a:bodyPr lIns="43200" rIns="43200" tIns="43200" bIns="43200" anchor="t">
-            <a:noAutofit/>
-          </a:bodyPr>
-          <a:p>
-            <a:r>
-              <a:rPr b="0" lang="en-US" sz="1700" spc="-1" strike="noStrike">
+          <p:cNvPr id="377" name=""/>
+          <p:cNvSpPr txBox="1"/>
+          <p:nvPr/>
+        </p:nvSpPr>
+        <p:spPr>
+          <a:xfrm>
+            <a:off x="9594000" y="1296000"/>
+            <a:ext cx="1962000" cy="478800"/>
+          </a:xfrm>
+          <a:prstGeom prst="rect">
+            <a:avLst/>
+          </a:prstGeom>
+          <a:noFill/>
+          <a:ln w="0">
+            <a:noFill/>
+          </a:ln>
+        </p:spPr>
+        <p:txBody>
+          <a:bodyPr lIns="43200" rIns="43200" tIns="43200" bIns="43200" anchor="t">
+            <a:noAutofit/>
+          </a:bodyPr>
+          <a:p>
+            <a:r>
+              <a:rPr b="0" lang="en-US" sz="1150" spc="-1" strike="noStrike">
                 <a:solidFill>
                   <a:srgbClr val="17212b"/>
                 </a:solidFill>
                 <a:latin typeface="Arial"/>
               </a:rPr>
-              <a:t>Synchronized five-interval constant-curvature target</a:t>
-            </a:r>
-            <a:endParaRPr b="0" lang="en-US" sz="1700" spc="-1" strike="noStrike">
+              <a:t>Six gauges per module</a:t>
+            </a:r>
+            <a:endParaRPr b="0" lang="en-US" sz="1150" spc="-1" strike="noStrike">
               <a:solidFill>
                 <a:srgbClr val="17212b"/>
               </a:solidFill>
@@ -7403,21 +8578,773 @@
       </p:sp>
       <p:sp>
         <p:nvSpPr>
-          <p:cNvPr id="348" name=""/>
+          <p:cNvPr id="378" name=""/>
+          <p:cNvSpPr txBox="1"/>
+          <p:nvPr/>
+        </p:nvSpPr>
+        <p:spPr>
+          <a:xfrm>
+            <a:off x="9396000" y="1792800"/>
+            <a:ext cx="180000" cy="222480"/>
+          </a:xfrm>
+          <a:prstGeom prst="rect">
+            <a:avLst/>
+          </a:prstGeom>
+          <a:noFill/>
+          <a:ln w="0">
+            <a:noFill/>
+          </a:ln>
+        </p:spPr>
+        <p:txBody>
+          <a:bodyPr lIns="43200" rIns="43200" tIns="43200" bIns="43200" anchor="t">
+            <a:noAutofit/>
+          </a:bodyPr>
+          <a:p>
+            <a:r>
+              <a:rPr b="1" lang="en-US" sz="950" spc="-1" strike="noStrike">
+                <a:solidFill>
+                  <a:srgbClr val="167d8d"/>
+                </a:solidFill>
+                <a:latin typeface="Arial"/>
+              </a:rPr>
+              <a:t>●</a:t>
+            </a:r>
+            <a:endParaRPr b="1" lang="en-US" sz="950" spc="-1" strike="noStrike">
+              <a:solidFill>
+                <a:srgbClr val="167d8d"/>
+              </a:solidFill>
+              <a:latin typeface="Arial"/>
+            </a:endParaRPr>
+          </a:p>
+        </p:txBody>
+      </p:sp>
+      <p:sp>
+        <p:nvSpPr>
+          <p:cNvPr id="379" name=""/>
+          <p:cNvSpPr txBox="1"/>
+          <p:nvPr/>
+        </p:nvSpPr>
+        <p:spPr>
+          <a:xfrm>
+            <a:off x="9594000" y="1778400"/>
+            <a:ext cx="1962000" cy="478800"/>
+          </a:xfrm>
+          <a:prstGeom prst="rect">
+            <a:avLst/>
+          </a:prstGeom>
+          <a:noFill/>
+          <a:ln w="0">
+            <a:noFill/>
+          </a:ln>
+        </p:spPr>
+        <p:txBody>
+          <a:bodyPr lIns="43200" rIns="43200" tIns="43200" bIns="43200" anchor="t">
+            <a:noAutofit/>
+          </a:bodyPr>
+          <a:p>
+            <a:r>
+              <a:rPr b="0" lang="en-US" sz="1150" spc="-1" strike="noStrike">
+                <a:solidFill>
+                  <a:srgbClr val="17212b"/>
+                </a:solidFill>
+                <a:latin typeface="Arial"/>
+              </a:rPr>
+              <a:t>Two axial stations</a:t>
+            </a:r>
+            <a:endParaRPr b="0" lang="en-US" sz="1150" spc="-1" strike="noStrike">
+              <a:solidFill>
+                <a:srgbClr val="17212b"/>
+              </a:solidFill>
+              <a:latin typeface="Arial"/>
+            </a:endParaRPr>
+          </a:p>
+        </p:txBody>
+      </p:sp>
+      <p:sp>
+        <p:nvSpPr>
+          <p:cNvPr id="380" name=""/>
+          <p:cNvSpPr txBox="1"/>
+          <p:nvPr/>
+        </p:nvSpPr>
+        <p:spPr>
+          <a:xfrm>
+            <a:off x="9396000" y="2275200"/>
+            <a:ext cx="180000" cy="222480"/>
+          </a:xfrm>
+          <a:prstGeom prst="rect">
+            <a:avLst/>
+          </a:prstGeom>
+          <a:noFill/>
+          <a:ln w="0">
+            <a:noFill/>
+          </a:ln>
+        </p:spPr>
+        <p:txBody>
+          <a:bodyPr lIns="43200" rIns="43200" tIns="43200" bIns="43200" anchor="t">
+            <a:noAutofit/>
+          </a:bodyPr>
+          <a:p>
+            <a:r>
+              <a:rPr b="1" lang="en-US" sz="950" spc="-1" strike="noStrike">
+                <a:solidFill>
+                  <a:srgbClr val="167d8d"/>
+                </a:solidFill>
+                <a:latin typeface="Arial"/>
+              </a:rPr>
+              <a:t>●</a:t>
+            </a:r>
+            <a:endParaRPr b="1" lang="en-US" sz="950" spc="-1" strike="noStrike">
+              <a:solidFill>
+                <a:srgbClr val="167d8d"/>
+              </a:solidFill>
+              <a:latin typeface="Arial"/>
+            </a:endParaRPr>
+          </a:p>
+        </p:txBody>
+      </p:sp>
+      <p:sp>
+        <p:nvSpPr>
+          <p:cNvPr id="381" name=""/>
+          <p:cNvSpPr txBox="1"/>
+          <p:nvPr/>
+        </p:nvSpPr>
+        <p:spPr>
+          <a:xfrm>
+            <a:off x="9594000" y="2260800"/>
+            <a:ext cx="1962000" cy="478800"/>
+          </a:xfrm>
+          <a:prstGeom prst="rect">
+            <a:avLst/>
+          </a:prstGeom>
+          <a:noFill/>
+          <a:ln w="0">
+            <a:noFill/>
+          </a:ln>
+        </p:spPr>
+        <p:txBody>
+          <a:bodyPr lIns="43200" rIns="43200" tIns="43200" bIns="43200" anchor="t">
+            <a:noAutofit/>
+          </a:bodyPr>
+          <a:p>
+            <a:r>
+              <a:rPr b="0" lang="en-US" sz="1150" spc="-1" strike="noStrike">
+                <a:solidFill>
+                  <a:srgbClr val="17212b"/>
+                </a:solidFill>
+                <a:latin typeface="Arial"/>
+              </a:rPr>
+              <a:t>Three gauges per ring</a:t>
+            </a:r>
+            <a:endParaRPr b="0" lang="en-US" sz="1150" spc="-1" strike="noStrike">
+              <a:solidFill>
+                <a:srgbClr val="17212b"/>
+              </a:solidFill>
+              <a:latin typeface="Arial"/>
+            </a:endParaRPr>
+          </a:p>
+        </p:txBody>
+      </p:sp>
+      <p:sp>
+        <p:nvSpPr>
+          <p:cNvPr id="382" name=""/>
+          <p:cNvSpPr txBox="1"/>
+          <p:nvPr/>
+        </p:nvSpPr>
+        <p:spPr>
+          <a:xfrm>
+            <a:off x="9396000" y="2757600"/>
+            <a:ext cx="180000" cy="222480"/>
+          </a:xfrm>
+          <a:prstGeom prst="rect">
+            <a:avLst/>
+          </a:prstGeom>
+          <a:noFill/>
+          <a:ln w="0">
+            <a:noFill/>
+          </a:ln>
+        </p:spPr>
+        <p:txBody>
+          <a:bodyPr lIns="43200" rIns="43200" tIns="43200" bIns="43200" anchor="t">
+            <a:noAutofit/>
+          </a:bodyPr>
+          <a:p>
+            <a:r>
+              <a:rPr b="1" lang="en-US" sz="950" spc="-1" strike="noStrike">
+                <a:solidFill>
+                  <a:srgbClr val="167d8d"/>
+                </a:solidFill>
+                <a:latin typeface="Arial"/>
+              </a:rPr>
+              <a:t>●</a:t>
+            </a:r>
+            <a:endParaRPr b="1" lang="en-US" sz="950" spc="-1" strike="noStrike">
+              <a:solidFill>
+                <a:srgbClr val="167d8d"/>
+              </a:solidFill>
+              <a:latin typeface="Arial"/>
+            </a:endParaRPr>
+          </a:p>
+        </p:txBody>
+      </p:sp>
+      <p:sp>
+        <p:nvSpPr>
+          <p:cNvPr id="383" name=""/>
+          <p:cNvSpPr txBox="1"/>
+          <p:nvPr/>
+        </p:nvSpPr>
+        <p:spPr>
+          <a:xfrm>
+            <a:off x="9594000" y="2743200"/>
+            <a:ext cx="1962000" cy="478800"/>
+          </a:xfrm>
+          <a:prstGeom prst="rect">
+            <a:avLst/>
+          </a:prstGeom>
+          <a:noFill/>
+          <a:ln w="0">
+            <a:noFill/>
+          </a:ln>
+        </p:spPr>
+        <p:txBody>
+          <a:bodyPr lIns="43200" rIns="43200" tIns="43200" bIns="43200" anchor="t">
+            <a:noAutofit/>
+          </a:bodyPr>
+          <a:p>
+            <a:r>
+              <a:rPr b="0" lang="en-US" sz="1150" spc="-1" strike="noStrike">
+                <a:solidFill>
+                  <a:srgbClr val="17212b"/>
+                </a:solidFill>
+                <a:latin typeface="Arial"/>
+              </a:rPr>
+              <a:t>18 bridge-voltage channels</a:t>
+            </a:r>
+            <a:endParaRPr b="0" lang="en-US" sz="1150" spc="-1" strike="noStrike">
+              <a:solidFill>
+                <a:srgbClr val="17212b"/>
+              </a:solidFill>
+              <a:latin typeface="Arial"/>
+            </a:endParaRPr>
+          </a:p>
+        </p:txBody>
+      </p:sp>
+      <p:sp>
+        <p:nvSpPr>
+          <p:cNvPr id="384" name=""/>
+          <p:cNvSpPr txBox="1"/>
+          <p:nvPr/>
+        </p:nvSpPr>
+        <p:spPr>
+          <a:xfrm>
+            <a:off x="9396000" y="3240000"/>
+            <a:ext cx="180000" cy="222480"/>
+          </a:xfrm>
+          <a:prstGeom prst="rect">
+            <a:avLst/>
+          </a:prstGeom>
+          <a:noFill/>
+          <a:ln w="0">
+            <a:noFill/>
+          </a:ln>
+        </p:spPr>
+        <p:txBody>
+          <a:bodyPr lIns="43200" rIns="43200" tIns="43200" bIns="43200" anchor="t">
+            <a:noAutofit/>
+          </a:bodyPr>
+          <a:p>
+            <a:r>
+              <a:rPr b="1" lang="en-US" sz="950" spc="-1" strike="noStrike">
+                <a:solidFill>
+                  <a:srgbClr val="167d8d"/>
+                </a:solidFill>
+                <a:latin typeface="Arial"/>
+              </a:rPr>
+              <a:t>●</a:t>
+            </a:r>
+            <a:endParaRPr b="1" lang="en-US" sz="950" spc="-1" strike="noStrike">
+              <a:solidFill>
+                <a:srgbClr val="167d8d"/>
+              </a:solidFill>
+              <a:latin typeface="Arial"/>
+            </a:endParaRPr>
+          </a:p>
+        </p:txBody>
+      </p:sp>
+      <p:sp>
+        <p:nvSpPr>
+          <p:cNvPr id="385" name=""/>
+          <p:cNvSpPr txBox="1"/>
+          <p:nvPr/>
+        </p:nvSpPr>
+        <p:spPr>
+          <a:xfrm>
+            <a:off x="9594000" y="3225600"/>
+            <a:ext cx="1962000" cy="478800"/>
+          </a:xfrm>
+          <a:prstGeom prst="rect">
+            <a:avLst/>
+          </a:prstGeom>
+          <a:noFill/>
+          <a:ln w="0">
+            <a:noFill/>
+          </a:ln>
+        </p:spPr>
+        <p:txBody>
+          <a:bodyPr lIns="43200" rIns="43200" tIns="43200" bIns="43200" anchor="t">
+            <a:noAutofit/>
+          </a:bodyPr>
+          <a:p>
+            <a:r>
+              <a:rPr b="0" lang="en-US" sz="1150" spc="-1" strike="noStrike">
+                <a:solidFill>
+                  <a:srgbClr val="17212b"/>
+                </a:solidFill>
+                <a:latin typeface="Arial"/>
+              </a:rPr>
+              <a:t>18 validity flags</a:t>
+            </a:r>
+            <a:endParaRPr b="0" lang="en-US" sz="1150" spc="-1" strike="noStrike">
+              <a:solidFill>
+                <a:srgbClr val="17212b"/>
+              </a:solidFill>
+              <a:latin typeface="Arial"/>
+            </a:endParaRPr>
+          </a:p>
+        </p:txBody>
+      </p:sp>
+      <p:sp>
+        <p:nvSpPr>
+          <p:cNvPr id="386" name=""/>
+          <p:cNvSpPr txBox="1"/>
+          <p:nvPr/>
+        </p:nvSpPr>
+        <p:spPr>
+          <a:xfrm>
+            <a:off x="9396000" y="3722400"/>
+            <a:ext cx="180000" cy="222480"/>
+          </a:xfrm>
+          <a:prstGeom prst="rect">
+            <a:avLst/>
+          </a:prstGeom>
+          <a:noFill/>
+          <a:ln w="0">
+            <a:noFill/>
+          </a:ln>
+        </p:spPr>
+        <p:txBody>
+          <a:bodyPr lIns="43200" rIns="43200" tIns="43200" bIns="43200" anchor="t">
+            <a:noAutofit/>
+          </a:bodyPr>
+          <a:p>
+            <a:r>
+              <a:rPr b="1" lang="en-US" sz="950" spc="-1" strike="noStrike">
+                <a:solidFill>
+                  <a:srgbClr val="167d8d"/>
+                </a:solidFill>
+                <a:latin typeface="Arial"/>
+              </a:rPr>
+              <a:t>●</a:t>
+            </a:r>
+            <a:endParaRPr b="1" lang="en-US" sz="950" spc="-1" strike="noStrike">
+              <a:solidFill>
+                <a:srgbClr val="167d8d"/>
+              </a:solidFill>
+              <a:latin typeface="Arial"/>
+            </a:endParaRPr>
+          </a:p>
+        </p:txBody>
+      </p:sp>
+      <p:sp>
+        <p:nvSpPr>
+          <p:cNvPr id="387" name=""/>
+          <p:cNvSpPr txBox="1"/>
+          <p:nvPr/>
+        </p:nvSpPr>
+        <p:spPr>
+          <a:xfrm>
+            <a:off x="9594000" y="3708000"/>
+            <a:ext cx="1962000" cy="478800"/>
+          </a:xfrm>
+          <a:prstGeom prst="rect">
+            <a:avLst/>
+          </a:prstGeom>
+          <a:noFill/>
+          <a:ln w="0">
+            <a:noFill/>
+          </a:ln>
+        </p:spPr>
+        <p:txBody>
+          <a:bodyPr lIns="43200" rIns="43200" tIns="43200" bIns="43200" anchor="t">
+            <a:noAutofit/>
+          </a:bodyPr>
+          <a:p>
+            <a:r>
+              <a:rPr b="0" lang="en-US" sz="1150" spc="-1" strike="noStrike">
+                <a:solidFill>
+                  <a:srgbClr val="17212b"/>
+                </a:solidFill>
+                <a:latin typeface="Arial"/>
+              </a:rPr>
+              <a:t>Quarter bridge: 350 Ω, GF 2.0, 2.5 V excitation</a:t>
+            </a:r>
+            <a:endParaRPr b="0" lang="en-US" sz="1150" spc="-1" strike="noStrike">
+              <a:solidFill>
+                <a:srgbClr val="17212b"/>
+              </a:solidFill>
+              <a:latin typeface="Arial"/>
+            </a:endParaRPr>
+          </a:p>
+        </p:txBody>
+      </p:sp>
+      <p:sp>
+        <p:nvSpPr>
+          <p:cNvPr id="388" name=""/>
+          <p:cNvSpPr txBox="1"/>
+          <p:nvPr/>
+        </p:nvSpPr>
+        <p:spPr>
+          <a:xfrm>
+            <a:off x="9396000" y="4204800"/>
+            <a:ext cx="180000" cy="222480"/>
+          </a:xfrm>
+          <a:prstGeom prst="rect">
+            <a:avLst/>
+          </a:prstGeom>
+          <a:noFill/>
+          <a:ln w="0">
+            <a:noFill/>
+          </a:ln>
+        </p:spPr>
+        <p:txBody>
+          <a:bodyPr lIns="43200" rIns="43200" tIns="43200" bIns="43200" anchor="t">
+            <a:noAutofit/>
+          </a:bodyPr>
+          <a:p>
+            <a:r>
+              <a:rPr b="1" lang="en-US" sz="950" spc="-1" strike="noStrike">
+                <a:solidFill>
+                  <a:srgbClr val="167d8d"/>
+                </a:solidFill>
+                <a:latin typeface="Arial"/>
+              </a:rPr>
+              <a:t>●</a:t>
+            </a:r>
+            <a:endParaRPr b="1" lang="en-US" sz="950" spc="-1" strike="noStrike">
+              <a:solidFill>
+                <a:srgbClr val="167d8d"/>
+              </a:solidFill>
+              <a:latin typeface="Arial"/>
+            </a:endParaRPr>
+          </a:p>
+        </p:txBody>
+      </p:sp>
+      <p:sp>
+        <p:nvSpPr>
+          <p:cNvPr id="389" name=""/>
+          <p:cNvSpPr txBox="1"/>
+          <p:nvPr/>
+        </p:nvSpPr>
+        <p:spPr>
+          <a:xfrm>
+            <a:off x="9594000" y="4190400"/>
+            <a:ext cx="1962000" cy="576000"/>
+          </a:xfrm>
+          <a:prstGeom prst="rect">
+            <a:avLst/>
+          </a:prstGeom>
+          <a:noFill/>
+          <a:ln w="0">
+            <a:noFill/>
+          </a:ln>
+        </p:spPr>
+        <p:txBody>
+          <a:bodyPr lIns="43200" rIns="43200" tIns="43200" bIns="43200" anchor="t">
+            <a:noAutofit/>
+          </a:bodyPr>
+          <a:p>
+            <a:r>
+              <a:rPr b="0" lang="en-US" sz="1150" spc="-1" strike="noStrike">
+                <a:solidFill>
+                  <a:srgbClr val="17212b"/>
+                </a:solidFill>
+                <a:latin typeface="Arial"/>
+              </a:rPr>
+              <a:t>All 18 voltage graphs open automatically with the simulation launch</a:t>
+            </a:r>
+            <a:endParaRPr b="0" lang="en-US" sz="1150" spc="-1" strike="noStrike">
+              <a:solidFill>
+                <a:srgbClr val="17212b"/>
+              </a:solidFill>
+              <a:latin typeface="Arial"/>
+            </a:endParaRPr>
+          </a:p>
+        </p:txBody>
+      </p:sp>
+      <p:sp>
+        <p:nvSpPr>
+          <p:cNvPr id="390" name=""/>
+          <p:cNvSpPr txBox="1"/>
+          <p:nvPr/>
+        </p:nvSpPr>
+        <p:spPr>
+          <a:xfrm>
+            <a:off x="9396000" y="4687200"/>
+            <a:ext cx="180000" cy="222480"/>
+          </a:xfrm>
+          <a:prstGeom prst="rect">
+            <a:avLst/>
+          </a:prstGeom>
+          <a:noFill/>
+          <a:ln w="0">
+            <a:noFill/>
+          </a:ln>
+        </p:spPr>
+        <p:txBody>
+          <a:bodyPr lIns="43200" rIns="43200" tIns="43200" bIns="43200" anchor="t">
+            <a:noAutofit/>
+          </a:bodyPr>
+          <a:p>
+            <a:r>
+              <a:rPr b="1" lang="en-US" sz="950" spc="-1" strike="noStrike">
+                <a:solidFill>
+                  <a:srgbClr val="167d8d"/>
+                </a:solidFill>
+                <a:latin typeface="Arial"/>
+              </a:rPr>
+              <a:t>●</a:t>
+            </a:r>
+            <a:endParaRPr b="1" lang="en-US" sz="950" spc="-1" strike="noStrike">
+              <a:solidFill>
+                <a:srgbClr val="167d8d"/>
+              </a:solidFill>
+              <a:latin typeface="Arial"/>
+            </a:endParaRPr>
+          </a:p>
+        </p:txBody>
+      </p:sp>
+      <p:sp>
+        <p:nvSpPr>
+          <p:cNvPr id="391" name=""/>
+          <p:cNvSpPr txBox="1"/>
+          <p:nvPr/>
+        </p:nvSpPr>
+        <p:spPr>
+          <a:xfrm>
+            <a:off x="9594000" y="4672800"/>
+            <a:ext cx="1962000" cy="576000"/>
+          </a:xfrm>
+          <a:prstGeom prst="rect">
+            <a:avLst/>
+          </a:prstGeom>
+          <a:noFill/>
+          <a:ln w="0">
+            <a:noFill/>
+          </a:ln>
+        </p:spPr>
+        <p:txBody>
+          <a:bodyPr lIns="43200" rIns="43200" tIns="43200" bIns="43200" anchor="t">
+            <a:noAutofit/>
+          </a:bodyPr>
+          <a:p>
+            <a:r>
+              <a:rPr b="0" lang="en-US" sz="1150" spc="-1" strike="noStrike">
+                <a:solidFill>
+                  <a:srgbClr val="17212b"/>
+                </a:solidFill>
+                <a:latin typeface="Arial"/>
+              </a:rPr>
+              <a:t>Pose-derived readings remain available without a command</a:t>
+            </a:r>
+            <a:endParaRPr b="0" lang="en-US" sz="1150" spc="-1" strike="noStrike">
+              <a:solidFill>
+                <a:srgbClr val="17212b"/>
+              </a:solidFill>
+              <a:latin typeface="Arial"/>
+            </a:endParaRPr>
+          </a:p>
+        </p:txBody>
+      </p:sp>
+      <p:sp>
+        <p:nvSpPr>
+          <p:cNvPr id="392" name=""/>
+          <p:cNvSpPr txBox="1"/>
+          <p:nvPr/>
+        </p:nvSpPr>
+        <p:spPr>
+          <a:xfrm>
+            <a:off x="9432000" y="5328000"/>
+            <a:ext cx="2088000" cy="678600"/>
+          </a:xfrm>
+          <a:prstGeom prst="rect">
+            <a:avLst/>
+          </a:prstGeom>
+          <a:noFill/>
+          <a:ln w="0">
+            <a:noFill/>
+          </a:ln>
+        </p:spPr>
+        <p:txBody>
+          <a:bodyPr lIns="43200" rIns="43200" tIns="43200" bIns="43200" anchor="t">
+            <a:noAutofit/>
+          </a:bodyPr>
+          <a:p>
+            <a:r>
+              <a:rPr b="0" lang="en-US" sz="1050" spc="-1" strike="noStrike">
+                <a:solidFill>
+                  <a:srgbClr val="44515e"/>
+                </a:solidFill>
+                <a:latin typeface="Arial"/>
+              </a:rPr>
+              <a:t>Live voltage graph captured from /soft_snake/module_N/sensors/... topics.</a:t>
+            </a:r>
+            <a:endParaRPr b="0" lang="en-US" sz="1050" spc="-1" strike="noStrike">
+              <a:solidFill>
+                <a:srgbClr val="44515e"/>
+              </a:solidFill>
+              <a:latin typeface="Arial"/>
+            </a:endParaRPr>
+          </a:p>
+        </p:txBody>
+      </p:sp>
+    </p:spTree>
+  </p:cSld>
+  <mc:AlternateContent>
+    <mc:Choice Requires="p14">
+      <p:transition spd="slow" p14:dur="2000"/>
+    </mc:Choice>
+    <mc:Fallback>
+      <p:transition spd="slow"/>
+    </mc:Fallback>
+  </mc:AlternateContent>
+</p:sld>
+</file>
+
+<file path=ppt/slides/slide15.xml><?xml version="1.0" encoding="utf-8"?>
+<p:sld xmlns:a="http://schemas.openxmlformats.org/drawingml/2006/main" xmlns:p="http://schemas.openxmlformats.org/presentationml/2006/main" xmlns:r="http://schemas.openxmlformats.org/officeDocument/2006/relationships" xmlns:p14="http://schemas.microsoft.com/office/powerpoint/2010/main" xmlns:p15="http://schemas.microsoft.com/office/powerpoint/2012/main" xmlns:mc="http://schemas.openxmlformats.org/markup-compatibility/2006">
+  <p:cSld>
+    <p:spTree>
+      <p:nvGrpSpPr>
+        <p:cNvPr id="1" name=""/>
+        <p:cNvGrpSpPr/>
+        <p:nvPr/>
+      </p:nvGrpSpPr>
+      <p:grpSpPr>
+        <a:xfrm>
+          <a:off x="0" y="0"/>
+          <a:ext cx="0" cy="0"/>
+          <a:chOff x="0" y="0"/>
+          <a:chExt cx="0" cy="0"/>
+        </a:xfrm>
+      </p:grpSpPr>
+      <p:sp>
+        <p:nvSpPr>
+          <p:cNvPr id="393" name=""/>
           <p:cNvSpPr/>
           <p:nvPr/>
         </p:nvSpPr>
         <p:spPr>
           <a:xfrm>
-            <a:off x="1440000" y="2916000"/>
-            <a:ext cx="9072000" cy="0"/>
-          </a:xfrm>
-          <a:prstGeom prst="line">
-            <a:avLst/>
-          </a:prstGeom>
+            <a:off x="0" y="0"/>
+            <a:ext cx="12192120" cy="6858000"/>
+          </a:xfrm>
+          <a:prstGeom prst="rect">
+            <a:avLst/>
+          </a:prstGeom>
+          <a:solidFill>
+            <a:srgbClr val="f4f2ef"/>
+          </a:solidFill>
           <a:ln w="7200">
             <a:solidFill>
-              <a:srgbClr val="d7d2cc"/>
+              <a:srgbClr val="f4f2ef"/>
+            </a:solidFill>
+            <a:round/>
+          </a:ln>
+        </p:spPr>
+      </p:sp>
+      <p:sp>
+        <p:nvSpPr>
+          <p:cNvPr id="394" name=""/>
+          <p:cNvSpPr/>
+          <p:nvPr/>
+        </p:nvSpPr>
+        <p:spPr>
+          <a:xfrm>
+            <a:off x="0" y="0"/>
+            <a:ext cx="126000" cy="6858000"/>
+          </a:xfrm>
+          <a:prstGeom prst="rect">
+            <a:avLst/>
+          </a:prstGeom>
+          <a:solidFill>
+            <a:srgbClr val="500000"/>
+          </a:solidFill>
+          <a:ln w="7200">
+            <a:solidFill>
+              <a:srgbClr val="500000"/>
+            </a:solidFill>
+            <a:round/>
+          </a:ln>
+        </p:spPr>
+      </p:sp>
+      <p:sp>
+        <p:nvSpPr>
+          <p:cNvPr id="395" name=""/>
+          <p:cNvSpPr txBox="1"/>
+          <p:nvPr/>
+        </p:nvSpPr>
+        <p:spPr>
+          <a:xfrm>
+            <a:off x="414000" y="234000"/>
+            <a:ext cx="11052000" cy="426600"/>
+          </a:xfrm>
+          <a:prstGeom prst="rect">
+            <a:avLst/>
+          </a:prstGeom>
+          <a:noFill/>
+          <a:ln w="0">
+            <a:noFill/>
+          </a:ln>
+        </p:spPr>
+        <p:txBody>
+          <a:bodyPr lIns="43200" rIns="43200" tIns="43200" bIns="43200" anchor="t">
+            <a:noAutofit/>
+          </a:bodyPr>
+          <a:p>
+            <a:r>
+              <a:rPr b="1" lang="en-US" sz="2400" spc="-1" strike="noStrike">
+                <a:solidFill>
+                  <a:srgbClr val="500000"/>
+                </a:solidFill>
+                <a:latin typeface="Arial"/>
+              </a:rPr>
+              <a:t>Next Research Steps</a:t>
+            </a:r>
+            <a:endParaRPr b="1" lang="en-US" sz="2400" spc="-1" strike="noStrike">
+              <a:solidFill>
+                <a:srgbClr val="500000"/>
+              </a:solidFill>
+              <a:latin typeface="Arial"/>
+            </a:endParaRPr>
+          </a:p>
+        </p:txBody>
+      </p:sp>
+      <p:sp>
+        <p:nvSpPr>
+          <p:cNvPr id="396" name=""/>
+          <p:cNvSpPr/>
+          <p:nvPr/>
+        </p:nvSpPr>
+        <p:spPr>
+          <a:xfrm>
+            <a:off x="414000" y="702000"/>
+            <a:ext cx="11178000" cy="0"/>
+          </a:xfrm>
+          <a:prstGeom prst="line">
+            <a:avLst/>
+          </a:prstGeom>
+          <a:ln w="14400">
+            <a:solidFill>
+              <a:srgbClr val="d6a84b"/>
             </a:solidFill>
             <a:round/>
           </a:ln>
@@ -7431,105 +9358,1045 @@
       </p:sp>
       <p:sp>
         <p:nvSpPr>
-          <p:cNvPr id="349" name=""/>
-          <p:cNvSpPr txBox="1"/>
-          <p:nvPr/>
-        </p:nvSpPr>
-        <p:spPr>
-          <a:xfrm>
-            <a:off x="1440000" y="3276000"/>
-            <a:ext cx="2160000" cy="257400"/>
-          </a:xfrm>
-          <a:prstGeom prst="rect">
-            <a:avLst/>
-          </a:prstGeom>
-          <a:noFill/>
-          <a:ln w="0">
-            <a:noFill/>
-          </a:ln>
-        </p:spPr>
-        <p:txBody>
-          <a:bodyPr lIns="43200" rIns="43200" tIns="43200" bIns="43200" anchor="t">
-            <a:noAutofit/>
-          </a:bodyPr>
-          <a:p>
-            <a:r>
-              <a:rPr b="1" lang="en-US" sz="1200" spc="-1" strike="noStrike">
-                <a:solidFill>
-                  <a:srgbClr val="167d8d"/>
-                </a:solidFill>
-                <a:latin typeface="Arial"/>
-              </a:rPr>
-              <a:t>SENSING</a:t>
-            </a:r>
-            <a:endParaRPr b="1" lang="en-US" sz="1200" spc="-1" strike="noStrike">
-              <a:solidFill>
-                <a:srgbClr val="167d8d"/>
-              </a:solidFill>
-              <a:latin typeface="Arial"/>
-            </a:endParaRPr>
-          </a:p>
-        </p:txBody>
-      </p:sp>
-      <p:sp>
-        <p:nvSpPr>
-          <p:cNvPr id="350" name=""/>
-          <p:cNvSpPr txBox="1"/>
-          <p:nvPr/>
-        </p:nvSpPr>
-        <p:spPr>
-          <a:xfrm>
-            <a:off x="3672000" y="3247200"/>
-            <a:ext cx="6840000" cy="329040"/>
-          </a:xfrm>
-          <a:prstGeom prst="rect">
-            <a:avLst/>
-          </a:prstGeom>
-          <a:noFill/>
-          <a:ln w="0">
-            <a:noFill/>
-          </a:ln>
-        </p:spPr>
-        <p:txBody>
-          <a:bodyPr lIns="43200" rIns="43200" tIns="43200" bIns="43200" anchor="t">
-            <a:noAutofit/>
-          </a:bodyPr>
-          <a:p>
-            <a:r>
-              <a:rPr b="0" lang="en-US" sz="1700" spc="-1" strike="noStrike">
-                <a:solidFill>
-                  <a:srgbClr val="17212b"/>
-                </a:solidFill>
-                <a:latin typeface="Arial"/>
-              </a:rPr>
-              <a:t>Six pose-derived strain channels + bridge voltages</a:t>
-            </a:r>
-            <a:endParaRPr b="0" lang="en-US" sz="1700" spc="-1" strike="noStrike">
-              <a:solidFill>
-                <a:srgbClr val="17212b"/>
-              </a:solidFill>
-              <a:latin typeface="Arial"/>
-            </a:endParaRPr>
-          </a:p>
-        </p:txBody>
-      </p:sp>
-      <p:sp>
-        <p:nvSpPr>
-          <p:cNvPr id="351" name=""/>
+          <p:cNvPr id="397" name=""/>
+          <p:cNvSpPr txBox="1"/>
+          <p:nvPr/>
+        </p:nvSpPr>
+        <p:spPr>
+          <a:xfrm>
+            <a:off x="9000000" y="90000"/>
+            <a:ext cx="2520000" cy="201240"/>
+          </a:xfrm>
+          <a:prstGeom prst="rect">
+            <a:avLst/>
+          </a:prstGeom>
+          <a:noFill/>
+          <a:ln w="0">
+            <a:noFill/>
+          </a:ln>
+        </p:spPr>
+        <p:txBody>
+          <a:bodyPr lIns="43200" rIns="43200" tIns="43200" bIns="43200" anchor="t">
+            <a:noAutofit/>
+          </a:bodyPr>
+          <a:p>
+            <a:pPr algn="just">
+              <a:buNone/>
+            </a:pPr>
+            <a:r>
+              <a:rPr b="1" lang="en-US" sz="800" spc="-1" strike="noStrike">
+                <a:solidFill>
+                  <a:srgbClr val="44515e"/>
+                </a:solidFill>
+                <a:latin typeface="Arial"/>
+              </a:rPr>
+              <a:t>FORWARD PLAN</a:t>
+            </a:r>
+            <a:endParaRPr b="1" lang="en-US" sz="800" spc="-1" strike="noStrike">
+              <a:solidFill>
+                <a:srgbClr val="44515e"/>
+              </a:solidFill>
+              <a:latin typeface="Arial"/>
+            </a:endParaRPr>
+          </a:p>
+        </p:txBody>
+      </p:sp>
+      <p:sp>
+        <p:nvSpPr>
+          <p:cNvPr id="398" name=""/>
+          <p:cNvSpPr txBox="1"/>
+          <p:nvPr/>
+        </p:nvSpPr>
+        <p:spPr>
+          <a:xfrm>
+            <a:off x="414000" y="6642000"/>
+            <a:ext cx="7560000" cy="193320"/>
+          </a:xfrm>
+          <a:prstGeom prst="rect">
+            <a:avLst/>
+          </a:prstGeom>
+          <a:noFill/>
+          <a:ln w="0">
+            <a:noFill/>
+          </a:ln>
+        </p:spPr>
+        <p:txBody>
+          <a:bodyPr lIns="43200" rIns="43200" tIns="43200" bIns="43200" anchor="t">
+            <a:noAutofit/>
+          </a:bodyPr>
+          <a:p>
+            <a:r>
+              <a:rPr b="0" lang="en-US" sz="750" spc="-1" strike="noStrike">
+                <a:solidFill>
+                  <a:srgbClr val="44515e"/>
+                </a:solidFill>
+                <a:latin typeface="Arial"/>
+              </a:rPr>
+              <a:t>Soft continuum limb research progress  •  15</a:t>
+            </a:r>
+            <a:endParaRPr b="0" lang="en-US" sz="750" spc="-1" strike="noStrike">
+              <a:solidFill>
+                <a:srgbClr val="44515e"/>
+              </a:solidFill>
+              <a:latin typeface="Arial"/>
+            </a:endParaRPr>
+          </a:p>
+        </p:txBody>
+      </p:sp>
+      <p:sp>
+        <p:nvSpPr>
+          <p:cNvPr id="399" name=""/>
+          <p:cNvSpPr txBox="1"/>
+          <p:nvPr/>
+        </p:nvSpPr>
+        <p:spPr>
+          <a:xfrm>
+            <a:off x="9000000" y="6642000"/>
+            <a:ext cx="2556000" cy="193320"/>
+          </a:xfrm>
+          <a:prstGeom prst="rect">
+            <a:avLst/>
+          </a:prstGeom>
+          <a:noFill/>
+          <a:ln w="0">
+            <a:noFill/>
+          </a:ln>
+        </p:spPr>
+        <p:txBody>
+          <a:bodyPr lIns="43200" rIns="43200" tIns="43200" bIns="43200" anchor="t">
+            <a:noAutofit/>
+          </a:bodyPr>
+          <a:p>
+            <a:pPr algn="just">
+              <a:buNone/>
+            </a:pPr>
+            <a:r>
+              <a:rPr b="0" lang="en-US" sz="750" spc="-1" strike="noStrike">
+                <a:solidFill>
+                  <a:srgbClr val="44515e"/>
+                </a:solidFill>
+                <a:latin typeface="Arial"/>
+              </a:rPr>
+              <a:t>ETID / MSET research</a:t>
+            </a:r>
+            <a:endParaRPr b="0" lang="en-US" sz="750" spc="-1" strike="noStrike">
+              <a:solidFill>
+                <a:srgbClr val="44515e"/>
+              </a:solidFill>
+              <a:latin typeface="Arial"/>
+            </a:endParaRPr>
+          </a:p>
+        </p:txBody>
+      </p:sp>
+      <p:sp>
+        <p:nvSpPr>
+          <p:cNvPr id="400" name=""/>
           <p:cNvSpPr/>
           <p:nvPr/>
         </p:nvSpPr>
         <p:spPr>
           <a:xfrm>
-            <a:off x="1440000" y="3654000"/>
-            <a:ext cx="9072000" cy="0"/>
-          </a:xfrm>
-          <a:prstGeom prst="line">
-            <a:avLst/>
-          </a:prstGeom>
+            <a:off x="468000" y="954000"/>
+            <a:ext cx="720000" cy="630000"/>
+          </a:xfrm>
+          <a:prstGeom prst="roundRect">
+            <a:avLst/>
+          </a:prstGeom>
+          <a:solidFill>
+            <a:srgbClr val="500000"/>
+          </a:solidFill>
           <a:ln w="7200">
             <a:solidFill>
-              <a:srgbClr val="d7d2cc"/>
+              <a:srgbClr val="500000"/>
+            </a:solidFill>
+            <a:round/>
+          </a:ln>
+        </p:spPr>
+      </p:sp>
+      <p:sp>
+        <p:nvSpPr>
+          <p:cNvPr id="401" name=""/>
+          <p:cNvSpPr txBox="1"/>
+          <p:nvPr/>
+        </p:nvSpPr>
+        <p:spPr>
+          <a:xfrm>
+            <a:off x="486000" y="1090800"/>
+            <a:ext cx="684000" cy="384120"/>
+          </a:xfrm>
+          <a:prstGeom prst="rect">
+            <a:avLst/>
+          </a:prstGeom>
+          <a:noFill/>
+          <a:ln w="0">
+            <a:noFill/>
+          </a:ln>
+        </p:spPr>
+        <p:txBody>
+          <a:bodyPr lIns="43200" rIns="43200" tIns="43200" bIns="43200" anchor="t">
+            <a:noAutofit/>
+          </a:bodyPr>
+          <a:p>
+            <a:pPr algn="r">
+              <a:buNone/>
+            </a:pPr>
+            <a:r>
+              <a:rPr b="1" lang="en-US" sz="2100" spc="-1" strike="noStrike">
+                <a:solidFill>
+                  <a:srgbClr val="ffffff"/>
+                </a:solidFill>
+                <a:latin typeface="Arial"/>
+              </a:rPr>
+              <a:t>01</a:t>
+            </a:r>
+            <a:endParaRPr b="1" lang="en-US" sz="2100" spc="-1" strike="noStrike">
+              <a:solidFill>
+                <a:srgbClr val="ffffff"/>
+              </a:solidFill>
+              <a:latin typeface="Arial"/>
+            </a:endParaRPr>
+          </a:p>
+        </p:txBody>
+      </p:sp>
+      <p:sp>
+        <p:nvSpPr>
+          <p:cNvPr id="402" name=""/>
+          <p:cNvSpPr txBox="1"/>
+          <p:nvPr/>
+        </p:nvSpPr>
+        <p:spPr>
+          <a:xfrm>
+            <a:off x="1368000" y="997200"/>
+            <a:ext cx="2592000" cy="446400"/>
+          </a:xfrm>
+          <a:prstGeom prst="rect">
+            <a:avLst/>
+          </a:prstGeom>
+          <a:noFill/>
+          <a:ln w="0">
+            <a:noFill/>
+          </a:ln>
+        </p:spPr>
+        <p:txBody>
+          <a:bodyPr lIns="43200" rIns="43200" tIns="43200" bIns="43200" anchor="t">
+            <a:noAutofit/>
+          </a:bodyPr>
+          <a:p>
+            <a:r>
+              <a:rPr b="1" lang="en-US" sz="1450" spc="-1" strike="noStrike">
+                <a:solidFill>
+                  <a:srgbClr val="500000"/>
+                </a:solidFill>
+                <a:latin typeface="Arial"/>
+              </a:rPr>
+              <a:t>Physical gauge selection</a:t>
+            </a:r>
+            <a:endParaRPr b="1" lang="en-US" sz="1450" spc="-1" strike="noStrike">
+              <a:solidFill>
+                <a:srgbClr val="500000"/>
+              </a:solidFill>
+              <a:latin typeface="Arial"/>
+            </a:endParaRPr>
+          </a:p>
+        </p:txBody>
+      </p:sp>
+      <p:sp>
+        <p:nvSpPr>
+          <p:cNvPr id="403" name=""/>
+          <p:cNvSpPr txBox="1"/>
+          <p:nvPr/>
+        </p:nvSpPr>
+        <p:spPr>
+          <a:xfrm>
+            <a:off x="4104000" y="997200"/>
+            <a:ext cx="7164000" cy="464400"/>
+          </a:xfrm>
+          <a:prstGeom prst="rect">
+            <a:avLst/>
+          </a:prstGeom>
+          <a:noFill/>
+          <a:ln w="0">
+            <a:noFill/>
+          </a:ln>
+        </p:spPr>
+        <p:txBody>
+          <a:bodyPr lIns="43200" rIns="43200" tIns="43200" bIns="43200" anchor="t">
+            <a:noAutofit/>
+          </a:bodyPr>
+          <a:p>
+            <a:r>
+              <a:rPr b="0" lang="en-US" sz="1200" spc="-1" strike="noStrike">
+                <a:solidFill>
+                  <a:srgbClr val="17212b"/>
+                </a:solidFill>
+                <a:latin typeface="Arial"/>
+              </a:rPr>
+              <a:t>Choose a commercial gauge, substrate, adhesive, and temperature compensation strategy.</a:t>
+            </a:r>
+            <a:endParaRPr b="0" lang="en-US" sz="1200" spc="-1" strike="noStrike">
+              <a:solidFill>
+                <a:srgbClr val="17212b"/>
+              </a:solidFill>
+              <a:latin typeface="Arial"/>
+            </a:endParaRPr>
+          </a:p>
+        </p:txBody>
+      </p:sp>
+      <p:sp>
+        <p:nvSpPr>
+          <p:cNvPr id="404" name=""/>
+          <p:cNvSpPr/>
+          <p:nvPr/>
+        </p:nvSpPr>
+        <p:spPr>
+          <a:xfrm>
+            <a:off x="468000" y="1944000"/>
+            <a:ext cx="720000" cy="630000"/>
+          </a:xfrm>
+          <a:prstGeom prst="roundRect">
+            <a:avLst/>
+          </a:prstGeom>
+          <a:solidFill>
+            <a:srgbClr val="500000"/>
+          </a:solidFill>
+          <a:ln w="7200">
+            <a:solidFill>
+              <a:srgbClr val="500000"/>
+            </a:solidFill>
+            <a:round/>
+          </a:ln>
+        </p:spPr>
+      </p:sp>
+      <p:sp>
+        <p:nvSpPr>
+          <p:cNvPr id="405" name=""/>
+          <p:cNvSpPr txBox="1"/>
+          <p:nvPr/>
+        </p:nvSpPr>
+        <p:spPr>
+          <a:xfrm>
+            <a:off x="486000" y="2080800"/>
+            <a:ext cx="684000" cy="384120"/>
+          </a:xfrm>
+          <a:prstGeom prst="rect">
+            <a:avLst/>
+          </a:prstGeom>
+          <a:noFill/>
+          <a:ln w="0">
+            <a:noFill/>
+          </a:ln>
+        </p:spPr>
+        <p:txBody>
+          <a:bodyPr lIns="43200" rIns="43200" tIns="43200" bIns="43200" anchor="t">
+            <a:noAutofit/>
+          </a:bodyPr>
+          <a:p>
+            <a:pPr algn="r">
+              <a:buNone/>
+            </a:pPr>
+            <a:r>
+              <a:rPr b="1" lang="en-US" sz="2100" spc="-1" strike="noStrike">
+                <a:solidFill>
+                  <a:srgbClr val="ffffff"/>
+                </a:solidFill>
+                <a:latin typeface="Arial"/>
+              </a:rPr>
+              <a:t>02</a:t>
+            </a:r>
+            <a:endParaRPr b="1" lang="en-US" sz="2100" spc="-1" strike="noStrike">
+              <a:solidFill>
+                <a:srgbClr val="ffffff"/>
+              </a:solidFill>
+              <a:latin typeface="Arial"/>
+            </a:endParaRPr>
+          </a:p>
+        </p:txBody>
+      </p:sp>
+      <p:sp>
+        <p:nvSpPr>
+          <p:cNvPr id="406" name=""/>
+          <p:cNvSpPr txBox="1"/>
+          <p:nvPr/>
+        </p:nvSpPr>
+        <p:spPr>
+          <a:xfrm>
+            <a:off x="1368000" y="1987200"/>
+            <a:ext cx="2592000" cy="446400"/>
+          </a:xfrm>
+          <a:prstGeom prst="rect">
+            <a:avLst/>
+          </a:prstGeom>
+          <a:noFill/>
+          <a:ln w="0">
+            <a:noFill/>
+          </a:ln>
+        </p:spPr>
+        <p:txBody>
+          <a:bodyPr lIns="43200" rIns="43200" tIns="43200" bIns="43200" anchor="t">
+            <a:noAutofit/>
+          </a:bodyPr>
+          <a:p>
+            <a:r>
+              <a:rPr b="1" lang="en-US" sz="1450" spc="-1" strike="noStrike">
+                <a:solidFill>
+                  <a:srgbClr val="500000"/>
+                </a:solidFill>
+                <a:latin typeface="Arial"/>
+              </a:rPr>
+              <a:t>Bench calibration</a:t>
+            </a:r>
+            <a:endParaRPr b="1" lang="en-US" sz="1450" spc="-1" strike="noStrike">
+              <a:solidFill>
+                <a:srgbClr val="500000"/>
+              </a:solidFill>
+              <a:latin typeface="Arial"/>
+            </a:endParaRPr>
+          </a:p>
+        </p:txBody>
+      </p:sp>
+      <p:sp>
+        <p:nvSpPr>
+          <p:cNvPr id="407" name=""/>
+          <p:cNvSpPr txBox="1"/>
+          <p:nvPr/>
+        </p:nvSpPr>
+        <p:spPr>
+          <a:xfrm>
+            <a:off x="4104000" y="1987200"/>
+            <a:ext cx="7164000" cy="464400"/>
+          </a:xfrm>
+          <a:prstGeom prst="rect">
+            <a:avLst/>
+          </a:prstGeom>
+          <a:noFill/>
+          <a:ln w="0">
+            <a:noFill/>
+          </a:ln>
+        </p:spPr>
+        <p:txBody>
+          <a:bodyPr lIns="43200" rIns="43200" tIns="43200" bIns="43200" anchor="t">
+            <a:noAutofit/>
+          </a:bodyPr>
+          <a:p>
+            <a:r>
+              <a:rPr b="0" lang="en-US" sz="1200" spc="-1" strike="noStrike">
+                <a:solidFill>
+                  <a:srgbClr val="17212b"/>
+                </a:solidFill>
+                <a:latin typeface="Arial"/>
+              </a:rPr>
+              <a:t>Measure real strain and bridge voltage against known curvature and loading.</a:t>
+            </a:r>
+            <a:endParaRPr b="0" lang="en-US" sz="1200" spc="-1" strike="noStrike">
+              <a:solidFill>
+                <a:srgbClr val="17212b"/>
+              </a:solidFill>
+              <a:latin typeface="Arial"/>
+            </a:endParaRPr>
+          </a:p>
+        </p:txBody>
+      </p:sp>
+      <p:sp>
+        <p:nvSpPr>
+          <p:cNvPr id="408" name=""/>
+          <p:cNvSpPr/>
+          <p:nvPr/>
+        </p:nvSpPr>
+        <p:spPr>
+          <a:xfrm>
+            <a:off x="468000" y="2934000"/>
+            <a:ext cx="720000" cy="630000"/>
+          </a:xfrm>
+          <a:prstGeom prst="roundRect">
+            <a:avLst/>
+          </a:prstGeom>
+          <a:solidFill>
+            <a:srgbClr val="500000"/>
+          </a:solidFill>
+          <a:ln w="7200">
+            <a:solidFill>
+              <a:srgbClr val="500000"/>
+            </a:solidFill>
+            <a:round/>
+          </a:ln>
+        </p:spPr>
+      </p:sp>
+      <p:sp>
+        <p:nvSpPr>
+          <p:cNvPr id="409" name=""/>
+          <p:cNvSpPr txBox="1"/>
+          <p:nvPr/>
+        </p:nvSpPr>
+        <p:spPr>
+          <a:xfrm>
+            <a:off x="486000" y="3070800"/>
+            <a:ext cx="684000" cy="384120"/>
+          </a:xfrm>
+          <a:prstGeom prst="rect">
+            <a:avLst/>
+          </a:prstGeom>
+          <a:noFill/>
+          <a:ln w="0">
+            <a:noFill/>
+          </a:ln>
+        </p:spPr>
+        <p:txBody>
+          <a:bodyPr lIns="43200" rIns="43200" tIns="43200" bIns="43200" anchor="t">
+            <a:noAutofit/>
+          </a:bodyPr>
+          <a:p>
+            <a:pPr algn="r">
+              <a:buNone/>
+            </a:pPr>
+            <a:r>
+              <a:rPr b="1" lang="en-US" sz="2100" spc="-1" strike="noStrike">
+                <a:solidFill>
+                  <a:srgbClr val="ffffff"/>
+                </a:solidFill>
+                <a:latin typeface="Arial"/>
+              </a:rPr>
+              <a:t>03</a:t>
+            </a:r>
+            <a:endParaRPr b="1" lang="en-US" sz="2100" spc="-1" strike="noStrike">
+              <a:solidFill>
+                <a:srgbClr val="ffffff"/>
+              </a:solidFill>
+              <a:latin typeface="Arial"/>
+            </a:endParaRPr>
+          </a:p>
+        </p:txBody>
+      </p:sp>
+      <p:sp>
+        <p:nvSpPr>
+          <p:cNvPr id="410" name=""/>
+          <p:cNvSpPr txBox="1"/>
+          <p:nvPr/>
+        </p:nvSpPr>
+        <p:spPr>
+          <a:xfrm>
+            <a:off x="1368000" y="2977200"/>
+            <a:ext cx="2592000" cy="501480"/>
+          </a:xfrm>
+          <a:prstGeom prst="rect">
+            <a:avLst/>
+          </a:prstGeom>
+          <a:noFill/>
+          <a:ln w="0">
+            <a:noFill/>
+          </a:ln>
+        </p:spPr>
+        <p:txBody>
+          <a:bodyPr lIns="43200" rIns="43200" tIns="43200" bIns="43200" anchor="t">
+            <a:noAutofit/>
+          </a:bodyPr>
+          <a:p>
+            <a:r>
+              <a:rPr b="1" lang="en-US" sz="1450" spc="-1" strike="noStrike">
+                <a:solidFill>
+                  <a:srgbClr val="500000"/>
+                </a:solidFill>
+                <a:latin typeface="Arial"/>
+              </a:rPr>
+              <a:t>Independent shape validation</a:t>
+            </a:r>
+            <a:endParaRPr b="1" lang="en-US" sz="1450" spc="-1" strike="noStrike">
+              <a:solidFill>
+                <a:srgbClr val="500000"/>
+              </a:solidFill>
+              <a:latin typeface="Arial"/>
+            </a:endParaRPr>
+          </a:p>
+        </p:txBody>
+      </p:sp>
+      <p:sp>
+        <p:nvSpPr>
+          <p:cNvPr id="411" name=""/>
+          <p:cNvSpPr txBox="1"/>
+          <p:nvPr/>
+        </p:nvSpPr>
+        <p:spPr>
+          <a:xfrm>
+            <a:off x="4104000" y="2977200"/>
+            <a:ext cx="7164000" cy="464400"/>
+          </a:xfrm>
+          <a:prstGeom prst="rect">
+            <a:avLst/>
+          </a:prstGeom>
+          <a:noFill/>
+          <a:ln w="0">
+            <a:noFill/>
+          </a:ln>
+        </p:spPr>
+        <p:txBody>
+          <a:bodyPr lIns="43200" rIns="43200" tIns="43200" bIns="43200" anchor="t">
+            <a:noAutofit/>
+          </a:bodyPr>
+          <a:p>
+            <a:r>
+              <a:rPr b="0" lang="en-US" sz="1200" spc="-1" strike="noStrike">
+                <a:solidFill>
+                  <a:srgbClr val="17212b"/>
+                </a:solidFill>
+                <a:latin typeface="Arial"/>
+              </a:rPr>
+              <a:t>Compare reconstructed curvature with motion capture or vision—not the same pose source.</a:t>
+            </a:r>
+            <a:endParaRPr b="0" lang="en-US" sz="1200" spc="-1" strike="noStrike">
+              <a:solidFill>
+                <a:srgbClr val="17212b"/>
+              </a:solidFill>
+              <a:latin typeface="Arial"/>
+            </a:endParaRPr>
+          </a:p>
+        </p:txBody>
+      </p:sp>
+      <p:sp>
+        <p:nvSpPr>
+          <p:cNvPr id="412" name=""/>
+          <p:cNvSpPr/>
+          <p:nvPr/>
+        </p:nvSpPr>
+        <p:spPr>
+          <a:xfrm>
+            <a:off x="468000" y="3924000"/>
+            <a:ext cx="720000" cy="630000"/>
+          </a:xfrm>
+          <a:prstGeom prst="roundRect">
+            <a:avLst/>
+          </a:prstGeom>
+          <a:solidFill>
+            <a:srgbClr val="500000"/>
+          </a:solidFill>
+          <a:ln w="7200">
+            <a:solidFill>
+              <a:srgbClr val="500000"/>
+            </a:solidFill>
+            <a:round/>
+          </a:ln>
+        </p:spPr>
+      </p:sp>
+      <p:sp>
+        <p:nvSpPr>
+          <p:cNvPr id="413" name=""/>
+          <p:cNvSpPr txBox="1"/>
+          <p:nvPr/>
+        </p:nvSpPr>
+        <p:spPr>
+          <a:xfrm>
+            <a:off x="486000" y="4060800"/>
+            <a:ext cx="684000" cy="384120"/>
+          </a:xfrm>
+          <a:prstGeom prst="rect">
+            <a:avLst/>
+          </a:prstGeom>
+          <a:noFill/>
+          <a:ln w="0">
+            <a:noFill/>
+          </a:ln>
+        </p:spPr>
+        <p:txBody>
+          <a:bodyPr lIns="43200" rIns="43200" tIns="43200" bIns="43200" anchor="t">
+            <a:noAutofit/>
+          </a:bodyPr>
+          <a:p>
+            <a:pPr algn="r">
+              <a:buNone/>
+            </a:pPr>
+            <a:r>
+              <a:rPr b="1" lang="en-US" sz="2100" spc="-1" strike="noStrike">
+                <a:solidFill>
+                  <a:srgbClr val="ffffff"/>
+                </a:solidFill>
+                <a:latin typeface="Arial"/>
+              </a:rPr>
+              <a:t>04</a:t>
+            </a:r>
+            <a:endParaRPr b="1" lang="en-US" sz="2100" spc="-1" strike="noStrike">
+              <a:solidFill>
+                <a:srgbClr val="ffffff"/>
+              </a:solidFill>
+              <a:latin typeface="Arial"/>
+            </a:endParaRPr>
+          </a:p>
+        </p:txBody>
+      </p:sp>
+      <p:sp>
+        <p:nvSpPr>
+          <p:cNvPr id="414" name=""/>
+          <p:cNvSpPr txBox="1"/>
+          <p:nvPr/>
+        </p:nvSpPr>
+        <p:spPr>
+          <a:xfrm>
+            <a:off x="1368000" y="3967200"/>
+            <a:ext cx="2592000" cy="501480"/>
+          </a:xfrm>
+          <a:prstGeom prst="rect">
+            <a:avLst/>
+          </a:prstGeom>
+          <a:noFill/>
+          <a:ln w="0">
+            <a:noFill/>
+          </a:ln>
+        </p:spPr>
+        <p:txBody>
+          <a:bodyPr lIns="43200" rIns="43200" tIns="43200" bIns="43200" anchor="t">
+            <a:noAutofit/>
+          </a:bodyPr>
+          <a:p>
+            <a:r>
+              <a:rPr b="1" lang="en-US" sz="1450" spc="-1" strike="noStrike">
+                <a:solidFill>
+                  <a:srgbClr val="500000"/>
+                </a:solidFill>
+                <a:latin typeface="Arial"/>
+              </a:rPr>
+              <a:t>Loaded and directional trials</a:t>
+            </a:r>
+            <a:endParaRPr b="1" lang="en-US" sz="1450" spc="-1" strike="noStrike">
+              <a:solidFill>
+                <a:srgbClr val="500000"/>
+              </a:solidFill>
+              <a:latin typeface="Arial"/>
+            </a:endParaRPr>
+          </a:p>
+        </p:txBody>
+      </p:sp>
+      <p:sp>
+        <p:nvSpPr>
+          <p:cNvPr id="415" name=""/>
+          <p:cNvSpPr txBox="1"/>
+          <p:nvPr/>
+        </p:nvSpPr>
+        <p:spPr>
+          <a:xfrm>
+            <a:off x="4104000" y="3967200"/>
+            <a:ext cx="7164000" cy="464400"/>
+          </a:xfrm>
+          <a:prstGeom prst="rect">
+            <a:avLst/>
+          </a:prstGeom>
+          <a:noFill/>
+          <a:ln w="0">
+            <a:noFill/>
+          </a:ln>
+        </p:spPr>
+        <p:txBody>
+          <a:bodyPr lIns="43200" rIns="43200" tIns="43200" bIns="43200" anchor="t">
+            <a:noAutofit/>
+          </a:bodyPr>
+          <a:p>
+            <a:r>
+              <a:rPr b="0" lang="en-US" sz="1200" spc="-1" strike="noStrike">
+                <a:solidFill>
+                  <a:srgbClr val="17212b"/>
+                </a:solidFill>
+                <a:latin typeface="Arial"/>
+              </a:rPr>
+              <a:t>Repeat across θ, negative torque, payloads, disturbances, and repeated cycles.</a:t>
+            </a:r>
+            <a:endParaRPr b="0" lang="en-US" sz="1200" spc="-1" strike="noStrike">
+              <a:solidFill>
+                <a:srgbClr val="17212b"/>
+              </a:solidFill>
+              <a:latin typeface="Arial"/>
+            </a:endParaRPr>
+          </a:p>
+        </p:txBody>
+      </p:sp>
+      <p:sp>
+        <p:nvSpPr>
+          <p:cNvPr id="416" name=""/>
+          <p:cNvSpPr/>
+          <p:nvPr/>
+        </p:nvSpPr>
+        <p:spPr>
+          <a:xfrm>
+            <a:off x="468000" y="4914000"/>
+            <a:ext cx="720000" cy="630000"/>
+          </a:xfrm>
+          <a:prstGeom prst="roundRect">
+            <a:avLst/>
+          </a:prstGeom>
+          <a:solidFill>
+            <a:srgbClr val="500000"/>
+          </a:solidFill>
+          <a:ln w="7200">
+            <a:solidFill>
+              <a:srgbClr val="500000"/>
+            </a:solidFill>
+            <a:round/>
+          </a:ln>
+        </p:spPr>
+      </p:sp>
+      <p:sp>
+        <p:nvSpPr>
+          <p:cNvPr id="417" name=""/>
+          <p:cNvSpPr txBox="1"/>
+          <p:nvPr/>
+        </p:nvSpPr>
+        <p:spPr>
+          <a:xfrm>
+            <a:off x="486000" y="5050800"/>
+            <a:ext cx="684000" cy="384120"/>
+          </a:xfrm>
+          <a:prstGeom prst="rect">
+            <a:avLst/>
+          </a:prstGeom>
+          <a:noFill/>
+          <a:ln w="0">
+            <a:noFill/>
+          </a:ln>
+        </p:spPr>
+        <p:txBody>
+          <a:bodyPr lIns="43200" rIns="43200" tIns="43200" bIns="43200" anchor="t">
+            <a:noAutofit/>
+          </a:bodyPr>
+          <a:p>
+            <a:pPr algn="r">
+              <a:buNone/>
+            </a:pPr>
+            <a:r>
+              <a:rPr b="1" lang="en-US" sz="2100" spc="-1" strike="noStrike">
+                <a:solidFill>
+                  <a:srgbClr val="ffffff"/>
+                </a:solidFill>
+                <a:latin typeface="Arial"/>
+              </a:rPr>
+              <a:t>05</a:t>
+            </a:r>
+            <a:endParaRPr b="1" lang="en-US" sz="2100" spc="-1" strike="noStrike">
+              <a:solidFill>
+                <a:srgbClr val="ffffff"/>
+              </a:solidFill>
+              <a:latin typeface="Arial"/>
+            </a:endParaRPr>
+          </a:p>
+        </p:txBody>
+      </p:sp>
+      <p:sp>
+        <p:nvSpPr>
+          <p:cNvPr id="418" name=""/>
+          <p:cNvSpPr txBox="1"/>
+          <p:nvPr/>
+        </p:nvSpPr>
+        <p:spPr>
+          <a:xfrm>
+            <a:off x="1368000" y="4957200"/>
+            <a:ext cx="2592000" cy="446400"/>
+          </a:xfrm>
+          <a:prstGeom prst="rect">
+            <a:avLst/>
+          </a:prstGeom>
+          <a:noFill/>
+          <a:ln w="0">
+            <a:noFill/>
+          </a:ln>
+        </p:spPr>
+        <p:txBody>
+          <a:bodyPr lIns="43200" rIns="43200" tIns="43200" bIns="43200" anchor="t">
+            <a:noAutofit/>
+          </a:bodyPr>
+          <a:p>
+            <a:r>
+              <a:rPr b="1" lang="en-US" sz="1450" spc="-1" strike="noStrike">
+                <a:solidFill>
+                  <a:srgbClr val="500000"/>
+                </a:solidFill>
+                <a:latin typeface="Arial"/>
+              </a:rPr>
+              <a:t>Uncertainty and statistics</a:t>
+            </a:r>
+            <a:endParaRPr b="1" lang="en-US" sz="1450" spc="-1" strike="noStrike">
+              <a:solidFill>
+                <a:srgbClr val="500000"/>
+              </a:solidFill>
+              <a:latin typeface="Arial"/>
+            </a:endParaRPr>
+          </a:p>
+        </p:txBody>
+      </p:sp>
+      <p:sp>
+        <p:nvSpPr>
+          <p:cNvPr id="419" name=""/>
+          <p:cNvSpPr txBox="1"/>
+          <p:nvPr/>
+        </p:nvSpPr>
+        <p:spPr>
+          <a:xfrm>
+            <a:off x="4104000" y="4957200"/>
+            <a:ext cx="7164000" cy="464400"/>
+          </a:xfrm>
+          <a:prstGeom prst="rect">
+            <a:avLst/>
+          </a:prstGeom>
+          <a:noFill/>
+          <a:ln w="0">
+            <a:noFill/>
+          </a:ln>
+        </p:spPr>
+        <p:txBody>
+          <a:bodyPr lIns="43200" rIns="43200" tIns="43200" bIns="43200" anchor="t">
+            <a:noAutofit/>
+          </a:bodyPr>
+          <a:p>
+            <a:r>
+              <a:rPr b="0" lang="en-US" sz="1200" spc="-1" strike="noStrike">
+                <a:solidFill>
+                  <a:srgbClr val="17212b"/>
+                </a:solidFill>
+                <a:latin typeface="Arial"/>
+              </a:rPr>
+              <a:t>Report repeatability, hysteresis, drift, confidence intervals, and failure limits.</a:t>
+            </a:r>
+            <a:endParaRPr b="0" lang="en-US" sz="1200" spc="-1" strike="noStrike">
+              <a:solidFill>
+                <a:srgbClr val="17212b"/>
+              </a:solidFill>
+              <a:latin typeface="Arial"/>
+            </a:endParaRPr>
+          </a:p>
+        </p:txBody>
+      </p:sp>
+    </p:spTree>
+  </p:cSld>
+  <mc:AlternateContent>
+    <mc:Choice Requires="p14">
+      <p:transition spd="slow" p14:dur="2000"/>
+    </mc:Choice>
+    <mc:Fallback>
+      <p:transition spd="slow"/>
+    </mc:Fallback>
+  </mc:AlternateContent>
+</p:sld>
+</file>
+
+<file path=ppt/slides/slide16.xml><?xml version="1.0" encoding="utf-8"?>
+<p:sld xmlns:a="http://schemas.openxmlformats.org/drawingml/2006/main" xmlns:p="http://schemas.openxmlformats.org/presentationml/2006/main" xmlns:r="http://schemas.openxmlformats.org/officeDocument/2006/relationships" xmlns:p14="http://schemas.microsoft.com/office/powerpoint/2010/main" xmlns:p15="http://schemas.microsoft.com/office/powerpoint/2012/main" xmlns:mc="http://schemas.openxmlformats.org/markup-compatibility/2006">
+  <p:cSld>
+    <p:spTree>
+      <p:nvGrpSpPr>
+        <p:cNvPr id="1" name=""/>
+        <p:cNvGrpSpPr/>
+        <p:nvPr/>
+      </p:nvGrpSpPr>
+      <p:grpSpPr>
+        <a:xfrm>
+          <a:off x="0" y="0"/>
+          <a:ext cx="0" cy="0"/>
+          <a:chOff x="0" y="0"/>
+          <a:chExt cx="0" cy="0"/>
+        </a:xfrm>
+      </p:grpSpPr>
+      <p:sp>
+        <p:nvSpPr>
+          <p:cNvPr id="420" name=""/>
+          <p:cNvSpPr/>
+          <p:nvPr/>
+        </p:nvSpPr>
+        <p:spPr>
+          <a:xfrm>
+            <a:off x="0" y="0"/>
+            <a:ext cx="12192120" cy="6858000"/>
+          </a:xfrm>
+          <a:prstGeom prst="rect">
+            <a:avLst/>
+          </a:prstGeom>
+          <a:solidFill>
+            <a:srgbClr val="f4f2ef"/>
+          </a:solidFill>
+          <a:ln w="7200">
+            <a:solidFill>
+              <a:srgbClr val="f4f2ef"/>
+            </a:solidFill>
+            <a:round/>
+          </a:ln>
+        </p:spPr>
+      </p:sp>
+      <p:sp>
+        <p:nvSpPr>
+          <p:cNvPr id="421" name=""/>
+          <p:cNvSpPr/>
+          <p:nvPr/>
+        </p:nvSpPr>
+        <p:spPr>
+          <a:xfrm>
+            <a:off x="0" y="0"/>
+            <a:ext cx="126000" cy="6858000"/>
+          </a:xfrm>
+          <a:prstGeom prst="rect">
+            <a:avLst/>
+          </a:prstGeom>
+          <a:solidFill>
+            <a:srgbClr val="500000"/>
+          </a:solidFill>
+          <a:ln w="7200">
+            <a:solidFill>
+              <a:srgbClr val="500000"/>
+            </a:solidFill>
+            <a:round/>
+          </a:ln>
+        </p:spPr>
+      </p:sp>
+      <p:sp>
+        <p:nvSpPr>
+          <p:cNvPr id="422" name=""/>
+          <p:cNvSpPr txBox="1"/>
+          <p:nvPr/>
+        </p:nvSpPr>
+        <p:spPr>
+          <a:xfrm>
+            <a:off x="414000" y="234000"/>
+            <a:ext cx="11052000" cy="426600"/>
+          </a:xfrm>
+          <a:prstGeom prst="rect">
+            <a:avLst/>
+          </a:prstGeom>
+          <a:noFill/>
+          <a:ln w="0">
+            <a:noFill/>
+          </a:ln>
+        </p:spPr>
+        <p:txBody>
+          <a:bodyPr lIns="43200" rIns="43200" tIns="43200" bIns="43200" anchor="t">
+            <a:noAutofit/>
+          </a:bodyPr>
+          <a:p>
+            <a:r>
+              <a:rPr b="1" lang="en-US" sz="2400" spc="-1" strike="noStrike">
+                <a:solidFill>
+                  <a:srgbClr val="500000"/>
+                </a:solidFill>
+                <a:latin typeface="Arial"/>
+              </a:rPr>
+              <a:t>Current Outcome</a:t>
+            </a:r>
+            <a:endParaRPr b="1" lang="en-US" sz="2400" spc="-1" strike="noStrike">
+              <a:solidFill>
+                <a:srgbClr val="500000"/>
+              </a:solidFill>
+              <a:latin typeface="Arial"/>
+            </a:endParaRPr>
+          </a:p>
+        </p:txBody>
+      </p:sp>
+      <p:sp>
+        <p:nvSpPr>
+          <p:cNvPr id="423" name=""/>
+          <p:cNvSpPr/>
+          <p:nvPr/>
+        </p:nvSpPr>
+        <p:spPr>
+          <a:xfrm>
+            <a:off x="414000" y="702000"/>
+            <a:ext cx="11178000" cy="0"/>
+          </a:xfrm>
+          <a:prstGeom prst="line">
+            <a:avLst/>
+          </a:prstGeom>
+          <a:ln w="14400">
+            <a:solidFill>
+              <a:srgbClr val="d6a84b"/>
             </a:solidFill>
             <a:round/>
           </a:ln>
@@ -7543,13 +10410,190 @@
       </p:sp>
       <p:sp>
         <p:nvSpPr>
-          <p:cNvPr id="352" name=""/>
-          <p:cNvSpPr txBox="1"/>
-          <p:nvPr/>
-        </p:nvSpPr>
-        <p:spPr>
-          <a:xfrm>
-            <a:off x="1440000" y="4014000"/>
+          <p:cNvPr id="424" name=""/>
+          <p:cNvSpPr txBox="1"/>
+          <p:nvPr/>
+        </p:nvSpPr>
+        <p:spPr>
+          <a:xfrm>
+            <a:off x="9000000" y="90000"/>
+            <a:ext cx="2520000" cy="201240"/>
+          </a:xfrm>
+          <a:prstGeom prst="rect">
+            <a:avLst/>
+          </a:prstGeom>
+          <a:noFill/>
+          <a:ln w="0">
+            <a:noFill/>
+          </a:ln>
+        </p:spPr>
+        <p:txBody>
+          <a:bodyPr lIns="43200" rIns="43200" tIns="43200" bIns="43200" anchor="t">
+            <a:noAutofit/>
+          </a:bodyPr>
+          <a:p>
+            <a:pPr algn="just">
+              <a:buNone/>
+            </a:pPr>
+            <a:r>
+              <a:rPr b="1" lang="en-US" sz="800" spc="-1" strike="noStrike">
+                <a:solidFill>
+                  <a:srgbClr val="44515e"/>
+                </a:solidFill>
+                <a:latin typeface="Arial"/>
+              </a:rPr>
+              <a:t>CONCLUSION</a:t>
+            </a:r>
+            <a:endParaRPr b="1" lang="en-US" sz="800" spc="-1" strike="noStrike">
+              <a:solidFill>
+                <a:srgbClr val="44515e"/>
+              </a:solidFill>
+              <a:latin typeface="Arial"/>
+            </a:endParaRPr>
+          </a:p>
+        </p:txBody>
+      </p:sp>
+      <p:sp>
+        <p:nvSpPr>
+          <p:cNvPr id="425" name=""/>
+          <p:cNvSpPr txBox="1"/>
+          <p:nvPr/>
+        </p:nvSpPr>
+        <p:spPr>
+          <a:xfrm>
+            <a:off x="414000" y="6642000"/>
+            <a:ext cx="7560000" cy="193320"/>
+          </a:xfrm>
+          <a:prstGeom prst="rect">
+            <a:avLst/>
+          </a:prstGeom>
+          <a:noFill/>
+          <a:ln w="0">
+            <a:noFill/>
+          </a:ln>
+        </p:spPr>
+        <p:txBody>
+          <a:bodyPr lIns="43200" rIns="43200" tIns="43200" bIns="43200" anchor="t">
+            <a:noAutofit/>
+          </a:bodyPr>
+          <a:p>
+            <a:r>
+              <a:rPr b="0" lang="en-US" sz="750" spc="-1" strike="noStrike">
+                <a:solidFill>
+                  <a:srgbClr val="44515e"/>
+                </a:solidFill>
+                <a:latin typeface="Arial"/>
+              </a:rPr>
+              <a:t>Soft continuum limb research progress  •  16</a:t>
+            </a:r>
+            <a:endParaRPr b="0" lang="en-US" sz="750" spc="-1" strike="noStrike">
+              <a:solidFill>
+                <a:srgbClr val="44515e"/>
+              </a:solidFill>
+              <a:latin typeface="Arial"/>
+            </a:endParaRPr>
+          </a:p>
+        </p:txBody>
+      </p:sp>
+      <p:sp>
+        <p:nvSpPr>
+          <p:cNvPr id="426" name=""/>
+          <p:cNvSpPr txBox="1"/>
+          <p:nvPr/>
+        </p:nvSpPr>
+        <p:spPr>
+          <a:xfrm>
+            <a:off x="9000000" y="6642000"/>
+            <a:ext cx="2556000" cy="193320"/>
+          </a:xfrm>
+          <a:prstGeom prst="rect">
+            <a:avLst/>
+          </a:prstGeom>
+          <a:noFill/>
+          <a:ln w="0">
+            <a:noFill/>
+          </a:ln>
+        </p:spPr>
+        <p:txBody>
+          <a:bodyPr lIns="43200" rIns="43200" tIns="43200" bIns="43200" anchor="t">
+            <a:noAutofit/>
+          </a:bodyPr>
+          <a:p>
+            <a:pPr algn="just">
+              <a:buNone/>
+            </a:pPr>
+            <a:r>
+              <a:rPr b="0" lang="en-US" sz="750" spc="-1" strike="noStrike">
+                <a:solidFill>
+                  <a:srgbClr val="44515e"/>
+                </a:solidFill>
+                <a:latin typeface="Arial"/>
+              </a:rPr>
+              <a:t>ETID / MSET research</a:t>
+            </a:r>
+            <a:endParaRPr b="0" lang="en-US" sz="750" spc="-1" strike="noStrike">
+              <a:solidFill>
+                <a:srgbClr val="44515e"/>
+              </a:solidFill>
+              <a:latin typeface="Arial"/>
+            </a:endParaRPr>
+          </a:p>
+        </p:txBody>
+      </p:sp>
+      <p:sp>
+        <p:nvSpPr>
+          <p:cNvPr id="427" name=""/>
+          <p:cNvSpPr txBox="1"/>
+          <p:nvPr/>
+        </p:nvSpPr>
+        <p:spPr>
+          <a:xfrm>
+            <a:off x="720000" y="1116000"/>
+            <a:ext cx="10620000" cy="440280"/>
+          </a:xfrm>
+          <a:prstGeom prst="rect">
+            <a:avLst/>
+          </a:prstGeom>
+          <a:noFill/>
+          <a:ln w="0">
+            <a:noFill/>
+          </a:ln>
+        </p:spPr>
+        <p:txBody>
+          <a:bodyPr lIns="43200" rIns="43200" tIns="43200" bIns="43200" anchor="t">
+            <a:noAutofit/>
+          </a:bodyPr>
+          <a:p>
+            <a:pPr algn="r">
+              <a:buNone/>
+            </a:pPr>
+            <a:r>
+              <a:rPr b="1" lang="en-US" sz="2500" spc="-1" strike="noStrike">
+                <a:solidFill>
+                  <a:srgbClr val="500000"/>
+                </a:solidFill>
+                <a:latin typeface="Arial"/>
+              </a:rPr>
+              <a:t>A reproducible six-disc research platform now connects</a:t>
+            </a:r>
+            <a:endParaRPr b="1" lang="en-US" sz="2500" spc="-1" strike="noStrike">
+              <a:solidFill>
+                <a:srgbClr val="500000"/>
+              </a:solidFill>
+              <a:latin typeface="Arial"/>
+            </a:endParaRPr>
+          </a:p>
+        </p:txBody>
+      </p:sp>
+      <p:sp>
+        <p:nvSpPr>
+          <p:cNvPr id="428" name=""/>
+          <p:cNvSpPr txBox="1"/>
+          <p:nvPr/>
+        </p:nvSpPr>
+        <p:spPr>
+          <a:xfrm>
+            <a:off x="1440000" y="1800000"/>
             <a:ext cx="2160000" cy="257400"/>
           </a:xfrm>
           <a:prstGeom prst="rect">
@@ -7572,7 +10616,7 @@
                 </a:solidFill>
                 <a:latin typeface="Arial"/>
               </a:rPr>
-              <a:t>VISUALIZATION</a:t>
+              <a:t>CONTROL</a:t>
             </a:r>
             <a:endParaRPr b="1" lang="en-US" sz="1200" spc="-1" strike="noStrike">
               <a:solidFill>
@@ -7585,13 +10629,13 @@
       </p:sp>
       <p:sp>
         <p:nvSpPr>
-          <p:cNvPr id="353" name=""/>
-          <p:cNvSpPr txBox="1"/>
-          <p:nvPr/>
-        </p:nvSpPr>
-        <p:spPr>
-          <a:xfrm>
-            <a:off x="3672000" y="3985200"/>
+          <p:cNvPr id="429" name=""/>
+          <p:cNvSpPr txBox="1"/>
+          <p:nvPr/>
+        </p:nvSpPr>
+        <p:spPr>
+          <a:xfrm>
+            <a:off x="3672000" y="1771200"/>
             <a:ext cx="6840000" cy="329040"/>
           </a:xfrm>
           <a:prstGeom prst="rect">
@@ -7614,7 +10658,7 @@
                 </a:solidFill>
                 <a:latin typeface="Arial"/>
               </a:rPr>
-              <a:t>Isaac Sim + sensor-driven RViz reconstruction</a:t>
+              <a:t>Position + calibrated torque admittance</a:t>
             </a:r>
             <a:endParaRPr b="0" lang="en-US" sz="1700" spc="-1" strike="noStrike">
               <a:solidFill>
@@ -7627,13 +10671,13 @@
       </p:sp>
       <p:sp>
         <p:nvSpPr>
-          <p:cNvPr id="354" name=""/>
+          <p:cNvPr id="430" name=""/>
           <p:cNvSpPr/>
           <p:nvPr/>
         </p:nvSpPr>
         <p:spPr>
           <a:xfrm>
-            <a:off x="1440000" y="4392000"/>
+            <a:off x="1440000" y="2178000"/>
             <a:ext cx="9072000" cy="0"/>
           </a:xfrm>
           <a:prstGeom prst="line">
@@ -7655,7 +10699,343 @@
       </p:sp>
       <p:sp>
         <p:nvSpPr>
-          <p:cNvPr id="355" name=""/>
+          <p:cNvPr id="431" name=""/>
+          <p:cNvSpPr txBox="1"/>
+          <p:nvPr/>
+        </p:nvSpPr>
+        <p:spPr>
+          <a:xfrm>
+            <a:off x="1440000" y="2538000"/>
+            <a:ext cx="2160000" cy="257400"/>
+          </a:xfrm>
+          <a:prstGeom prst="rect">
+            <a:avLst/>
+          </a:prstGeom>
+          <a:noFill/>
+          <a:ln w="0">
+            <a:noFill/>
+          </a:ln>
+        </p:spPr>
+        <p:txBody>
+          <a:bodyPr lIns="43200" rIns="43200" tIns="43200" bIns="43200" anchor="t">
+            <a:noAutofit/>
+          </a:bodyPr>
+          <a:p>
+            <a:r>
+              <a:rPr b="1" lang="en-US" sz="1200" spc="-1" strike="noStrike">
+                <a:solidFill>
+                  <a:srgbClr val="167d8d"/>
+                </a:solidFill>
+                <a:latin typeface="Arial"/>
+              </a:rPr>
+              <a:t>SHAPE</a:t>
+            </a:r>
+            <a:endParaRPr b="1" lang="en-US" sz="1200" spc="-1" strike="noStrike">
+              <a:solidFill>
+                <a:srgbClr val="167d8d"/>
+              </a:solidFill>
+              <a:latin typeface="Arial"/>
+            </a:endParaRPr>
+          </a:p>
+        </p:txBody>
+      </p:sp>
+      <p:sp>
+        <p:nvSpPr>
+          <p:cNvPr id="432" name=""/>
+          <p:cNvSpPr txBox="1"/>
+          <p:nvPr/>
+        </p:nvSpPr>
+        <p:spPr>
+          <a:xfrm>
+            <a:off x="3672000" y="2509200"/>
+            <a:ext cx="6840000" cy="329040"/>
+          </a:xfrm>
+          <a:prstGeom prst="rect">
+            <a:avLst/>
+          </a:prstGeom>
+          <a:noFill/>
+          <a:ln w="0">
+            <a:noFill/>
+          </a:ln>
+        </p:spPr>
+        <p:txBody>
+          <a:bodyPr lIns="43200" rIns="43200" tIns="43200" bIns="43200" anchor="t">
+            <a:noAutofit/>
+          </a:bodyPr>
+          <a:p>
+            <a:r>
+              <a:rPr b="0" lang="en-US" sz="1700" spc="-1" strike="noStrike">
+                <a:solidFill>
+                  <a:srgbClr val="17212b"/>
+                </a:solidFill>
+                <a:latin typeface="Arial"/>
+              </a:rPr>
+              <a:t>Synchronized five-interval constant-curvature target</a:t>
+            </a:r>
+            <a:endParaRPr b="0" lang="en-US" sz="1700" spc="-1" strike="noStrike">
+              <a:solidFill>
+                <a:srgbClr val="17212b"/>
+              </a:solidFill>
+              <a:latin typeface="Arial"/>
+            </a:endParaRPr>
+          </a:p>
+        </p:txBody>
+      </p:sp>
+      <p:sp>
+        <p:nvSpPr>
+          <p:cNvPr id="433" name=""/>
+          <p:cNvSpPr/>
+          <p:nvPr/>
+        </p:nvSpPr>
+        <p:spPr>
+          <a:xfrm>
+            <a:off x="1440000" y="2916000"/>
+            <a:ext cx="9072000" cy="0"/>
+          </a:xfrm>
+          <a:prstGeom prst="line">
+            <a:avLst/>
+          </a:prstGeom>
+          <a:ln w="7200">
+            <a:solidFill>
+              <a:srgbClr val="d7d2cc"/>
+            </a:solidFill>
+            <a:round/>
+          </a:ln>
+        </p:spPr>
+        <p:style>
+          <a:lnRef idx="0"/>
+          <a:fillRef idx="0"/>
+          <a:effectRef idx="0"/>
+          <a:fontRef idx="minor"/>
+        </p:style>
+      </p:sp>
+      <p:sp>
+        <p:nvSpPr>
+          <p:cNvPr id="434" name=""/>
+          <p:cNvSpPr txBox="1"/>
+          <p:nvPr/>
+        </p:nvSpPr>
+        <p:spPr>
+          <a:xfrm>
+            <a:off x="1440000" y="3276000"/>
+            <a:ext cx="2160000" cy="257400"/>
+          </a:xfrm>
+          <a:prstGeom prst="rect">
+            <a:avLst/>
+          </a:prstGeom>
+          <a:noFill/>
+          <a:ln w="0">
+            <a:noFill/>
+          </a:ln>
+        </p:spPr>
+        <p:txBody>
+          <a:bodyPr lIns="43200" rIns="43200" tIns="43200" bIns="43200" anchor="t">
+            <a:noAutofit/>
+          </a:bodyPr>
+          <a:p>
+            <a:r>
+              <a:rPr b="1" lang="en-US" sz="1200" spc="-1" strike="noStrike">
+                <a:solidFill>
+                  <a:srgbClr val="167d8d"/>
+                </a:solidFill>
+                <a:latin typeface="Arial"/>
+              </a:rPr>
+              <a:t>SENSING</a:t>
+            </a:r>
+            <a:endParaRPr b="1" lang="en-US" sz="1200" spc="-1" strike="noStrike">
+              <a:solidFill>
+                <a:srgbClr val="167d8d"/>
+              </a:solidFill>
+              <a:latin typeface="Arial"/>
+            </a:endParaRPr>
+          </a:p>
+        </p:txBody>
+      </p:sp>
+      <p:sp>
+        <p:nvSpPr>
+          <p:cNvPr id="435" name=""/>
+          <p:cNvSpPr txBox="1"/>
+          <p:nvPr/>
+        </p:nvSpPr>
+        <p:spPr>
+          <a:xfrm>
+            <a:off x="3672000" y="3247200"/>
+            <a:ext cx="6840000" cy="329040"/>
+          </a:xfrm>
+          <a:prstGeom prst="rect">
+            <a:avLst/>
+          </a:prstGeom>
+          <a:noFill/>
+          <a:ln w="0">
+            <a:noFill/>
+          </a:ln>
+        </p:spPr>
+        <p:txBody>
+          <a:bodyPr lIns="43200" rIns="43200" tIns="43200" bIns="43200" anchor="t">
+            <a:noAutofit/>
+          </a:bodyPr>
+          <a:p>
+            <a:r>
+              <a:rPr b="0" lang="en-US" sz="1700" spc="-1" strike="noStrike">
+                <a:solidFill>
+                  <a:srgbClr val="17212b"/>
+                </a:solidFill>
+                <a:latin typeface="Arial"/>
+              </a:rPr>
+              <a:t>Six pose-derived strain channels + bridge voltages</a:t>
+            </a:r>
+            <a:endParaRPr b="0" lang="en-US" sz="1700" spc="-1" strike="noStrike">
+              <a:solidFill>
+                <a:srgbClr val="17212b"/>
+              </a:solidFill>
+              <a:latin typeface="Arial"/>
+            </a:endParaRPr>
+          </a:p>
+        </p:txBody>
+      </p:sp>
+      <p:sp>
+        <p:nvSpPr>
+          <p:cNvPr id="436" name=""/>
+          <p:cNvSpPr/>
+          <p:nvPr/>
+        </p:nvSpPr>
+        <p:spPr>
+          <a:xfrm>
+            <a:off x="1440000" y="3654000"/>
+            <a:ext cx="9072000" cy="0"/>
+          </a:xfrm>
+          <a:prstGeom prst="line">
+            <a:avLst/>
+          </a:prstGeom>
+          <a:ln w="7200">
+            <a:solidFill>
+              <a:srgbClr val="d7d2cc"/>
+            </a:solidFill>
+            <a:round/>
+          </a:ln>
+        </p:spPr>
+        <p:style>
+          <a:lnRef idx="0"/>
+          <a:fillRef idx="0"/>
+          <a:effectRef idx="0"/>
+          <a:fontRef idx="minor"/>
+        </p:style>
+      </p:sp>
+      <p:sp>
+        <p:nvSpPr>
+          <p:cNvPr id="437" name=""/>
+          <p:cNvSpPr txBox="1"/>
+          <p:nvPr/>
+        </p:nvSpPr>
+        <p:spPr>
+          <a:xfrm>
+            <a:off x="1440000" y="4014000"/>
+            <a:ext cx="2160000" cy="257400"/>
+          </a:xfrm>
+          <a:prstGeom prst="rect">
+            <a:avLst/>
+          </a:prstGeom>
+          <a:noFill/>
+          <a:ln w="0">
+            <a:noFill/>
+          </a:ln>
+        </p:spPr>
+        <p:txBody>
+          <a:bodyPr lIns="43200" rIns="43200" tIns="43200" bIns="43200" anchor="t">
+            <a:noAutofit/>
+          </a:bodyPr>
+          <a:p>
+            <a:r>
+              <a:rPr b="1" lang="en-US" sz="1200" spc="-1" strike="noStrike">
+                <a:solidFill>
+                  <a:srgbClr val="167d8d"/>
+                </a:solidFill>
+                <a:latin typeface="Arial"/>
+              </a:rPr>
+              <a:t>VISUALIZATION</a:t>
+            </a:r>
+            <a:endParaRPr b="1" lang="en-US" sz="1200" spc="-1" strike="noStrike">
+              <a:solidFill>
+                <a:srgbClr val="167d8d"/>
+              </a:solidFill>
+              <a:latin typeface="Arial"/>
+            </a:endParaRPr>
+          </a:p>
+        </p:txBody>
+      </p:sp>
+      <p:sp>
+        <p:nvSpPr>
+          <p:cNvPr id="438" name=""/>
+          <p:cNvSpPr txBox="1"/>
+          <p:nvPr/>
+        </p:nvSpPr>
+        <p:spPr>
+          <a:xfrm>
+            <a:off x="3672000" y="3985200"/>
+            <a:ext cx="6840000" cy="329040"/>
+          </a:xfrm>
+          <a:prstGeom prst="rect">
+            <a:avLst/>
+          </a:prstGeom>
+          <a:noFill/>
+          <a:ln w="0">
+            <a:noFill/>
+          </a:ln>
+        </p:spPr>
+        <p:txBody>
+          <a:bodyPr lIns="43200" rIns="43200" tIns="43200" bIns="43200" anchor="t">
+            <a:noAutofit/>
+          </a:bodyPr>
+          <a:p>
+            <a:r>
+              <a:rPr b="0" lang="en-US" sz="1700" spc="-1" strike="noStrike">
+                <a:solidFill>
+                  <a:srgbClr val="17212b"/>
+                </a:solidFill>
+                <a:latin typeface="Arial"/>
+              </a:rPr>
+              <a:t>Isaac Sim + sensor-driven RViz reconstruction</a:t>
+            </a:r>
+            <a:endParaRPr b="0" lang="en-US" sz="1700" spc="-1" strike="noStrike">
+              <a:solidFill>
+                <a:srgbClr val="17212b"/>
+              </a:solidFill>
+              <a:latin typeface="Arial"/>
+            </a:endParaRPr>
+          </a:p>
+        </p:txBody>
+      </p:sp>
+      <p:sp>
+        <p:nvSpPr>
+          <p:cNvPr id="439" name=""/>
+          <p:cNvSpPr/>
+          <p:nvPr/>
+        </p:nvSpPr>
+        <p:spPr>
+          <a:xfrm>
+            <a:off x="1440000" y="4392000"/>
+            <a:ext cx="9072000" cy="0"/>
+          </a:xfrm>
+          <a:prstGeom prst="line">
+            <a:avLst/>
+          </a:prstGeom>
+          <a:ln w="7200">
+            <a:solidFill>
+              <a:srgbClr val="d7d2cc"/>
+            </a:solidFill>
+            <a:round/>
+          </a:ln>
+        </p:spPr>
+        <p:style>
+          <a:lnRef idx="0"/>
+          <a:fillRef idx="0"/>
+          <a:effectRef idx="0"/>
+          <a:fontRef idx="minor"/>
+        </p:style>
+      </p:sp>
+      <p:sp>
+        <p:nvSpPr>
+          <p:cNvPr id="440" name=""/>
           <p:cNvSpPr txBox="1"/>
           <p:nvPr/>
         </p:nvSpPr>
@@ -7697,7 +11077,7 @@
       </p:sp>
       <p:sp>
         <p:nvSpPr>
-          <p:cNvPr id="356" name=""/>
+          <p:cNvPr id="441" name=""/>
           <p:cNvSpPr txBox="1"/>
           <p:nvPr/>
         </p:nvSpPr>
@@ -7739,7 +11119,7 @@
       </p:sp>
       <p:sp>
         <p:nvSpPr>
-          <p:cNvPr id="357" name=""/>
+          <p:cNvPr id="442" name=""/>
           <p:cNvSpPr txBox="1"/>
           <p:nvPr/>
         </p:nvSpPr>

--- a/research_documentation/soft_limb_progress_update_working.pptx
+++ b/research_documentation/soft_limb_progress_update_working.pptx
@@ -21,6 +21,7 @@
     <p:sldId id="269" r:id="rId16"/>
     <p:sldId id="270" r:id="rId17"/>
     <p:sldId id="271" r:id="rId18"/>
+    <p:sldId id="272" r:id="rId19"/>
   </p:sldIdLst>
   <p:sldSz cx="12192000" cy="6858000"/>
   <p:notesSz cx="7772400" cy="10058400"/>
@@ -78,7 +79,7 @@
         <p:txBody>
           <a:bodyPr/>
           <a:p>
-            <a:fld id="{CFB18620-351E-49BD-8DAC-35CAEBF33AA4}" type="slidenum">
+            <a:fld id="{F2659B5D-BB39-4DEE-98CC-81C237C5FA60}" type="slidenum">
               <a:t>&lt;#&gt;</a:t>
             </a:fld>
           </a:p>
@@ -266,7 +267,7 @@
         <p:txBody>
           <a:bodyPr/>
           <a:p>
-            <a:fld id="{32328E50-6A23-4A0E-B725-DCB6EA7236E5}" type="slidenum">
+            <a:fld id="{7229391F-5229-42F0-9C8A-4937DC910E38}" type="slidenum">
               <a:t>&lt;#&gt;</a:t>
             </a:fld>
           </a:p>
@@ -522,7 +523,7 @@
         <p:txBody>
           <a:bodyPr/>
           <a:p>
-            <a:fld id="{49294720-93ED-477B-BFFF-3F68A9F8A57A}" type="slidenum">
+            <a:fld id="{887BFBEF-AC93-4B0F-B25A-9AC25FBAB1CF}" type="slidenum">
               <a:t>&lt;#&gt;</a:t>
             </a:fld>
           </a:p>
@@ -846,7 +847,7 @@
         <p:txBody>
           <a:bodyPr/>
           <a:p>
-            <a:fld id="{72E27208-F871-4490-9A4B-685FA6DA54B3}" type="slidenum">
+            <a:fld id="{018114DE-F26C-4B04-A613-D8212FB11132}" type="slidenum">
               <a:t>&lt;#&gt;</a:t>
             </a:fld>
           </a:p>
@@ -1003,7 +1004,7 @@
         <p:txBody>
           <a:bodyPr/>
           <a:p>
-            <a:fld id="{C4E5F0DA-1EE1-4BB3-A7A9-C432DB5242B6}" type="slidenum">
+            <a:fld id="{0DCDC570-9FD2-4989-8BD9-39CE2AE44AA5}" type="slidenum">
               <a:t>&lt;#&gt;</a:t>
             </a:fld>
           </a:p>
@@ -1157,7 +1158,7 @@
         <p:txBody>
           <a:bodyPr/>
           <a:p>
-            <a:fld id="{AF8BC977-4C56-4001-A5F9-C6CD6BEBB7CB}" type="slidenum">
+            <a:fld id="{1B99CE92-82B2-4A06-8146-DB8D91BD0045}" type="slidenum">
               <a:t>&lt;#&gt;</a:t>
             </a:fld>
           </a:p>
@@ -1345,7 +1346,7 @@
         <p:txBody>
           <a:bodyPr/>
           <a:p>
-            <a:fld id="{3D4191B5-473D-48AC-94B2-73894C063264}" type="slidenum">
+            <a:fld id="{BBF21DAD-F310-4C67-A696-0C7F25ACB06E}" type="slidenum">
               <a:t>&lt;#&gt;</a:t>
             </a:fld>
           </a:p>
@@ -1465,7 +1466,7 @@
         <p:txBody>
           <a:bodyPr/>
           <a:p>
-            <a:fld id="{4B540548-A05B-4C3D-90DE-895AD08B1FA4}" type="slidenum">
+            <a:fld id="{2D4978C3-6703-4509-A9EC-896614C8F810}" type="slidenum">
               <a:t>&lt;#&gt;</a:t>
             </a:fld>
           </a:p>
@@ -1585,7 +1586,7 @@
         <p:txBody>
           <a:bodyPr/>
           <a:p>
-            <a:fld id="{CC9890F6-810E-4504-8C86-48F40FFED9EA}" type="slidenum">
+            <a:fld id="{94B98F32-DBD2-4453-AB84-FCFC5EC7E80B}" type="slidenum">
               <a:t>&lt;#&gt;</a:t>
             </a:fld>
           </a:p>
@@ -1807,7 +1808,7 @@
         <p:txBody>
           <a:bodyPr/>
           <a:p>
-            <a:fld id="{8ACBA6BA-523B-4636-928C-A988FB6B9661}" type="slidenum">
+            <a:fld id="{1ACF015C-F896-42BA-9623-ED7ECAD311E4}" type="slidenum">
               <a:t>&lt;#&gt;</a:t>
             </a:fld>
           </a:p>
@@ -2029,7 +2030,7 @@
         <p:txBody>
           <a:bodyPr/>
           <a:p>
-            <a:fld id="{80B70D53-3A41-47CF-8C1B-2ECCEC1F00C4}" type="slidenum">
+            <a:fld id="{525C0D7F-ED0F-4DDE-83D7-B5675D573F7D}" type="slidenum">
               <a:t>&lt;#&gt;</a:t>
             </a:fld>
           </a:p>
@@ -2251,7 +2252,7 @@
         <p:txBody>
           <a:bodyPr/>
           <a:p>
-            <a:fld id="{11AC929E-F02C-450B-83D0-4EFA98FBF751}" type="slidenum">
+            <a:fld id="{1E22308F-5F3B-4DD7-816A-23921D1FEBBF}" type="slidenum">
               <a:t>&lt;#&gt;</a:t>
             </a:fld>
           </a:p>
@@ -2663,7 +2664,7 @@
             <a:pPr algn="r">
               <a:buNone/>
             </a:pPr>
-            <a:fld id="{8CAFB1A2-88D0-49A3-B2E6-DF6029BF15EA}" type="slidenum">
+            <a:fld id="{4138E036-8961-4AF7-B1A0-FB0CC46500BE}" type="slidenum">
               <a:rPr b="0" lang="en-US" sz="1400" spc="-1" strike="noStrike">
                 <a:latin typeface="Times New Roman"/>
               </a:rPr>
@@ -9317,7 +9318,7 @@
                 </a:solidFill>
                 <a:latin typeface="Arial"/>
               </a:rPr>
-              <a:t>Next Research Steps</a:t>
+              <a:t>Automated Torque–Theta Voltage Dataset</a:t>
             </a:r>
             <a:endParaRPr b="1" lang="en-US" sz="2400" spc="-1" strike="noStrike">
               <a:solidFill>
@@ -9390,7 +9391,7 @@
                 </a:solidFill>
                 <a:latin typeface="Arial"/>
               </a:rPr>
-              <a:t>FORWARD PLAN</a:t>
+              <a:t>DATA ACQUISITION</a:t>
             </a:r>
             <a:endParaRPr b="1" lang="en-US" sz="800" spc="-1" strike="noStrike">
               <a:solidFill>
@@ -9496,10 +9497,710 @@
         </p:nvSpPr>
         <p:spPr>
           <a:xfrm>
-            <a:off x="468000" y="954000"/>
-            <a:ext cx="720000" cy="630000"/>
+            <a:off x="450000" y="1080000"/>
+            <a:ext cx="2520000" cy="1440000"/>
           </a:xfrm>
           <a:prstGeom prst="roundRect">
+            <a:avLst/>
+          </a:prstGeom>
+          <a:solidFill>
+            <a:srgbClr val="ffffff"/>
+          </a:solidFill>
+          <a:ln w="7200">
+            <a:solidFill>
+              <a:srgbClr val="500000"/>
+            </a:solidFill>
+            <a:round/>
+          </a:ln>
+        </p:spPr>
+      </p:sp>
+      <p:sp>
+        <p:nvSpPr>
+          <p:cNvPr id="401" name=""/>
+          <p:cNvSpPr txBox="1"/>
+          <p:nvPr/>
+        </p:nvSpPr>
+        <p:spPr>
+          <a:xfrm>
+            <a:off x="576000" y="1242000"/>
+            <a:ext cx="2268000" cy="277560"/>
+          </a:xfrm>
+          <a:prstGeom prst="rect">
+            <a:avLst/>
+          </a:prstGeom>
+          <a:noFill/>
+          <a:ln w="0">
+            <a:noFill/>
+          </a:ln>
+        </p:spPr>
+        <p:txBody>
+          <a:bodyPr lIns="43200" rIns="43200" tIns="43200" bIns="43200" anchor="t">
+            <a:noAutofit/>
+          </a:bodyPr>
+          <a:p>
+            <a:pPr algn="r">
+              <a:buNone/>
+            </a:pPr>
+            <a:r>
+              <a:rPr b="1" lang="en-US" sz="1350" spc="-1" strike="noStrike">
+                <a:solidFill>
+                  <a:srgbClr val="500000"/>
+                </a:solidFill>
+                <a:latin typeface="Arial"/>
+              </a:rPr>
+              <a:t>COMMAND GRID</a:t>
+            </a:r>
+            <a:endParaRPr b="1" lang="en-US" sz="1350" spc="-1" strike="noStrike">
+              <a:solidFill>
+                <a:srgbClr val="500000"/>
+              </a:solidFill>
+              <a:latin typeface="Arial"/>
+            </a:endParaRPr>
+          </a:p>
+        </p:txBody>
+      </p:sp>
+      <p:sp>
+        <p:nvSpPr>
+          <p:cNvPr id="402" name=""/>
+          <p:cNvSpPr txBox="1"/>
+          <p:nvPr/>
+        </p:nvSpPr>
+        <p:spPr>
+          <a:xfrm>
+            <a:off x="594000" y="1638000"/>
+            <a:ext cx="2232000" cy="590400"/>
+          </a:xfrm>
+          <a:prstGeom prst="rect">
+            <a:avLst/>
+          </a:prstGeom>
+          <a:noFill/>
+          <a:ln w="0">
+            <a:noFill/>
+          </a:ln>
+        </p:spPr>
+        <p:txBody>
+          <a:bodyPr lIns="43200" rIns="43200" tIns="43200" bIns="43200" anchor="t">
+            <a:noAutofit/>
+          </a:bodyPr>
+          <a:p>
+            <a:pPr algn="r">
+              <a:buNone/>
+            </a:pPr>
+            <a:r>
+              <a:rPr b="0" lang="en-US" sz="1220" spc="-1" strike="noStrike">
+                <a:solidFill>
+                  <a:srgbClr val="17212b"/>
+                </a:solidFill>
+                <a:latin typeface="Arial"/>
+              </a:rPr>
+              <a:t>4 torques × 5 θ directions</a:t>
+            </a:r>
+            <a:endParaRPr b="0" lang="en-US" sz="1220" spc="-1" strike="noStrike">
+              <a:solidFill>
+                <a:srgbClr val="17212b"/>
+              </a:solidFill>
+              <a:latin typeface="Arial"/>
+            </a:endParaRPr>
+          </a:p>
+          <a:p>
+            <a:pPr algn="r">
+              <a:buNone/>
+            </a:pPr>
+            <a:r>
+              <a:rPr b="0" lang="en-US" sz="1220" spc="-1" strike="noStrike">
+                <a:solidFill>
+                  <a:srgbClr val="17212b"/>
+                </a:solidFill>
+                <a:latin typeface="Arial"/>
+              </a:rPr>
+              <a:t>for each of 3 modules</a:t>
+            </a:r>
+            <a:endParaRPr b="0" lang="en-US" sz="1220" spc="-1" strike="noStrike">
+              <a:solidFill>
+                <a:srgbClr val="17212b"/>
+              </a:solidFill>
+              <a:latin typeface="Arial"/>
+            </a:endParaRPr>
+          </a:p>
+        </p:txBody>
+      </p:sp>
+      <p:sp>
+        <p:nvSpPr>
+          <p:cNvPr id="403" name=""/>
+          <p:cNvSpPr txBox="1"/>
+          <p:nvPr/>
+        </p:nvSpPr>
+        <p:spPr>
+          <a:xfrm>
+            <a:off x="3024000" y="1530000"/>
+            <a:ext cx="252000" cy="440280"/>
+          </a:xfrm>
+          <a:prstGeom prst="rect">
+            <a:avLst/>
+          </a:prstGeom>
+          <a:noFill/>
+          <a:ln w="0">
+            <a:noFill/>
+          </a:ln>
+        </p:spPr>
+        <p:txBody>
+          <a:bodyPr lIns="43200" rIns="43200" tIns="43200" bIns="43200" anchor="t">
+            <a:noAutofit/>
+          </a:bodyPr>
+          <a:p>
+            <a:pPr algn="r">
+              <a:buNone/>
+            </a:pPr>
+            <a:r>
+              <a:rPr b="1" lang="en-US" sz="2500" spc="-1" strike="noStrike">
+                <a:solidFill>
+                  <a:srgbClr val="44515e"/>
+                </a:solidFill>
+                <a:latin typeface="Arial"/>
+              </a:rPr>
+              <a:t>→</a:t>
+            </a:r>
+            <a:endParaRPr b="1" lang="en-US" sz="2500" spc="-1" strike="noStrike">
+              <a:solidFill>
+                <a:srgbClr val="44515e"/>
+              </a:solidFill>
+              <a:latin typeface="Arial"/>
+            </a:endParaRPr>
+          </a:p>
+        </p:txBody>
+      </p:sp>
+      <p:sp>
+        <p:nvSpPr>
+          <p:cNvPr id="404" name=""/>
+          <p:cNvSpPr/>
+          <p:nvPr/>
+        </p:nvSpPr>
+        <p:spPr>
+          <a:xfrm>
+            <a:off x="3348000" y="1080000"/>
+            <a:ext cx="2520000" cy="1440000"/>
+          </a:xfrm>
+          <a:prstGeom prst="roundRect">
+            <a:avLst/>
+          </a:prstGeom>
+          <a:solidFill>
+            <a:srgbClr val="ffffff"/>
+          </a:solidFill>
+          <a:ln w="7200">
+            <a:solidFill>
+              <a:srgbClr val="167d8d"/>
+            </a:solidFill>
+            <a:round/>
+          </a:ln>
+        </p:spPr>
+      </p:sp>
+      <p:sp>
+        <p:nvSpPr>
+          <p:cNvPr id="405" name=""/>
+          <p:cNvSpPr txBox="1"/>
+          <p:nvPr/>
+        </p:nvSpPr>
+        <p:spPr>
+          <a:xfrm>
+            <a:off x="3474000" y="1242000"/>
+            <a:ext cx="2268000" cy="277560"/>
+          </a:xfrm>
+          <a:prstGeom prst="rect">
+            <a:avLst/>
+          </a:prstGeom>
+          <a:noFill/>
+          <a:ln w="0">
+            <a:noFill/>
+          </a:ln>
+        </p:spPr>
+        <p:txBody>
+          <a:bodyPr lIns="43200" rIns="43200" tIns="43200" bIns="43200" anchor="t">
+            <a:noAutofit/>
+          </a:bodyPr>
+          <a:p>
+            <a:pPr algn="r">
+              <a:buNone/>
+            </a:pPr>
+            <a:r>
+              <a:rPr b="1" lang="en-US" sz="1350" spc="-1" strike="noStrike">
+                <a:solidFill>
+                  <a:srgbClr val="167d8d"/>
+                </a:solidFill>
+                <a:latin typeface="Arial"/>
+              </a:rPr>
+              <a:t>SETTLE + SAMPLE</a:t>
+            </a:r>
+            <a:endParaRPr b="1" lang="en-US" sz="1350" spc="-1" strike="noStrike">
+              <a:solidFill>
+                <a:srgbClr val="167d8d"/>
+              </a:solidFill>
+              <a:latin typeface="Arial"/>
+            </a:endParaRPr>
+          </a:p>
+        </p:txBody>
+      </p:sp>
+      <p:sp>
+        <p:nvSpPr>
+          <p:cNvPr id="406" name=""/>
+          <p:cNvSpPr txBox="1"/>
+          <p:nvPr/>
+        </p:nvSpPr>
+        <p:spPr>
+          <a:xfrm>
+            <a:off x="3492000" y="1638000"/>
+            <a:ext cx="2232000" cy="590400"/>
+          </a:xfrm>
+          <a:prstGeom prst="rect">
+            <a:avLst/>
+          </a:prstGeom>
+          <a:noFill/>
+          <a:ln w="0">
+            <a:noFill/>
+          </a:ln>
+        </p:spPr>
+        <p:txBody>
+          <a:bodyPr lIns="43200" rIns="43200" tIns="43200" bIns="43200" anchor="t">
+            <a:noAutofit/>
+          </a:bodyPr>
+          <a:p>
+            <a:pPr algn="r">
+              <a:buNone/>
+            </a:pPr>
+            <a:r>
+              <a:rPr b="0" lang="en-US" sz="1220" spc="-1" strike="noStrike">
+                <a:solidFill>
+                  <a:srgbClr val="17212b"/>
+                </a:solidFill>
+                <a:latin typeface="Arial"/>
+              </a:rPr>
+              <a:t>3 s settling; 20 Hz</a:t>
+            </a:r>
+            <a:endParaRPr b="0" lang="en-US" sz="1220" spc="-1" strike="noStrike">
+              <a:solidFill>
+                <a:srgbClr val="17212b"/>
+              </a:solidFill>
+              <a:latin typeface="Arial"/>
+            </a:endParaRPr>
+          </a:p>
+          <a:p>
+            <a:pPr algn="r">
+              <a:buNone/>
+            </a:pPr>
+            <a:r>
+              <a:rPr b="0" lang="en-US" sz="1220" spc="-1" strike="noStrike">
+                <a:solidFill>
+                  <a:srgbClr val="17212b"/>
+                </a:solidFill>
+                <a:latin typeface="Arial"/>
+              </a:rPr>
+              <a:t>18 voltages + pose</a:t>
+            </a:r>
+            <a:endParaRPr b="0" lang="en-US" sz="1220" spc="-1" strike="noStrike">
+              <a:solidFill>
+                <a:srgbClr val="17212b"/>
+              </a:solidFill>
+              <a:latin typeface="Arial"/>
+            </a:endParaRPr>
+          </a:p>
+        </p:txBody>
+      </p:sp>
+      <p:sp>
+        <p:nvSpPr>
+          <p:cNvPr id="407" name=""/>
+          <p:cNvSpPr txBox="1"/>
+          <p:nvPr/>
+        </p:nvSpPr>
+        <p:spPr>
+          <a:xfrm>
+            <a:off x="5922000" y="1530000"/>
+            <a:ext cx="252000" cy="440280"/>
+          </a:xfrm>
+          <a:prstGeom prst="rect">
+            <a:avLst/>
+          </a:prstGeom>
+          <a:noFill/>
+          <a:ln w="0">
+            <a:noFill/>
+          </a:ln>
+        </p:spPr>
+        <p:txBody>
+          <a:bodyPr lIns="43200" rIns="43200" tIns="43200" bIns="43200" anchor="t">
+            <a:noAutofit/>
+          </a:bodyPr>
+          <a:p>
+            <a:pPr algn="r">
+              <a:buNone/>
+            </a:pPr>
+            <a:r>
+              <a:rPr b="1" lang="en-US" sz="2500" spc="-1" strike="noStrike">
+                <a:solidFill>
+                  <a:srgbClr val="44515e"/>
+                </a:solidFill>
+                <a:latin typeface="Arial"/>
+              </a:rPr>
+              <a:t>→</a:t>
+            </a:r>
+            <a:endParaRPr b="1" lang="en-US" sz="2500" spc="-1" strike="noStrike">
+              <a:solidFill>
+                <a:srgbClr val="44515e"/>
+              </a:solidFill>
+              <a:latin typeface="Arial"/>
+            </a:endParaRPr>
+          </a:p>
+        </p:txBody>
+      </p:sp>
+      <p:sp>
+        <p:nvSpPr>
+          <p:cNvPr id="408" name=""/>
+          <p:cNvSpPr/>
+          <p:nvPr/>
+        </p:nvSpPr>
+        <p:spPr>
+          <a:xfrm>
+            <a:off x="6246000" y="1080000"/>
+            <a:ext cx="2520000" cy="1440000"/>
+          </a:xfrm>
+          <a:prstGeom prst="roundRect">
+            <a:avLst/>
+          </a:prstGeom>
+          <a:solidFill>
+            <a:srgbClr val="ffffff"/>
+          </a:solidFill>
+          <a:ln w="7200">
+            <a:solidFill>
+              <a:srgbClr val="d6a84b"/>
+            </a:solidFill>
+            <a:round/>
+          </a:ln>
+        </p:spPr>
+      </p:sp>
+      <p:sp>
+        <p:nvSpPr>
+          <p:cNvPr id="409" name=""/>
+          <p:cNvSpPr txBox="1"/>
+          <p:nvPr/>
+        </p:nvSpPr>
+        <p:spPr>
+          <a:xfrm>
+            <a:off x="6372000" y="1242000"/>
+            <a:ext cx="2268000" cy="277560"/>
+          </a:xfrm>
+          <a:prstGeom prst="rect">
+            <a:avLst/>
+          </a:prstGeom>
+          <a:noFill/>
+          <a:ln w="0">
+            <a:noFill/>
+          </a:ln>
+        </p:spPr>
+        <p:txBody>
+          <a:bodyPr lIns="43200" rIns="43200" tIns="43200" bIns="43200" anchor="t">
+            <a:noAutofit/>
+          </a:bodyPr>
+          <a:p>
+            <a:pPr algn="r">
+              <a:buNone/>
+            </a:pPr>
+            <a:r>
+              <a:rPr b="1" lang="en-US" sz="1350" spc="-1" strike="noStrike">
+                <a:solidFill>
+                  <a:srgbClr val="d6a84b"/>
+                </a:solidFill>
+                <a:latin typeface="Arial"/>
+              </a:rPr>
+              <a:t>QUALITY FLAGS</a:t>
+            </a:r>
+            <a:endParaRPr b="1" lang="en-US" sz="1350" spc="-1" strike="noStrike">
+              <a:solidFill>
+                <a:srgbClr val="d6a84b"/>
+              </a:solidFill>
+              <a:latin typeface="Arial"/>
+            </a:endParaRPr>
+          </a:p>
+        </p:txBody>
+      </p:sp>
+      <p:sp>
+        <p:nvSpPr>
+          <p:cNvPr id="410" name=""/>
+          <p:cNvSpPr txBox="1"/>
+          <p:nvPr/>
+        </p:nvSpPr>
+        <p:spPr>
+          <a:xfrm>
+            <a:off x="6390000" y="1638000"/>
+            <a:ext cx="2232000" cy="590400"/>
+          </a:xfrm>
+          <a:prstGeom prst="rect">
+            <a:avLst/>
+          </a:prstGeom>
+          <a:noFill/>
+          <a:ln w="0">
+            <a:noFill/>
+          </a:ln>
+        </p:spPr>
+        <p:txBody>
+          <a:bodyPr lIns="43200" rIns="43200" tIns="43200" bIns="43200" anchor="t">
+            <a:noAutofit/>
+          </a:bodyPr>
+          <a:p>
+            <a:pPr algn="r">
+              <a:buNone/>
+            </a:pPr>
+            <a:r>
+              <a:rPr b="0" lang="en-US" sz="1220" spc="-1" strike="noStrike">
+                <a:solidFill>
+                  <a:srgbClr val="17212b"/>
+                </a:solidFill>
+                <a:latin typeface="Arial"/>
+              </a:rPr>
+              <a:t>18 validity channels</a:t>
+            </a:r>
+            <a:endParaRPr b="0" lang="en-US" sz="1220" spc="-1" strike="noStrike">
+              <a:solidFill>
+                <a:srgbClr val="17212b"/>
+              </a:solidFill>
+              <a:latin typeface="Arial"/>
+            </a:endParaRPr>
+          </a:p>
+          <a:p>
+            <a:pPr algn="r">
+              <a:buNone/>
+            </a:pPr>
+            <a:r>
+              <a:rPr b="0" lang="en-US" sz="1220" spc="-1" strike="noStrike">
+                <a:solidFill>
+                  <a:srgbClr val="17212b"/>
+                </a:solidFill>
+                <a:latin typeface="Arial"/>
+              </a:rPr>
+              <a:t>controller-conflict guard</a:t>
+            </a:r>
+            <a:endParaRPr b="0" lang="en-US" sz="1220" spc="-1" strike="noStrike">
+              <a:solidFill>
+                <a:srgbClr val="17212b"/>
+              </a:solidFill>
+              <a:latin typeface="Arial"/>
+            </a:endParaRPr>
+          </a:p>
+        </p:txBody>
+      </p:sp>
+      <p:sp>
+        <p:nvSpPr>
+          <p:cNvPr id="411" name=""/>
+          <p:cNvSpPr txBox="1"/>
+          <p:nvPr/>
+        </p:nvSpPr>
+        <p:spPr>
+          <a:xfrm>
+            <a:off x="8820000" y="1530000"/>
+            <a:ext cx="252000" cy="440280"/>
+          </a:xfrm>
+          <a:prstGeom prst="rect">
+            <a:avLst/>
+          </a:prstGeom>
+          <a:noFill/>
+          <a:ln w="0">
+            <a:noFill/>
+          </a:ln>
+        </p:spPr>
+        <p:txBody>
+          <a:bodyPr lIns="43200" rIns="43200" tIns="43200" bIns="43200" anchor="t">
+            <a:noAutofit/>
+          </a:bodyPr>
+          <a:p>
+            <a:pPr algn="r">
+              <a:buNone/>
+            </a:pPr>
+            <a:r>
+              <a:rPr b="1" lang="en-US" sz="2500" spc="-1" strike="noStrike">
+                <a:solidFill>
+                  <a:srgbClr val="44515e"/>
+                </a:solidFill>
+                <a:latin typeface="Arial"/>
+              </a:rPr>
+              <a:t>→</a:t>
+            </a:r>
+            <a:endParaRPr b="1" lang="en-US" sz="2500" spc="-1" strike="noStrike">
+              <a:solidFill>
+                <a:srgbClr val="44515e"/>
+              </a:solidFill>
+              <a:latin typeface="Arial"/>
+            </a:endParaRPr>
+          </a:p>
+        </p:txBody>
+      </p:sp>
+      <p:sp>
+        <p:nvSpPr>
+          <p:cNvPr id="412" name=""/>
+          <p:cNvSpPr/>
+          <p:nvPr/>
+        </p:nvSpPr>
+        <p:spPr>
+          <a:xfrm>
+            <a:off x="9144000" y="1080000"/>
+            <a:ext cx="2520000" cy="1440000"/>
+          </a:xfrm>
+          <a:prstGeom prst="roundRect">
+            <a:avLst/>
+          </a:prstGeom>
+          <a:solidFill>
+            <a:srgbClr val="ffffff"/>
+          </a:solidFill>
+          <a:ln w="7200">
+            <a:solidFill>
+              <a:srgbClr val="3e8e62"/>
+            </a:solidFill>
+            <a:round/>
+          </a:ln>
+        </p:spPr>
+      </p:sp>
+      <p:sp>
+        <p:nvSpPr>
+          <p:cNvPr id="413" name=""/>
+          <p:cNvSpPr txBox="1"/>
+          <p:nvPr/>
+        </p:nvSpPr>
+        <p:spPr>
+          <a:xfrm>
+            <a:off x="9270000" y="1242000"/>
+            <a:ext cx="2268000" cy="277560"/>
+          </a:xfrm>
+          <a:prstGeom prst="rect">
+            <a:avLst/>
+          </a:prstGeom>
+          <a:noFill/>
+          <a:ln w="0">
+            <a:noFill/>
+          </a:ln>
+        </p:spPr>
+        <p:txBody>
+          <a:bodyPr lIns="43200" rIns="43200" tIns="43200" bIns="43200" anchor="t">
+            <a:noAutofit/>
+          </a:bodyPr>
+          <a:p>
+            <a:pPr algn="r">
+              <a:buNone/>
+            </a:pPr>
+            <a:r>
+              <a:rPr b="1" lang="en-US" sz="1350" spc="-1" strike="noStrike">
+                <a:solidFill>
+                  <a:srgbClr val="3e8e62"/>
+                </a:solidFill>
+                <a:latin typeface="Arial"/>
+              </a:rPr>
+              <a:t>EXCEL OUTPUT</a:t>
+            </a:r>
+            <a:endParaRPr b="1" lang="en-US" sz="1350" spc="-1" strike="noStrike">
+              <a:solidFill>
+                <a:srgbClr val="3e8e62"/>
+              </a:solidFill>
+              <a:latin typeface="Arial"/>
+            </a:endParaRPr>
+          </a:p>
+        </p:txBody>
+      </p:sp>
+      <p:sp>
+        <p:nvSpPr>
+          <p:cNvPr id="414" name=""/>
+          <p:cNvSpPr txBox="1"/>
+          <p:nvPr/>
+        </p:nvSpPr>
+        <p:spPr>
+          <a:xfrm>
+            <a:off x="9288000" y="1638000"/>
+            <a:ext cx="2232000" cy="590400"/>
+          </a:xfrm>
+          <a:prstGeom prst="rect">
+            <a:avLst/>
+          </a:prstGeom>
+          <a:noFill/>
+          <a:ln w="0">
+            <a:noFill/>
+          </a:ln>
+        </p:spPr>
+        <p:txBody>
+          <a:bodyPr lIns="43200" rIns="43200" tIns="43200" bIns="43200" anchor="t">
+            <a:noAutofit/>
+          </a:bodyPr>
+          <a:p>
+            <a:pPr algn="r">
+              <a:buNone/>
+            </a:pPr>
+            <a:r>
+              <a:rPr b="0" lang="en-US" sz="1220" spc="-1" strike="noStrike">
+                <a:solidFill>
+                  <a:srgbClr val="17212b"/>
+                </a:solidFill>
+                <a:latin typeface="Arial"/>
+              </a:rPr>
+              <a:t>Raw rows + case and</a:t>
+            </a:r>
+            <a:endParaRPr b="0" lang="en-US" sz="1220" spc="-1" strike="noStrike">
+              <a:solidFill>
+                <a:srgbClr val="17212b"/>
+              </a:solidFill>
+              <a:latin typeface="Arial"/>
+            </a:endParaRPr>
+          </a:p>
+          <a:p>
+            <a:pPr algn="r">
+              <a:buNone/>
+            </a:pPr>
+            <a:r>
+              <a:rPr b="0" lang="en-US" sz="1220" spc="-1" strike="noStrike">
+                <a:solidFill>
+                  <a:srgbClr val="17212b"/>
+                </a:solidFill>
+                <a:latin typeface="Arial"/>
+              </a:rPr>
+              <a:t>sensor summaries</a:t>
+            </a:r>
+            <a:endParaRPr b="0" lang="en-US" sz="1220" spc="-1" strike="noStrike">
+              <a:solidFill>
+                <a:srgbClr val="17212b"/>
+              </a:solidFill>
+              <a:latin typeface="Arial"/>
+            </a:endParaRPr>
+          </a:p>
+        </p:txBody>
+      </p:sp>
+      <p:sp>
+        <p:nvSpPr>
+          <p:cNvPr id="415" name=""/>
+          <p:cNvSpPr/>
+          <p:nvPr/>
+        </p:nvSpPr>
+        <p:spPr>
+          <a:xfrm>
+            <a:off x="720000" y="2988000"/>
+            <a:ext cx="3096000" cy="810000"/>
+          </a:xfrm>
+          <a:prstGeom prst="roundRect">
+            <a:avLst/>
+          </a:prstGeom>
+          <a:solidFill>
+            <a:srgbClr val="ffffff"/>
+          </a:solidFill>
+          <a:ln w="7200">
+            <a:solidFill>
+              <a:srgbClr val="d7d2cc"/>
+            </a:solidFill>
+            <a:round/>
+          </a:ln>
+        </p:spPr>
+      </p:sp>
+      <p:sp>
+        <p:nvSpPr>
+          <p:cNvPr id="416" name=""/>
+          <p:cNvSpPr/>
+          <p:nvPr/>
+        </p:nvSpPr>
+        <p:spPr>
+          <a:xfrm>
+            <a:off x="720000" y="2988000"/>
+            <a:ext cx="57600" cy="810000"/>
+          </a:xfrm>
+          <a:prstGeom prst="rect">
             <a:avLst/>
           </a:prstGeom>
           <a:solidFill>
@@ -9515,83 +10216,38 @@
       </p:sp>
       <p:sp>
         <p:nvSpPr>
-          <p:cNvPr id="401" name=""/>
-          <p:cNvSpPr txBox="1"/>
-          <p:nvPr/>
-        </p:nvSpPr>
-        <p:spPr>
-          <a:xfrm>
-            <a:off x="486000" y="1090800"/>
-            <a:ext cx="684000" cy="384120"/>
-          </a:xfrm>
-          <a:prstGeom prst="rect">
-            <a:avLst/>
-          </a:prstGeom>
-          <a:noFill/>
-          <a:ln w="0">
-            <a:noFill/>
-          </a:ln>
-        </p:spPr>
-        <p:txBody>
-          <a:bodyPr lIns="43200" rIns="43200" tIns="43200" bIns="43200" anchor="t">
-            <a:noAutofit/>
-          </a:bodyPr>
-          <a:p>
-            <a:pPr algn="r">
-              <a:buNone/>
-            </a:pPr>
-            <a:r>
-              <a:rPr b="1" lang="en-US" sz="2100" spc="-1" strike="noStrike">
-                <a:solidFill>
-                  <a:srgbClr val="ffffff"/>
-                </a:solidFill>
-                <a:latin typeface="Arial"/>
-              </a:rPr>
-              <a:t>01</a:t>
-            </a:r>
-            <a:endParaRPr b="1" lang="en-US" sz="2100" spc="-1" strike="noStrike">
-              <a:solidFill>
-                <a:srgbClr val="ffffff"/>
-              </a:solidFill>
-              <a:latin typeface="Arial"/>
-            </a:endParaRPr>
-          </a:p>
-        </p:txBody>
-      </p:sp>
-      <p:sp>
-        <p:nvSpPr>
-          <p:cNvPr id="402" name=""/>
-          <p:cNvSpPr txBox="1"/>
-          <p:nvPr/>
-        </p:nvSpPr>
-        <p:spPr>
-          <a:xfrm>
-            <a:off x="1368000" y="997200"/>
-            <a:ext cx="2592000" cy="446400"/>
-          </a:xfrm>
-          <a:prstGeom prst="rect">
-            <a:avLst/>
-          </a:prstGeom>
-          <a:noFill/>
-          <a:ln w="0">
-            <a:noFill/>
-          </a:ln>
-        </p:spPr>
-        <p:txBody>
-          <a:bodyPr lIns="43200" rIns="43200" tIns="43200" bIns="43200" anchor="t">
-            <a:noAutofit/>
-          </a:bodyPr>
-          <a:p>
-            <a:r>
-              <a:rPr b="1" lang="en-US" sz="1450" spc="-1" strike="noStrike">
+          <p:cNvPr id="417" name=""/>
+          <p:cNvSpPr txBox="1"/>
+          <p:nvPr/>
+        </p:nvSpPr>
+        <p:spPr>
+          <a:xfrm>
+            <a:off x="882000" y="3088800"/>
+            <a:ext cx="2862000" cy="414720"/>
+          </a:xfrm>
+          <a:prstGeom prst="rect">
+            <a:avLst/>
+          </a:prstGeom>
+          <a:noFill/>
+          <a:ln w="0">
+            <a:noFill/>
+          </a:ln>
+        </p:spPr>
+        <p:txBody>
+          <a:bodyPr lIns="43200" rIns="43200" tIns="43200" bIns="43200" anchor="t">
+            <a:noAutofit/>
+          </a:bodyPr>
+          <a:p>
+            <a:r>
+              <a:rPr b="1" lang="en-US" sz="2300" spc="-1" strike="noStrike">
                 <a:solidFill>
                   <a:srgbClr val="500000"/>
                 </a:solidFill>
                 <a:latin typeface="Arial"/>
               </a:rPr>
-              <a:t>Physical gauge selection</a:t>
-            </a:r>
-            <a:endParaRPr b="1" lang="en-US" sz="1450" spc="-1" strike="noStrike">
+              <a:t>61</a:t>
+            </a:r>
+            <a:endParaRPr b="1" lang="en-US" sz="2300" spc="-1" strike="noStrike">
               <a:solidFill>
                 <a:srgbClr val="500000"/>
               </a:solidFill>
@@ -9602,66 +10258,66 @@
       </p:sp>
       <p:sp>
         <p:nvSpPr>
-          <p:cNvPr id="403" name=""/>
-          <p:cNvSpPr txBox="1"/>
-          <p:nvPr/>
-        </p:nvSpPr>
-        <p:spPr>
-          <a:xfrm>
-            <a:off x="4104000" y="997200"/>
-            <a:ext cx="7164000" cy="464400"/>
-          </a:xfrm>
-          <a:prstGeom prst="rect">
-            <a:avLst/>
-          </a:prstGeom>
-          <a:noFill/>
-          <a:ln w="0">
-            <a:noFill/>
-          </a:ln>
-        </p:spPr>
-        <p:txBody>
-          <a:bodyPr lIns="43200" rIns="43200" tIns="43200" bIns="43200" anchor="t">
-            <a:noAutofit/>
-          </a:bodyPr>
-          <a:p>
-            <a:r>
-              <a:rPr b="0" lang="en-US" sz="1200" spc="-1" strike="noStrike">
-                <a:solidFill>
-                  <a:srgbClr val="17212b"/>
-                </a:solidFill>
-                <a:latin typeface="Arial"/>
-              </a:rPr>
-              <a:t>Choose a commercial gauge, substrate, adhesive, and temperature compensation strategy.</a:t>
-            </a:r>
-            <a:endParaRPr b="0" lang="en-US" sz="1200" spc="-1" strike="noStrike">
-              <a:solidFill>
-                <a:srgbClr val="17212b"/>
-              </a:solidFill>
-              <a:latin typeface="Arial"/>
-            </a:endParaRPr>
-          </a:p>
-        </p:txBody>
-      </p:sp>
-      <p:sp>
-        <p:nvSpPr>
-          <p:cNvPr id="404" name=""/>
+          <p:cNvPr id="418" name=""/>
+          <p:cNvSpPr txBox="1"/>
+          <p:nvPr/>
+        </p:nvSpPr>
+        <p:spPr>
+          <a:xfrm>
+            <a:off x="882000" y="3412800"/>
+            <a:ext cx="2862000" cy="234720"/>
+          </a:xfrm>
+          <a:prstGeom prst="rect">
+            <a:avLst/>
+          </a:prstGeom>
+          <a:noFill/>
+          <a:ln w="0">
+            <a:noFill/>
+          </a:ln>
+        </p:spPr>
+        <p:txBody>
+          <a:bodyPr lIns="43200" rIns="43200" tIns="43200" bIns="43200" anchor="t">
+            <a:noAutofit/>
+          </a:bodyPr>
+          <a:p>
+            <a:r>
+              <a:rPr b="0" lang="en-US" sz="1050" spc="-1" strike="noStrike">
+                <a:solidFill>
+                  <a:srgbClr val="44515e"/>
+                </a:solidFill>
+                <a:latin typeface="Arial"/>
+              </a:rPr>
+              <a:t>default cases</a:t>
+            </a:r>
+            <a:endParaRPr b="0" lang="en-US" sz="1050" spc="-1" strike="noStrike">
+              <a:solidFill>
+                <a:srgbClr val="44515e"/>
+              </a:solidFill>
+              <a:latin typeface="Arial"/>
+            </a:endParaRPr>
+          </a:p>
+        </p:txBody>
+      </p:sp>
+      <p:sp>
+        <p:nvSpPr>
+          <p:cNvPr id="419" name=""/>
           <p:cNvSpPr/>
           <p:nvPr/>
         </p:nvSpPr>
         <p:spPr>
           <a:xfrm>
-            <a:off x="468000" y="1944000"/>
-            <a:ext cx="720000" cy="630000"/>
+            <a:off x="4536000" y="2988000"/>
+            <a:ext cx="3096000" cy="810000"/>
           </a:xfrm>
           <a:prstGeom prst="roundRect">
             <a:avLst/>
           </a:prstGeom>
           <a:solidFill>
-            <a:srgbClr val="500000"/>
+            <a:srgbClr val="ffffff"/>
           </a:solidFill>
           <a:ln w="7200">
             <a:solidFill>
-              <a:srgbClr val="500000"/>
+              <a:srgbClr val="d7d2cc"/>
             </a:solidFill>
             <a:round/>
           </a:ln>
@@ -9669,153 +10325,24 @@
       </p:sp>
       <p:sp>
         <p:nvSpPr>
-          <p:cNvPr id="405" name=""/>
-          <p:cNvSpPr txBox="1"/>
-          <p:nvPr/>
-        </p:nvSpPr>
-        <p:spPr>
-          <a:xfrm>
-            <a:off x="486000" y="2080800"/>
-            <a:ext cx="684000" cy="384120"/>
-          </a:xfrm>
-          <a:prstGeom prst="rect">
-            <a:avLst/>
-          </a:prstGeom>
-          <a:noFill/>
-          <a:ln w="0">
-            <a:noFill/>
-          </a:ln>
-        </p:spPr>
-        <p:txBody>
-          <a:bodyPr lIns="43200" rIns="43200" tIns="43200" bIns="43200" anchor="t">
-            <a:noAutofit/>
-          </a:bodyPr>
-          <a:p>
-            <a:pPr algn="r">
-              <a:buNone/>
-            </a:pPr>
-            <a:r>
-              <a:rPr b="1" lang="en-US" sz="2100" spc="-1" strike="noStrike">
-                <a:solidFill>
-                  <a:srgbClr val="ffffff"/>
-                </a:solidFill>
-                <a:latin typeface="Arial"/>
-              </a:rPr>
-              <a:t>02</a:t>
-            </a:r>
-            <a:endParaRPr b="1" lang="en-US" sz="2100" spc="-1" strike="noStrike">
-              <a:solidFill>
-                <a:srgbClr val="ffffff"/>
-              </a:solidFill>
-              <a:latin typeface="Arial"/>
-            </a:endParaRPr>
-          </a:p>
-        </p:txBody>
-      </p:sp>
-      <p:sp>
-        <p:nvSpPr>
-          <p:cNvPr id="406" name=""/>
-          <p:cNvSpPr txBox="1"/>
-          <p:nvPr/>
-        </p:nvSpPr>
-        <p:spPr>
-          <a:xfrm>
-            <a:off x="1368000" y="1987200"/>
-            <a:ext cx="2592000" cy="446400"/>
-          </a:xfrm>
-          <a:prstGeom prst="rect">
-            <a:avLst/>
-          </a:prstGeom>
-          <a:noFill/>
-          <a:ln w="0">
-            <a:noFill/>
-          </a:ln>
-        </p:spPr>
-        <p:txBody>
-          <a:bodyPr lIns="43200" rIns="43200" tIns="43200" bIns="43200" anchor="t">
-            <a:noAutofit/>
-          </a:bodyPr>
-          <a:p>
-            <a:r>
-              <a:rPr b="1" lang="en-US" sz="1450" spc="-1" strike="noStrike">
-                <a:solidFill>
-                  <a:srgbClr val="500000"/>
-                </a:solidFill>
-                <a:latin typeface="Arial"/>
-              </a:rPr>
-              <a:t>Bench calibration</a:t>
-            </a:r>
-            <a:endParaRPr b="1" lang="en-US" sz="1450" spc="-1" strike="noStrike">
-              <a:solidFill>
-                <a:srgbClr val="500000"/>
-              </a:solidFill>
-              <a:latin typeface="Arial"/>
-            </a:endParaRPr>
-          </a:p>
-        </p:txBody>
-      </p:sp>
-      <p:sp>
-        <p:nvSpPr>
-          <p:cNvPr id="407" name=""/>
-          <p:cNvSpPr txBox="1"/>
-          <p:nvPr/>
-        </p:nvSpPr>
-        <p:spPr>
-          <a:xfrm>
-            <a:off x="4104000" y="1987200"/>
-            <a:ext cx="7164000" cy="464400"/>
-          </a:xfrm>
-          <a:prstGeom prst="rect">
-            <a:avLst/>
-          </a:prstGeom>
-          <a:noFill/>
-          <a:ln w="0">
-            <a:noFill/>
-          </a:ln>
-        </p:spPr>
-        <p:txBody>
-          <a:bodyPr lIns="43200" rIns="43200" tIns="43200" bIns="43200" anchor="t">
-            <a:noAutofit/>
-          </a:bodyPr>
-          <a:p>
-            <a:r>
-              <a:rPr b="0" lang="en-US" sz="1200" spc="-1" strike="noStrike">
-                <a:solidFill>
-                  <a:srgbClr val="17212b"/>
-                </a:solidFill>
-                <a:latin typeface="Arial"/>
-              </a:rPr>
-              <a:t>Measure real strain and bridge voltage against known curvature and loading.</a:t>
-            </a:r>
-            <a:endParaRPr b="0" lang="en-US" sz="1200" spc="-1" strike="noStrike">
-              <a:solidFill>
-                <a:srgbClr val="17212b"/>
-              </a:solidFill>
-              <a:latin typeface="Arial"/>
-            </a:endParaRPr>
-          </a:p>
-        </p:txBody>
-      </p:sp>
-      <p:sp>
-        <p:nvSpPr>
-          <p:cNvPr id="408" name=""/>
+          <p:cNvPr id="420" name=""/>
           <p:cNvSpPr/>
           <p:nvPr/>
         </p:nvSpPr>
         <p:spPr>
           <a:xfrm>
-            <a:off x="468000" y="2934000"/>
-            <a:ext cx="720000" cy="630000"/>
-          </a:xfrm>
-          <a:prstGeom prst="roundRect">
+            <a:off x="4536000" y="2988000"/>
+            <a:ext cx="57600" cy="810000"/>
+          </a:xfrm>
+          <a:prstGeom prst="rect">
             <a:avLst/>
           </a:prstGeom>
           <a:solidFill>
-            <a:srgbClr val="500000"/>
+            <a:srgbClr val="167d8d"/>
           </a:solidFill>
           <a:ln w="7200">
             <a:solidFill>
-              <a:srgbClr val="500000"/>
+              <a:srgbClr val="167d8d"/>
             </a:solidFill>
             <a:round/>
           </a:ln>
@@ -9823,153 +10350,108 @@
       </p:sp>
       <p:sp>
         <p:nvSpPr>
-          <p:cNvPr id="409" name=""/>
-          <p:cNvSpPr txBox="1"/>
-          <p:nvPr/>
-        </p:nvSpPr>
-        <p:spPr>
-          <a:xfrm>
-            <a:off x="486000" y="3070800"/>
-            <a:ext cx="684000" cy="384120"/>
-          </a:xfrm>
-          <a:prstGeom prst="rect">
-            <a:avLst/>
-          </a:prstGeom>
-          <a:noFill/>
-          <a:ln w="0">
-            <a:noFill/>
-          </a:ln>
-        </p:spPr>
-        <p:txBody>
-          <a:bodyPr lIns="43200" rIns="43200" tIns="43200" bIns="43200" anchor="t">
-            <a:noAutofit/>
-          </a:bodyPr>
-          <a:p>
-            <a:pPr algn="r">
-              <a:buNone/>
-            </a:pPr>
-            <a:r>
-              <a:rPr b="1" lang="en-US" sz="2100" spc="-1" strike="noStrike">
-                <a:solidFill>
-                  <a:srgbClr val="ffffff"/>
-                </a:solidFill>
-                <a:latin typeface="Arial"/>
-              </a:rPr>
-              <a:t>03</a:t>
-            </a:r>
-            <a:endParaRPr b="1" lang="en-US" sz="2100" spc="-1" strike="noStrike">
-              <a:solidFill>
-                <a:srgbClr val="ffffff"/>
-              </a:solidFill>
-              <a:latin typeface="Arial"/>
-            </a:endParaRPr>
-          </a:p>
-        </p:txBody>
-      </p:sp>
-      <p:sp>
-        <p:nvSpPr>
-          <p:cNvPr id="410" name=""/>
-          <p:cNvSpPr txBox="1"/>
-          <p:nvPr/>
-        </p:nvSpPr>
-        <p:spPr>
-          <a:xfrm>
-            <a:off x="1368000" y="2977200"/>
-            <a:ext cx="2592000" cy="501480"/>
-          </a:xfrm>
-          <a:prstGeom prst="rect">
-            <a:avLst/>
-          </a:prstGeom>
-          <a:noFill/>
-          <a:ln w="0">
-            <a:noFill/>
-          </a:ln>
-        </p:spPr>
-        <p:txBody>
-          <a:bodyPr lIns="43200" rIns="43200" tIns="43200" bIns="43200" anchor="t">
-            <a:noAutofit/>
-          </a:bodyPr>
-          <a:p>
-            <a:r>
-              <a:rPr b="1" lang="en-US" sz="1450" spc="-1" strike="noStrike">
-                <a:solidFill>
-                  <a:srgbClr val="500000"/>
-                </a:solidFill>
-                <a:latin typeface="Arial"/>
-              </a:rPr>
-              <a:t>Independent shape validation</a:t>
-            </a:r>
-            <a:endParaRPr b="1" lang="en-US" sz="1450" spc="-1" strike="noStrike">
-              <a:solidFill>
-                <a:srgbClr val="500000"/>
-              </a:solidFill>
-              <a:latin typeface="Arial"/>
-            </a:endParaRPr>
-          </a:p>
-        </p:txBody>
-      </p:sp>
-      <p:sp>
-        <p:nvSpPr>
-          <p:cNvPr id="411" name=""/>
-          <p:cNvSpPr txBox="1"/>
-          <p:nvPr/>
-        </p:nvSpPr>
-        <p:spPr>
-          <a:xfrm>
-            <a:off x="4104000" y="2977200"/>
-            <a:ext cx="7164000" cy="464400"/>
-          </a:xfrm>
-          <a:prstGeom prst="rect">
-            <a:avLst/>
-          </a:prstGeom>
-          <a:noFill/>
-          <a:ln w="0">
-            <a:noFill/>
-          </a:ln>
-        </p:spPr>
-        <p:txBody>
-          <a:bodyPr lIns="43200" rIns="43200" tIns="43200" bIns="43200" anchor="t">
-            <a:noAutofit/>
-          </a:bodyPr>
-          <a:p>
-            <a:r>
-              <a:rPr b="0" lang="en-US" sz="1200" spc="-1" strike="noStrike">
-                <a:solidFill>
-                  <a:srgbClr val="17212b"/>
-                </a:solidFill>
-                <a:latin typeface="Arial"/>
-              </a:rPr>
-              <a:t>Compare reconstructed curvature with motion capture or vision—not the same pose source.</a:t>
-            </a:r>
-            <a:endParaRPr b="0" lang="en-US" sz="1200" spc="-1" strike="noStrike">
-              <a:solidFill>
-                <a:srgbClr val="17212b"/>
-              </a:solidFill>
-              <a:latin typeface="Arial"/>
-            </a:endParaRPr>
-          </a:p>
-        </p:txBody>
-      </p:sp>
-      <p:sp>
-        <p:nvSpPr>
-          <p:cNvPr id="412" name=""/>
+          <p:cNvPr id="421" name=""/>
+          <p:cNvSpPr txBox="1"/>
+          <p:nvPr/>
+        </p:nvSpPr>
+        <p:spPr>
+          <a:xfrm>
+            <a:off x="4698000" y="3088800"/>
+            <a:ext cx="2862000" cy="414720"/>
+          </a:xfrm>
+          <a:prstGeom prst="rect">
+            <a:avLst/>
+          </a:prstGeom>
+          <a:noFill/>
+          <a:ln w="0">
+            <a:noFill/>
+          </a:ln>
+        </p:spPr>
+        <p:txBody>
+          <a:bodyPr lIns="43200" rIns="43200" tIns="43200" bIns="43200" anchor="t">
+            <a:noAutofit/>
+          </a:bodyPr>
+          <a:p>
+            <a:r>
+              <a:rPr b="1" lang="en-US" sz="2300" spc="-1" strike="noStrike">
+                <a:solidFill>
+                  <a:srgbClr val="167d8d"/>
+                </a:solidFill>
+                <a:latin typeface="Arial"/>
+              </a:rPr>
+              <a:t>1,220</a:t>
+            </a:r>
+            <a:endParaRPr b="1" lang="en-US" sz="2300" spc="-1" strike="noStrike">
+              <a:solidFill>
+                <a:srgbClr val="167d8d"/>
+              </a:solidFill>
+              <a:latin typeface="Arial"/>
+            </a:endParaRPr>
+          </a:p>
+        </p:txBody>
+      </p:sp>
+      <p:sp>
+        <p:nvSpPr>
+          <p:cNvPr id="422" name=""/>
+          <p:cNvSpPr txBox="1"/>
+          <p:nvPr/>
+        </p:nvSpPr>
+        <p:spPr>
+          <a:xfrm>
+            <a:off x="4698000" y="3412800"/>
+            <a:ext cx="2862000" cy="234720"/>
+          </a:xfrm>
+          <a:prstGeom prst="rect">
+            <a:avLst/>
+          </a:prstGeom>
+          <a:noFill/>
+          <a:ln w="0">
+            <a:noFill/>
+          </a:ln>
+        </p:spPr>
+        <p:txBody>
+          <a:bodyPr lIns="43200" rIns="43200" tIns="43200" bIns="43200" anchor="t">
+            <a:noAutofit/>
+          </a:bodyPr>
+          <a:p>
+            <a:r>
+              <a:rPr b="0" lang="en-US" sz="1050" spc="-1" strike="noStrike">
+                <a:solidFill>
+                  <a:srgbClr val="44515e"/>
+                </a:solidFill>
+                <a:latin typeface="Arial"/>
+              </a:rPr>
+              <a:t>collected raw rows</a:t>
+            </a:r>
+            <a:endParaRPr b="0" lang="en-US" sz="1050" spc="-1" strike="noStrike">
+              <a:solidFill>
+                <a:srgbClr val="44515e"/>
+              </a:solidFill>
+              <a:latin typeface="Arial"/>
+            </a:endParaRPr>
+          </a:p>
+        </p:txBody>
+      </p:sp>
+      <p:sp>
+        <p:nvSpPr>
+          <p:cNvPr id="423" name=""/>
           <p:cNvSpPr/>
           <p:nvPr/>
         </p:nvSpPr>
         <p:spPr>
           <a:xfrm>
-            <a:off x="468000" y="3924000"/>
-            <a:ext cx="720000" cy="630000"/>
+            <a:off x="8352000" y="2988000"/>
+            <a:ext cx="3096000" cy="810000"/>
           </a:xfrm>
           <a:prstGeom prst="roundRect">
             <a:avLst/>
           </a:prstGeom>
           <a:solidFill>
-            <a:srgbClr val="500000"/>
+            <a:srgbClr val="ffffff"/>
           </a:solidFill>
           <a:ln w="7200">
             <a:solidFill>
-              <a:srgbClr val="500000"/>
+              <a:srgbClr val="d7d2cc"/>
             </a:solidFill>
             <a:round/>
           </a:ln>
@@ -9977,153 +10459,24 @@
       </p:sp>
       <p:sp>
         <p:nvSpPr>
-          <p:cNvPr id="413" name=""/>
-          <p:cNvSpPr txBox="1"/>
-          <p:nvPr/>
-        </p:nvSpPr>
-        <p:spPr>
-          <a:xfrm>
-            <a:off x="486000" y="4060800"/>
-            <a:ext cx="684000" cy="384120"/>
-          </a:xfrm>
-          <a:prstGeom prst="rect">
-            <a:avLst/>
-          </a:prstGeom>
-          <a:noFill/>
-          <a:ln w="0">
-            <a:noFill/>
-          </a:ln>
-        </p:spPr>
-        <p:txBody>
-          <a:bodyPr lIns="43200" rIns="43200" tIns="43200" bIns="43200" anchor="t">
-            <a:noAutofit/>
-          </a:bodyPr>
-          <a:p>
-            <a:pPr algn="r">
-              <a:buNone/>
-            </a:pPr>
-            <a:r>
-              <a:rPr b="1" lang="en-US" sz="2100" spc="-1" strike="noStrike">
-                <a:solidFill>
-                  <a:srgbClr val="ffffff"/>
-                </a:solidFill>
-                <a:latin typeface="Arial"/>
-              </a:rPr>
-              <a:t>04</a:t>
-            </a:r>
-            <a:endParaRPr b="1" lang="en-US" sz="2100" spc="-1" strike="noStrike">
-              <a:solidFill>
-                <a:srgbClr val="ffffff"/>
-              </a:solidFill>
-              <a:latin typeface="Arial"/>
-            </a:endParaRPr>
-          </a:p>
-        </p:txBody>
-      </p:sp>
-      <p:sp>
-        <p:nvSpPr>
-          <p:cNvPr id="414" name=""/>
-          <p:cNvSpPr txBox="1"/>
-          <p:nvPr/>
-        </p:nvSpPr>
-        <p:spPr>
-          <a:xfrm>
-            <a:off x="1368000" y="3967200"/>
-            <a:ext cx="2592000" cy="501480"/>
-          </a:xfrm>
-          <a:prstGeom prst="rect">
-            <a:avLst/>
-          </a:prstGeom>
-          <a:noFill/>
-          <a:ln w="0">
-            <a:noFill/>
-          </a:ln>
-        </p:spPr>
-        <p:txBody>
-          <a:bodyPr lIns="43200" rIns="43200" tIns="43200" bIns="43200" anchor="t">
-            <a:noAutofit/>
-          </a:bodyPr>
-          <a:p>
-            <a:r>
-              <a:rPr b="1" lang="en-US" sz="1450" spc="-1" strike="noStrike">
-                <a:solidFill>
-                  <a:srgbClr val="500000"/>
-                </a:solidFill>
-                <a:latin typeface="Arial"/>
-              </a:rPr>
-              <a:t>Loaded and directional trials</a:t>
-            </a:r>
-            <a:endParaRPr b="1" lang="en-US" sz="1450" spc="-1" strike="noStrike">
-              <a:solidFill>
-                <a:srgbClr val="500000"/>
-              </a:solidFill>
-              <a:latin typeface="Arial"/>
-            </a:endParaRPr>
-          </a:p>
-        </p:txBody>
-      </p:sp>
-      <p:sp>
-        <p:nvSpPr>
-          <p:cNvPr id="415" name=""/>
-          <p:cNvSpPr txBox="1"/>
-          <p:nvPr/>
-        </p:nvSpPr>
-        <p:spPr>
-          <a:xfrm>
-            <a:off x="4104000" y="3967200"/>
-            <a:ext cx="7164000" cy="464400"/>
-          </a:xfrm>
-          <a:prstGeom prst="rect">
-            <a:avLst/>
-          </a:prstGeom>
-          <a:noFill/>
-          <a:ln w="0">
-            <a:noFill/>
-          </a:ln>
-        </p:spPr>
-        <p:txBody>
-          <a:bodyPr lIns="43200" rIns="43200" tIns="43200" bIns="43200" anchor="t">
-            <a:noAutofit/>
-          </a:bodyPr>
-          <a:p>
-            <a:r>
-              <a:rPr b="0" lang="en-US" sz="1200" spc="-1" strike="noStrike">
-                <a:solidFill>
-                  <a:srgbClr val="17212b"/>
-                </a:solidFill>
-                <a:latin typeface="Arial"/>
-              </a:rPr>
-              <a:t>Repeat across θ, negative torque, payloads, disturbances, and repeated cycles.</a:t>
-            </a:r>
-            <a:endParaRPr b="0" lang="en-US" sz="1200" spc="-1" strike="noStrike">
-              <a:solidFill>
-                <a:srgbClr val="17212b"/>
-              </a:solidFill>
-              <a:latin typeface="Arial"/>
-            </a:endParaRPr>
-          </a:p>
-        </p:txBody>
-      </p:sp>
-      <p:sp>
-        <p:nvSpPr>
-          <p:cNvPr id="416" name=""/>
+          <p:cNvPr id="424" name=""/>
           <p:cNvSpPr/>
           <p:nvPr/>
         </p:nvSpPr>
         <p:spPr>
           <a:xfrm>
-            <a:off x="468000" y="4914000"/>
-            <a:ext cx="720000" cy="630000"/>
-          </a:xfrm>
-          <a:prstGeom prst="roundRect">
+            <a:off x="8352000" y="2988000"/>
+            <a:ext cx="57600" cy="810000"/>
+          </a:xfrm>
+          <a:prstGeom prst="rect">
             <a:avLst/>
           </a:prstGeom>
           <a:solidFill>
-            <a:srgbClr val="500000"/>
+            <a:srgbClr val="d6a84b"/>
           </a:solidFill>
           <a:ln w="7200">
             <a:solidFill>
-              <a:srgbClr val="500000"/>
+              <a:srgbClr val="d6a84b"/>
             </a:solidFill>
             <a:round/>
           </a:ln>
@@ -10131,125 +10484,500 @@
       </p:sp>
       <p:sp>
         <p:nvSpPr>
-          <p:cNvPr id="417" name=""/>
-          <p:cNvSpPr txBox="1"/>
-          <p:nvPr/>
-        </p:nvSpPr>
-        <p:spPr>
-          <a:xfrm>
-            <a:off x="486000" y="5050800"/>
-            <a:ext cx="684000" cy="384120"/>
-          </a:xfrm>
-          <a:prstGeom prst="rect">
-            <a:avLst/>
-          </a:prstGeom>
-          <a:noFill/>
-          <a:ln w="0">
-            <a:noFill/>
-          </a:ln>
-        </p:spPr>
-        <p:txBody>
-          <a:bodyPr lIns="43200" rIns="43200" tIns="43200" bIns="43200" anchor="t">
-            <a:noAutofit/>
-          </a:bodyPr>
-          <a:p>
-            <a:pPr algn="r">
-              <a:buNone/>
-            </a:pPr>
-            <a:r>
-              <a:rPr b="1" lang="en-US" sz="2100" spc="-1" strike="noStrike">
-                <a:solidFill>
-                  <a:srgbClr val="ffffff"/>
-                </a:solidFill>
-                <a:latin typeface="Arial"/>
-              </a:rPr>
-              <a:t>05</a:t>
-            </a:r>
-            <a:endParaRPr b="1" lang="en-US" sz="2100" spc="-1" strike="noStrike">
-              <a:solidFill>
-                <a:srgbClr val="ffffff"/>
-              </a:solidFill>
-              <a:latin typeface="Arial"/>
-            </a:endParaRPr>
-          </a:p>
-        </p:txBody>
-      </p:sp>
-      <p:sp>
-        <p:nvSpPr>
-          <p:cNvPr id="418" name=""/>
-          <p:cNvSpPr txBox="1"/>
-          <p:nvPr/>
-        </p:nvSpPr>
-        <p:spPr>
-          <a:xfrm>
-            <a:off x="1368000" y="4957200"/>
-            <a:ext cx="2592000" cy="446400"/>
-          </a:xfrm>
-          <a:prstGeom prst="rect">
-            <a:avLst/>
-          </a:prstGeom>
-          <a:noFill/>
-          <a:ln w="0">
-            <a:noFill/>
-          </a:ln>
-        </p:spPr>
-        <p:txBody>
-          <a:bodyPr lIns="43200" rIns="43200" tIns="43200" bIns="43200" anchor="t">
-            <a:noAutofit/>
-          </a:bodyPr>
-          <a:p>
-            <a:r>
-              <a:rPr b="1" lang="en-US" sz="1450" spc="-1" strike="noStrike">
-                <a:solidFill>
-                  <a:srgbClr val="500000"/>
-                </a:solidFill>
-                <a:latin typeface="Arial"/>
-              </a:rPr>
-              <a:t>Uncertainty and statistics</a:t>
-            </a:r>
-            <a:endParaRPr b="1" lang="en-US" sz="1450" spc="-1" strike="noStrike">
-              <a:solidFill>
-                <a:srgbClr val="500000"/>
-              </a:solidFill>
-              <a:latin typeface="Arial"/>
-            </a:endParaRPr>
-          </a:p>
-        </p:txBody>
-      </p:sp>
-      <p:sp>
-        <p:nvSpPr>
-          <p:cNvPr id="419" name=""/>
-          <p:cNvSpPr txBox="1"/>
-          <p:nvPr/>
-        </p:nvSpPr>
-        <p:spPr>
-          <a:xfrm>
-            <a:off x="4104000" y="4957200"/>
-            <a:ext cx="7164000" cy="464400"/>
-          </a:xfrm>
-          <a:prstGeom prst="rect">
-            <a:avLst/>
-          </a:prstGeom>
-          <a:noFill/>
-          <a:ln w="0">
-            <a:noFill/>
-          </a:ln>
-        </p:spPr>
-        <p:txBody>
-          <a:bodyPr lIns="43200" rIns="43200" tIns="43200" bIns="43200" anchor="t">
-            <a:noAutofit/>
-          </a:bodyPr>
-          <a:p>
-            <a:r>
-              <a:rPr b="0" lang="en-US" sz="1200" spc="-1" strike="noStrike">
+          <p:cNvPr id="425" name=""/>
+          <p:cNvSpPr txBox="1"/>
+          <p:nvPr/>
+        </p:nvSpPr>
+        <p:spPr>
+          <a:xfrm>
+            <a:off x="8514000" y="3088800"/>
+            <a:ext cx="2862000" cy="414720"/>
+          </a:xfrm>
+          <a:prstGeom prst="rect">
+            <a:avLst/>
+          </a:prstGeom>
+          <a:noFill/>
+          <a:ln w="0">
+            <a:noFill/>
+          </a:ln>
+        </p:spPr>
+        <p:txBody>
+          <a:bodyPr lIns="43200" rIns="43200" tIns="43200" bIns="43200" anchor="t">
+            <a:noAutofit/>
+          </a:bodyPr>
+          <a:p>
+            <a:r>
+              <a:rPr b="1" lang="en-US" sz="2300" spc="-1" strike="noStrike">
+                <a:solidFill>
+                  <a:srgbClr val="d6a84b"/>
+                </a:solidFill>
+                <a:latin typeface="Arial"/>
+              </a:rPr>
+              <a:t>7,320</a:t>
+            </a:r>
+            <a:endParaRPr b="1" lang="en-US" sz="2300" spc="-1" strike="noStrike">
+              <a:solidFill>
+                <a:srgbClr val="d6a84b"/>
+              </a:solidFill>
+              <a:latin typeface="Arial"/>
+            </a:endParaRPr>
+          </a:p>
+        </p:txBody>
+      </p:sp>
+      <p:sp>
+        <p:nvSpPr>
+          <p:cNvPr id="426" name=""/>
+          <p:cNvSpPr txBox="1"/>
+          <p:nvPr/>
+        </p:nvSpPr>
+        <p:spPr>
+          <a:xfrm>
+            <a:off x="8514000" y="3412800"/>
+            <a:ext cx="2862000" cy="234720"/>
+          </a:xfrm>
+          <a:prstGeom prst="rect">
+            <a:avLst/>
+          </a:prstGeom>
+          <a:noFill/>
+          <a:ln w="0">
+            <a:noFill/>
+          </a:ln>
+        </p:spPr>
+        <p:txBody>
+          <a:bodyPr lIns="43200" rIns="43200" tIns="43200" bIns="43200" anchor="t">
+            <a:noAutofit/>
+          </a:bodyPr>
+          <a:p>
+            <a:r>
+              <a:rPr b="0" lang="en-US" sz="1050" spc="-1" strike="noStrike">
+                <a:solidFill>
+                  <a:srgbClr val="44515e"/>
+                </a:solidFill>
+                <a:latin typeface="Arial"/>
+              </a:rPr>
+              <a:t>3 repeats × 2 s</a:t>
+            </a:r>
+            <a:endParaRPr b="0" lang="en-US" sz="1050" spc="-1" strike="noStrike">
+              <a:solidFill>
+                <a:srgbClr val="44515e"/>
+              </a:solidFill>
+              <a:latin typeface="Arial"/>
+            </a:endParaRPr>
+          </a:p>
+        </p:txBody>
+      </p:sp>
+      <p:sp>
+        <p:nvSpPr>
+          <p:cNvPr id="427" name=""/>
+          <p:cNvSpPr txBox="1"/>
+          <p:nvPr/>
+        </p:nvSpPr>
+        <p:spPr>
+          <a:xfrm>
+            <a:off x="720000" y="4370400"/>
+            <a:ext cx="180000" cy="223920"/>
+          </a:xfrm>
+          <a:prstGeom prst="rect">
+            <a:avLst/>
+          </a:prstGeom>
+          <a:noFill/>
+          <a:ln w="0">
+            <a:noFill/>
+          </a:ln>
+        </p:spPr>
+        <p:txBody>
+          <a:bodyPr lIns="43200" rIns="43200" tIns="43200" bIns="43200" anchor="t">
+            <a:noAutofit/>
+          </a:bodyPr>
+          <a:p>
+            <a:r>
+              <a:rPr b="1" lang="en-US" sz="970" spc="-1" strike="noStrike">
+                <a:solidFill>
+                  <a:srgbClr val="167d8d"/>
+                </a:solidFill>
+                <a:latin typeface="Arial"/>
+              </a:rPr>
+              <a:t>●</a:t>
+            </a:r>
+            <a:endParaRPr b="1" lang="en-US" sz="970" spc="-1" strike="noStrike">
+              <a:solidFill>
+                <a:srgbClr val="167d8d"/>
+              </a:solidFill>
+              <a:latin typeface="Arial"/>
+            </a:endParaRPr>
+          </a:p>
+        </p:txBody>
+      </p:sp>
+      <p:sp>
+        <p:nvSpPr>
+          <p:cNvPr id="428" name=""/>
+          <p:cNvSpPr txBox="1"/>
+          <p:nvPr/>
+        </p:nvSpPr>
+        <p:spPr>
+          <a:xfrm>
+            <a:off x="918000" y="4356000"/>
+            <a:ext cx="10242000" cy="374400"/>
+          </a:xfrm>
+          <a:prstGeom prst="rect">
+            <a:avLst/>
+          </a:prstGeom>
+          <a:noFill/>
+          <a:ln w="0">
+            <a:noFill/>
+          </a:ln>
+        </p:spPr>
+        <p:txBody>
+          <a:bodyPr lIns="43200" rIns="43200" tIns="43200" bIns="43200" anchor="t">
+            <a:noAutofit/>
+          </a:bodyPr>
+          <a:p>
+            <a:r>
+              <a:rPr b="0" lang="en-US" sz="1170" spc="-1" strike="noStrike">
                 <a:solidFill>
                   <a:srgbClr val="17212b"/>
                 </a:solidFill>
                 <a:latin typeface="Arial"/>
               </a:rPr>
-              <a:t>Report repeatability, hysteresis, drift, confidence intervals, and failure limits.</a:t>
-            </a:r>
-            <a:endParaRPr b="0" lang="en-US" sz="1200" spc="-1" strike="noStrike">
+              <a:t>Workbook sheets: Metadata, Sensor_Map, Cases, Samples, Sensor_Summary.</a:t>
+            </a:r>
+            <a:endParaRPr b="0" lang="en-US" sz="1170" spc="-1" strike="noStrike">
+              <a:solidFill>
+                <a:srgbClr val="17212b"/>
+              </a:solidFill>
+              <a:latin typeface="Arial"/>
+            </a:endParaRPr>
+          </a:p>
+        </p:txBody>
+      </p:sp>
+      <p:sp>
+        <p:nvSpPr>
+          <p:cNvPr id="429" name=""/>
+          <p:cNvSpPr txBox="1"/>
+          <p:nvPr/>
+        </p:nvSpPr>
+        <p:spPr>
+          <a:xfrm>
+            <a:off x="720000" y="4748400"/>
+            <a:ext cx="180000" cy="223920"/>
+          </a:xfrm>
+          <a:prstGeom prst="rect">
+            <a:avLst/>
+          </a:prstGeom>
+          <a:noFill/>
+          <a:ln w="0">
+            <a:noFill/>
+          </a:ln>
+        </p:spPr>
+        <p:txBody>
+          <a:bodyPr lIns="43200" rIns="43200" tIns="43200" bIns="43200" anchor="t">
+            <a:noAutofit/>
+          </a:bodyPr>
+          <a:p>
+            <a:r>
+              <a:rPr b="1" lang="en-US" sz="970" spc="-1" strike="noStrike">
+                <a:solidFill>
+                  <a:srgbClr val="167d8d"/>
+                </a:solidFill>
+                <a:latin typeface="Arial"/>
+              </a:rPr>
+              <a:t>●</a:t>
+            </a:r>
+            <a:endParaRPr b="1" lang="en-US" sz="970" spc="-1" strike="noStrike">
+              <a:solidFill>
+                <a:srgbClr val="167d8d"/>
+              </a:solidFill>
+              <a:latin typeface="Arial"/>
+            </a:endParaRPr>
+          </a:p>
+        </p:txBody>
+      </p:sp>
+      <p:sp>
+        <p:nvSpPr>
+          <p:cNvPr id="430" name=""/>
+          <p:cNvSpPr txBox="1"/>
+          <p:nvPr/>
+        </p:nvSpPr>
+        <p:spPr>
+          <a:xfrm>
+            <a:off x="918000" y="4734000"/>
+            <a:ext cx="10242000" cy="374400"/>
+          </a:xfrm>
+          <a:prstGeom prst="rect">
+            <a:avLst/>
+          </a:prstGeom>
+          <a:noFill/>
+          <a:ln w="0">
+            <a:noFill/>
+          </a:ln>
+        </p:spPr>
+        <p:txBody>
+          <a:bodyPr lIns="43200" rIns="43200" tIns="43200" bIns="43200" anchor="t">
+            <a:noAutofit/>
+          </a:bodyPr>
+          <a:p>
+            <a:r>
+              <a:rPr b="0" lang="en-US" sz="1170" spc="-1" strike="noStrike">
+                <a:solidFill>
+                  <a:srgbClr val="17212b"/>
+                </a:solidFill>
+                <a:latin typeface="Arial"/>
+              </a:rPr>
+              <a:t>Every raw row preserves three commands, three measured poses, 18 voltages, and 18 validity flags.</a:t>
+            </a:r>
+            <a:endParaRPr b="0" lang="en-US" sz="1170" spc="-1" strike="noStrike">
+              <a:solidFill>
+                <a:srgbClr val="17212b"/>
+              </a:solidFill>
+              <a:latin typeface="Arial"/>
+            </a:endParaRPr>
+          </a:p>
+        </p:txBody>
+      </p:sp>
+      <p:sp>
+        <p:nvSpPr>
+          <p:cNvPr id="431" name=""/>
+          <p:cNvSpPr txBox="1"/>
+          <p:nvPr/>
+        </p:nvSpPr>
+        <p:spPr>
+          <a:xfrm>
+            <a:off x="720000" y="5126400"/>
+            <a:ext cx="180000" cy="223920"/>
+          </a:xfrm>
+          <a:prstGeom prst="rect">
+            <a:avLst/>
+          </a:prstGeom>
+          <a:noFill/>
+          <a:ln w="0">
+            <a:noFill/>
+          </a:ln>
+        </p:spPr>
+        <p:txBody>
+          <a:bodyPr lIns="43200" rIns="43200" tIns="43200" bIns="43200" anchor="t">
+            <a:noAutofit/>
+          </a:bodyPr>
+          <a:p>
+            <a:r>
+              <a:rPr b="1" lang="en-US" sz="970" spc="-1" strike="noStrike">
+                <a:solidFill>
+                  <a:srgbClr val="167d8d"/>
+                </a:solidFill>
+                <a:latin typeface="Arial"/>
+              </a:rPr>
+              <a:t>●</a:t>
+            </a:r>
+            <a:endParaRPr b="1" lang="en-US" sz="970" spc="-1" strike="noStrike">
+              <a:solidFill>
+                <a:srgbClr val="167d8d"/>
+              </a:solidFill>
+              <a:latin typeface="Arial"/>
+            </a:endParaRPr>
+          </a:p>
+        </p:txBody>
+      </p:sp>
+      <p:sp>
+        <p:nvSpPr>
+          <p:cNvPr id="432" name=""/>
+          <p:cNvSpPr txBox="1"/>
+          <p:nvPr/>
+        </p:nvSpPr>
+        <p:spPr>
+          <a:xfrm>
+            <a:off x="918000" y="5112000"/>
+            <a:ext cx="10242000" cy="374400"/>
+          </a:xfrm>
+          <a:prstGeom prst="rect">
+            <a:avLst/>
+          </a:prstGeom>
+          <a:noFill/>
+          <a:ln w="0">
+            <a:noFill/>
+          </a:ln>
+        </p:spPr>
+        <p:txBody>
+          <a:bodyPr lIns="43200" rIns="43200" tIns="43200" bIns="43200" anchor="t">
+            <a:noAutofit/>
+          </a:bodyPr>
+          <a:p>
+            <a:r>
+              <a:rPr b="0" lang="en-US" sz="1170" spc="-1" strike="noStrike">
+                <a:solidFill>
+                  <a:srgbClr val="17212b"/>
+                </a:solidFill>
+                <a:latin typeface="Arial"/>
+              </a:rPr>
+              <a:t>Full sweep completed: 61/61 cases and 1,220/1,220 synchronized rows.</a:t>
+            </a:r>
+            <a:endParaRPr b="0" lang="en-US" sz="1170" spc="-1" strike="noStrike">
+              <a:solidFill>
+                <a:srgbClr val="17212b"/>
+              </a:solidFill>
+              <a:latin typeface="Arial"/>
+            </a:endParaRPr>
+          </a:p>
+        </p:txBody>
+      </p:sp>
+      <p:sp>
+        <p:nvSpPr>
+          <p:cNvPr id="433" name=""/>
+          <p:cNvSpPr txBox="1"/>
+          <p:nvPr/>
+        </p:nvSpPr>
+        <p:spPr>
+          <a:xfrm>
+            <a:off x="720000" y="5504400"/>
+            <a:ext cx="180000" cy="223920"/>
+          </a:xfrm>
+          <a:prstGeom prst="rect">
+            <a:avLst/>
+          </a:prstGeom>
+          <a:noFill/>
+          <a:ln w="0">
+            <a:noFill/>
+          </a:ln>
+        </p:spPr>
+        <p:txBody>
+          <a:bodyPr lIns="43200" rIns="43200" tIns="43200" bIns="43200" anchor="t">
+            <a:noAutofit/>
+          </a:bodyPr>
+          <a:p>
+            <a:r>
+              <a:rPr b="1" lang="en-US" sz="970" spc="-1" strike="noStrike">
+                <a:solidFill>
+                  <a:srgbClr val="167d8d"/>
+                </a:solidFill>
+                <a:latin typeface="Arial"/>
+              </a:rPr>
+              <a:t>●</a:t>
+            </a:r>
+            <a:endParaRPr b="1" lang="en-US" sz="970" spc="-1" strike="noStrike">
+              <a:solidFill>
+                <a:srgbClr val="167d8d"/>
+              </a:solidFill>
+              <a:latin typeface="Arial"/>
+            </a:endParaRPr>
+          </a:p>
+        </p:txBody>
+      </p:sp>
+      <p:sp>
+        <p:nvSpPr>
+          <p:cNvPr id="434" name=""/>
+          <p:cNvSpPr txBox="1"/>
+          <p:nvPr/>
+        </p:nvSpPr>
+        <p:spPr>
+          <a:xfrm>
+            <a:off x="918000" y="5490000"/>
+            <a:ext cx="10242000" cy="374400"/>
+          </a:xfrm>
+          <a:prstGeom prst="rect">
+            <a:avLst/>
+          </a:prstGeom>
+          <a:noFill/>
+          <a:ln w="0">
+            <a:noFill/>
+          </a:ln>
+        </p:spPr>
+        <p:txBody>
+          <a:bodyPr lIns="43200" rIns="43200" tIns="43200" bIns="43200" anchor="t">
+            <a:noAutofit/>
+          </a:bodyPr>
+          <a:p>
+            <a:r>
+              <a:rPr b="0" lang="en-US" sz="1170" spc="-1" strike="noStrike">
+                <a:solidFill>
+                  <a:srgbClr val="17212b"/>
+                </a:solidFill>
+                <a:latin typeface="Arial"/>
+              </a:rPr>
+              <a:t>68.10% of 21,960 validity observations were nominal; 83 non-finite voltages remain blank and flagged.</a:t>
+            </a:r>
+            <a:endParaRPr b="0" lang="en-US" sz="1170" spc="-1" strike="noStrike">
+              <a:solidFill>
+                <a:srgbClr val="17212b"/>
+              </a:solidFill>
+              <a:latin typeface="Arial"/>
+            </a:endParaRPr>
+          </a:p>
+        </p:txBody>
+      </p:sp>
+      <p:sp>
+        <p:nvSpPr>
+          <p:cNvPr id="435" name=""/>
+          <p:cNvSpPr txBox="1"/>
+          <p:nvPr/>
+        </p:nvSpPr>
+        <p:spPr>
+          <a:xfrm>
+            <a:off x="720000" y="5882400"/>
+            <a:ext cx="180000" cy="223920"/>
+          </a:xfrm>
+          <a:prstGeom prst="rect">
+            <a:avLst/>
+          </a:prstGeom>
+          <a:noFill/>
+          <a:ln w="0">
+            <a:noFill/>
+          </a:ln>
+        </p:spPr>
+        <p:txBody>
+          <a:bodyPr lIns="43200" rIns="43200" tIns="43200" bIns="43200" anchor="t">
+            <a:noAutofit/>
+          </a:bodyPr>
+          <a:p>
+            <a:r>
+              <a:rPr b="1" lang="en-US" sz="970" spc="-1" strike="noStrike">
+                <a:solidFill>
+                  <a:srgbClr val="167d8d"/>
+                </a:solidFill>
+                <a:latin typeface="Arial"/>
+              </a:rPr>
+              <a:t>●</a:t>
+            </a:r>
+            <a:endParaRPr b="1" lang="en-US" sz="970" spc="-1" strike="noStrike">
+              <a:solidFill>
+                <a:srgbClr val="167d8d"/>
+              </a:solidFill>
+              <a:latin typeface="Arial"/>
+            </a:endParaRPr>
+          </a:p>
+        </p:txBody>
+      </p:sp>
+      <p:sp>
+        <p:nvSpPr>
+          <p:cNvPr id="436" name=""/>
+          <p:cNvSpPr txBox="1"/>
+          <p:nvPr/>
+        </p:nvSpPr>
+        <p:spPr>
+          <a:xfrm>
+            <a:off x="918000" y="5868000"/>
+            <a:ext cx="10242000" cy="374400"/>
+          </a:xfrm>
+          <a:prstGeom prst="rect">
+            <a:avLst/>
+          </a:prstGeom>
+          <a:noFill/>
+          <a:ln w="0">
+            <a:noFill/>
+          </a:ln>
+        </p:spPr>
+        <p:txBody>
+          <a:bodyPr lIns="43200" rIns="43200" tIns="43200" bIns="43200" anchor="t">
+            <a:noAutofit/>
+          </a:bodyPr>
+          <a:p>
+            <a:r>
+              <a:rPr b="0" lang="en-US" sz="1170" spc="-1" strike="noStrike">
+                <a:solidFill>
+                  <a:srgbClr val="17212b"/>
+                </a:solidFill>
+                <a:latin typeface="Arial"/>
+              </a:rPr>
+              <a:t>Voltage remains pose-derived simulation output; physical calibration is still required.</a:t>
+            </a:r>
+            <a:endParaRPr b="0" lang="en-US" sz="1170" spc="-1" strike="noStrike">
               <a:solidFill>
                 <a:srgbClr val="17212b"/>
               </a:solidFill>
@@ -10290,7 +11018,7 @@
       </p:grpSpPr>
       <p:sp>
         <p:nvSpPr>
-          <p:cNvPr id="420" name=""/>
+          <p:cNvPr id="437" name=""/>
           <p:cNvSpPr/>
           <p:nvPr/>
         </p:nvSpPr>
@@ -10315,7 +11043,7 @@
       </p:sp>
       <p:sp>
         <p:nvSpPr>
-          <p:cNvPr id="421" name=""/>
+          <p:cNvPr id="438" name=""/>
           <p:cNvSpPr/>
           <p:nvPr/>
         </p:nvSpPr>
@@ -10340,7 +11068,7 @@
       </p:sp>
       <p:sp>
         <p:nvSpPr>
-          <p:cNvPr id="422" name=""/>
+          <p:cNvPr id="439" name=""/>
           <p:cNvSpPr txBox="1"/>
           <p:nvPr/>
         </p:nvSpPr>
@@ -10369,7 +11097,7 @@
                 </a:solidFill>
                 <a:latin typeface="Arial"/>
               </a:rPr>
-              <a:t>Current Outcome</a:t>
+              <a:t>Next Research Steps</a:t>
             </a:r>
             <a:endParaRPr b="1" lang="en-US" sz="2400" spc="-1" strike="noStrike">
               <a:solidFill>
@@ -10382,7 +11110,7 @@
       </p:sp>
       <p:sp>
         <p:nvSpPr>
-          <p:cNvPr id="423" name=""/>
+          <p:cNvPr id="440" name=""/>
           <p:cNvSpPr/>
           <p:nvPr/>
         </p:nvSpPr>
@@ -10410,7 +11138,7 @@
       </p:sp>
       <p:sp>
         <p:nvSpPr>
-          <p:cNvPr id="424" name=""/>
+          <p:cNvPr id="441" name=""/>
           <p:cNvSpPr txBox="1"/>
           <p:nvPr/>
         </p:nvSpPr>
@@ -10442,7 +11170,7 @@
                 </a:solidFill>
                 <a:latin typeface="Arial"/>
               </a:rPr>
-              <a:t>CONCLUSION</a:t>
+              <a:t>FORWARD PLAN</a:t>
             </a:r>
             <a:endParaRPr b="1" lang="en-US" sz="800" spc="-1" strike="noStrike">
               <a:solidFill>
@@ -10455,7 +11183,7 @@
       </p:sp>
       <p:sp>
         <p:nvSpPr>
-          <p:cNvPr id="425" name=""/>
+          <p:cNvPr id="442" name=""/>
           <p:cNvSpPr txBox="1"/>
           <p:nvPr/>
         </p:nvSpPr>
@@ -10497,7 +11225,7 @@
       </p:sp>
       <p:sp>
         <p:nvSpPr>
-          <p:cNvPr id="426" name=""/>
+          <p:cNvPr id="443" name=""/>
           <p:cNvSpPr txBox="1"/>
           <p:nvPr/>
         </p:nvSpPr>
@@ -10542,14 +11270,39 @@
       </p:sp>
       <p:sp>
         <p:nvSpPr>
-          <p:cNvPr id="427" name=""/>
-          <p:cNvSpPr txBox="1"/>
-          <p:nvPr/>
-        </p:nvSpPr>
-        <p:spPr>
-          <a:xfrm>
-            <a:off x="720000" y="1116000"/>
-            <a:ext cx="10620000" cy="440280"/>
+          <p:cNvPr id="444" name=""/>
+          <p:cNvSpPr/>
+          <p:nvPr/>
+        </p:nvSpPr>
+        <p:spPr>
+          <a:xfrm>
+            <a:off x="468000" y="954000"/>
+            <a:ext cx="720000" cy="630000"/>
+          </a:xfrm>
+          <a:prstGeom prst="roundRect">
+            <a:avLst/>
+          </a:prstGeom>
+          <a:solidFill>
+            <a:srgbClr val="500000"/>
+          </a:solidFill>
+          <a:ln w="7200">
+            <a:solidFill>
+              <a:srgbClr val="500000"/>
+            </a:solidFill>
+            <a:round/>
+          </a:ln>
+        </p:spPr>
+      </p:sp>
+      <p:sp>
+        <p:nvSpPr>
+          <p:cNvPr id="445" name=""/>
+          <p:cNvSpPr txBox="1"/>
+          <p:nvPr/>
+        </p:nvSpPr>
+        <p:spPr>
+          <a:xfrm>
+            <a:off x="486000" y="1090800"/>
+            <a:ext cx="684000" cy="384120"/>
           </a:xfrm>
           <a:prstGeom prst="rect">
             <a:avLst/>
@@ -10568,15 +11321,57 @@
               <a:buNone/>
             </a:pPr>
             <a:r>
-              <a:rPr b="1" lang="en-US" sz="2500" spc="-1" strike="noStrike">
+              <a:rPr b="1" lang="en-US" sz="2100" spc="-1" strike="noStrike">
+                <a:solidFill>
+                  <a:srgbClr val="ffffff"/>
+                </a:solidFill>
+                <a:latin typeface="Arial"/>
+              </a:rPr>
+              <a:t>01</a:t>
+            </a:r>
+            <a:endParaRPr b="1" lang="en-US" sz="2100" spc="-1" strike="noStrike">
+              <a:solidFill>
+                <a:srgbClr val="ffffff"/>
+              </a:solidFill>
+              <a:latin typeface="Arial"/>
+            </a:endParaRPr>
+          </a:p>
+        </p:txBody>
+      </p:sp>
+      <p:sp>
+        <p:nvSpPr>
+          <p:cNvPr id="446" name=""/>
+          <p:cNvSpPr txBox="1"/>
+          <p:nvPr/>
+        </p:nvSpPr>
+        <p:spPr>
+          <a:xfrm>
+            <a:off x="1368000" y="997200"/>
+            <a:ext cx="2592000" cy="446400"/>
+          </a:xfrm>
+          <a:prstGeom prst="rect">
+            <a:avLst/>
+          </a:prstGeom>
+          <a:noFill/>
+          <a:ln w="0">
+            <a:noFill/>
+          </a:ln>
+        </p:spPr>
+        <p:txBody>
+          <a:bodyPr lIns="43200" rIns="43200" tIns="43200" bIns="43200" anchor="t">
+            <a:noAutofit/>
+          </a:bodyPr>
+          <a:p>
+            <a:r>
+              <a:rPr b="1" lang="en-US" sz="1450" spc="-1" strike="noStrike">
                 <a:solidFill>
                   <a:srgbClr val="500000"/>
                 </a:solidFill>
                 <a:latin typeface="Arial"/>
               </a:rPr>
-              <a:t>A reproducible six-disc research platform now connects</a:t>
-            </a:r>
-            <a:endParaRPr b="1" lang="en-US" sz="2500" spc="-1" strike="noStrike">
+              <a:t>Physical gauge selection</a:t>
+            </a:r>
+            <a:endParaRPr b="1" lang="en-US" sz="1450" spc="-1" strike="noStrike">
               <a:solidFill>
                 <a:srgbClr val="500000"/>
               </a:solidFill>
@@ -10587,80 +11382,38 @@
       </p:sp>
       <p:sp>
         <p:nvSpPr>
-          <p:cNvPr id="428" name=""/>
-          <p:cNvSpPr txBox="1"/>
-          <p:nvPr/>
-        </p:nvSpPr>
-        <p:spPr>
-          <a:xfrm>
-            <a:off x="1440000" y="1800000"/>
-            <a:ext cx="2160000" cy="257400"/>
-          </a:xfrm>
-          <a:prstGeom prst="rect">
-            <a:avLst/>
-          </a:prstGeom>
-          <a:noFill/>
-          <a:ln w="0">
-            <a:noFill/>
-          </a:ln>
-        </p:spPr>
-        <p:txBody>
-          <a:bodyPr lIns="43200" rIns="43200" tIns="43200" bIns="43200" anchor="t">
-            <a:noAutofit/>
-          </a:bodyPr>
-          <a:p>
-            <a:r>
-              <a:rPr b="1" lang="en-US" sz="1200" spc="-1" strike="noStrike">
-                <a:solidFill>
-                  <a:srgbClr val="167d8d"/>
-                </a:solidFill>
-                <a:latin typeface="Arial"/>
-              </a:rPr>
-              <a:t>CONTROL</a:t>
-            </a:r>
-            <a:endParaRPr b="1" lang="en-US" sz="1200" spc="-1" strike="noStrike">
-              <a:solidFill>
-                <a:srgbClr val="167d8d"/>
-              </a:solidFill>
-              <a:latin typeface="Arial"/>
-            </a:endParaRPr>
-          </a:p>
-        </p:txBody>
-      </p:sp>
-      <p:sp>
-        <p:nvSpPr>
-          <p:cNvPr id="429" name=""/>
-          <p:cNvSpPr txBox="1"/>
-          <p:nvPr/>
-        </p:nvSpPr>
-        <p:spPr>
-          <a:xfrm>
-            <a:off x="3672000" y="1771200"/>
-            <a:ext cx="6840000" cy="329040"/>
-          </a:xfrm>
-          <a:prstGeom prst="rect">
-            <a:avLst/>
-          </a:prstGeom>
-          <a:noFill/>
-          <a:ln w="0">
-            <a:noFill/>
-          </a:ln>
-        </p:spPr>
-        <p:txBody>
-          <a:bodyPr lIns="43200" rIns="43200" tIns="43200" bIns="43200" anchor="t">
-            <a:noAutofit/>
-          </a:bodyPr>
-          <a:p>
-            <a:r>
-              <a:rPr b="0" lang="en-US" sz="1700" spc="-1" strike="noStrike">
+          <p:cNvPr id="447" name=""/>
+          <p:cNvSpPr txBox="1"/>
+          <p:nvPr/>
+        </p:nvSpPr>
+        <p:spPr>
+          <a:xfrm>
+            <a:off x="4104000" y="997200"/>
+            <a:ext cx="7164000" cy="464400"/>
+          </a:xfrm>
+          <a:prstGeom prst="rect">
+            <a:avLst/>
+          </a:prstGeom>
+          <a:noFill/>
+          <a:ln w="0">
+            <a:noFill/>
+          </a:ln>
+        </p:spPr>
+        <p:txBody>
+          <a:bodyPr lIns="43200" rIns="43200" tIns="43200" bIns="43200" anchor="t">
+            <a:noAutofit/>
+          </a:bodyPr>
+          <a:p>
+            <a:r>
+              <a:rPr b="0" lang="en-US" sz="1200" spc="-1" strike="noStrike">
                 <a:solidFill>
                   <a:srgbClr val="17212b"/>
                 </a:solidFill>
                 <a:latin typeface="Arial"/>
               </a:rPr>
-              <a:t>Position + calibrated torque admittance</a:t>
-            </a:r>
-            <a:endParaRPr b="0" lang="en-US" sz="1700" spc="-1" strike="noStrike">
+              <a:t>Choose a commercial gauge, substrate, adhesive, and temperature compensation strategy.</a:t>
+            </a:r>
+            <a:endParaRPr b="0" lang="en-US" sz="1200" spc="-1" strike="noStrike">
               <a:solidFill>
                 <a:srgbClr val="17212b"/>
               </a:solidFill>
@@ -10671,21 +11424,759 @@
       </p:sp>
       <p:sp>
         <p:nvSpPr>
-          <p:cNvPr id="430" name=""/>
+          <p:cNvPr id="448" name=""/>
           <p:cNvSpPr/>
           <p:nvPr/>
         </p:nvSpPr>
         <p:spPr>
           <a:xfrm>
-            <a:off x="1440000" y="2178000"/>
-            <a:ext cx="9072000" cy="0"/>
-          </a:xfrm>
-          <a:prstGeom prst="line">
-            <a:avLst/>
-          </a:prstGeom>
+            <a:off x="468000" y="1944000"/>
+            <a:ext cx="720000" cy="630000"/>
+          </a:xfrm>
+          <a:prstGeom prst="roundRect">
+            <a:avLst/>
+          </a:prstGeom>
+          <a:solidFill>
+            <a:srgbClr val="500000"/>
+          </a:solidFill>
           <a:ln w="7200">
             <a:solidFill>
-              <a:srgbClr val="d7d2cc"/>
+              <a:srgbClr val="500000"/>
+            </a:solidFill>
+            <a:round/>
+          </a:ln>
+        </p:spPr>
+      </p:sp>
+      <p:sp>
+        <p:nvSpPr>
+          <p:cNvPr id="449" name=""/>
+          <p:cNvSpPr txBox="1"/>
+          <p:nvPr/>
+        </p:nvSpPr>
+        <p:spPr>
+          <a:xfrm>
+            <a:off x="486000" y="2080800"/>
+            <a:ext cx="684000" cy="384120"/>
+          </a:xfrm>
+          <a:prstGeom prst="rect">
+            <a:avLst/>
+          </a:prstGeom>
+          <a:noFill/>
+          <a:ln w="0">
+            <a:noFill/>
+          </a:ln>
+        </p:spPr>
+        <p:txBody>
+          <a:bodyPr lIns="43200" rIns="43200" tIns="43200" bIns="43200" anchor="t">
+            <a:noAutofit/>
+          </a:bodyPr>
+          <a:p>
+            <a:pPr algn="r">
+              <a:buNone/>
+            </a:pPr>
+            <a:r>
+              <a:rPr b="1" lang="en-US" sz="2100" spc="-1" strike="noStrike">
+                <a:solidFill>
+                  <a:srgbClr val="ffffff"/>
+                </a:solidFill>
+                <a:latin typeface="Arial"/>
+              </a:rPr>
+              <a:t>02</a:t>
+            </a:r>
+            <a:endParaRPr b="1" lang="en-US" sz="2100" spc="-1" strike="noStrike">
+              <a:solidFill>
+                <a:srgbClr val="ffffff"/>
+              </a:solidFill>
+              <a:latin typeface="Arial"/>
+            </a:endParaRPr>
+          </a:p>
+        </p:txBody>
+      </p:sp>
+      <p:sp>
+        <p:nvSpPr>
+          <p:cNvPr id="450" name=""/>
+          <p:cNvSpPr txBox="1"/>
+          <p:nvPr/>
+        </p:nvSpPr>
+        <p:spPr>
+          <a:xfrm>
+            <a:off x="1368000" y="1987200"/>
+            <a:ext cx="2592000" cy="446400"/>
+          </a:xfrm>
+          <a:prstGeom prst="rect">
+            <a:avLst/>
+          </a:prstGeom>
+          <a:noFill/>
+          <a:ln w="0">
+            <a:noFill/>
+          </a:ln>
+        </p:spPr>
+        <p:txBody>
+          <a:bodyPr lIns="43200" rIns="43200" tIns="43200" bIns="43200" anchor="t">
+            <a:noAutofit/>
+          </a:bodyPr>
+          <a:p>
+            <a:r>
+              <a:rPr b="1" lang="en-US" sz="1450" spc="-1" strike="noStrike">
+                <a:solidFill>
+                  <a:srgbClr val="500000"/>
+                </a:solidFill>
+                <a:latin typeface="Arial"/>
+              </a:rPr>
+              <a:t>Bench calibration</a:t>
+            </a:r>
+            <a:endParaRPr b="1" lang="en-US" sz="1450" spc="-1" strike="noStrike">
+              <a:solidFill>
+                <a:srgbClr val="500000"/>
+              </a:solidFill>
+              <a:latin typeface="Arial"/>
+            </a:endParaRPr>
+          </a:p>
+        </p:txBody>
+      </p:sp>
+      <p:sp>
+        <p:nvSpPr>
+          <p:cNvPr id="451" name=""/>
+          <p:cNvSpPr txBox="1"/>
+          <p:nvPr/>
+        </p:nvSpPr>
+        <p:spPr>
+          <a:xfrm>
+            <a:off x="4104000" y="1987200"/>
+            <a:ext cx="7164000" cy="464400"/>
+          </a:xfrm>
+          <a:prstGeom prst="rect">
+            <a:avLst/>
+          </a:prstGeom>
+          <a:noFill/>
+          <a:ln w="0">
+            <a:noFill/>
+          </a:ln>
+        </p:spPr>
+        <p:txBody>
+          <a:bodyPr lIns="43200" rIns="43200" tIns="43200" bIns="43200" anchor="t">
+            <a:noAutofit/>
+          </a:bodyPr>
+          <a:p>
+            <a:r>
+              <a:rPr b="0" lang="en-US" sz="1200" spc="-1" strike="noStrike">
+                <a:solidFill>
+                  <a:srgbClr val="17212b"/>
+                </a:solidFill>
+                <a:latin typeface="Arial"/>
+              </a:rPr>
+              <a:t>Measure real strain and bridge voltage against known curvature and loading.</a:t>
+            </a:r>
+            <a:endParaRPr b="0" lang="en-US" sz="1200" spc="-1" strike="noStrike">
+              <a:solidFill>
+                <a:srgbClr val="17212b"/>
+              </a:solidFill>
+              <a:latin typeface="Arial"/>
+            </a:endParaRPr>
+          </a:p>
+        </p:txBody>
+      </p:sp>
+      <p:sp>
+        <p:nvSpPr>
+          <p:cNvPr id="452" name=""/>
+          <p:cNvSpPr/>
+          <p:nvPr/>
+        </p:nvSpPr>
+        <p:spPr>
+          <a:xfrm>
+            <a:off x="468000" y="2934000"/>
+            <a:ext cx="720000" cy="630000"/>
+          </a:xfrm>
+          <a:prstGeom prst="roundRect">
+            <a:avLst/>
+          </a:prstGeom>
+          <a:solidFill>
+            <a:srgbClr val="500000"/>
+          </a:solidFill>
+          <a:ln w="7200">
+            <a:solidFill>
+              <a:srgbClr val="500000"/>
+            </a:solidFill>
+            <a:round/>
+          </a:ln>
+        </p:spPr>
+      </p:sp>
+      <p:sp>
+        <p:nvSpPr>
+          <p:cNvPr id="453" name=""/>
+          <p:cNvSpPr txBox="1"/>
+          <p:nvPr/>
+        </p:nvSpPr>
+        <p:spPr>
+          <a:xfrm>
+            <a:off x="486000" y="3070800"/>
+            <a:ext cx="684000" cy="384120"/>
+          </a:xfrm>
+          <a:prstGeom prst="rect">
+            <a:avLst/>
+          </a:prstGeom>
+          <a:noFill/>
+          <a:ln w="0">
+            <a:noFill/>
+          </a:ln>
+        </p:spPr>
+        <p:txBody>
+          <a:bodyPr lIns="43200" rIns="43200" tIns="43200" bIns="43200" anchor="t">
+            <a:noAutofit/>
+          </a:bodyPr>
+          <a:p>
+            <a:pPr algn="r">
+              <a:buNone/>
+            </a:pPr>
+            <a:r>
+              <a:rPr b="1" lang="en-US" sz="2100" spc="-1" strike="noStrike">
+                <a:solidFill>
+                  <a:srgbClr val="ffffff"/>
+                </a:solidFill>
+                <a:latin typeface="Arial"/>
+              </a:rPr>
+              <a:t>03</a:t>
+            </a:r>
+            <a:endParaRPr b="1" lang="en-US" sz="2100" spc="-1" strike="noStrike">
+              <a:solidFill>
+                <a:srgbClr val="ffffff"/>
+              </a:solidFill>
+              <a:latin typeface="Arial"/>
+            </a:endParaRPr>
+          </a:p>
+        </p:txBody>
+      </p:sp>
+      <p:sp>
+        <p:nvSpPr>
+          <p:cNvPr id="454" name=""/>
+          <p:cNvSpPr txBox="1"/>
+          <p:nvPr/>
+        </p:nvSpPr>
+        <p:spPr>
+          <a:xfrm>
+            <a:off x="1368000" y="2977200"/>
+            <a:ext cx="2592000" cy="501480"/>
+          </a:xfrm>
+          <a:prstGeom prst="rect">
+            <a:avLst/>
+          </a:prstGeom>
+          <a:noFill/>
+          <a:ln w="0">
+            <a:noFill/>
+          </a:ln>
+        </p:spPr>
+        <p:txBody>
+          <a:bodyPr lIns="43200" rIns="43200" tIns="43200" bIns="43200" anchor="t">
+            <a:noAutofit/>
+          </a:bodyPr>
+          <a:p>
+            <a:r>
+              <a:rPr b="1" lang="en-US" sz="1450" spc="-1" strike="noStrike">
+                <a:solidFill>
+                  <a:srgbClr val="500000"/>
+                </a:solidFill>
+                <a:latin typeface="Arial"/>
+              </a:rPr>
+              <a:t>Independent shape validation</a:t>
+            </a:r>
+            <a:endParaRPr b="1" lang="en-US" sz="1450" spc="-1" strike="noStrike">
+              <a:solidFill>
+                <a:srgbClr val="500000"/>
+              </a:solidFill>
+              <a:latin typeface="Arial"/>
+            </a:endParaRPr>
+          </a:p>
+        </p:txBody>
+      </p:sp>
+      <p:sp>
+        <p:nvSpPr>
+          <p:cNvPr id="455" name=""/>
+          <p:cNvSpPr txBox="1"/>
+          <p:nvPr/>
+        </p:nvSpPr>
+        <p:spPr>
+          <a:xfrm>
+            <a:off x="4104000" y="2977200"/>
+            <a:ext cx="7164000" cy="464400"/>
+          </a:xfrm>
+          <a:prstGeom prst="rect">
+            <a:avLst/>
+          </a:prstGeom>
+          <a:noFill/>
+          <a:ln w="0">
+            <a:noFill/>
+          </a:ln>
+        </p:spPr>
+        <p:txBody>
+          <a:bodyPr lIns="43200" rIns="43200" tIns="43200" bIns="43200" anchor="t">
+            <a:noAutofit/>
+          </a:bodyPr>
+          <a:p>
+            <a:r>
+              <a:rPr b="0" lang="en-US" sz="1200" spc="-1" strike="noStrike">
+                <a:solidFill>
+                  <a:srgbClr val="17212b"/>
+                </a:solidFill>
+                <a:latin typeface="Arial"/>
+              </a:rPr>
+              <a:t>Compare reconstructed curvature with motion capture or vision—not the same pose source.</a:t>
+            </a:r>
+            <a:endParaRPr b="0" lang="en-US" sz="1200" spc="-1" strike="noStrike">
+              <a:solidFill>
+                <a:srgbClr val="17212b"/>
+              </a:solidFill>
+              <a:latin typeface="Arial"/>
+            </a:endParaRPr>
+          </a:p>
+        </p:txBody>
+      </p:sp>
+      <p:sp>
+        <p:nvSpPr>
+          <p:cNvPr id="456" name=""/>
+          <p:cNvSpPr/>
+          <p:nvPr/>
+        </p:nvSpPr>
+        <p:spPr>
+          <a:xfrm>
+            <a:off x="468000" y="3924000"/>
+            <a:ext cx="720000" cy="630000"/>
+          </a:xfrm>
+          <a:prstGeom prst="roundRect">
+            <a:avLst/>
+          </a:prstGeom>
+          <a:solidFill>
+            <a:srgbClr val="500000"/>
+          </a:solidFill>
+          <a:ln w="7200">
+            <a:solidFill>
+              <a:srgbClr val="500000"/>
+            </a:solidFill>
+            <a:round/>
+          </a:ln>
+        </p:spPr>
+      </p:sp>
+      <p:sp>
+        <p:nvSpPr>
+          <p:cNvPr id="457" name=""/>
+          <p:cNvSpPr txBox="1"/>
+          <p:nvPr/>
+        </p:nvSpPr>
+        <p:spPr>
+          <a:xfrm>
+            <a:off x="486000" y="4060800"/>
+            <a:ext cx="684000" cy="384120"/>
+          </a:xfrm>
+          <a:prstGeom prst="rect">
+            <a:avLst/>
+          </a:prstGeom>
+          <a:noFill/>
+          <a:ln w="0">
+            <a:noFill/>
+          </a:ln>
+        </p:spPr>
+        <p:txBody>
+          <a:bodyPr lIns="43200" rIns="43200" tIns="43200" bIns="43200" anchor="t">
+            <a:noAutofit/>
+          </a:bodyPr>
+          <a:p>
+            <a:pPr algn="r">
+              <a:buNone/>
+            </a:pPr>
+            <a:r>
+              <a:rPr b="1" lang="en-US" sz="2100" spc="-1" strike="noStrike">
+                <a:solidFill>
+                  <a:srgbClr val="ffffff"/>
+                </a:solidFill>
+                <a:latin typeface="Arial"/>
+              </a:rPr>
+              <a:t>04</a:t>
+            </a:r>
+            <a:endParaRPr b="1" lang="en-US" sz="2100" spc="-1" strike="noStrike">
+              <a:solidFill>
+                <a:srgbClr val="ffffff"/>
+              </a:solidFill>
+              <a:latin typeface="Arial"/>
+            </a:endParaRPr>
+          </a:p>
+        </p:txBody>
+      </p:sp>
+      <p:sp>
+        <p:nvSpPr>
+          <p:cNvPr id="458" name=""/>
+          <p:cNvSpPr txBox="1"/>
+          <p:nvPr/>
+        </p:nvSpPr>
+        <p:spPr>
+          <a:xfrm>
+            <a:off x="1368000" y="3967200"/>
+            <a:ext cx="2592000" cy="501480"/>
+          </a:xfrm>
+          <a:prstGeom prst="rect">
+            <a:avLst/>
+          </a:prstGeom>
+          <a:noFill/>
+          <a:ln w="0">
+            <a:noFill/>
+          </a:ln>
+        </p:spPr>
+        <p:txBody>
+          <a:bodyPr lIns="43200" rIns="43200" tIns="43200" bIns="43200" anchor="t">
+            <a:noAutofit/>
+          </a:bodyPr>
+          <a:p>
+            <a:r>
+              <a:rPr b="1" lang="en-US" sz="1450" spc="-1" strike="noStrike">
+                <a:solidFill>
+                  <a:srgbClr val="500000"/>
+                </a:solidFill>
+                <a:latin typeface="Arial"/>
+              </a:rPr>
+              <a:t>Loaded and directional trials</a:t>
+            </a:r>
+            <a:endParaRPr b="1" lang="en-US" sz="1450" spc="-1" strike="noStrike">
+              <a:solidFill>
+                <a:srgbClr val="500000"/>
+              </a:solidFill>
+              <a:latin typeface="Arial"/>
+            </a:endParaRPr>
+          </a:p>
+        </p:txBody>
+      </p:sp>
+      <p:sp>
+        <p:nvSpPr>
+          <p:cNvPr id="459" name=""/>
+          <p:cNvSpPr txBox="1"/>
+          <p:nvPr/>
+        </p:nvSpPr>
+        <p:spPr>
+          <a:xfrm>
+            <a:off x="4104000" y="3967200"/>
+            <a:ext cx="7164000" cy="464400"/>
+          </a:xfrm>
+          <a:prstGeom prst="rect">
+            <a:avLst/>
+          </a:prstGeom>
+          <a:noFill/>
+          <a:ln w="0">
+            <a:noFill/>
+          </a:ln>
+        </p:spPr>
+        <p:txBody>
+          <a:bodyPr lIns="43200" rIns="43200" tIns="43200" bIns="43200" anchor="t">
+            <a:noAutofit/>
+          </a:bodyPr>
+          <a:p>
+            <a:r>
+              <a:rPr b="0" lang="en-US" sz="1200" spc="-1" strike="noStrike">
+                <a:solidFill>
+                  <a:srgbClr val="17212b"/>
+                </a:solidFill>
+                <a:latin typeface="Arial"/>
+              </a:rPr>
+              <a:t>Repeat across θ, negative torque, payloads, disturbances, and repeated cycles.</a:t>
+            </a:r>
+            <a:endParaRPr b="0" lang="en-US" sz="1200" spc="-1" strike="noStrike">
+              <a:solidFill>
+                <a:srgbClr val="17212b"/>
+              </a:solidFill>
+              <a:latin typeface="Arial"/>
+            </a:endParaRPr>
+          </a:p>
+        </p:txBody>
+      </p:sp>
+      <p:sp>
+        <p:nvSpPr>
+          <p:cNvPr id="460" name=""/>
+          <p:cNvSpPr/>
+          <p:nvPr/>
+        </p:nvSpPr>
+        <p:spPr>
+          <a:xfrm>
+            <a:off x="468000" y="4914000"/>
+            <a:ext cx="720000" cy="630000"/>
+          </a:xfrm>
+          <a:prstGeom prst="roundRect">
+            <a:avLst/>
+          </a:prstGeom>
+          <a:solidFill>
+            <a:srgbClr val="500000"/>
+          </a:solidFill>
+          <a:ln w="7200">
+            <a:solidFill>
+              <a:srgbClr val="500000"/>
+            </a:solidFill>
+            <a:round/>
+          </a:ln>
+        </p:spPr>
+      </p:sp>
+      <p:sp>
+        <p:nvSpPr>
+          <p:cNvPr id="461" name=""/>
+          <p:cNvSpPr txBox="1"/>
+          <p:nvPr/>
+        </p:nvSpPr>
+        <p:spPr>
+          <a:xfrm>
+            <a:off x="486000" y="5050800"/>
+            <a:ext cx="684000" cy="384120"/>
+          </a:xfrm>
+          <a:prstGeom prst="rect">
+            <a:avLst/>
+          </a:prstGeom>
+          <a:noFill/>
+          <a:ln w="0">
+            <a:noFill/>
+          </a:ln>
+        </p:spPr>
+        <p:txBody>
+          <a:bodyPr lIns="43200" rIns="43200" tIns="43200" bIns="43200" anchor="t">
+            <a:noAutofit/>
+          </a:bodyPr>
+          <a:p>
+            <a:pPr algn="r">
+              <a:buNone/>
+            </a:pPr>
+            <a:r>
+              <a:rPr b="1" lang="en-US" sz="2100" spc="-1" strike="noStrike">
+                <a:solidFill>
+                  <a:srgbClr val="ffffff"/>
+                </a:solidFill>
+                <a:latin typeface="Arial"/>
+              </a:rPr>
+              <a:t>05</a:t>
+            </a:r>
+            <a:endParaRPr b="1" lang="en-US" sz="2100" spc="-1" strike="noStrike">
+              <a:solidFill>
+                <a:srgbClr val="ffffff"/>
+              </a:solidFill>
+              <a:latin typeface="Arial"/>
+            </a:endParaRPr>
+          </a:p>
+        </p:txBody>
+      </p:sp>
+      <p:sp>
+        <p:nvSpPr>
+          <p:cNvPr id="462" name=""/>
+          <p:cNvSpPr txBox="1"/>
+          <p:nvPr/>
+        </p:nvSpPr>
+        <p:spPr>
+          <a:xfrm>
+            <a:off x="1368000" y="4957200"/>
+            <a:ext cx="2592000" cy="446400"/>
+          </a:xfrm>
+          <a:prstGeom prst="rect">
+            <a:avLst/>
+          </a:prstGeom>
+          <a:noFill/>
+          <a:ln w="0">
+            <a:noFill/>
+          </a:ln>
+        </p:spPr>
+        <p:txBody>
+          <a:bodyPr lIns="43200" rIns="43200" tIns="43200" bIns="43200" anchor="t">
+            <a:noAutofit/>
+          </a:bodyPr>
+          <a:p>
+            <a:r>
+              <a:rPr b="1" lang="en-US" sz="1450" spc="-1" strike="noStrike">
+                <a:solidFill>
+                  <a:srgbClr val="500000"/>
+                </a:solidFill>
+                <a:latin typeface="Arial"/>
+              </a:rPr>
+              <a:t>Uncertainty and statistics</a:t>
+            </a:r>
+            <a:endParaRPr b="1" lang="en-US" sz="1450" spc="-1" strike="noStrike">
+              <a:solidFill>
+                <a:srgbClr val="500000"/>
+              </a:solidFill>
+              <a:latin typeface="Arial"/>
+            </a:endParaRPr>
+          </a:p>
+        </p:txBody>
+      </p:sp>
+      <p:sp>
+        <p:nvSpPr>
+          <p:cNvPr id="463" name=""/>
+          <p:cNvSpPr txBox="1"/>
+          <p:nvPr/>
+        </p:nvSpPr>
+        <p:spPr>
+          <a:xfrm>
+            <a:off x="4104000" y="4957200"/>
+            <a:ext cx="7164000" cy="464400"/>
+          </a:xfrm>
+          <a:prstGeom prst="rect">
+            <a:avLst/>
+          </a:prstGeom>
+          <a:noFill/>
+          <a:ln w="0">
+            <a:noFill/>
+          </a:ln>
+        </p:spPr>
+        <p:txBody>
+          <a:bodyPr lIns="43200" rIns="43200" tIns="43200" bIns="43200" anchor="t">
+            <a:noAutofit/>
+          </a:bodyPr>
+          <a:p>
+            <a:r>
+              <a:rPr b="0" lang="en-US" sz="1200" spc="-1" strike="noStrike">
+                <a:solidFill>
+                  <a:srgbClr val="17212b"/>
+                </a:solidFill>
+                <a:latin typeface="Arial"/>
+              </a:rPr>
+              <a:t>Use repeated XLSX sweeps to report repeatability, hysteresis, drift, confidence intervals, and failure limits.</a:t>
+            </a:r>
+            <a:endParaRPr b="0" lang="en-US" sz="1200" spc="-1" strike="noStrike">
+              <a:solidFill>
+                <a:srgbClr val="17212b"/>
+              </a:solidFill>
+              <a:latin typeface="Arial"/>
+            </a:endParaRPr>
+          </a:p>
+        </p:txBody>
+      </p:sp>
+    </p:spTree>
+  </p:cSld>
+  <mc:AlternateContent>
+    <mc:Choice Requires="p14">
+      <p:transition spd="slow" p14:dur="2000"/>
+    </mc:Choice>
+    <mc:Fallback>
+      <p:transition spd="slow"/>
+    </mc:Fallback>
+  </mc:AlternateContent>
+</p:sld>
+</file>
+
+<file path=ppt/slides/slide17.xml><?xml version="1.0" encoding="utf-8"?>
+<p:sld xmlns:a="http://schemas.openxmlformats.org/drawingml/2006/main" xmlns:p="http://schemas.openxmlformats.org/presentationml/2006/main" xmlns:r="http://schemas.openxmlformats.org/officeDocument/2006/relationships" xmlns:p14="http://schemas.microsoft.com/office/powerpoint/2010/main" xmlns:p15="http://schemas.microsoft.com/office/powerpoint/2012/main" xmlns:mc="http://schemas.openxmlformats.org/markup-compatibility/2006">
+  <p:cSld>
+    <p:spTree>
+      <p:nvGrpSpPr>
+        <p:cNvPr id="1" name=""/>
+        <p:cNvGrpSpPr/>
+        <p:nvPr/>
+      </p:nvGrpSpPr>
+      <p:grpSpPr>
+        <a:xfrm>
+          <a:off x="0" y="0"/>
+          <a:ext cx="0" cy="0"/>
+          <a:chOff x="0" y="0"/>
+          <a:chExt cx="0" cy="0"/>
+        </a:xfrm>
+      </p:grpSpPr>
+      <p:sp>
+        <p:nvSpPr>
+          <p:cNvPr id="464" name=""/>
+          <p:cNvSpPr/>
+          <p:nvPr/>
+        </p:nvSpPr>
+        <p:spPr>
+          <a:xfrm>
+            <a:off x="0" y="0"/>
+            <a:ext cx="12192120" cy="6858000"/>
+          </a:xfrm>
+          <a:prstGeom prst="rect">
+            <a:avLst/>
+          </a:prstGeom>
+          <a:solidFill>
+            <a:srgbClr val="f4f2ef"/>
+          </a:solidFill>
+          <a:ln w="7200">
+            <a:solidFill>
+              <a:srgbClr val="f4f2ef"/>
+            </a:solidFill>
+            <a:round/>
+          </a:ln>
+        </p:spPr>
+      </p:sp>
+      <p:sp>
+        <p:nvSpPr>
+          <p:cNvPr id="465" name=""/>
+          <p:cNvSpPr/>
+          <p:nvPr/>
+        </p:nvSpPr>
+        <p:spPr>
+          <a:xfrm>
+            <a:off x="0" y="0"/>
+            <a:ext cx="126000" cy="6858000"/>
+          </a:xfrm>
+          <a:prstGeom prst="rect">
+            <a:avLst/>
+          </a:prstGeom>
+          <a:solidFill>
+            <a:srgbClr val="500000"/>
+          </a:solidFill>
+          <a:ln w="7200">
+            <a:solidFill>
+              <a:srgbClr val="500000"/>
+            </a:solidFill>
+            <a:round/>
+          </a:ln>
+        </p:spPr>
+      </p:sp>
+      <p:sp>
+        <p:nvSpPr>
+          <p:cNvPr id="466" name=""/>
+          <p:cNvSpPr txBox="1"/>
+          <p:nvPr/>
+        </p:nvSpPr>
+        <p:spPr>
+          <a:xfrm>
+            <a:off x="414000" y="234000"/>
+            <a:ext cx="11052000" cy="426600"/>
+          </a:xfrm>
+          <a:prstGeom prst="rect">
+            <a:avLst/>
+          </a:prstGeom>
+          <a:noFill/>
+          <a:ln w="0">
+            <a:noFill/>
+          </a:ln>
+        </p:spPr>
+        <p:txBody>
+          <a:bodyPr lIns="43200" rIns="43200" tIns="43200" bIns="43200" anchor="t">
+            <a:noAutofit/>
+          </a:bodyPr>
+          <a:p>
+            <a:r>
+              <a:rPr b="1" lang="en-US" sz="2400" spc="-1" strike="noStrike">
+                <a:solidFill>
+                  <a:srgbClr val="500000"/>
+                </a:solidFill>
+                <a:latin typeface="Arial"/>
+              </a:rPr>
+              <a:t>Current Outcome</a:t>
+            </a:r>
+            <a:endParaRPr b="1" lang="en-US" sz="2400" spc="-1" strike="noStrike">
+              <a:solidFill>
+                <a:srgbClr val="500000"/>
+              </a:solidFill>
+              <a:latin typeface="Arial"/>
+            </a:endParaRPr>
+          </a:p>
+        </p:txBody>
+      </p:sp>
+      <p:sp>
+        <p:nvSpPr>
+          <p:cNvPr id="467" name=""/>
+          <p:cNvSpPr/>
+          <p:nvPr/>
+        </p:nvSpPr>
+        <p:spPr>
+          <a:xfrm>
+            <a:off x="414000" y="702000"/>
+            <a:ext cx="11178000" cy="0"/>
+          </a:xfrm>
+          <a:prstGeom prst="line">
+            <a:avLst/>
+          </a:prstGeom>
+          <a:ln w="14400">
+            <a:solidFill>
+              <a:srgbClr val="d6a84b"/>
             </a:solidFill>
             <a:round/>
           </a:ln>
@@ -10699,13 +12190,190 @@
       </p:sp>
       <p:sp>
         <p:nvSpPr>
-          <p:cNvPr id="431" name=""/>
-          <p:cNvSpPr txBox="1"/>
-          <p:nvPr/>
-        </p:nvSpPr>
-        <p:spPr>
-          <a:xfrm>
-            <a:off x="1440000" y="2538000"/>
+          <p:cNvPr id="468" name=""/>
+          <p:cNvSpPr txBox="1"/>
+          <p:nvPr/>
+        </p:nvSpPr>
+        <p:spPr>
+          <a:xfrm>
+            <a:off x="9000000" y="90000"/>
+            <a:ext cx="2520000" cy="201240"/>
+          </a:xfrm>
+          <a:prstGeom prst="rect">
+            <a:avLst/>
+          </a:prstGeom>
+          <a:noFill/>
+          <a:ln w="0">
+            <a:noFill/>
+          </a:ln>
+        </p:spPr>
+        <p:txBody>
+          <a:bodyPr lIns="43200" rIns="43200" tIns="43200" bIns="43200" anchor="t">
+            <a:noAutofit/>
+          </a:bodyPr>
+          <a:p>
+            <a:pPr algn="just">
+              <a:buNone/>
+            </a:pPr>
+            <a:r>
+              <a:rPr b="1" lang="en-US" sz="800" spc="-1" strike="noStrike">
+                <a:solidFill>
+                  <a:srgbClr val="44515e"/>
+                </a:solidFill>
+                <a:latin typeface="Arial"/>
+              </a:rPr>
+              <a:t>CONCLUSION</a:t>
+            </a:r>
+            <a:endParaRPr b="1" lang="en-US" sz="800" spc="-1" strike="noStrike">
+              <a:solidFill>
+                <a:srgbClr val="44515e"/>
+              </a:solidFill>
+              <a:latin typeface="Arial"/>
+            </a:endParaRPr>
+          </a:p>
+        </p:txBody>
+      </p:sp>
+      <p:sp>
+        <p:nvSpPr>
+          <p:cNvPr id="469" name=""/>
+          <p:cNvSpPr txBox="1"/>
+          <p:nvPr/>
+        </p:nvSpPr>
+        <p:spPr>
+          <a:xfrm>
+            <a:off x="414000" y="6642000"/>
+            <a:ext cx="7560000" cy="193320"/>
+          </a:xfrm>
+          <a:prstGeom prst="rect">
+            <a:avLst/>
+          </a:prstGeom>
+          <a:noFill/>
+          <a:ln w="0">
+            <a:noFill/>
+          </a:ln>
+        </p:spPr>
+        <p:txBody>
+          <a:bodyPr lIns="43200" rIns="43200" tIns="43200" bIns="43200" anchor="t">
+            <a:noAutofit/>
+          </a:bodyPr>
+          <a:p>
+            <a:r>
+              <a:rPr b="0" lang="en-US" sz="750" spc="-1" strike="noStrike">
+                <a:solidFill>
+                  <a:srgbClr val="44515e"/>
+                </a:solidFill>
+                <a:latin typeface="Arial"/>
+              </a:rPr>
+              <a:t>Soft continuum limb research progress  •  17</a:t>
+            </a:r>
+            <a:endParaRPr b="0" lang="en-US" sz="750" spc="-1" strike="noStrike">
+              <a:solidFill>
+                <a:srgbClr val="44515e"/>
+              </a:solidFill>
+              <a:latin typeface="Arial"/>
+            </a:endParaRPr>
+          </a:p>
+        </p:txBody>
+      </p:sp>
+      <p:sp>
+        <p:nvSpPr>
+          <p:cNvPr id="470" name=""/>
+          <p:cNvSpPr txBox="1"/>
+          <p:nvPr/>
+        </p:nvSpPr>
+        <p:spPr>
+          <a:xfrm>
+            <a:off x="9000000" y="6642000"/>
+            <a:ext cx="2556000" cy="193320"/>
+          </a:xfrm>
+          <a:prstGeom prst="rect">
+            <a:avLst/>
+          </a:prstGeom>
+          <a:noFill/>
+          <a:ln w="0">
+            <a:noFill/>
+          </a:ln>
+        </p:spPr>
+        <p:txBody>
+          <a:bodyPr lIns="43200" rIns="43200" tIns="43200" bIns="43200" anchor="t">
+            <a:noAutofit/>
+          </a:bodyPr>
+          <a:p>
+            <a:pPr algn="just">
+              <a:buNone/>
+            </a:pPr>
+            <a:r>
+              <a:rPr b="0" lang="en-US" sz="750" spc="-1" strike="noStrike">
+                <a:solidFill>
+                  <a:srgbClr val="44515e"/>
+                </a:solidFill>
+                <a:latin typeface="Arial"/>
+              </a:rPr>
+              <a:t>ETID / MSET research</a:t>
+            </a:r>
+            <a:endParaRPr b="0" lang="en-US" sz="750" spc="-1" strike="noStrike">
+              <a:solidFill>
+                <a:srgbClr val="44515e"/>
+              </a:solidFill>
+              <a:latin typeface="Arial"/>
+            </a:endParaRPr>
+          </a:p>
+        </p:txBody>
+      </p:sp>
+      <p:sp>
+        <p:nvSpPr>
+          <p:cNvPr id="471" name=""/>
+          <p:cNvSpPr txBox="1"/>
+          <p:nvPr/>
+        </p:nvSpPr>
+        <p:spPr>
+          <a:xfrm>
+            <a:off x="720000" y="1116000"/>
+            <a:ext cx="10620000" cy="440280"/>
+          </a:xfrm>
+          <a:prstGeom prst="rect">
+            <a:avLst/>
+          </a:prstGeom>
+          <a:noFill/>
+          <a:ln w="0">
+            <a:noFill/>
+          </a:ln>
+        </p:spPr>
+        <p:txBody>
+          <a:bodyPr lIns="43200" rIns="43200" tIns="43200" bIns="43200" anchor="t">
+            <a:noAutofit/>
+          </a:bodyPr>
+          <a:p>
+            <a:pPr algn="r">
+              <a:buNone/>
+            </a:pPr>
+            <a:r>
+              <a:rPr b="1" lang="en-US" sz="2500" spc="-1" strike="noStrike">
+                <a:solidFill>
+                  <a:srgbClr val="500000"/>
+                </a:solidFill>
+                <a:latin typeface="Arial"/>
+              </a:rPr>
+              <a:t>A reproducible six-disc research platform now connects</a:t>
+            </a:r>
+            <a:endParaRPr b="1" lang="en-US" sz="2500" spc="-1" strike="noStrike">
+              <a:solidFill>
+                <a:srgbClr val="500000"/>
+              </a:solidFill>
+              <a:latin typeface="Arial"/>
+            </a:endParaRPr>
+          </a:p>
+        </p:txBody>
+      </p:sp>
+      <p:sp>
+        <p:nvSpPr>
+          <p:cNvPr id="472" name=""/>
+          <p:cNvSpPr txBox="1"/>
+          <p:nvPr/>
+        </p:nvSpPr>
+        <p:spPr>
+          <a:xfrm>
+            <a:off x="1440000" y="1800000"/>
             <a:ext cx="2160000" cy="257400"/>
           </a:xfrm>
           <a:prstGeom prst="rect">
@@ -10728,7 +12396,7 @@
                 </a:solidFill>
                 <a:latin typeface="Arial"/>
               </a:rPr>
-              <a:t>SHAPE</a:t>
+              <a:t>CONTROL</a:t>
             </a:r>
             <a:endParaRPr b="1" lang="en-US" sz="1200" spc="-1" strike="noStrike">
               <a:solidFill>
@@ -10741,13 +12409,13 @@
       </p:sp>
       <p:sp>
         <p:nvSpPr>
-          <p:cNvPr id="432" name=""/>
-          <p:cNvSpPr txBox="1"/>
-          <p:nvPr/>
-        </p:nvSpPr>
-        <p:spPr>
-          <a:xfrm>
-            <a:off x="3672000" y="2509200"/>
+          <p:cNvPr id="473" name=""/>
+          <p:cNvSpPr txBox="1"/>
+          <p:nvPr/>
+        </p:nvSpPr>
+        <p:spPr>
+          <a:xfrm>
+            <a:off x="3672000" y="1771200"/>
             <a:ext cx="6840000" cy="329040"/>
           </a:xfrm>
           <a:prstGeom prst="rect">
@@ -10770,7 +12438,7 @@
                 </a:solidFill>
                 <a:latin typeface="Arial"/>
               </a:rPr>
-              <a:t>Synchronized five-interval constant-curvature target</a:t>
+              <a:t>Position + calibrated torque admittance</a:t>
             </a:r>
             <a:endParaRPr b="0" lang="en-US" sz="1700" spc="-1" strike="noStrike">
               <a:solidFill>
@@ -10783,13 +12451,13 @@
       </p:sp>
       <p:sp>
         <p:nvSpPr>
-          <p:cNvPr id="433" name=""/>
+          <p:cNvPr id="474" name=""/>
           <p:cNvSpPr/>
           <p:nvPr/>
         </p:nvSpPr>
         <p:spPr>
           <a:xfrm>
-            <a:off x="1440000" y="2916000"/>
+            <a:off x="1440000" y="2178000"/>
             <a:ext cx="9072000" cy="0"/>
           </a:xfrm>
           <a:prstGeom prst="line">
@@ -10811,13 +12479,13 @@
       </p:sp>
       <p:sp>
         <p:nvSpPr>
-          <p:cNvPr id="434" name=""/>
-          <p:cNvSpPr txBox="1"/>
-          <p:nvPr/>
-        </p:nvSpPr>
-        <p:spPr>
-          <a:xfrm>
-            <a:off x="1440000" y="3276000"/>
+          <p:cNvPr id="475" name=""/>
+          <p:cNvSpPr txBox="1"/>
+          <p:nvPr/>
+        </p:nvSpPr>
+        <p:spPr>
+          <a:xfrm>
+            <a:off x="1440000" y="2538000"/>
             <a:ext cx="2160000" cy="257400"/>
           </a:xfrm>
           <a:prstGeom prst="rect">
@@ -10840,7 +12508,7 @@
                 </a:solidFill>
                 <a:latin typeface="Arial"/>
               </a:rPr>
-              <a:t>SENSING</a:t>
+              <a:t>SHAPE</a:t>
             </a:r>
             <a:endParaRPr b="1" lang="en-US" sz="1200" spc="-1" strike="noStrike">
               <a:solidFill>
@@ -10853,13 +12521,13 @@
       </p:sp>
       <p:sp>
         <p:nvSpPr>
-          <p:cNvPr id="435" name=""/>
-          <p:cNvSpPr txBox="1"/>
-          <p:nvPr/>
-        </p:nvSpPr>
-        <p:spPr>
-          <a:xfrm>
-            <a:off x="3672000" y="3247200"/>
+          <p:cNvPr id="476" name=""/>
+          <p:cNvSpPr txBox="1"/>
+          <p:nvPr/>
+        </p:nvSpPr>
+        <p:spPr>
+          <a:xfrm>
+            <a:off x="3672000" y="2509200"/>
             <a:ext cx="6840000" cy="329040"/>
           </a:xfrm>
           <a:prstGeom prst="rect">
@@ -10882,7 +12550,7 @@
                 </a:solidFill>
                 <a:latin typeface="Arial"/>
               </a:rPr>
-              <a:t>Six pose-derived strain channels + bridge voltages</a:t>
+              <a:t>Synchronized five-interval constant-curvature target</a:t>
             </a:r>
             <a:endParaRPr b="0" lang="en-US" sz="1700" spc="-1" strike="noStrike">
               <a:solidFill>
@@ -10895,13 +12563,13 @@
       </p:sp>
       <p:sp>
         <p:nvSpPr>
-          <p:cNvPr id="436" name=""/>
+          <p:cNvPr id="477" name=""/>
           <p:cNvSpPr/>
           <p:nvPr/>
         </p:nvSpPr>
         <p:spPr>
           <a:xfrm>
-            <a:off x="1440000" y="3654000"/>
+            <a:off x="1440000" y="2916000"/>
             <a:ext cx="9072000" cy="0"/>
           </a:xfrm>
           <a:prstGeom prst="line">
@@ -10923,13 +12591,13 @@
       </p:sp>
       <p:sp>
         <p:nvSpPr>
-          <p:cNvPr id="437" name=""/>
-          <p:cNvSpPr txBox="1"/>
-          <p:nvPr/>
-        </p:nvSpPr>
-        <p:spPr>
-          <a:xfrm>
-            <a:off x="1440000" y="4014000"/>
+          <p:cNvPr id="478" name=""/>
+          <p:cNvSpPr txBox="1"/>
+          <p:nvPr/>
+        </p:nvSpPr>
+        <p:spPr>
+          <a:xfrm>
+            <a:off x="1440000" y="3276000"/>
             <a:ext cx="2160000" cy="257400"/>
           </a:xfrm>
           <a:prstGeom prst="rect">
@@ -10952,7 +12620,7 @@
                 </a:solidFill>
                 <a:latin typeface="Arial"/>
               </a:rPr>
-              <a:t>VISUALIZATION</a:t>
+              <a:t>SENSING</a:t>
             </a:r>
             <a:endParaRPr b="1" lang="en-US" sz="1200" spc="-1" strike="noStrike">
               <a:solidFill>
@@ -10965,13 +12633,13 @@
       </p:sp>
       <p:sp>
         <p:nvSpPr>
-          <p:cNvPr id="438" name=""/>
-          <p:cNvSpPr txBox="1"/>
-          <p:nvPr/>
-        </p:nvSpPr>
-        <p:spPr>
-          <a:xfrm>
-            <a:off x="3672000" y="3985200"/>
+          <p:cNvPr id="479" name=""/>
+          <p:cNvSpPr txBox="1"/>
+          <p:nvPr/>
+        </p:nvSpPr>
+        <p:spPr>
+          <a:xfrm>
+            <a:off x="3672000" y="3247200"/>
             <a:ext cx="6840000" cy="329040"/>
           </a:xfrm>
           <a:prstGeom prst="rect">
@@ -10994,7 +12662,7 @@
                 </a:solidFill>
                 <a:latin typeface="Arial"/>
               </a:rPr>
-              <a:t>Isaac Sim + sensor-driven RViz reconstruction</a:t>
+              <a:t>18 pose-derived strain channels + bridge voltages</a:t>
             </a:r>
             <a:endParaRPr b="0" lang="en-US" sz="1700" spc="-1" strike="noStrike">
               <a:solidFill>
@@ -11007,13 +12675,13 @@
       </p:sp>
       <p:sp>
         <p:nvSpPr>
-          <p:cNvPr id="439" name=""/>
+          <p:cNvPr id="480" name=""/>
           <p:cNvSpPr/>
           <p:nvPr/>
         </p:nvSpPr>
         <p:spPr>
           <a:xfrm>
-            <a:off x="1440000" y="4392000"/>
+            <a:off x="1440000" y="3654000"/>
             <a:ext cx="9072000" cy="0"/>
           </a:xfrm>
           <a:prstGeom prst="line">
@@ -11035,7 +12703,119 @@
       </p:sp>
       <p:sp>
         <p:nvSpPr>
-          <p:cNvPr id="440" name=""/>
+          <p:cNvPr id="481" name=""/>
+          <p:cNvSpPr txBox="1"/>
+          <p:nvPr/>
+        </p:nvSpPr>
+        <p:spPr>
+          <a:xfrm>
+            <a:off x="1440000" y="4014000"/>
+            <a:ext cx="2160000" cy="257400"/>
+          </a:xfrm>
+          <a:prstGeom prst="rect">
+            <a:avLst/>
+          </a:prstGeom>
+          <a:noFill/>
+          <a:ln w="0">
+            <a:noFill/>
+          </a:ln>
+        </p:spPr>
+        <p:txBody>
+          <a:bodyPr lIns="43200" rIns="43200" tIns="43200" bIns="43200" anchor="t">
+            <a:noAutofit/>
+          </a:bodyPr>
+          <a:p>
+            <a:r>
+              <a:rPr b="1" lang="en-US" sz="1200" spc="-1" strike="noStrike">
+                <a:solidFill>
+                  <a:srgbClr val="167d8d"/>
+                </a:solidFill>
+                <a:latin typeface="Arial"/>
+              </a:rPr>
+              <a:t>VISUALIZATION</a:t>
+            </a:r>
+            <a:endParaRPr b="1" lang="en-US" sz="1200" spc="-1" strike="noStrike">
+              <a:solidFill>
+                <a:srgbClr val="167d8d"/>
+              </a:solidFill>
+              <a:latin typeface="Arial"/>
+            </a:endParaRPr>
+          </a:p>
+        </p:txBody>
+      </p:sp>
+      <p:sp>
+        <p:nvSpPr>
+          <p:cNvPr id="482" name=""/>
+          <p:cNvSpPr txBox="1"/>
+          <p:nvPr/>
+        </p:nvSpPr>
+        <p:spPr>
+          <a:xfrm>
+            <a:off x="3672000" y="3985200"/>
+            <a:ext cx="6840000" cy="329040"/>
+          </a:xfrm>
+          <a:prstGeom prst="rect">
+            <a:avLst/>
+          </a:prstGeom>
+          <a:noFill/>
+          <a:ln w="0">
+            <a:noFill/>
+          </a:ln>
+        </p:spPr>
+        <p:txBody>
+          <a:bodyPr lIns="43200" rIns="43200" tIns="43200" bIns="43200" anchor="t">
+            <a:noAutofit/>
+          </a:bodyPr>
+          <a:p>
+            <a:r>
+              <a:rPr b="0" lang="en-US" sz="1700" spc="-1" strike="noStrike">
+                <a:solidFill>
+                  <a:srgbClr val="17212b"/>
+                </a:solidFill>
+                <a:latin typeface="Arial"/>
+              </a:rPr>
+              <a:t>Isaac Sim + sensor-driven RViz reconstruction</a:t>
+            </a:r>
+            <a:endParaRPr b="0" lang="en-US" sz="1700" spc="-1" strike="noStrike">
+              <a:solidFill>
+                <a:srgbClr val="17212b"/>
+              </a:solidFill>
+              <a:latin typeface="Arial"/>
+            </a:endParaRPr>
+          </a:p>
+        </p:txBody>
+      </p:sp>
+      <p:sp>
+        <p:nvSpPr>
+          <p:cNvPr id="483" name=""/>
+          <p:cNvSpPr/>
+          <p:nvPr/>
+        </p:nvSpPr>
+        <p:spPr>
+          <a:xfrm>
+            <a:off x="1440000" y="4392000"/>
+            <a:ext cx="9072000" cy="0"/>
+          </a:xfrm>
+          <a:prstGeom prst="line">
+            <a:avLst/>
+          </a:prstGeom>
+          <a:ln w="7200">
+            <a:solidFill>
+              <a:srgbClr val="d7d2cc"/>
+            </a:solidFill>
+            <a:round/>
+          </a:ln>
+        </p:spPr>
+        <p:style>
+          <a:lnRef idx="0"/>
+          <a:fillRef idx="0"/>
+          <a:effectRef idx="0"/>
+          <a:fontRef idx="minor"/>
+        </p:style>
+      </p:sp>
+      <p:sp>
+        <p:nvSpPr>
+          <p:cNvPr id="484" name=""/>
           <p:cNvSpPr txBox="1"/>
           <p:nvPr/>
         </p:nvSpPr>
@@ -11077,7 +12857,7 @@
       </p:sp>
       <p:sp>
         <p:nvSpPr>
-          <p:cNvPr id="441" name=""/>
+          <p:cNvPr id="485" name=""/>
           <p:cNvSpPr txBox="1"/>
           <p:nvPr/>
         </p:nvSpPr>
@@ -11106,7 +12886,7 @@
                 </a:solidFill>
                 <a:latin typeface="Arial"/>
               </a:rPr>
-              <a:t>Automated tests and research documentation</a:t>
+              <a:t>Automated tests, XLSX datasets, and research documentation</a:t>
             </a:r>
             <a:endParaRPr b="0" lang="en-US" sz="1700" spc="-1" strike="noStrike">
               <a:solidFill>
@@ -11119,7 +12899,7 @@
       </p:sp>
       <p:sp>
         <p:nvSpPr>
-          <p:cNvPr id="442" name=""/>
+          <p:cNvPr id="486" name=""/>
           <p:cNvSpPr txBox="1"/>
           <p:nvPr/>
         </p:nvSpPr>

--- a/research_documentation/soft_limb_progress_update_working.pptx
+++ b/research_documentation/soft_limb_progress_update_working.pptx
@@ -79,7 +79,7 @@
         <p:txBody>
           <a:bodyPr/>
           <a:p>
-            <a:fld id="{F2659B5D-BB39-4DEE-98CC-81C237C5FA60}" type="slidenum">
+            <a:fld id="{A871E0BB-C18A-484B-9491-57F7F2E66718}" type="slidenum">
               <a:t>&lt;#&gt;</a:t>
             </a:fld>
           </a:p>
@@ -267,7 +267,7 @@
         <p:txBody>
           <a:bodyPr/>
           <a:p>
-            <a:fld id="{7229391F-5229-42F0-9C8A-4937DC910E38}" type="slidenum">
+            <a:fld id="{1DD255B3-1EDB-4ED3-98CC-8DF4812FB1F9}" type="slidenum">
               <a:t>&lt;#&gt;</a:t>
             </a:fld>
           </a:p>
@@ -523,7 +523,7 @@
         <p:txBody>
           <a:bodyPr/>
           <a:p>
-            <a:fld id="{887BFBEF-AC93-4B0F-B25A-9AC25FBAB1CF}" type="slidenum">
+            <a:fld id="{26A2E16A-1136-49EE-AB3E-B9FD44B1927D}" type="slidenum">
               <a:t>&lt;#&gt;</a:t>
             </a:fld>
           </a:p>
@@ -847,7 +847,7 @@
         <p:txBody>
           <a:bodyPr/>
           <a:p>
-            <a:fld id="{018114DE-F26C-4B04-A613-D8212FB11132}" type="slidenum">
+            <a:fld id="{D5622B4C-940F-447F-BBC5-885D875E1355}" type="slidenum">
               <a:t>&lt;#&gt;</a:t>
             </a:fld>
           </a:p>
@@ -1004,7 +1004,7 @@
         <p:txBody>
           <a:bodyPr/>
           <a:p>
-            <a:fld id="{0DCDC570-9FD2-4989-8BD9-39CE2AE44AA5}" type="slidenum">
+            <a:fld id="{726DB0E7-0104-451D-8905-69387C22056A}" type="slidenum">
               <a:t>&lt;#&gt;</a:t>
             </a:fld>
           </a:p>
@@ -1158,7 +1158,7 @@
         <p:txBody>
           <a:bodyPr/>
           <a:p>
-            <a:fld id="{1B99CE92-82B2-4A06-8146-DB8D91BD0045}" type="slidenum">
+            <a:fld id="{C7474AB5-5F04-4CCE-9E64-7D7D276438A7}" type="slidenum">
               <a:t>&lt;#&gt;</a:t>
             </a:fld>
           </a:p>
@@ -1346,7 +1346,7 @@
         <p:txBody>
           <a:bodyPr/>
           <a:p>
-            <a:fld id="{BBF21DAD-F310-4C67-A696-0C7F25ACB06E}" type="slidenum">
+            <a:fld id="{ABCF0501-6351-4B1D-9721-086ADDD8E72C}" type="slidenum">
               <a:t>&lt;#&gt;</a:t>
             </a:fld>
           </a:p>
@@ -1466,7 +1466,7 @@
         <p:txBody>
           <a:bodyPr/>
           <a:p>
-            <a:fld id="{2D4978C3-6703-4509-A9EC-896614C8F810}" type="slidenum">
+            <a:fld id="{C472F137-E496-4E0E-B35D-DED490CBAB5C}" type="slidenum">
               <a:t>&lt;#&gt;</a:t>
             </a:fld>
           </a:p>
@@ -1586,7 +1586,7 @@
         <p:txBody>
           <a:bodyPr/>
           <a:p>
-            <a:fld id="{94B98F32-DBD2-4453-AB84-FCFC5EC7E80B}" type="slidenum">
+            <a:fld id="{5033CABB-E598-4472-A7F6-04968E3EF111}" type="slidenum">
               <a:t>&lt;#&gt;</a:t>
             </a:fld>
           </a:p>
@@ -1808,7 +1808,7 @@
         <p:txBody>
           <a:bodyPr/>
           <a:p>
-            <a:fld id="{1ACF015C-F896-42BA-9623-ED7ECAD311E4}" type="slidenum">
+            <a:fld id="{E11B1DB8-D287-4E06-8605-2B841822653C}" type="slidenum">
               <a:t>&lt;#&gt;</a:t>
             </a:fld>
           </a:p>
@@ -2030,7 +2030,7 @@
         <p:txBody>
           <a:bodyPr/>
           <a:p>
-            <a:fld id="{525C0D7F-ED0F-4DDE-83D7-B5675D573F7D}" type="slidenum">
+            <a:fld id="{0DC206D1-A7B9-4C8A-85AF-F2B0A86175D8}" type="slidenum">
               <a:t>&lt;#&gt;</a:t>
             </a:fld>
           </a:p>
@@ -2252,7 +2252,7 @@
         <p:txBody>
           <a:bodyPr/>
           <a:p>
-            <a:fld id="{1E22308F-5F3B-4DD7-816A-23921D1FEBBF}" type="slidenum">
+            <a:fld id="{6486D511-E679-469F-8D9D-70BB57542A82}" type="slidenum">
               <a:t>&lt;#&gt;</a:t>
             </a:fld>
           </a:p>
@@ -2664,7 +2664,7 @@
             <a:pPr algn="r">
               <a:buNone/>
             </a:pPr>
-            <a:fld id="{4138E036-8961-4AF7-B1A0-FB0CC46500BE}" type="slidenum">
+            <a:fld id="{9F2B081E-B9C5-4815-B9F5-AEA5D2631317}" type="slidenum">
               <a:rPr b="0" lang="en-US" sz="1400" spc="-1" strike="noStrike">
                 <a:latin typeface="Times New Roman"/>
               </a:rPr>
@@ -10379,7 +10379,7 @@
                 </a:solidFill>
                 <a:latin typeface="Arial"/>
               </a:rPr>
-              <a:t>1,220</a:t>
+              <a:t>61</a:t>
             </a:r>
             <a:endParaRPr b="1" lang="en-US" sz="2300" spc="-1" strike="noStrike">
               <a:solidFill>
@@ -10421,7 +10421,7 @@
                 </a:solidFill>
                 <a:latin typeface="Arial"/>
               </a:rPr>
-              <a:t>collected raw rows</a:t>
+              <a:t>one snapshot per case</a:t>
             </a:r>
             <a:endParaRPr b="0" lang="en-US" sz="1050" spc="-1" strike="noStrike">
               <a:solidFill>
@@ -10513,7 +10513,7 @@
                 </a:solidFill>
                 <a:latin typeface="Arial"/>
               </a:rPr>
-              <a:t>7,320</a:t>
+              <a:t>1,098</a:t>
             </a:r>
             <a:endParaRPr b="1" lang="en-US" sz="2300" spc="-1" strike="noStrike">
               <a:solidFill>
@@ -10555,7 +10555,7 @@
                 </a:solidFill>
                 <a:latin typeface="Arial"/>
               </a:rPr>
-              <a:t>3 repeats × 2 s</a:t>
+              <a:t>long-format sensor rows</a:t>
             </a:r>
             <a:endParaRPr b="0" lang="en-US" sz="1050" spc="-1" strike="noStrike">
               <a:solidFill>
@@ -10639,7 +10639,7 @@
                 </a:solidFill>
                 <a:latin typeface="Arial"/>
               </a:rPr>
-              <a:t>Workbook sheets: Metadata, Sensor_Map, Cases, Samples, Sensor_Summary.</a:t>
+              <a:t>Four sheets match Final Data.xlsx, including 38-column Samples and 13-column Final Sensor Data.</a:t>
             </a:r>
             <a:endParaRPr b="0" lang="en-US" sz="1170" spc="-1" strike="noStrike">
               <a:solidFill>
@@ -10723,7 +10723,7 @@
                 </a:solidFill>
                 <a:latin typeface="Arial"/>
               </a:rPr>
-              <a:t>Every raw row preserves three commands, three measured poses, 18 voltages, and 18 validity flags.</a:t>
+              <a:t>Mandatory fields: case, module, section, gauge, torque command, θ command, and voltage.</a:t>
             </a:r>
             <a:endParaRPr b="0" lang="en-US" sz="1170" spc="-1" strike="noStrike">
               <a:solidFill>
@@ -10807,7 +10807,7 @@
                 </a:solidFill>
                 <a:latin typeface="Arial"/>
               </a:rPr>
-              <a:t>Full sweep completed: 61/61 cases and 1,220/1,220 synchronized rows.</a:t>
+              <a:t>Recording starts only after applied torque/theta pass a continuous 0.5 s command gate.</a:t>
             </a:r>
             <a:endParaRPr b="0" lang="en-US" sz="1170" spc="-1" strike="noStrike">
               <a:solidFill>
@@ -10891,7 +10891,7 @@
                 </a:solidFill>
                 <a:latin typeface="Arial"/>
               </a:rPr>
-              <a:t>68.10% of 21,960 validity observations were nominal; 83 non-finite voltages remain blank and flagged.</a:t>
+              <a:t>Full gated sweep: 61/61 cases, one snapshot per case, and 1,098 sensor rows.</a:t>
             </a:r>
             <a:endParaRPr b="0" lang="en-US" sz="1170" spc="-1" strike="noStrike">
               <a:solidFill>

--- a/research_documentation/soft_limb_progress_update_working.pptx
+++ b/research_documentation/soft_limb_progress_update_working.pptx
@@ -21,6 +21,7 @@
     <p:sldId id="269" r:id="rId16"/>
     <p:sldId id="270" r:id="rId17"/>
     <p:sldId id="271" r:id="rId18"/>
+    <p:sldId id="272" r:id="rId19"/>
   </p:sldIdLst>
   <p:sldSz cx="12192000" cy="6858000"/>
   <p:notesSz cx="7772400" cy="10058400"/>
@@ -78,7 +79,7 @@
         <p:txBody>
           <a:bodyPr/>
           <a:p>
-            <a:fld id="{CFB18620-351E-49BD-8DAC-35CAEBF33AA4}" type="slidenum">
+            <a:fld id="{D0F6F42B-F9D3-4959-B0EF-C8B3300B9879}" type="slidenum">
               <a:t>&lt;#&gt;</a:t>
             </a:fld>
           </a:p>
@@ -266,7 +267,7 @@
         <p:txBody>
           <a:bodyPr/>
           <a:p>
-            <a:fld id="{32328E50-6A23-4A0E-B725-DCB6EA7236E5}" type="slidenum">
+            <a:fld id="{297BBA29-AB69-4BF7-B7E9-732F1321C543}" type="slidenum">
               <a:t>&lt;#&gt;</a:t>
             </a:fld>
           </a:p>
@@ -522,7 +523,7 @@
         <p:txBody>
           <a:bodyPr/>
           <a:p>
-            <a:fld id="{49294720-93ED-477B-BFFF-3F68A9F8A57A}" type="slidenum">
+            <a:fld id="{4B62A288-E93D-4234-8DEA-97C51F157F39}" type="slidenum">
               <a:t>&lt;#&gt;</a:t>
             </a:fld>
           </a:p>
@@ -846,7 +847,7 @@
         <p:txBody>
           <a:bodyPr/>
           <a:p>
-            <a:fld id="{72E27208-F871-4490-9A4B-685FA6DA54B3}" type="slidenum">
+            <a:fld id="{07DAD7E1-DB38-43CC-994A-323BC2310848}" type="slidenum">
               <a:t>&lt;#&gt;</a:t>
             </a:fld>
           </a:p>
@@ -1003,7 +1004,7 @@
         <p:txBody>
           <a:bodyPr/>
           <a:p>
-            <a:fld id="{C4E5F0DA-1EE1-4BB3-A7A9-C432DB5242B6}" type="slidenum">
+            <a:fld id="{57953C76-1931-47A2-A488-5544262E8DD1}" type="slidenum">
               <a:t>&lt;#&gt;</a:t>
             </a:fld>
           </a:p>
@@ -1157,7 +1158,7 @@
         <p:txBody>
           <a:bodyPr/>
           <a:p>
-            <a:fld id="{AF8BC977-4C56-4001-A5F9-C6CD6BEBB7CB}" type="slidenum">
+            <a:fld id="{3CD704F0-6496-4F15-96EE-DAF6E83C5EA3}" type="slidenum">
               <a:t>&lt;#&gt;</a:t>
             </a:fld>
           </a:p>
@@ -1345,7 +1346,7 @@
         <p:txBody>
           <a:bodyPr/>
           <a:p>
-            <a:fld id="{3D4191B5-473D-48AC-94B2-73894C063264}" type="slidenum">
+            <a:fld id="{AA2A2338-3C5A-4D38-B238-D0AF5E190CFA}" type="slidenum">
               <a:t>&lt;#&gt;</a:t>
             </a:fld>
           </a:p>
@@ -1465,7 +1466,7 @@
         <p:txBody>
           <a:bodyPr/>
           <a:p>
-            <a:fld id="{4B540548-A05B-4C3D-90DE-895AD08B1FA4}" type="slidenum">
+            <a:fld id="{816ED094-7BC1-436F-A95D-114060D51BFD}" type="slidenum">
               <a:t>&lt;#&gt;</a:t>
             </a:fld>
           </a:p>
@@ -1585,7 +1586,7 @@
         <p:txBody>
           <a:bodyPr/>
           <a:p>
-            <a:fld id="{CC9890F6-810E-4504-8C86-48F40FFED9EA}" type="slidenum">
+            <a:fld id="{984107D1-27EC-4F61-BA96-EE8E1D61B2B8}" type="slidenum">
               <a:t>&lt;#&gt;</a:t>
             </a:fld>
           </a:p>
@@ -1807,7 +1808,7 @@
         <p:txBody>
           <a:bodyPr/>
           <a:p>
-            <a:fld id="{8ACBA6BA-523B-4636-928C-A988FB6B9661}" type="slidenum">
+            <a:fld id="{CD267EF9-BABE-4D25-A6F5-D6D3D928C247}" type="slidenum">
               <a:t>&lt;#&gt;</a:t>
             </a:fld>
           </a:p>
@@ -2029,7 +2030,7 @@
         <p:txBody>
           <a:bodyPr/>
           <a:p>
-            <a:fld id="{80B70D53-3A41-47CF-8C1B-2ECCEC1F00C4}" type="slidenum">
+            <a:fld id="{D7666C0C-8D4E-434C-9947-C42FC27894E4}" type="slidenum">
               <a:t>&lt;#&gt;</a:t>
             </a:fld>
           </a:p>
@@ -2251,7 +2252,7 @@
         <p:txBody>
           <a:bodyPr/>
           <a:p>
-            <a:fld id="{11AC929E-F02C-450B-83D0-4EFA98FBF751}" type="slidenum">
+            <a:fld id="{EB135813-19E7-4E0E-8377-27DDBE6887FF}" type="slidenum">
               <a:t>&lt;#&gt;</a:t>
             </a:fld>
           </a:p>
@@ -2663,7 +2664,7 @@
             <a:pPr algn="r">
               <a:buNone/>
             </a:pPr>
-            <a:fld id="{8CAFB1A2-88D0-49A3-B2E6-DF6029BF15EA}" type="slidenum">
+            <a:fld id="{000E7DEE-A548-45E9-9D1B-413A0EE8F5DB}" type="slidenum">
               <a:rPr b="0" lang="en-US" sz="1400" spc="-1" strike="noStrike">
                 <a:latin typeface="Times New Roman"/>
               </a:rPr>
@@ -8256,7 +8257,7 @@
                 </a:solidFill>
                 <a:latin typeface="Arial"/>
               </a:rPr>
-              <a:t>Eighteen-Channel Bridge-Voltage Instrumentation</a:t>
+              <a:t>Minimum-Energy Horizontal Tip Circle</a:t>
             </a:r>
             <a:endParaRPr b="1" lang="en-US" sz="2400" spc="-1" strike="noStrike">
               <a:solidFill>
@@ -8329,7 +8330,7 @@
                 </a:solidFill>
                 <a:latin typeface="Arial"/>
               </a:rPr>
-              <a:t>SENSING</a:t>
+              <a:t>LINKED BRANCH</a:t>
             </a:r>
             <a:endParaRPr b="1" lang="en-US" sz="800" spc="-1" strike="noStrike">
               <a:solidFill>
@@ -8427,63 +8428,90 @@
           </a:p>
         </p:txBody>
       </p:sp>
-      <p:pic>
-        <p:nvPicPr>
-          <p:cNvPr id="374" name="" descr=""/>
-          <p:cNvPicPr/>
-          <p:nvPr/>
-        </p:nvPicPr>
-        <p:blipFill>
-          <a:blip r:embed="rId1"/>
-          <a:stretch/>
-        </p:blipFill>
-        <p:spPr>
-          <a:xfrm>
-            <a:off x="1362960" y="810000"/>
-            <a:ext cx="6886080" cy="5130000"/>
-          </a:xfrm>
-          <a:prstGeom prst="rect">
-            <a:avLst/>
-          </a:prstGeom>
-          <a:ln w="0">
-            <a:noFill/>
-          </a:ln>
-        </p:spPr>
-      </p:pic>
+      <p:sp>
+        <p:nvSpPr>
+          <p:cNvPr id="374" name=""/>
+          <p:cNvSpPr/>
+          <p:nvPr/>
+        </p:nvSpPr>
+        <p:spPr>
+          <a:xfrm>
+            <a:off x="432000" y="972000"/>
+            <a:ext cx="3528000" cy="810000"/>
+          </a:xfrm>
+          <a:prstGeom prst="roundRect">
+            <a:avLst/>
+          </a:prstGeom>
+          <a:solidFill>
+            <a:srgbClr val="ffffff"/>
+          </a:solidFill>
+          <a:ln w="7200">
+            <a:solidFill>
+              <a:srgbClr val="d7d2cc"/>
+            </a:solidFill>
+            <a:round/>
+          </a:ln>
+        </p:spPr>
+      </p:sp>
       <p:sp>
         <p:nvSpPr>
           <p:cNvPr id="375" name=""/>
-          <p:cNvSpPr txBox="1"/>
-          <p:nvPr/>
-        </p:nvSpPr>
-        <p:spPr>
-          <a:xfrm>
-            <a:off x="9450000" y="918000"/>
-            <a:ext cx="2088000" cy="525960"/>
-          </a:xfrm>
-          <a:prstGeom prst="rect">
-            <a:avLst/>
-          </a:prstGeom>
-          <a:noFill/>
-          <a:ln w="0">
-            <a:noFill/>
-          </a:ln>
-        </p:spPr>
-        <p:txBody>
-          <a:bodyPr lIns="43200" rIns="43200" tIns="43200" bIns="43200" anchor="t">
-            <a:noAutofit/>
-          </a:bodyPr>
-          <a:p>
-            <a:r>
-              <a:rPr b="1" lang="en-US" sz="1550" spc="-1" strike="noStrike">
+          <p:cNvSpPr/>
+          <p:nvPr/>
+        </p:nvSpPr>
+        <p:spPr>
+          <a:xfrm>
+            <a:off x="432000" y="972000"/>
+            <a:ext cx="57600" cy="810000"/>
+          </a:xfrm>
+          <a:prstGeom prst="rect">
+            <a:avLst/>
+          </a:prstGeom>
+          <a:solidFill>
+            <a:srgbClr val="500000"/>
+          </a:solidFill>
+          <a:ln w="7200">
+            <a:solidFill>
+              <a:srgbClr val="500000"/>
+            </a:solidFill>
+            <a:round/>
+          </a:ln>
+        </p:spPr>
+      </p:sp>
+      <p:sp>
+        <p:nvSpPr>
+          <p:cNvPr id="376" name=""/>
+          <p:cNvSpPr txBox="1"/>
+          <p:nvPr/>
+        </p:nvSpPr>
+        <p:spPr>
+          <a:xfrm>
+            <a:off x="594000" y="1072800"/>
+            <a:ext cx="3294000" cy="414720"/>
+          </a:xfrm>
+          <a:prstGeom prst="rect">
+            <a:avLst/>
+          </a:prstGeom>
+          <a:noFill/>
+          <a:ln w="0">
+            <a:noFill/>
+          </a:ln>
+        </p:spPr>
+        <p:txBody>
+          <a:bodyPr lIns="43200" rIns="43200" tIns="43200" bIns="43200" anchor="t">
+            <a:noAutofit/>
+          </a:bodyPr>
+          <a:p>
+            <a:r>
+              <a:rPr b="1" lang="en-US" sz="2300" spc="-1" strike="noStrike">
                 <a:solidFill>
                   <a:srgbClr val="500000"/>
                 </a:solidFill>
                 <a:latin typeface="Arial"/>
               </a:rPr>
-              <a:t>Repeated sensing layout</a:t>
-            </a:r>
-            <a:endParaRPr b="1" lang="en-US" sz="1550" spc="-1" strike="noStrike">
+              <a:t>212.34 mm</a:t>
+            </a:r>
+            <a:endParaRPr b="1" lang="en-US" sz="2300" spc="-1" strike="noStrike">
               <a:solidFill>
                 <a:srgbClr val="500000"/>
               </a:solidFill>
@@ -8494,38 +8522,390 @@
       </p:sp>
       <p:sp>
         <p:nvSpPr>
-          <p:cNvPr id="376" name=""/>
-          <p:cNvSpPr txBox="1"/>
-          <p:nvPr/>
-        </p:nvSpPr>
-        <p:spPr>
-          <a:xfrm>
-            <a:off x="9396000" y="1310400"/>
-            <a:ext cx="180000" cy="222480"/>
-          </a:xfrm>
-          <a:prstGeom prst="rect">
-            <a:avLst/>
-          </a:prstGeom>
-          <a:noFill/>
-          <a:ln w="0">
-            <a:noFill/>
-          </a:ln>
-        </p:spPr>
-        <p:txBody>
-          <a:bodyPr lIns="43200" rIns="43200" tIns="43200" bIns="43200" anchor="t">
-            <a:noAutofit/>
-          </a:bodyPr>
-          <a:p>
-            <a:r>
-              <a:rPr b="1" lang="en-US" sz="950" spc="-1" strike="noStrike">
+          <p:cNvPr id="377" name=""/>
+          <p:cNvSpPr txBox="1"/>
+          <p:nvPr/>
+        </p:nvSpPr>
+        <p:spPr>
+          <a:xfrm>
+            <a:off x="594000" y="1396800"/>
+            <a:ext cx="3294000" cy="234720"/>
+          </a:xfrm>
+          <a:prstGeom prst="rect">
+            <a:avLst/>
+          </a:prstGeom>
+          <a:noFill/>
+          <a:ln w="0">
+            <a:noFill/>
+          </a:ln>
+        </p:spPr>
+        <p:txBody>
+          <a:bodyPr lIns="43200" rIns="43200" tIns="43200" bIns="43200" anchor="t">
+            <a:noAutofit/>
+          </a:bodyPr>
+          <a:p>
+            <a:r>
+              <a:rPr b="0" lang="en-US" sz="1050" spc="-1" strike="noStrike">
+                <a:solidFill>
+                  <a:srgbClr val="44515e"/>
+                </a:solidFill>
+                <a:latin typeface="Arial"/>
+              </a:rPr>
+              <a:t>measured mean radius</a:t>
+            </a:r>
+            <a:endParaRPr b="0" lang="en-US" sz="1050" spc="-1" strike="noStrike">
+              <a:solidFill>
+                <a:srgbClr val="44515e"/>
+              </a:solidFill>
+              <a:latin typeface="Arial"/>
+            </a:endParaRPr>
+          </a:p>
+        </p:txBody>
+      </p:sp>
+      <p:sp>
+        <p:nvSpPr>
+          <p:cNvPr id="378" name=""/>
+          <p:cNvSpPr/>
+          <p:nvPr/>
+        </p:nvSpPr>
+        <p:spPr>
+          <a:xfrm>
+            <a:off x="4212000" y="972000"/>
+            <a:ext cx="3528000" cy="810000"/>
+          </a:xfrm>
+          <a:prstGeom prst="roundRect">
+            <a:avLst/>
+          </a:prstGeom>
+          <a:solidFill>
+            <a:srgbClr val="ffffff"/>
+          </a:solidFill>
+          <a:ln w="7200">
+            <a:solidFill>
+              <a:srgbClr val="d7d2cc"/>
+            </a:solidFill>
+            <a:round/>
+          </a:ln>
+        </p:spPr>
+      </p:sp>
+      <p:sp>
+        <p:nvSpPr>
+          <p:cNvPr id="379" name=""/>
+          <p:cNvSpPr/>
+          <p:nvPr/>
+        </p:nvSpPr>
+        <p:spPr>
+          <a:xfrm>
+            <a:off x="4212000" y="972000"/>
+            <a:ext cx="57600" cy="810000"/>
+          </a:xfrm>
+          <a:prstGeom prst="rect">
+            <a:avLst/>
+          </a:prstGeom>
+          <a:solidFill>
+            <a:srgbClr val="167d8d"/>
+          </a:solidFill>
+          <a:ln w="7200">
+            <a:solidFill>
+              <a:srgbClr val="167d8d"/>
+            </a:solidFill>
+            <a:round/>
+          </a:ln>
+        </p:spPr>
+      </p:sp>
+      <p:sp>
+        <p:nvSpPr>
+          <p:cNvPr id="380" name=""/>
+          <p:cNvSpPr txBox="1"/>
+          <p:nvPr/>
+        </p:nvSpPr>
+        <p:spPr>
+          <a:xfrm>
+            <a:off x="4374000" y="1072800"/>
+            <a:ext cx="3294000" cy="414720"/>
+          </a:xfrm>
+          <a:prstGeom prst="rect">
+            <a:avLst/>
+          </a:prstGeom>
+          <a:noFill/>
+          <a:ln w="0">
+            <a:noFill/>
+          </a:ln>
+        </p:spPr>
+        <p:txBody>
+          <a:bodyPr lIns="43200" rIns="43200" tIns="43200" bIns="43200" anchor="t">
+            <a:noAutofit/>
+          </a:bodyPr>
+          <a:p>
+            <a:r>
+              <a:rPr b="1" lang="en-US" sz="2300" spc="-1" strike="noStrike">
                 <a:solidFill>
                   <a:srgbClr val="167d8d"/>
                 </a:solidFill>
                 <a:latin typeface="Arial"/>
               </a:rPr>
+              <a:t>0.71 mm</a:t>
+            </a:r>
+            <a:endParaRPr b="1" lang="en-US" sz="2300" spc="-1" strike="noStrike">
+              <a:solidFill>
+                <a:srgbClr val="167d8d"/>
+              </a:solidFill>
+              <a:latin typeface="Arial"/>
+            </a:endParaRPr>
+          </a:p>
+        </p:txBody>
+      </p:sp>
+      <p:sp>
+        <p:nvSpPr>
+          <p:cNvPr id="381" name=""/>
+          <p:cNvSpPr txBox="1"/>
+          <p:nvPr/>
+        </p:nvSpPr>
+        <p:spPr>
+          <a:xfrm>
+            <a:off x="4374000" y="1396800"/>
+            <a:ext cx="3294000" cy="234720"/>
+          </a:xfrm>
+          <a:prstGeom prst="rect">
+            <a:avLst/>
+          </a:prstGeom>
+          <a:noFill/>
+          <a:ln w="0">
+            <a:noFill/>
+          </a:ln>
+        </p:spPr>
+        <p:txBody>
+          <a:bodyPr lIns="43200" rIns="43200" tIns="43200" bIns="43200" anchor="t">
+            <a:noAutofit/>
+          </a:bodyPr>
+          <a:p>
+            <a:r>
+              <a:rPr b="0" lang="en-US" sz="1050" spc="-1" strike="noStrike">
+                <a:solidFill>
+                  <a:srgbClr val="44515e"/>
+                </a:solidFill>
+                <a:latin typeface="Arial"/>
+              </a:rPr>
+              <a:t>height peak-to-peak</a:t>
+            </a:r>
+            <a:endParaRPr b="0" lang="en-US" sz="1050" spc="-1" strike="noStrike">
+              <a:solidFill>
+                <a:srgbClr val="44515e"/>
+              </a:solidFill>
+              <a:latin typeface="Arial"/>
+            </a:endParaRPr>
+          </a:p>
+        </p:txBody>
+      </p:sp>
+      <p:sp>
+        <p:nvSpPr>
+          <p:cNvPr id="382" name=""/>
+          <p:cNvSpPr/>
+          <p:nvPr/>
+        </p:nvSpPr>
+        <p:spPr>
+          <a:xfrm>
+            <a:off x="7992000" y="972000"/>
+            <a:ext cx="3528000" cy="810000"/>
+          </a:xfrm>
+          <a:prstGeom prst="roundRect">
+            <a:avLst/>
+          </a:prstGeom>
+          <a:solidFill>
+            <a:srgbClr val="ffffff"/>
+          </a:solidFill>
+          <a:ln w="7200">
+            <a:solidFill>
+              <a:srgbClr val="d7d2cc"/>
+            </a:solidFill>
+            <a:round/>
+          </a:ln>
+        </p:spPr>
+      </p:sp>
+      <p:sp>
+        <p:nvSpPr>
+          <p:cNvPr id="383" name=""/>
+          <p:cNvSpPr/>
+          <p:nvPr/>
+        </p:nvSpPr>
+        <p:spPr>
+          <a:xfrm>
+            <a:off x="7992000" y="972000"/>
+            <a:ext cx="57600" cy="810000"/>
+          </a:xfrm>
+          <a:prstGeom prst="rect">
+            <a:avLst/>
+          </a:prstGeom>
+          <a:solidFill>
+            <a:srgbClr val="d6a84b"/>
+          </a:solidFill>
+          <a:ln w="7200">
+            <a:solidFill>
+              <a:srgbClr val="d6a84b"/>
+            </a:solidFill>
+            <a:round/>
+          </a:ln>
+        </p:spPr>
+      </p:sp>
+      <p:sp>
+        <p:nvSpPr>
+          <p:cNvPr id="384" name=""/>
+          <p:cNvSpPr txBox="1"/>
+          <p:nvPr/>
+        </p:nvSpPr>
+        <p:spPr>
+          <a:xfrm>
+            <a:off x="8154000" y="1072800"/>
+            <a:ext cx="3294000" cy="414720"/>
+          </a:xfrm>
+          <a:prstGeom prst="rect">
+            <a:avLst/>
+          </a:prstGeom>
+          <a:noFill/>
+          <a:ln w="0">
+            <a:noFill/>
+          </a:ln>
+        </p:spPr>
+        <p:txBody>
+          <a:bodyPr lIns="43200" rIns="43200" tIns="43200" bIns="43200" anchor="t">
+            <a:noAutofit/>
+          </a:bodyPr>
+          <a:p>
+            <a:r>
+              <a:rPr b="1" lang="en-US" sz="2300" spc="-1" strike="noStrike">
+                <a:solidFill>
+                  <a:srgbClr val="d6a84b"/>
+                </a:solidFill>
+                <a:latin typeface="Arial"/>
+              </a:rPr>
+              <a:t>0.1254 N·m</a:t>
+            </a:r>
+            <a:endParaRPr b="1" lang="en-US" sz="2300" spc="-1" strike="noStrike">
+              <a:solidFill>
+                <a:srgbClr val="d6a84b"/>
+              </a:solidFill>
+              <a:latin typeface="Arial"/>
+            </a:endParaRPr>
+          </a:p>
+        </p:txBody>
+      </p:sp>
+      <p:sp>
+        <p:nvSpPr>
+          <p:cNvPr id="385" name=""/>
+          <p:cNvSpPr txBox="1"/>
+          <p:nvPr/>
+        </p:nvSpPr>
+        <p:spPr>
+          <a:xfrm>
+            <a:off x="8154000" y="1396800"/>
+            <a:ext cx="3294000" cy="234720"/>
+          </a:xfrm>
+          <a:prstGeom prst="rect">
+            <a:avLst/>
+          </a:prstGeom>
+          <a:noFill/>
+          <a:ln w="0">
+            <a:noFill/>
+          </a:ln>
+        </p:spPr>
+        <p:txBody>
+          <a:bodyPr lIns="43200" rIns="43200" tIns="43200" bIns="43200" anchor="t">
+            <a:noAutofit/>
+          </a:bodyPr>
+          <a:p>
+            <a:r>
+              <a:rPr b="0" lang="en-US" sz="1050" spc="-1" strike="noStrike">
+                <a:solidFill>
+                  <a:srgbClr val="44515e"/>
+                </a:solidFill>
+                <a:latin typeface="Arial"/>
+              </a:rPr>
+              <a:t>maximum module command</a:t>
+            </a:r>
+            <a:endParaRPr b="0" lang="en-US" sz="1050" spc="-1" strike="noStrike">
+              <a:solidFill>
+                <a:srgbClr val="44515e"/>
+              </a:solidFill>
+              <a:latin typeface="Arial"/>
+            </a:endParaRPr>
+          </a:p>
+        </p:txBody>
+      </p:sp>
+      <p:sp>
+        <p:nvSpPr>
+          <p:cNvPr id="386" name=""/>
+          <p:cNvSpPr txBox="1"/>
+          <p:nvPr/>
+        </p:nvSpPr>
+        <p:spPr>
+          <a:xfrm>
+            <a:off x="504000" y="2196000"/>
+            <a:ext cx="5400000" cy="342720"/>
+          </a:xfrm>
+          <a:prstGeom prst="rect">
+            <a:avLst/>
+          </a:prstGeom>
+          <a:noFill/>
+          <a:ln w="0">
+            <a:noFill/>
+          </a:ln>
+        </p:spPr>
+        <p:txBody>
+          <a:bodyPr lIns="43200" rIns="43200" tIns="43200" bIns="43200" anchor="t">
+            <a:noAutofit/>
+          </a:bodyPr>
+          <a:p>
+            <a:r>
+              <a:rPr b="1" lang="en-US" sz="1800" spc="-1" strike="noStrike">
+                <a:solidFill>
+                  <a:srgbClr val="500000"/>
+                </a:solidFill>
+                <a:latin typeface="Arial"/>
+              </a:rPr>
+              <a:t>Constrained constant-curvature solution</a:t>
+            </a:r>
+            <a:endParaRPr b="1" lang="en-US" sz="1800" spc="-1" strike="noStrike">
+              <a:solidFill>
+                <a:srgbClr val="500000"/>
+              </a:solidFill>
+              <a:latin typeface="Arial"/>
+            </a:endParaRPr>
+          </a:p>
+        </p:txBody>
+      </p:sp>
+      <p:sp>
+        <p:nvSpPr>
+          <p:cNvPr id="387" name=""/>
+          <p:cNvSpPr txBox="1"/>
+          <p:nvPr/>
+        </p:nvSpPr>
+        <p:spPr>
+          <a:xfrm>
+            <a:off x="504000" y="2588400"/>
+            <a:ext cx="180000" cy="253080"/>
+          </a:xfrm>
+          <a:prstGeom prst="rect">
+            <a:avLst/>
+          </a:prstGeom>
+          <a:noFill/>
+          <a:ln w="0">
+            <a:noFill/>
+          </a:ln>
+        </p:spPr>
+        <p:txBody>
+          <a:bodyPr lIns="43200" rIns="43200" tIns="43200" bIns="43200" anchor="t">
+            <a:noAutofit/>
+          </a:bodyPr>
+          <a:p>
+            <a:r>
+              <a:rPr b="1" lang="en-US" sz="1160" spc="-1" strike="noStrike">
+                <a:solidFill>
+                  <a:srgbClr val="167d8d"/>
+                </a:solidFill>
+                <a:latin typeface="Arial"/>
+              </a:rPr>
               <a:t>●</a:t>
             </a:r>
-            <a:endParaRPr b="1" lang="en-US" sz="950" spc="-1" strike="noStrike">
+            <a:endParaRPr b="1" lang="en-US" sz="1160" spc="-1" strike="noStrike">
               <a:solidFill>
                 <a:srgbClr val="167d8d"/>
               </a:solidFill>
@@ -8536,38 +8916,38 @@
       </p:sp>
       <p:sp>
         <p:nvSpPr>
-          <p:cNvPr id="377" name=""/>
-          <p:cNvSpPr txBox="1"/>
-          <p:nvPr/>
-        </p:nvSpPr>
-        <p:spPr>
-          <a:xfrm>
-            <a:off x="9594000" y="1296000"/>
-            <a:ext cx="1962000" cy="478800"/>
-          </a:xfrm>
-          <a:prstGeom prst="rect">
-            <a:avLst/>
-          </a:prstGeom>
-          <a:noFill/>
-          <a:ln w="0">
-            <a:noFill/>
-          </a:ln>
-        </p:spPr>
-        <p:txBody>
-          <a:bodyPr lIns="43200" rIns="43200" tIns="43200" bIns="43200" anchor="t">
-            <a:noAutofit/>
-          </a:bodyPr>
-          <a:p>
-            <a:r>
-              <a:rPr b="0" lang="en-US" sz="1150" spc="-1" strike="noStrike">
+          <p:cNvPr id="388" name=""/>
+          <p:cNvSpPr txBox="1"/>
+          <p:nvPr/>
+        </p:nvSpPr>
+        <p:spPr>
+          <a:xfrm>
+            <a:off x="702000" y="2574000"/>
+            <a:ext cx="7002000" cy="500400"/>
+          </a:xfrm>
+          <a:prstGeom prst="rect">
+            <a:avLst/>
+          </a:prstGeom>
+          <a:noFill/>
+          <a:ln w="0">
+            <a:noFill/>
+          </a:ln>
+        </p:spPr>
+        <p:txBody>
+          <a:bodyPr lIns="43200" rIns="43200" tIns="43200" bIns="43200" anchor="t">
+            <a:noAutofit/>
+          </a:bodyPr>
+          <a:p>
+            <a:r>
+              <a:rPr b="0" lang="en-US" sz="1360" spc="-1" strike="noStrike">
                 <a:solidFill>
                   <a:srgbClr val="17212b"/>
                 </a:solidFill>
                 <a:latin typeface="Arial"/>
               </a:rPr>
-              <a:t>Six gauges per module</a:t>
-            </a:r>
-            <a:endParaRPr b="0" lang="en-US" sz="1150" spc="-1" strike="noStrike">
+              <a:t>Minimizes 0.5 Σ wᵢτᵢ² subject to requested tip radius and height.</a:t>
+            </a:r>
+            <a:endParaRPr b="0" lang="en-US" sz="1360" spc="-1" strike="noStrike">
               <a:solidFill>
                 <a:srgbClr val="17212b"/>
               </a:solidFill>
@@ -8578,30 +8958,30 @@
       </p:sp>
       <p:sp>
         <p:nvSpPr>
-          <p:cNvPr id="378" name=""/>
-          <p:cNvSpPr txBox="1"/>
-          <p:nvPr/>
-        </p:nvSpPr>
-        <p:spPr>
-          <a:xfrm>
-            <a:off x="9396000" y="1792800"/>
-            <a:ext cx="180000" cy="222480"/>
-          </a:xfrm>
-          <a:prstGeom prst="rect">
-            <a:avLst/>
-          </a:prstGeom>
-          <a:noFill/>
-          <a:ln w="0">
-            <a:noFill/>
-          </a:ln>
-        </p:spPr>
-        <p:txBody>
-          <a:bodyPr lIns="43200" rIns="43200" tIns="43200" bIns="43200" anchor="t">
-            <a:noAutofit/>
-          </a:bodyPr>
-          <a:p>
-            <a:r>
-              <a:rPr b="1" lang="en-US" sz="950" spc="-1" strike="noStrike">
+          <p:cNvPr id="389" name=""/>
+          <p:cNvSpPr txBox="1"/>
+          <p:nvPr/>
+        </p:nvSpPr>
+        <p:spPr>
+          <a:xfrm>
+            <a:off x="504000" y="3092400"/>
+            <a:ext cx="180000" cy="253080"/>
+          </a:xfrm>
+          <a:prstGeom prst="rect">
+            <a:avLst/>
+          </a:prstGeom>
+          <a:noFill/>
+          <a:ln w="0">
+            <a:noFill/>
+          </a:ln>
+        </p:spPr>
+        <p:txBody>
+          <a:bodyPr lIns="43200" rIns="43200" tIns="43200" bIns="43200" anchor="t">
+            <a:noAutofit/>
+          </a:bodyPr>
+          <a:p>
+            <a:r>
+              <a:rPr b="1" lang="en-US" sz="1160" spc="-1" strike="noStrike">
                 <a:solidFill>
                   <a:srgbClr val="167d8d"/>
                 </a:solidFill>
@@ -8609,7 +8989,7 @@
               </a:rPr>
               <a:t>●</a:t>
             </a:r>
-            <a:endParaRPr b="1" lang="en-US" sz="950" spc="-1" strike="noStrike">
+            <a:endParaRPr b="1" lang="en-US" sz="1160" spc="-1" strike="noStrike">
               <a:solidFill>
                 <a:srgbClr val="167d8d"/>
               </a:solidFill>
@@ -8620,38 +9000,38 @@
       </p:sp>
       <p:sp>
         <p:nvSpPr>
-          <p:cNvPr id="379" name=""/>
-          <p:cNvSpPr txBox="1"/>
-          <p:nvPr/>
-        </p:nvSpPr>
-        <p:spPr>
-          <a:xfrm>
-            <a:off x="9594000" y="1778400"/>
-            <a:ext cx="1962000" cy="478800"/>
-          </a:xfrm>
-          <a:prstGeom prst="rect">
-            <a:avLst/>
-          </a:prstGeom>
-          <a:noFill/>
-          <a:ln w="0">
-            <a:noFill/>
-          </a:ln>
-        </p:spPr>
-        <p:txBody>
-          <a:bodyPr lIns="43200" rIns="43200" tIns="43200" bIns="43200" anchor="t">
-            <a:noAutofit/>
-          </a:bodyPr>
-          <a:p>
-            <a:r>
-              <a:rPr b="0" lang="en-US" sz="1150" spc="-1" strike="noStrike">
+          <p:cNvPr id="390" name=""/>
+          <p:cNvSpPr txBox="1"/>
+          <p:nvPr/>
+        </p:nvSpPr>
+        <p:spPr>
+          <a:xfrm>
+            <a:off x="702000" y="3078000"/>
+            <a:ext cx="7002000" cy="500400"/>
+          </a:xfrm>
+          <a:prstGeom prst="rect">
+            <a:avLst/>
+          </a:prstGeom>
+          <a:noFill/>
+          <a:ln w="0">
+            <a:noFill/>
+          </a:ln>
+        </p:spPr>
+        <p:txBody>
+          <a:bodyPr lIns="43200" rIns="43200" tIns="43200" bIns="43200" anchor="t">
+            <a:noAutofit/>
+          </a:bodyPr>
+          <a:p>
+            <a:r>
+              <a:rPr b="0" lang="en-US" sz="1360" spc="-1" strike="noStrike">
                 <a:solidFill>
                   <a:srgbClr val="17212b"/>
                 </a:solidFill>
                 <a:latin typeface="Arial"/>
               </a:rPr>
-              <a:t>Two axial stations</a:t>
-            </a:r>
-            <a:endParaRPr b="0" lang="en-US" sz="1150" spc="-1" strike="noStrike">
+              <a:t>All 15 bending intervals and both rigid connector spans are modeled.</a:t>
+            </a:r>
+            <a:endParaRPr b="0" lang="en-US" sz="1360" spc="-1" strike="noStrike">
               <a:solidFill>
                 <a:srgbClr val="17212b"/>
               </a:solidFill>
@@ -8662,30 +9042,30 @@
       </p:sp>
       <p:sp>
         <p:nvSpPr>
-          <p:cNvPr id="380" name=""/>
-          <p:cNvSpPr txBox="1"/>
-          <p:nvPr/>
-        </p:nvSpPr>
-        <p:spPr>
-          <a:xfrm>
-            <a:off x="9396000" y="2275200"/>
-            <a:ext cx="180000" cy="222480"/>
-          </a:xfrm>
-          <a:prstGeom prst="rect">
-            <a:avLst/>
-          </a:prstGeom>
-          <a:noFill/>
-          <a:ln w="0">
-            <a:noFill/>
-          </a:ln>
-        </p:spPr>
-        <p:txBody>
-          <a:bodyPr lIns="43200" rIns="43200" tIns="43200" bIns="43200" anchor="t">
-            <a:noAutofit/>
-          </a:bodyPr>
-          <a:p>
-            <a:r>
-              <a:rPr b="1" lang="en-US" sz="950" spc="-1" strike="noStrike">
+          <p:cNvPr id="391" name=""/>
+          <p:cNvSpPr txBox="1"/>
+          <p:nvPr/>
+        </p:nvSpPr>
+        <p:spPr>
+          <a:xfrm>
+            <a:off x="504000" y="3596400"/>
+            <a:ext cx="180000" cy="253080"/>
+          </a:xfrm>
+          <a:prstGeom prst="rect">
+            <a:avLst/>
+          </a:prstGeom>
+          <a:noFill/>
+          <a:ln w="0">
+            <a:noFill/>
+          </a:ln>
+        </p:spPr>
+        <p:txBody>
+          <a:bodyPr lIns="43200" rIns="43200" tIns="43200" bIns="43200" anchor="t">
+            <a:noAutofit/>
+          </a:bodyPr>
+          <a:p>
+            <a:r>
+              <a:rPr b="1" lang="en-US" sz="1160" spc="-1" strike="noStrike">
                 <a:solidFill>
                   <a:srgbClr val="167d8d"/>
                 </a:solidFill>
@@ -8693,7 +9073,7 @@
               </a:rPr>
               <a:t>●</a:t>
             </a:r>
-            <a:endParaRPr b="1" lang="en-US" sz="950" spc="-1" strike="noStrike">
+            <a:endParaRPr b="1" lang="en-US" sz="1160" spc="-1" strike="noStrike">
               <a:solidFill>
                 <a:srgbClr val="167d8d"/>
               </a:solidFill>
@@ -8704,38 +9084,38 @@
       </p:sp>
       <p:sp>
         <p:nvSpPr>
-          <p:cNvPr id="381" name=""/>
-          <p:cNvSpPr txBox="1"/>
-          <p:nvPr/>
-        </p:nvSpPr>
-        <p:spPr>
-          <a:xfrm>
-            <a:off x="9594000" y="2260800"/>
-            <a:ext cx="1962000" cy="478800"/>
-          </a:xfrm>
-          <a:prstGeom prst="rect">
-            <a:avLst/>
-          </a:prstGeom>
-          <a:noFill/>
-          <a:ln w="0">
-            <a:noFill/>
-          </a:ln>
-        </p:spPr>
-        <p:txBody>
-          <a:bodyPr lIns="43200" rIns="43200" tIns="43200" bIns="43200" anchor="t">
-            <a:noAutofit/>
-          </a:bodyPr>
-          <a:p>
-            <a:r>
-              <a:rPr b="0" lang="en-US" sz="1150" spc="-1" strike="noStrike">
+          <p:cNvPr id="392" name=""/>
+          <p:cNvSpPr txBox="1"/>
+          <p:nvPr/>
+        </p:nvSpPr>
+        <p:spPr>
+          <a:xfrm>
+            <a:off x="702000" y="3582000"/>
+            <a:ext cx="7002000" cy="500400"/>
+          </a:xfrm>
+          <a:prstGeom prst="rect">
+            <a:avLst/>
+          </a:prstGeom>
+          <a:noFill/>
+          <a:ln w="0">
+            <a:noFill/>
+          </a:ln>
+        </p:spPr>
+        <p:txBody>
+          <a:bodyPr lIns="43200" rIns="43200" tIns="43200" bIns="43200" anchor="t">
+            <a:noAutofit/>
+          </a:bodyPr>
+          <a:p>
+            <a:r>
+              <a:rPr b="0" lang="en-US" sz="1360" spc="-1" strike="noStrike">
                 <a:solidFill>
                   <a:srgbClr val="17212b"/>
                 </a:solidFill>
                 <a:latin typeface="Arial"/>
               </a:rPr>
-              <a:t>Three gauges per ring</a:t>
-            </a:r>
-            <a:endParaRPr b="0" lang="en-US" sz="1150" spc="-1" strike="noStrike">
+              <a:t>Optimized torques stay constant while the common bending plane rotates.</a:t>
+            </a:r>
+            <a:endParaRPr b="0" lang="en-US" sz="1360" spc="-1" strike="noStrike">
               <a:solidFill>
                 <a:srgbClr val="17212b"/>
               </a:solidFill>
@@ -8746,30 +9126,30 @@
       </p:sp>
       <p:sp>
         <p:nvSpPr>
-          <p:cNvPr id="382" name=""/>
-          <p:cNvSpPr txBox="1"/>
-          <p:nvPr/>
-        </p:nvSpPr>
-        <p:spPr>
-          <a:xfrm>
-            <a:off x="9396000" y="2757600"/>
-            <a:ext cx="180000" cy="222480"/>
-          </a:xfrm>
-          <a:prstGeom prst="rect">
-            <a:avLst/>
-          </a:prstGeom>
-          <a:noFill/>
-          <a:ln w="0">
-            <a:noFill/>
-          </a:ln>
-        </p:spPr>
-        <p:txBody>
-          <a:bodyPr lIns="43200" rIns="43200" tIns="43200" bIns="43200" anchor="t">
-            <a:noAutofit/>
-          </a:bodyPr>
-          <a:p>
-            <a:r>
-              <a:rPr b="1" lang="en-US" sz="950" spc="-1" strike="noStrike">
+          <p:cNvPr id="393" name=""/>
+          <p:cNvSpPr txBox="1"/>
+          <p:nvPr/>
+        </p:nvSpPr>
+        <p:spPr>
+          <a:xfrm>
+            <a:off x="504000" y="4100400"/>
+            <a:ext cx="180000" cy="253080"/>
+          </a:xfrm>
+          <a:prstGeom prst="rect">
+            <a:avLst/>
+          </a:prstGeom>
+          <a:noFill/>
+          <a:ln w="0">
+            <a:noFill/>
+          </a:ln>
+        </p:spPr>
+        <p:txBody>
+          <a:bodyPr lIns="43200" rIns="43200" tIns="43200" bIns="43200" anchor="t">
+            <a:noAutofit/>
+          </a:bodyPr>
+          <a:p>
+            <a:r>
+              <a:rPr b="1" lang="en-US" sz="1160" spc="-1" strike="noStrike">
                 <a:solidFill>
                   <a:srgbClr val="167d8d"/>
                 </a:solidFill>
@@ -8777,7 +9157,7 @@
               </a:rPr>
               <a:t>●</a:t>
             </a:r>
-            <a:endParaRPr b="1" lang="en-US" sz="950" spc="-1" strike="noStrike">
+            <a:endParaRPr b="1" lang="en-US" sz="1160" spc="-1" strike="noStrike">
               <a:solidFill>
                 <a:srgbClr val="167d8d"/>
               </a:solidFill>
@@ -8788,38 +9168,38 @@
       </p:sp>
       <p:sp>
         <p:nvSpPr>
-          <p:cNvPr id="383" name=""/>
-          <p:cNvSpPr txBox="1"/>
-          <p:nvPr/>
-        </p:nvSpPr>
-        <p:spPr>
-          <a:xfrm>
-            <a:off x="9594000" y="2743200"/>
-            <a:ext cx="1962000" cy="478800"/>
-          </a:xfrm>
-          <a:prstGeom prst="rect">
-            <a:avLst/>
-          </a:prstGeom>
-          <a:noFill/>
-          <a:ln w="0">
-            <a:noFill/>
-          </a:ln>
-        </p:spPr>
-        <p:txBody>
-          <a:bodyPr lIns="43200" rIns="43200" tIns="43200" bIns="43200" anchor="t">
-            <a:noAutofit/>
-          </a:bodyPr>
-          <a:p>
-            <a:r>
-              <a:rPr b="0" lang="en-US" sz="1150" spc="-1" strike="noStrike">
+          <p:cNvPr id="394" name=""/>
+          <p:cNvSpPr txBox="1"/>
+          <p:nvPr/>
+        </p:nvSpPr>
+        <p:spPr>
+          <a:xfrm>
+            <a:off x="702000" y="4086000"/>
+            <a:ext cx="7002000" cy="500400"/>
+          </a:xfrm>
+          <a:prstGeom prst="rect">
+            <a:avLst/>
+          </a:prstGeom>
+          <a:noFill/>
+          <a:ln w="0">
+            <a:noFill/>
+          </a:ln>
+        </p:spPr>
+        <p:txBody>
+          <a:bodyPr lIns="43200" rIns="43200" tIns="43200" bIns="43200" anchor="t">
+            <a:noAutofit/>
+          </a:bodyPr>
+          <a:p>
+            <a:r>
+              <a:rPr b="0" lang="en-US" sz="1360" spc="-1" strike="noStrike">
                 <a:solidFill>
                   <a:srgbClr val="17212b"/>
                 </a:solidFill>
                 <a:latin typeface="Arial"/>
               </a:rPr>
-              <a:t>18 bridge-voltage channels</a:t>
-            </a:r>
-            <a:endParaRPr b="0" lang="en-US" sz="1150" spc="-1" strike="noStrike">
+              <a:t>Default radius: 212.5 mm = half of the 425 mm modeled limb length.</a:t>
+            </a:r>
+            <a:endParaRPr b="0" lang="en-US" sz="1360" spc="-1" strike="noStrike">
               <a:solidFill>
                 <a:srgbClr val="17212b"/>
               </a:solidFill>
@@ -8830,30 +9210,30 @@
       </p:sp>
       <p:sp>
         <p:nvSpPr>
-          <p:cNvPr id="384" name=""/>
-          <p:cNvSpPr txBox="1"/>
-          <p:nvPr/>
-        </p:nvSpPr>
-        <p:spPr>
-          <a:xfrm>
-            <a:off x="9396000" y="3240000"/>
-            <a:ext cx="180000" cy="222480"/>
-          </a:xfrm>
-          <a:prstGeom prst="rect">
-            <a:avLst/>
-          </a:prstGeom>
-          <a:noFill/>
-          <a:ln w="0">
-            <a:noFill/>
-          </a:ln>
-        </p:spPr>
-        <p:txBody>
-          <a:bodyPr lIns="43200" rIns="43200" tIns="43200" bIns="43200" anchor="t">
-            <a:noAutofit/>
-          </a:bodyPr>
-          <a:p>
-            <a:r>
-              <a:rPr b="1" lang="en-US" sz="950" spc="-1" strike="noStrike">
+          <p:cNvPr id="395" name=""/>
+          <p:cNvSpPr txBox="1"/>
+          <p:nvPr/>
+        </p:nvSpPr>
+        <p:spPr>
+          <a:xfrm>
+            <a:off x="504000" y="4604400"/>
+            <a:ext cx="180000" cy="253080"/>
+          </a:xfrm>
+          <a:prstGeom prst="rect">
+            <a:avLst/>
+          </a:prstGeom>
+          <a:noFill/>
+          <a:ln w="0">
+            <a:noFill/>
+          </a:ln>
+        </p:spPr>
+        <p:txBody>
+          <a:bodyPr lIns="43200" rIns="43200" tIns="43200" bIns="43200" anchor="t">
+            <a:noAutofit/>
+          </a:bodyPr>
+          <a:p>
+            <a:r>
+              <a:rPr b="1" lang="en-US" sz="1160" spc="-1" strike="noStrike">
                 <a:solidFill>
                   <a:srgbClr val="167d8d"/>
                 </a:solidFill>
@@ -8861,7 +9241,7 @@
               </a:rPr>
               <a:t>●</a:t>
             </a:r>
-            <a:endParaRPr b="1" lang="en-US" sz="950" spc="-1" strike="noStrike">
+            <a:endParaRPr b="1" lang="en-US" sz="1160" spc="-1" strike="noStrike">
               <a:solidFill>
                 <a:srgbClr val="167d8d"/>
               </a:solidFill>
@@ -8872,38 +9252,38 @@
       </p:sp>
       <p:sp>
         <p:nvSpPr>
-          <p:cNvPr id="385" name=""/>
-          <p:cNvSpPr txBox="1"/>
-          <p:nvPr/>
-        </p:nvSpPr>
-        <p:spPr>
-          <a:xfrm>
-            <a:off x="9594000" y="3225600"/>
-            <a:ext cx="1962000" cy="478800"/>
-          </a:xfrm>
-          <a:prstGeom prst="rect">
-            <a:avLst/>
-          </a:prstGeom>
-          <a:noFill/>
-          <a:ln w="0">
-            <a:noFill/>
-          </a:ln>
-        </p:spPr>
-        <p:txBody>
-          <a:bodyPr lIns="43200" rIns="43200" tIns="43200" bIns="43200" anchor="t">
-            <a:noAutofit/>
-          </a:bodyPr>
-          <a:p>
-            <a:r>
-              <a:rPr b="0" lang="en-US" sz="1150" spc="-1" strike="noStrike">
+          <p:cNvPr id="396" name=""/>
+          <p:cNvSpPr txBox="1"/>
+          <p:nvPr/>
+        </p:nvSpPr>
+        <p:spPr>
+          <a:xfrm>
+            <a:off x="702000" y="4590000"/>
+            <a:ext cx="7002000" cy="500400"/>
+          </a:xfrm>
+          <a:prstGeom prst="rect">
+            <a:avLst/>
+          </a:prstGeom>
+          <a:noFill/>
+          <a:ln w="0">
+            <a:noFill/>
+          </a:ln>
+        </p:spPr>
+        <p:txBody>
+          <a:bodyPr lIns="43200" rIns="43200" tIns="43200" bIns="43200" anchor="t">
+            <a:noAutofit/>
+          </a:bodyPr>
+          <a:p>
+            <a:r>
+              <a:rPr b="0" lang="en-US" sz="1360" spc="-1" strike="noStrike">
                 <a:solidFill>
                   <a:srgbClr val="17212b"/>
                 </a:solidFill>
                 <a:latin typeface="Arial"/>
               </a:rPr>
-              <a:t>18 validity flags</a:t>
-            </a:r>
-            <a:endParaRPr b="0" lang="en-US" sz="1150" spc="-1" strike="noStrike">
+              <a:t>Path height is 0.40 m; the 54 s period preserves the prior tip speed.</a:t>
+            </a:r>
+            <a:endParaRPr b="0" lang="en-US" sz="1360" spc="-1" strike="noStrike">
               <a:solidFill>
                 <a:srgbClr val="17212b"/>
               </a:solidFill>
@@ -8914,30 +9294,30 @@
       </p:sp>
       <p:sp>
         <p:nvSpPr>
-          <p:cNvPr id="386" name=""/>
-          <p:cNvSpPr txBox="1"/>
-          <p:nvPr/>
-        </p:nvSpPr>
-        <p:spPr>
-          <a:xfrm>
-            <a:off x="9396000" y="3722400"/>
-            <a:ext cx="180000" cy="222480"/>
-          </a:xfrm>
-          <a:prstGeom prst="rect">
-            <a:avLst/>
-          </a:prstGeom>
-          <a:noFill/>
-          <a:ln w="0">
-            <a:noFill/>
-          </a:ln>
-        </p:spPr>
-        <p:txBody>
-          <a:bodyPr lIns="43200" rIns="43200" tIns="43200" bIns="43200" anchor="t">
-            <a:noAutofit/>
-          </a:bodyPr>
-          <a:p>
-            <a:r>
-              <a:rPr b="1" lang="en-US" sz="950" spc="-1" strike="noStrike">
+          <p:cNvPr id="397" name=""/>
+          <p:cNvSpPr txBox="1"/>
+          <p:nvPr/>
+        </p:nvSpPr>
+        <p:spPr>
+          <a:xfrm>
+            <a:off x="504000" y="5108400"/>
+            <a:ext cx="180000" cy="253080"/>
+          </a:xfrm>
+          <a:prstGeom prst="rect">
+            <a:avLst/>
+          </a:prstGeom>
+          <a:noFill/>
+          <a:ln w="0">
+            <a:noFill/>
+          </a:ln>
+        </p:spPr>
+        <p:txBody>
+          <a:bodyPr lIns="43200" rIns="43200" tIns="43200" bIns="43200" anchor="t">
+            <a:noAutofit/>
+          </a:bodyPr>
+          <a:p>
+            <a:r>
+              <a:rPr b="1" lang="en-US" sz="1160" spc="-1" strike="noStrike">
                 <a:solidFill>
                   <a:srgbClr val="167d8d"/>
                 </a:solidFill>
@@ -8945,7 +9325,7 @@
               </a:rPr>
               <a:t>●</a:t>
             </a:r>
-            <a:endParaRPr b="1" lang="en-US" sz="950" spc="-1" strike="noStrike">
+            <a:endParaRPr b="1" lang="en-US" sz="1160" spc="-1" strike="noStrike">
               <a:solidFill>
                 <a:srgbClr val="167d8d"/>
               </a:solidFill>
@@ -8956,38 +9336,38 @@
       </p:sp>
       <p:sp>
         <p:nvSpPr>
-          <p:cNvPr id="387" name=""/>
-          <p:cNvSpPr txBox="1"/>
-          <p:nvPr/>
-        </p:nvSpPr>
-        <p:spPr>
-          <a:xfrm>
-            <a:off x="9594000" y="3708000"/>
-            <a:ext cx="1962000" cy="478800"/>
-          </a:xfrm>
-          <a:prstGeom prst="rect">
-            <a:avLst/>
-          </a:prstGeom>
-          <a:noFill/>
-          <a:ln w="0">
-            <a:noFill/>
-          </a:ln>
-        </p:spPr>
-        <p:txBody>
-          <a:bodyPr lIns="43200" rIns="43200" tIns="43200" bIns="43200" anchor="t">
-            <a:noAutofit/>
-          </a:bodyPr>
-          <a:p>
-            <a:r>
-              <a:rPr b="0" lang="en-US" sz="1150" spc="-1" strike="noStrike">
+          <p:cNvPr id="398" name=""/>
+          <p:cNvSpPr txBox="1"/>
+          <p:nvPr/>
+        </p:nvSpPr>
+        <p:spPr>
+          <a:xfrm>
+            <a:off x="702000" y="5094000"/>
+            <a:ext cx="7002000" cy="500400"/>
+          </a:xfrm>
+          <a:prstGeom prst="rect">
+            <a:avLst/>
+          </a:prstGeom>
+          <a:noFill/>
+          <a:ln w="0">
+            <a:noFill/>
+          </a:ln>
+        </p:spPr>
+        <p:txBody>
+          <a:bodyPr lIns="43200" rIns="43200" tIns="43200" bIns="43200" anchor="t">
+            <a:noAutofit/>
+          </a:bodyPr>
+          <a:p>
+            <a:r>
+              <a:rPr b="0" lang="en-US" sz="1360" spc="-1" strike="noStrike">
                 <a:solidFill>
                   <a:srgbClr val="17212b"/>
                 </a:solidFill>
                 <a:latin typeface="Arial"/>
               </a:rPr>
-              <a:t>Quarter bridge: 350 Ω, GF 2.0, 2.5 V excitation</a:t>
-            </a:r>
-            <a:endParaRPr b="0" lang="en-US" sz="1150" spc="-1" strike="noStrike">
+              <a:t>Full revolution passed: 0.76 mm radial and 0.71 mm height variation.</a:t>
+            </a:r>
+            <a:endParaRPr b="0" lang="en-US" sz="1360" spc="-1" strike="noStrike">
               <a:solidFill>
                 <a:srgbClr val="17212b"/>
               </a:solidFill>
@@ -8998,208 +9378,107 @@
       </p:sp>
       <p:sp>
         <p:nvSpPr>
-          <p:cNvPr id="388" name=""/>
-          <p:cNvSpPr txBox="1"/>
-          <p:nvPr/>
-        </p:nvSpPr>
-        <p:spPr>
-          <a:xfrm>
-            <a:off x="9396000" y="4204800"/>
-            <a:ext cx="180000" cy="222480"/>
-          </a:xfrm>
-          <a:prstGeom prst="rect">
-            <a:avLst/>
-          </a:prstGeom>
-          <a:noFill/>
-          <a:ln w="0">
-            <a:noFill/>
-          </a:ln>
-        </p:spPr>
-        <p:txBody>
-          <a:bodyPr lIns="43200" rIns="43200" tIns="43200" bIns="43200" anchor="t">
-            <a:noAutofit/>
-          </a:bodyPr>
-          <a:p>
-            <a:r>
-              <a:rPr b="1" lang="en-US" sz="950" spc="-1" strike="noStrike">
-                <a:solidFill>
-                  <a:srgbClr val="167d8d"/>
-                </a:solidFill>
-                <a:latin typeface="Arial"/>
-              </a:rPr>
-              <a:t>●</a:t>
-            </a:r>
-            <a:endParaRPr b="1" lang="en-US" sz="950" spc="-1" strike="noStrike">
-              <a:solidFill>
-                <a:srgbClr val="167d8d"/>
-              </a:solidFill>
-              <a:latin typeface="Arial"/>
-            </a:endParaRPr>
-          </a:p>
-        </p:txBody>
-      </p:sp>
-      <p:sp>
-        <p:nvSpPr>
-          <p:cNvPr id="389" name=""/>
-          <p:cNvSpPr txBox="1"/>
-          <p:nvPr/>
-        </p:nvSpPr>
-        <p:spPr>
-          <a:xfrm>
-            <a:off x="9594000" y="4190400"/>
-            <a:ext cx="1962000" cy="576000"/>
-          </a:xfrm>
-          <a:prstGeom prst="rect">
-            <a:avLst/>
-          </a:prstGeom>
-          <a:noFill/>
-          <a:ln w="0">
-            <a:noFill/>
-          </a:ln>
-        </p:spPr>
-        <p:txBody>
-          <a:bodyPr lIns="43200" rIns="43200" tIns="43200" bIns="43200" anchor="t">
-            <a:noAutofit/>
-          </a:bodyPr>
-          <a:p>
-            <a:r>
-              <a:rPr b="0" lang="en-US" sz="1150" spc="-1" strike="noStrike">
+          <p:cNvPr id="399" name=""/>
+          <p:cNvSpPr/>
+          <p:nvPr/>
+        </p:nvSpPr>
+        <p:spPr>
+          <a:xfrm>
+            <a:off x="8064000" y="2196000"/>
+            <a:ext cx="3420000" cy="2952000"/>
+          </a:xfrm>
+          <a:prstGeom prst="roundRect">
+            <a:avLst/>
+          </a:prstGeom>
+          <a:solidFill>
+            <a:srgbClr val="ffffff"/>
+          </a:solidFill>
+          <a:ln w="7200">
+            <a:solidFill>
+              <a:srgbClr val="d7d2cc"/>
+            </a:solidFill>
+            <a:round/>
+          </a:ln>
+        </p:spPr>
+      </p:sp>
+      <p:sp>
+        <p:nvSpPr>
+          <p:cNvPr id="400" name=""/>
+          <p:cNvSpPr txBox="1"/>
+          <p:nvPr/>
+        </p:nvSpPr>
+        <p:spPr>
+          <a:xfrm>
+            <a:off x="8280000" y="2412000"/>
+            <a:ext cx="2952000" cy="329040"/>
+          </a:xfrm>
+          <a:prstGeom prst="rect">
+            <a:avLst/>
+          </a:prstGeom>
+          <a:noFill/>
+          <a:ln w="0">
+            <a:noFill/>
+          </a:ln>
+        </p:spPr>
+        <p:txBody>
+          <a:bodyPr lIns="43200" rIns="43200" tIns="43200" bIns="43200" anchor="t">
+            <a:noAutofit/>
+          </a:bodyPr>
+          <a:p>
+            <a:r>
+              <a:rPr b="1" lang="en-US" sz="1700" spc="-1" strike="noStrike">
+                <a:solidFill>
+                  <a:srgbClr val="500000"/>
+                </a:solidFill>
+                <a:latin typeface="Arial"/>
+              </a:rPr>
+              <a:t>Research boundary</a:t>
+            </a:r>
+            <a:endParaRPr b="1" lang="en-US" sz="1700" spc="-1" strike="noStrike">
+              <a:solidFill>
+                <a:srgbClr val="500000"/>
+              </a:solidFill>
+              <a:latin typeface="Arial"/>
+            </a:endParaRPr>
+          </a:p>
+        </p:txBody>
+      </p:sp>
+      <p:sp>
+        <p:nvSpPr>
+          <p:cNvPr id="401" name=""/>
+          <p:cNvSpPr txBox="1"/>
+          <p:nvPr/>
+        </p:nvSpPr>
+        <p:spPr>
+          <a:xfrm>
+            <a:off x="8280000" y="2808000"/>
+            <a:ext cx="2916000" cy="1724400"/>
+          </a:xfrm>
+          <a:prstGeom prst="rect">
+            <a:avLst/>
+          </a:prstGeom>
+          <a:noFill/>
+          <a:ln w="0">
+            <a:noFill/>
+          </a:ln>
+        </p:spPr>
+        <p:txBody>
+          <a:bodyPr lIns="43200" rIns="43200" tIns="43200" bIns="43200" anchor="t">
+            <a:noAutofit/>
+          </a:bodyPr>
+          <a:p>
+            <a:r>
+              <a:rPr b="0" lang="en-US" sz="1320" spc="-1" strike="noStrike">
                 <a:solidFill>
                   <a:srgbClr val="17212b"/>
                 </a:solidFill>
                 <a:latin typeface="Arial"/>
               </a:rPr>
-              <a:t>All 18 voltage graphs open automatically with the simulation launch</a:t>
-            </a:r>
-            <a:endParaRPr b="0" lang="en-US" sz="1150" spc="-1" strike="noStrike">
+              <a:t>Energy is a normalized squared-command/elastic proxy. It is not electrical consumption, actuator work, or calibrated mechanical energy in joules.</a:t>
+            </a:r>
+            <a:endParaRPr b="0" lang="en-US" sz="1320" spc="-1" strike="noStrike">
               <a:solidFill>
                 <a:srgbClr val="17212b"/>
-              </a:solidFill>
-              <a:latin typeface="Arial"/>
-            </a:endParaRPr>
-          </a:p>
-        </p:txBody>
-      </p:sp>
-      <p:sp>
-        <p:nvSpPr>
-          <p:cNvPr id="390" name=""/>
-          <p:cNvSpPr txBox="1"/>
-          <p:nvPr/>
-        </p:nvSpPr>
-        <p:spPr>
-          <a:xfrm>
-            <a:off x="9396000" y="4687200"/>
-            <a:ext cx="180000" cy="222480"/>
-          </a:xfrm>
-          <a:prstGeom prst="rect">
-            <a:avLst/>
-          </a:prstGeom>
-          <a:noFill/>
-          <a:ln w="0">
-            <a:noFill/>
-          </a:ln>
-        </p:spPr>
-        <p:txBody>
-          <a:bodyPr lIns="43200" rIns="43200" tIns="43200" bIns="43200" anchor="t">
-            <a:noAutofit/>
-          </a:bodyPr>
-          <a:p>
-            <a:r>
-              <a:rPr b="1" lang="en-US" sz="950" spc="-1" strike="noStrike">
-                <a:solidFill>
-                  <a:srgbClr val="167d8d"/>
-                </a:solidFill>
-                <a:latin typeface="Arial"/>
-              </a:rPr>
-              <a:t>●</a:t>
-            </a:r>
-            <a:endParaRPr b="1" lang="en-US" sz="950" spc="-1" strike="noStrike">
-              <a:solidFill>
-                <a:srgbClr val="167d8d"/>
-              </a:solidFill>
-              <a:latin typeface="Arial"/>
-            </a:endParaRPr>
-          </a:p>
-        </p:txBody>
-      </p:sp>
-      <p:sp>
-        <p:nvSpPr>
-          <p:cNvPr id="391" name=""/>
-          <p:cNvSpPr txBox="1"/>
-          <p:nvPr/>
-        </p:nvSpPr>
-        <p:spPr>
-          <a:xfrm>
-            <a:off x="9594000" y="4672800"/>
-            <a:ext cx="1962000" cy="576000"/>
-          </a:xfrm>
-          <a:prstGeom prst="rect">
-            <a:avLst/>
-          </a:prstGeom>
-          <a:noFill/>
-          <a:ln w="0">
-            <a:noFill/>
-          </a:ln>
-        </p:spPr>
-        <p:txBody>
-          <a:bodyPr lIns="43200" rIns="43200" tIns="43200" bIns="43200" anchor="t">
-            <a:noAutofit/>
-          </a:bodyPr>
-          <a:p>
-            <a:r>
-              <a:rPr b="0" lang="en-US" sz="1150" spc="-1" strike="noStrike">
-                <a:solidFill>
-                  <a:srgbClr val="17212b"/>
-                </a:solidFill>
-                <a:latin typeface="Arial"/>
-              </a:rPr>
-              <a:t>Pose-derived readings remain available without a command</a:t>
-            </a:r>
-            <a:endParaRPr b="0" lang="en-US" sz="1150" spc="-1" strike="noStrike">
-              <a:solidFill>
-                <a:srgbClr val="17212b"/>
-              </a:solidFill>
-              <a:latin typeface="Arial"/>
-            </a:endParaRPr>
-          </a:p>
-        </p:txBody>
-      </p:sp>
-      <p:sp>
-        <p:nvSpPr>
-          <p:cNvPr id="392" name=""/>
-          <p:cNvSpPr txBox="1"/>
-          <p:nvPr/>
-        </p:nvSpPr>
-        <p:spPr>
-          <a:xfrm>
-            <a:off x="9432000" y="5328000"/>
-            <a:ext cx="2088000" cy="678600"/>
-          </a:xfrm>
-          <a:prstGeom prst="rect">
-            <a:avLst/>
-          </a:prstGeom>
-          <a:noFill/>
-          <a:ln w="0">
-            <a:noFill/>
-          </a:ln>
-        </p:spPr>
-        <p:txBody>
-          <a:bodyPr lIns="43200" rIns="43200" tIns="43200" bIns="43200" anchor="t">
-            <a:noAutofit/>
-          </a:bodyPr>
-          <a:p>
-            <a:r>
-              <a:rPr b="0" lang="en-US" sz="1050" spc="-1" strike="noStrike">
-                <a:solidFill>
-                  <a:srgbClr val="44515e"/>
-                </a:solidFill>
-                <a:latin typeface="Arial"/>
-              </a:rPr>
-              <a:t>Live voltage graph captured from /soft_snake/module_N/sensors/... topics.</a:t>
-            </a:r>
-            <a:endParaRPr b="0" lang="en-US" sz="1050" spc="-1" strike="noStrike">
-              <a:solidFill>
-                <a:srgbClr val="44515e"/>
               </a:solidFill>
               <a:latin typeface="Arial"/>
             </a:endParaRPr>
@@ -9238,7 +9517,7 @@
       </p:grpSpPr>
       <p:sp>
         <p:nvSpPr>
-          <p:cNvPr id="393" name=""/>
+          <p:cNvPr id="402" name=""/>
           <p:cNvSpPr/>
           <p:nvPr/>
         </p:nvSpPr>
@@ -9263,7 +9542,7 @@
       </p:sp>
       <p:sp>
         <p:nvSpPr>
-          <p:cNvPr id="394" name=""/>
+          <p:cNvPr id="403" name=""/>
           <p:cNvSpPr/>
           <p:nvPr/>
         </p:nvSpPr>
@@ -9288,7 +9567,7 @@
       </p:sp>
       <p:sp>
         <p:nvSpPr>
-          <p:cNvPr id="395" name=""/>
+          <p:cNvPr id="404" name=""/>
           <p:cNvSpPr txBox="1"/>
           <p:nvPr/>
         </p:nvSpPr>
@@ -9317,7 +9596,7 @@
                 </a:solidFill>
                 <a:latin typeface="Arial"/>
               </a:rPr>
-              <a:t>Next Research Steps</a:t>
+              <a:t>Eighteen-Channel Bridge-Voltage Instrumentation</a:t>
             </a:r>
             <a:endParaRPr b="1" lang="en-US" sz="2400" spc="-1" strike="noStrike">
               <a:solidFill>
@@ -9330,7 +9609,7 @@
       </p:sp>
       <p:sp>
         <p:nvSpPr>
-          <p:cNvPr id="396" name=""/>
+          <p:cNvPr id="405" name=""/>
           <p:cNvSpPr/>
           <p:nvPr/>
         </p:nvSpPr>
@@ -9358,7 +9637,7 @@
       </p:sp>
       <p:sp>
         <p:nvSpPr>
-          <p:cNvPr id="397" name=""/>
+          <p:cNvPr id="406" name=""/>
           <p:cNvSpPr txBox="1"/>
           <p:nvPr/>
         </p:nvSpPr>
@@ -9390,7 +9669,7 @@
                 </a:solidFill>
                 <a:latin typeface="Arial"/>
               </a:rPr>
-              <a:t>FORWARD PLAN</a:t>
+              <a:t>SENSING</a:t>
             </a:r>
             <a:endParaRPr b="1" lang="en-US" sz="800" spc="-1" strike="noStrike">
               <a:solidFill>
@@ -9403,7 +9682,7 @@
       </p:sp>
       <p:sp>
         <p:nvSpPr>
-          <p:cNvPr id="398" name=""/>
+          <p:cNvPr id="407" name=""/>
           <p:cNvSpPr txBox="1"/>
           <p:nvPr/>
         </p:nvSpPr>
@@ -9445,7 +9724,7 @@
       </p:sp>
       <p:sp>
         <p:nvSpPr>
-          <p:cNvPr id="399" name=""/>
+          <p:cNvPr id="408" name=""/>
           <p:cNvSpPr txBox="1"/>
           <p:nvPr/>
         </p:nvSpPr>
@@ -9488,110 +9767,63 @@
           </a:p>
         </p:txBody>
       </p:sp>
-      <p:sp>
-        <p:nvSpPr>
-          <p:cNvPr id="400" name=""/>
-          <p:cNvSpPr/>
-          <p:nvPr/>
-        </p:nvSpPr>
-        <p:spPr>
-          <a:xfrm>
-            <a:off x="468000" y="954000"/>
-            <a:ext cx="720000" cy="630000"/>
-          </a:xfrm>
-          <a:prstGeom prst="roundRect">
-            <a:avLst/>
-          </a:prstGeom>
-          <a:solidFill>
-            <a:srgbClr val="500000"/>
-          </a:solidFill>
-          <a:ln w="7200">
-            <a:solidFill>
-              <a:srgbClr val="500000"/>
-            </a:solidFill>
-            <a:round/>
-          </a:ln>
-        </p:spPr>
-      </p:sp>
-      <p:sp>
-        <p:nvSpPr>
-          <p:cNvPr id="401" name=""/>
-          <p:cNvSpPr txBox="1"/>
-          <p:nvPr/>
-        </p:nvSpPr>
-        <p:spPr>
-          <a:xfrm>
-            <a:off x="486000" y="1090800"/>
-            <a:ext cx="684000" cy="384120"/>
-          </a:xfrm>
-          <a:prstGeom prst="rect">
-            <a:avLst/>
-          </a:prstGeom>
-          <a:noFill/>
-          <a:ln w="0">
-            <a:noFill/>
-          </a:ln>
-        </p:spPr>
-        <p:txBody>
-          <a:bodyPr lIns="43200" rIns="43200" tIns="43200" bIns="43200" anchor="t">
-            <a:noAutofit/>
-          </a:bodyPr>
-          <a:p>
-            <a:pPr algn="r">
-              <a:buNone/>
-            </a:pPr>
-            <a:r>
-              <a:rPr b="1" lang="en-US" sz="2100" spc="-1" strike="noStrike">
-                <a:solidFill>
-                  <a:srgbClr val="ffffff"/>
-                </a:solidFill>
-                <a:latin typeface="Arial"/>
-              </a:rPr>
-              <a:t>01</a:t>
-            </a:r>
-            <a:endParaRPr b="1" lang="en-US" sz="2100" spc="-1" strike="noStrike">
-              <a:solidFill>
-                <a:srgbClr val="ffffff"/>
-              </a:solidFill>
-              <a:latin typeface="Arial"/>
-            </a:endParaRPr>
-          </a:p>
-        </p:txBody>
-      </p:sp>
-      <p:sp>
-        <p:nvSpPr>
-          <p:cNvPr id="402" name=""/>
-          <p:cNvSpPr txBox="1"/>
-          <p:nvPr/>
-        </p:nvSpPr>
-        <p:spPr>
-          <a:xfrm>
-            <a:off x="1368000" y="997200"/>
-            <a:ext cx="2592000" cy="446400"/>
-          </a:xfrm>
-          <a:prstGeom prst="rect">
-            <a:avLst/>
-          </a:prstGeom>
-          <a:noFill/>
-          <a:ln w="0">
-            <a:noFill/>
-          </a:ln>
-        </p:spPr>
-        <p:txBody>
-          <a:bodyPr lIns="43200" rIns="43200" tIns="43200" bIns="43200" anchor="t">
-            <a:noAutofit/>
-          </a:bodyPr>
-          <a:p>
-            <a:r>
-              <a:rPr b="1" lang="en-US" sz="1450" spc="-1" strike="noStrike">
+      <p:pic>
+        <p:nvPicPr>
+          <p:cNvPr id="409" name="" descr=""/>
+          <p:cNvPicPr/>
+          <p:nvPr/>
+        </p:nvPicPr>
+        <p:blipFill>
+          <a:blip r:embed="rId1"/>
+          <a:stretch/>
+        </p:blipFill>
+        <p:spPr>
+          <a:xfrm>
+            <a:off x="1362960" y="810000"/>
+            <a:ext cx="6886080" cy="5130000"/>
+          </a:xfrm>
+          <a:prstGeom prst="rect">
+            <a:avLst/>
+          </a:prstGeom>
+          <a:ln w="0">
+            <a:noFill/>
+          </a:ln>
+        </p:spPr>
+      </p:pic>
+      <p:sp>
+        <p:nvSpPr>
+          <p:cNvPr id="410" name=""/>
+          <p:cNvSpPr txBox="1"/>
+          <p:nvPr/>
+        </p:nvSpPr>
+        <p:spPr>
+          <a:xfrm>
+            <a:off x="9450000" y="918000"/>
+            <a:ext cx="2088000" cy="525960"/>
+          </a:xfrm>
+          <a:prstGeom prst="rect">
+            <a:avLst/>
+          </a:prstGeom>
+          <a:noFill/>
+          <a:ln w="0">
+            <a:noFill/>
+          </a:ln>
+        </p:spPr>
+        <p:txBody>
+          <a:bodyPr lIns="43200" rIns="43200" tIns="43200" bIns="43200" anchor="t">
+            <a:noAutofit/>
+          </a:bodyPr>
+          <a:p>
+            <a:r>
+              <a:rPr b="1" lang="en-US" sz="1550" spc="-1" strike="noStrike">
                 <a:solidFill>
                   <a:srgbClr val="500000"/>
                 </a:solidFill>
                 <a:latin typeface="Arial"/>
               </a:rPr>
-              <a:t>Physical gauge selection</a:t>
-            </a:r>
-            <a:endParaRPr b="1" lang="en-US" sz="1450" spc="-1" strike="noStrike">
+              <a:t>Repeated sensing layout</a:t>
+            </a:r>
+            <a:endParaRPr b="1" lang="en-US" sz="1550" spc="-1" strike="noStrike">
               <a:solidFill>
                 <a:srgbClr val="500000"/>
               </a:solidFill>
@@ -9602,38 +9834,80 @@
       </p:sp>
       <p:sp>
         <p:nvSpPr>
-          <p:cNvPr id="403" name=""/>
-          <p:cNvSpPr txBox="1"/>
-          <p:nvPr/>
-        </p:nvSpPr>
-        <p:spPr>
-          <a:xfrm>
-            <a:off x="4104000" y="997200"/>
-            <a:ext cx="7164000" cy="464400"/>
-          </a:xfrm>
-          <a:prstGeom prst="rect">
-            <a:avLst/>
-          </a:prstGeom>
-          <a:noFill/>
-          <a:ln w="0">
-            <a:noFill/>
-          </a:ln>
-        </p:spPr>
-        <p:txBody>
-          <a:bodyPr lIns="43200" rIns="43200" tIns="43200" bIns="43200" anchor="t">
-            <a:noAutofit/>
-          </a:bodyPr>
-          <a:p>
-            <a:r>
-              <a:rPr b="0" lang="en-US" sz="1200" spc="-1" strike="noStrike">
+          <p:cNvPr id="411" name=""/>
+          <p:cNvSpPr txBox="1"/>
+          <p:nvPr/>
+        </p:nvSpPr>
+        <p:spPr>
+          <a:xfrm>
+            <a:off x="9396000" y="1310400"/>
+            <a:ext cx="180000" cy="222480"/>
+          </a:xfrm>
+          <a:prstGeom prst="rect">
+            <a:avLst/>
+          </a:prstGeom>
+          <a:noFill/>
+          <a:ln w="0">
+            <a:noFill/>
+          </a:ln>
+        </p:spPr>
+        <p:txBody>
+          <a:bodyPr lIns="43200" rIns="43200" tIns="43200" bIns="43200" anchor="t">
+            <a:noAutofit/>
+          </a:bodyPr>
+          <a:p>
+            <a:r>
+              <a:rPr b="1" lang="en-US" sz="950" spc="-1" strike="noStrike">
+                <a:solidFill>
+                  <a:srgbClr val="167d8d"/>
+                </a:solidFill>
+                <a:latin typeface="Arial"/>
+              </a:rPr>
+              <a:t>●</a:t>
+            </a:r>
+            <a:endParaRPr b="1" lang="en-US" sz="950" spc="-1" strike="noStrike">
+              <a:solidFill>
+                <a:srgbClr val="167d8d"/>
+              </a:solidFill>
+              <a:latin typeface="Arial"/>
+            </a:endParaRPr>
+          </a:p>
+        </p:txBody>
+      </p:sp>
+      <p:sp>
+        <p:nvSpPr>
+          <p:cNvPr id="412" name=""/>
+          <p:cNvSpPr txBox="1"/>
+          <p:nvPr/>
+        </p:nvSpPr>
+        <p:spPr>
+          <a:xfrm>
+            <a:off x="9594000" y="1296000"/>
+            <a:ext cx="1962000" cy="478800"/>
+          </a:xfrm>
+          <a:prstGeom prst="rect">
+            <a:avLst/>
+          </a:prstGeom>
+          <a:noFill/>
+          <a:ln w="0">
+            <a:noFill/>
+          </a:ln>
+        </p:spPr>
+        <p:txBody>
+          <a:bodyPr lIns="43200" rIns="43200" tIns="43200" bIns="43200" anchor="t">
+            <a:noAutofit/>
+          </a:bodyPr>
+          <a:p>
+            <a:r>
+              <a:rPr b="0" lang="en-US" sz="1150" spc="-1" strike="noStrike">
                 <a:solidFill>
                   <a:srgbClr val="17212b"/>
                 </a:solidFill>
                 <a:latin typeface="Arial"/>
               </a:rPr>
-              <a:t>Choose a commercial gauge, substrate, adhesive, and temperature compensation strategy.</a:t>
-            </a:r>
-            <a:endParaRPr b="0" lang="en-US" sz="1200" spc="-1" strike="noStrike">
+              <a:t>Six gauges per module</a:t>
+            </a:r>
+            <a:endParaRPr b="0" lang="en-US" sz="1150" spc="-1" strike="noStrike">
               <a:solidFill>
                 <a:srgbClr val="17212b"/>
               </a:solidFill>
@@ -9644,150 +9918,80 @@
       </p:sp>
       <p:sp>
         <p:nvSpPr>
-          <p:cNvPr id="404" name=""/>
-          <p:cNvSpPr/>
-          <p:nvPr/>
-        </p:nvSpPr>
-        <p:spPr>
-          <a:xfrm>
-            <a:off x="468000" y="1944000"/>
-            <a:ext cx="720000" cy="630000"/>
-          </a:xfrm>
-          <a:prstGeom prst="roundRect">
-            <a:avLst/>
-          </a:prstGeom>
-          <a:solidFill>
-            <a:srgbClr val="500000"/>
-          </a:solidFill>
-          <a:ln w="7200">
-            <a:solidFill>
-              <a:srgbClr val="500000"/>
-            </a:solidFill>
-            <a:round/>
-          </a:ln>
-        </p:spPr>
-      </p:sp>
-      <p:sp>
-        <p:nvSpPr>
-          <p:cNvPr id="405" name=""/>
-          <p:cNvSpPr txBox="1"/>
-          <p:nvPr/>
-        </p:nvSpPr>
-        <p:spPr>
-          <a:xfrm>
-            <a:off x="486000" y="2080800"/>
-            <a:ext cx="684000" cy="384120"/>
-          </a:xfrm>
-          <a:prstGeom prst="rect">
-            <a:avLst/>
-          </a:prstGeom>
-          <a:noFill/>
-          <a:ln w="0">
-            <a:noFill/>
-          </a:ln>
-        </p:spPr>
-        <p:txBody>
-          <a:bodyPr lIns="43200" rIns="43200" tIns="43200" bIns="43200" anchor="t">
-            <a:noAutofit/>
-          </a:bodyPr>
-          <a:p>
-            <a:pPr algn="r">
-              <a:buNone/>
-            </a:pPr>
-            <a:r>
-              <a:rPr b="1" lang="en-US" sz="2100" spc="-1" strike="noStrike">
-                <a:solidFill>
-                  <a:srgbClr val="ffffff"/>
-                </a:solidFill>
-                <a:latin typeface="Arial"/>
-              </a:rPr>
-              <a:t>02</a:t>
-            </a:r>
-            <a:endParaRPr b="1" lang="en-US" sz="2100" spc="-1" strike="noStrike">
-              <a:solidFill>
-                <a:srgbClr val="ffffff"/>
-              </a:solidFill>
-              <a:latin typeface="Arial"/>
-            </a:endParaRPr>
-          </a:p>
-        </p:txBody>
-      </p:sp>
-      <p:sp>
-        <p:nvSpPr>
-          <p:cNvPr id="406" name=""/>
-          <p:cNvSpPr txBox="1"/>
-          <p:nvPr/>
-        </p:nvSpPr>
-        <p:spPr>
-          <a:xfrm>
-            <a:off x="1368000" y="1987200"/>
-            <a:ext cx="2592000" cy="446400"/>
-          </a:xfrm>
-          <a:prstGeom prst="rect">
-            <a:avLst/>
-          </a:prstGeom>
-          <a:noFill/>
-          <a:ln w="0">
-            <a:noFill/>
-          </a:ln>
-        </p:spPr>
-        <p:txBody>
-          <a:bodyPr lIns="43200" rIns="43200" tIns="43200" bIns="43200" anchor="t">
-            <a:noAutofit/>
-          </a:bodyPr>
-          <a:p>
-            <a:r>
-              <a:rPr b="1" lang="en-US" sz="1450" spc="-1" strike="noStrike">
-                <a:solidFill>
-                  <a:srgbClr val="500000"/>
-                </a:solidFill>
-                <a:latin typeface="Arial"/>
-              </a:rPr>
-              <a:t>Bench calibration</a:t>
-            </a:r>
-            <a:endParaRPr b="1" lang="en-US" sz="1450" spc="-1" strike="noStrike">
-              <a:solidFill>
-                <a:srgbClr val="500000"/>
-              </a:solidFill>
-              <a:latin typeface="Arial"/>
-            </a:endParaRPr>
-          </a:p>
-        </p:txBody>
-      </p:sp>
-      <p:sp>
-        <p:nvSpPr>
-          <p:cNvPr id="407" name=""/>
-          <p:cNvSpPr txBox="1"/>
-          <p:nvPr/>
-        </p:nvSpPr>
-        <p:spPr>
-          <a:xfrm>
-            <a:off x="4104000" y="1987200"/>
-            <a:ext cx="7164000" cy="464400"/>
-          </a:xfrm>
-          <a:prstGeom prst="rect">
-            <a:avLst/>
-          </a:prstGeom>
-          <a:noFill/>
-          <a:ln w="0">
-            <a:noFill/>
-          </a:ln>
-        </p:spPr>
-        <p:txBody>
-          <a:bodyPr lIns="43200" rIns="43200" tIns="43200" bIns="43200" anchor="t">
-            <a:noAutofit/>
-          </a:bodyPr>
-          <a:p>
-            <a:r>
-              <a:rPr b="0" lang="en-US" sz="1200" spc="-1" strike="noStrike">
+          <p:cNvPr id="413" name=""/>
+          <p:cNvSpPr txBox="1"/>
+          <p:nvPr/>
+        </p:nvSpPr>
+        <p:spPr>
+          <a:xfrm>
+            <a:off x="9396000" y="1792800"/>
+            <a:ext cx="180000" cy="222480"/>
+          </a:xfrm>
+          <a:prstGeom prst="rect">
+            <a:avLst/>
+          </a:prstGeom>
+          <a:noFill/>
+          <a:ln w="0">
+            <a:noFill/>
+          </a:ln>
+        </p:spPr>
+        <p:txBody>
+          <a:bodyPr lIns="43200" rIns="43200" tIns="43200" bIns="43200" anchor="t">
+            <a:noAutofit/>
+          </a:bodyPr>
+          <a:p>
+            <a:r>
+              <a:rPr b="1" lang="en-US" sz="950" spc="-1" strike="noStrike">
+                <a:solidFill>
+                  <a:srgbClr val="167d8d"/>
+                </a:solidFill>
+                <a:latin typeface="Arial"/>
+              </a:rPr>
+              <a:t>●</a:t>
+            </a:r>
+            <a:endParaRPr b="1" lang="en-US" sz="950" spc="-1" strike="noStrike">
+              <a:solidFill>
+                <a:srgbClr val="167d8d"/>
+              </a:solidFill>
+              <a:latin typeface="Arial"/>
+            </a:endParaRPr>
+          </a:p>
+        </p:txBody>
+      </p:sp>
+      <p:sp>
+        <p:nvSpPr>
+          <p:cNvPr id="414" name=""/>
+          <p:cNvSpPr txBox="1"/>
+          <p:nvPr/>
+        </p:nvSpPr>
+        <p:spPr>
+          <a:xfrm>
+            <a:off x="9594000" y="1778400"/>
+            <a:ext cx="1962000" cy="478800"/>
+          </a:xfrm>
+          <a:prstGeom prst="rect">
+            <a:avLst/>
+          </a:prstGeom>
+          <a:noFill/>
+          <a:ln w="0">
+            <a:noFill/>
+          </a:ln>
+        </p:spPr>
+        <p:txBody>
+          <a:bodyPr lIns="43200" rIns="43200" tIns="43200" bIns="43200" anchor="t">
+            <a:noAutofit/>
+          </a:bodyPr>
+          <a:p>
+            <a:r>
+              <a:rPr b="0" lang="en-US" sz="1150" spc="-1" strike="noStrike">
                 <a:solidFill>
                   <a:srgbClr val="17212b"/>
                 </a:solidFill>
                 <a:latin typeface="Arial"/>
               </a:rPr>
-              <a:t>Measure real strain and bridge voltage against known curvature and loading.</a:t>
-            </a:r>
-            <a:endParaRPr b="0" lang="en-US" sz="1200" spc="-1" strike="noStrike">
+              <a:t>Two axial stations</a:t>
+            </a:r>
+            <a:endParaRPr b="0" lang="en-US" sz="1150" spc="-1" strike="noStrike">
               <a:solidFill>
                 <a:srgbClr val="17212b"/>
               </a:solidFill>
@@ -9798,150 +10002,80 @@
       </p:sp>
       <p:sp>
         <p:nvSpPr>
-          <p:cNvPr id="408" name=""/>
-          <p:cNvSpPr/>
-          <p:nvPr/>
-        </p:nvSpPr>
-        <p:spPr>
-          <a:xfrm>
-            <a:off x="468000" y="2934000"/>
-            <a:ext cx="720000" cy="630000"/>
-          </a:xfrm>
-          <a:prstGeom prst="roundRect">
-            <a:avLst/>
-          </a:prstGeom>
-          <a:solidFill>
-            <a:srgbClr val="500000"/>
-          </a:solidFill>
-          <a:ln w="7200">
-            <a:solidFill>
-              <a:srgbClr val="500000"/>
-            </a:solidFill>
-            <a:round/>
-          </a:ln>
-        </p:spPr>
-      </p:sp>
-      <p:sp>
-        <p:nvSpPr>
-          <p:cNvPr id="409" name=""/>
-          <p:cNvSpPr txBox="1"/>
-          <p:nvPr/>
-        </p:nvSpPr>
-        <p:spPr>
-          <a:xfrm>
-            <a:off x="486000" y="3070800"/>
-            <a:ext cx="684000" cy="384120"/>
-          </a:xfrm>
-          <a:prstGeom prst="rect">
-            <a:avLst/>
-          </a:prstGeom>
-          <a:noFill/>
-          <a:ln w="0">
-            <a:noFill/>
-          </a:ln>
-        </p:spPr>
-        <p:txBody>
-          <a:bodyPr lIns="43200" rIns="43200" tIns="43200" bIns="43200" anchor="t">
-            <a:noAutofit/>
-          </a:bodyPr>
-          <a:p>
-            <a:pPr algn="r">
-              <a:buNone/>
-            </a:pPr>
-            <a:r>
-              <a:rPr b="1" lang="en-US" sz="2100" spc="-1" strike="noStrike">
-                <a:solidFill>
-                  <a:srgbClr val="ffffff"/>
-                </a:solidFill>
-                <a:latin typeface="Arial"/>
-              </a:rPr>
-              <a:t>03</a:t>
-            </a:r>
-            <a:endParaRPr b="1" lang="en-US" sz="2100" spc="-1" strike="noStrike">
-              <a:solidFill>
-                <a:srgbClr val="ffffff"/>
-              </a:solidFill>
-              <a:latin typeface="Arial"/>
-            </a:endParaRPr>
-          </a:p>
-        </p:txBody>
-      </p:sp>
-      <p:sp>
-        <p:nvSpPr>
-          <p:cNvPr id="410" name=""/>
-          <p:cNvSpPr txBox="1"/>
-          <p:nvPr/>
-        </p:nvSpPr>
-        <p:spPr>
-          <a:xfrm>
-            <a:off x="1368000" y="2977200"/>
-            <a:ext cx="2592000" cy="501480"/>
-          </a:xfrm>
-          <a:prstGeom prst="rect">
-            <a:avLst/>
-          </a:prstGeom>
-          <a:noFill/>
-          <a:ln w="0">
-            <a:noFill/>
-          </a:ln>
-        </p:spPr>
-        <p:txBody>
-          <a:bodyPr lIns="43200" rIns="43200" tIns="43200" bIns="43200" anchor="t">
-            <a:noAutofit/>
-          </a:bodyPr>
-          <a:p>
-            <a:r>
-              <a:rPr b="1" lang="en-US" sz="1450" spc="-1" strike="noStrike">
-                <a:solidFill>
-                  <a:srgbClr val="500000"/>
-                </a:solidFill>
-                <a:latin typeface="Arial"/>
-              </a:rPr>
-              <a:t>Independent shape validation</a:t>
-            </a:r>
-            <a:endParaRPr b="1" lang="en-US" sz="1450" spc="-1" strike="noStrike">
-              <a:solidFill>
-                <a:srgbClr val="500000"/>
-              </a:solidFill>
-              <a:latin typeface="Arial"/>
-            </a:endParaRPr>
-          </a:p>
-        </p:txBody>
-      </p:sp>
-      <p:sp>
-        <p:nvSpPr>
-          <p:cNvPr id="411" name=""/>
-          <p:cNvSpPr txBox="1"/>
-          <p:nvPr/>
-        </p:nvSpPr>
-        <p:spPr>
-          <a:xfrm>
-            <a:off x="4104000" y="2977200"/>
-            <a:ext cx="7164000" cy="464400"/>
-          </a:xfrm>
-          <a:prstGeom prst="rect">
-            <a:avLst/>
-          </a:prstGeom>
-          <a:noFill/>
-          <a:ln w="0">
-            <a:noFill/>
-          </a:ln>
-        </p:spPr>
-        <p:txBody>
-          <a:bodyPr lIns="43200" rIns="43200" tIns="43200" bIns="43200" anchor="t">
-            <a:noAutofit/>
-          </a:bodyPr>
-          <a:p>
-            <a:r>
-              <a:rPr b="0" lang="en-US" sz="1200" spc="-1" strike="noStrike">
+          <p:cNvPr id="415" name=""/>
+          <p:cNvSpPr txBox="1"/>
+          <p:nvPr/>
+        </p:nvSpPr>
+        <p:spPr>
+          <a:xfrm>
+            <a:off x="9396000" y="2275200"/>
+            <a:ext cx="180000" cy="222480"/>
+          </a:xfrm>
+          <a:prstGeom prst="rect">
+            <a:avLst/>
+          </a:prstGeom>
+          <a:noFill/>
+          <a:ln w="0">
+            <a:noFill/>
+          </a:ln>
+        </p:spPr>
+        <p:txBody>
+          <a:bodyPr lIns="43200" rIns="43200" tIns="43200" bIns="43200" anchor="t">
+            <a:noAutofit/>
+          </a:bodyPr>
+          <a:p>
+            <a:r>
+              <a:rPr b="1" lang="en-US" sz="950" spc="-1" strike="noStrike">
+                <a:solidFill>
+                  <a:srgbClr val="167d8d"/>
+                </a:solidFill>
+                <a:latin typeface="Arial"/>
+              </a:rPr>
+              <a:t>●</a:t>
+            </a:r>
+            <a:endParaRPr b="1" lang="en-US" sz="950" spc="-1" strike="noStrike">
+              <a:solidFill>
+                <a:srgbClr val="167d8d"/>
+              </a:solidFill>
+              <a:latin typeface="Arial"/>
+            </a:endParaRPr>
+          </a:p>
+        </p:txBody>
+      </p:sp>
+      <p:sp>
+        <p:nvSpPr>
+          <p:cNvPr id="416" name=""/>
+          <p:cNvSpPr txBox="1"/>
+          <p:nvPr/>
+        </p:nvSpPr>
+        <p:spPr>
+          <a:xfrm>
+            <a:off x="9594000" y="2260800"/>
+            <a:ext cx="1962000" cy="478800"/>
+          </a:xfrm>
+          <a:prstGeom prst="rect">
+            <a:avLst/>
+          </a:prstGeom>
+          <a:noFill/>
+          <a:ln w="0">
+            <a:noFill/>
+          </a:ln>
+        </p:spPr>
+        <p:txBody>
+          <a:bodyPr lIns="43200" rIns="43200" tIns="43200" bIns="43200" anchor="t">
+            <a:noAutofit/>
+          </a:bodyPr>
+          <a:p>
+            <a:r>
+              <a:rPr b="0" lang="en-US" sz="1150" spc="-1" strike="noStrike">
                 <a:solidFill>
                   <a:srgbClr val="17212b"/>
                 </a:solidFill>
                 <a:latin typeface="Arial"/>
               </a:rPr>
-              <a:t>Compare reconstructed curvature with motion capture or vision—not the same pose source.</a:t>
-            </a:r>
-            <a:endParaRPr b="0" lang="en-US" sz="1200" spc="-1" strike="noStrike">
+              <a:t>Three gauges per ring</a:t>
+            </a:r>
+            <a:endParaRPr b="0" lang="en-US" sz="1150" spc="-1" strike="noStrike">
               <a:solidFill>
                 <a:srgbClr val="17212b"/>
               </a:solidFill>
@@ -9952,150 +10086,80 @@
       </p:sp>
       <p:sp>
         <p:nvSpPr>
-          <p:cNvPr id="412" name=""/>
-          <p:cNvSpPr/>
-          <p:nvPr/>
-        </p:nvSpPr>
-        <p:spPr>
-          <a:xfrm>
-            <a:off x="468000" y="3924000"/>
-            <a:ext cx="720000" cy="630000"/>
-          </a:xfrm>
-          <a:prstGeom prst="roundRect">
-            <a:avLst/>
-          </a:prstGeom>
-          <a:solidFill>
-            <a:srgbClr val="500000"/>
-          </a:solidFill>
-          <a:ln w="7200">
-            <a:solidFill>
-              <a:srgbClr val="500000"/>
-            </a:solidFill>
-            <a:round/>
-          </a:ln>
-        </p:spPr>
-      </p:sp>
-      <p:sp>
-        <p:nvSpPr>
-          <p:cNvPr id="413" name=""/>
-          <p:cNvSpPr txBox="1"/>
-          <p:nvPr/>
-        </p:nvSpPr>
-        <p:spPr>
-          <a:xfrm>
-            <a:off x="486000" y="4060800"/>
-            <a:ext cx="684000" cy="384120"/>
-          </a:xfrm>
-          <a:prstGeom prst="rect">
-            <a:avLst/>
-          </a:prstGeom>
-          <a:noFill/>
-          <a:ln w="0">
-            <a:noFill/>
-          </a:ln>
-        </p:spPr>
-        <p:txBody>
-          <a:bodyPr lIns="43200" rIns="43200" tIns="43200" bIns="43200" anchor="t">
-            <a:noAutofit/>
-          </a:bodyPr>
-          <a:p>
-            <a:pPr algn="r">
-              <a:buNone/>
-            </a:pPr>
-            <a:r>
-              <a:rPr b="1" lang="en-US" sz="2100" spc="-1" strike="noStrike">
-                <a:solidFill>
-                  <a:srgbClr val="ffffff"/>
-                </a:solidFill>
-                <a:latin typeface="Arial"/>
-              </a:rPr>
-              <a:t>04</a:t>
-            </a:r>
-            <a:endParaRPr b="1" lang="en-US" sz="2100" spc="-1" strike="noStrike">
-              <a:solidFill>
-                <a:srgbClr val="ffffff"/>
-              </a:solidFill>
-              <a:latin typeface="Arial"/>
-            </a:endParaRPr>
-          </a:p>
-        </p:txBody>
-      </p:sp>
-      <p:sp>
-        <p:nvSpPr>
-          <p:cNvPr id="414" name=""/>
-          <p:cNvSpPr txBox="1"/>
-          <p:nvPr/>
-        </p:nvSpPr>
-        <p:spPr>
-          <a:xfrm>
-            <a:off x="1368000" y="3967200"/>
-            <a:ext cx="2592000" cy="501480"/>
-          </a:xfrm>
-          <a:prstGeom prst="rect">
-            <a:avLst/>
-          </a:prstGeom>
-          <a:noFill/>
-          <a:ln w="0">
-            <a:noFill/>
-          </a:ln>
-        </p:spPr>
-        <p:txBody>
-          <a:bodyPr lIns="43200" rIns="43200" tIns="43200" bIns="43200" anchor="t">
-            <a:noAutofit/>
-          </a:bodyPr>
-          <a:p>
-            <a:r>
-              <a:rPr b="1" lang="en-US" sz="1450" spc="-1" strike="noStrike">
-                <a:solidFill>
-                  <a:srgbClr val="500000"/>
-                </a:solidFill>
-                <a:latin typeface="Arial"/>
-              </a:rPr>
-              <a:t>Loaded and directional trials</a:t>
-            </a:r>
-            <a:endParaRPr b="1" lang="en-US" sz="1450" spc="-1" strike="noStrike">
-              <a:solidFill>
-                <a:srgbClr val="500000"/>
-              </a:solidFill>
-              <a:latin typeface="Arial"/>
-            </a:endParaRPr>
-          </a:p>
-        </p:txBody>
-      </p:sp>
-      <p:sp>
-        <p:nvSpPr>
-          <p:cNvPr id="415" name=""/>
-          <p:cNvSpPr txBox="1"/>
-          <p:nvPr/>
-        </p:nvSpPr>
-        <p:spPr>
-          <a:xfrm>
-            <a:off x="4104000" y="3967200"/>
-            <a:ext cx="7164000" cy="464400"/>
-          </a:xfrm>
-          <a:prstGeom prst="rect">
-            <a:avLst/>
-          </a:prstGeom>
-          <a:noFill/>
-          <a:ln w="0">
-            <a:noFill/>
-          </a:ln>
-        </p:spPr>
-        <p:txBody>
-          <a:bodyPr lIns="43200" rIns="43200" tIns="43200" bIns="43200" anchor="t">
-            <a:noAutofit/>
-          </a:bodyPr>
-          <a:p>
-            <a:r>
-              <a:rPr b="0" lang="en-US" sz="1200" spc="-1" strike="noStrike">
+          <p:cNvPr id="417" name=""/>
+          <p:cNvSpPr txBox="1"/>
+          <p:nvPr/>
+        </p:nvSpPr>
+        <p:spPr>
+          <a:xfrm>
+            <a:off x="9396000" y="2757600"/>
+            <a:ext cx="180000" cy="222480"/>
+          </a:xfrm>
+          <a:prstGeom prst="rect">
+            <a:avLst/>
+          </a:prstGeom>
+          <a:noFill/>
+          <a:ln w="0">
+            <a:noFill/>
+          </a:ln>
+        </p:spPr>
+        <p:txBody>
+          <a:bodyPr lIns="43200" rIns="43200" tIns="43200" bIns="43200" anchor="t">
+            <a:noAutofit/>
+          </a:bodyPr>
+          <a:p>
+            <a:r>
+              <a:rPr b="1" lang="en-US" sz="950" spc="-1" strike="noStrike">
+                <a:solidFill>
+                  <a:srgbClr val="167d8d"/>
+                </a:solidFill>
+                <a:latin typeface="Arial"/>
+              </a:rPr>
+              <a:t>●</a:t>
+            </a:r>
+            <a:endParaRPr b="1" lang="en-US" sz="950" spc="-1" strike="noStrike">
+              <a:solidFill>
+                <a:srgbClr val="167d8d"/>
+              </a:solidFill>
+              <a:latin typeface="Arial"/>
+            </a:endParaRPr>
+          </a:p>
+        </p:txBody>
+      </p:sp>
+      <p:sp>
+        <p:nvSpPr>
+          <p:cNvPr id="418" name=""/>
+          <p:cNvSpPr txBox="1"/>
+          <p:nvPr/>
+        </p:nvSpPr>
+        <p:spPr>
+          <a:xfrm>
+            <a:off x="9594000" y="2743200"/>
+            <a:ext cx="1962000" cy="478800"/>
+          </a:xfrm>
+          <a:prstGeom prst="rect">
+            <a:avLst/>
+          </a:prstGeom>
+          <a:noFill/>
+          <a:ln w="0">
+            <a:noFill/>
+          </a:ln>
+        </p:spPr>
+        <p:txBody>
+          <a:bodyPr lIns="43200" rIns="43200" tIns="43200" bIns="43200" anchor="t">
+            <a:noAutofit/>
+          </a:bodyPr>
+          <a:p>
+            <a:r>
+              <a:rPr b="0" lang="en-US" sz="1150" spc="-1" strike="noStrike">
                 <a:solidFill>
                   <a:srgbClr val="17212b"/>
                 </a:solidFill>
                 <a:latin typeface="Arial"/>
               </a:rPr>
-              <a:t>Repeat across θ, negative torque, payloads, disturbances, and repeated cycles.</a:t>
-            </a:r>
-            <a:endParaRPr b="0" lang="en-US" sz="1200" spc="-1" strike="noStrike">
+              <a:t>18 bridge-voltage channels</a:t>
+            </a:r>
+            <a:endParaRPr b="0" lang="en-US" sz="1150" spc="-1" strike="noStrike">
               <a:solidFill>
                 <a:srgbClr val="17212b"/>
               </a:solidFill>
@@ -10106,152 +10170,376 @@
       </p:sp>
       <p:sp>
         <p:nvSpPr>
-          <p:cNvPr id="416" name=""/>
-          <p:cNvSpPr/>
-          <p:nvPr/>
-        </p:nvSpPr>
-        <p:spPr>
-          <a:xfrm>
-            <a:off x="468000" y="4914000"/>
-            <a:ext cx="720000" cy="630000"/>
-          </a:xfrm>
-          <a:prstGeom prst="roundRect">
-            <a:avLst/>
-          </a:prstGeom>
-          <a:solidFill>
-            <a:srgbClr val="500000"/>
-          </a:solidFill>
-          <a:ln w="7200">
-            <a:solidFill>
-              <a:srgbClr val="500000"/>
-            </a:solidFill>
-            <a:round/>
-          </a:ln>
-        </p:spPr>
-      </p:sp>
-      <p:sp>
-        <p:nvSpPr>
-          <p:cNvPr id="417" name=""/>
-          <p:cNvSpPr txBox="1"/>
-          <p:nvPr/>
-        </p:nvSpPr>
-        <p:spPr>
-          <a:xfrm>
-            <a:off x="486000" y="5050800"/>
-            <a:ext cx="684000" cy="384120"/>
-          </a:xfrm>
-          <a:prstGeom prst="rect">
-            <a:avLst/>
-          </a:prstGeom>
-          <a:noFill/>
-          <a:ln w="0">
-            <a:noFill/>
-          </a:ln>
-        </p:spPr>
-        <p:txBody>
-          <a:bodyPr lIns="43200" rIns="43200" tIns="43200" bIns="43200" anchor="t">
-            <a:noAutofit/>
-          </a:bodyPr>
-          <a:p>
-            <a:pPr algn="r">
-              <a:buNone/>
-            </a:pPr>
-            <a:r>
-              <a:rPr b="1" lang="en-US" sz="2100" spc="-1" strike="noStrike">
-                <a:solidFill>
-                  <a:srgbClr val="ffffff"/>
-                </a:solidFill>
-                <a:latin typeface="Arial"/>
-              </a:rPr>
-              <a:t>05</a:t>
-            </a:r>
-            <a:endParaRPr b="1" lang="en-US" sz="2100" spc="-1" strike="noStrike">
-              <a:solidFill>
-                <a:srgbClr val="ffffff"/>
-              </a:solidFill>
-              <a:latin typeface="Arial"/>
-            </a:endParaRPr>
-          </a:p>
-        </p:txBody>
-      </p:sp>
-      <p:sp>
-        <p:nvSpPr>
-          <p:cNvPr id="418" name=""/>
-          <p:cNvSpPr txBox="1"/>
-          <p:nvPr/>
-        </p:nvSpPr>
-        <p:spPr>
-          <a:xfrm>
-            <a:off x="1368000" y="4957200"/>
-            <a:ext cx="2592000" cy="446400"/>
-          </a:xfrm>
-          <a:prstGeom prst="rect">
-            <a:avLst/>
-          </a:prstGeom>
-          <a:noFill/>
-          <a:ln w="0">
-            <a:noFill/>
-          </a:ln>
-        </p:spPr>
-        <p:txBody>
-          <a:bodyPr lIns="43200" rIns="43200" tIns="43200" bIns="43200" anchor="t">
-            <a:noAutofit/>
-          </a:bodyPr>
-          <a:p>
-            <a:r>
-              <a:rPr b="1" lang="en-US" sz="1450" spc="-1" strike="noStrike">
-                <a:solidFill>
-                  <a:srgbClr val="500000"/>
-                </a:solidFill>
-                <a:latin typeface="Arial"/>
-              </a:rPr>
-              <a:t>Uncertainty and statistics</a:t>
-            </a:r>
-            <a:endParaRPr b="1" lang="en-US" sz="1450" spc="-1" strike="noStrike">
-              <a:solidFill>
-                <a:srgbClr val="500000"/>
-              </a:solidFill>
-              <a:latin typeface="Arial"/>
-            </a:endParaRPr>
-          </a:p>
-        </p:txBody>
-      </p:sp>
-      <p:sp>
-        <p:nvSpPr>
           <p:cNvPr id="419" name=""/>
           <p:cNvSpPr txBox="1"/>
           <p:nvPr/>
         </p:nvSpPr>
         <p:spPr>
           <a:xfrm>
-            <a:off x="4104000" y="4957200"/>
-            <a:ext cx="7164000" cy="464400"/>
-          </a:xfrm>
-          <a:prstGeom prst="rect">
-            <a:avLst/>
-          </a:prstGeom>
-          <a:noFill/>
-          <a:ln w="0">
-            <a:noFill/>
-          </a:ln>
-        </p:spPr>
-        <p:txBody>
-          <a:bodyPr lIns="43200" rIns="43200" tIns="43200" bIns="43200" anchor="t">
-            <a:noAutofit/>
-          </a:bodyPr>
-          <a:p>
-            <a:r>
-              <a:rPr b="0" lang="en-US" sz="1200" spc="-1" strike="noStrike">
+            <a:off x="9396000" y="3240000"/>
+            <a:ext cx="180000" cy="222480"/>
+          </a:xfrm>
+          <a:prstGeom prst="rect">
+            <a:avLst/>
+          </a:prstGeom>
+          <a:noFill/>
+          <a:ln w="0">
+            <a:noFill/>
+          </a:ln>
+        </p:spPr>
+        <p:txBody>
+          <a:bodyPr lIns="43200" rIns="43200" tIns="43200" bIns="43200" anchor="t">
+            <a:noAutofit/>
+          </a:bodyPr>
+          <a:p>
+            <a:r>
+              <a:rPr b="1" lang="en-US" sz="950" spc="-1" strike="noStrike">
+                <a:solidFill>
+                  <a:srgbClr val="167d8d"/>
+                </a:solidFill>
+                <a:latin typeface="Arial"/>
+              </a:rPr>
+              <a:t>●</a:t>
+            </a:r>
+            <a:endParaRPr b="1" lang="en-US" sz="950" spc="-1" strike="noStrike">
+              <a:solidFill>
+                <a:srgbClr val="167d8d"/>
+              </a:solidFill>
+              <a:latin typeface="Arial"/>
+            </a:endParaRPr>
+          </a:p>
+        </p:txBody>
+      </p:sp>
+      <p:sp>
+        <p:nvSpPr>
+          <p:cNvPr id="420" name=""/>
+          <p:cNvSpPr txBox="1"/>
+          <p:nvPr/>
+        </p:nvSpPr>
+        <p:spPr>
+          <a:xfrm>
+            <a:off x="9594000" y="3225600"/>
+            <a:ext cx="1962000" cy="478800"/>
+          </a:xfrm>
+          <a:prstGeom prst="rect">
+            <a:avLst/>
+          </a:prstGeom>
+          <a:noFill/>
+          <a:ln w="0">
+            <a:noFill/>
+          </a:ln>
+        </p:spPr>
+        <p:txBody>
+          <a:bodyPr lIns="43200" rIns="43200" tIns="43200" bIns="43200" anchor="t">
+            <a:noAutofit/>
+          </a:bodyPr>
+          <a:p>
+            <a:r>
+              <a:rPr b="0" lang="en-US" sz="1150" spc="-1" strike="noStrike">
                 <a:solidFill>
                   <a:srgbClr val="17212b"/>
                 </a:solidFill>
                 <a:latin typeface="Arial"/>
               </a:rPr>
-              <a:t>Report repeatability, hysteresis, drift, confidence intervals, and failure limits.</a:t>
-            </a:r>
-            <a:endParaRPr b="0" lang="en-US" sz="1200" spc="-1" strike="noStrike">
+              <a:t>18 validity flags</a:t>
+            </a:r>
+            <a:endParaRPr b="0" lang="en-US" sz="1150" spc="-1" strike="noStrike">
               <a:solidFill>
                 <a:srgbClr val="17212b"/>
+              </a:solidFill>
+              <a:latin typeface="Arial"/>
+            </a:endParaRPr>
+          </a:p>
+        </p:txBody>
+      </p:sp>
+      <p:sp>
+        <p:nvSpPr>
+          <p:cNvPr id="421" name=""/>
+          <p:cNvSpPr txBox="1"/>
+          <p:nvPr/>
+        </p:nvSpPr>
+        <p:spPr>
+          <a:xfrm>
+            <a:off x="9396000" y="3722400"/>
+            <a:ext cx="180000" cy="222480"/>
+          </a:xfrm>
+          <a:prstGeom prst="rect">
+            <a:avLst/>
+          </a:prstGeom>
+          <a:noFill/>
+          <a:ln w="0">
+            <a:noFill/>
+          </a:ln>
+        </p:spPr>
+        <p:txBody>
+          <a:bodyPr lIns="43200" rIns="43200" tIns="43200" bIns="43200" anchor="t">
+            <a:noAutofit/>
+          </a:bodyPr>
+          <a:p>
+            <a:r>
+              <a:rPr b="1" lang="en-US" sz="950" spc="-1" strike="noStrike">
+                <a:solidFill>
+                  <a:srgbClr val="167d8d"/>
+                </a:solidFill>
+                <a:latin typeface="Arial"/>
+              </a:rPr>
+              <a:t>●</a:t>
+            </a:r>
+            <a:endParaRPr b="1" lang="en-US" sz="950" spc="-1" strike="noStrike">
+              <a:solidFill>
+                <a:srgbClr val="167d8d"/>
+              </a:solidFill>
+              <a:latin typeface="Arial"/>
+            </a:endParaRPr>
+          </a:p>
+        </p:txBody>
+      </p:sp>
+      <p:sp>
+        <p:nvSpPr>
+          <p:cNvPr id="422" name=""/>
+          <p:cNvSpPr txBox="1"/>
+          <p:nvPr/>
+        </p:nvSpPr>
+        <p:spPr>
+          <a:xfrm>
+            <a:off x="9594000" y="3708000"/>
+            <a:ext cx="1962000" cy="478800"/>
+          </a:xfrm>
+          <a:prstGeom prst="rect">
+            <a:avLst/>
+          </a:prstGeom>
+          <a:noFill/>
+          <a:ln w="0">
+            <a:noFill/>
+          </a:ln>
+        </p:spPr>
+        <p:txBody>
+          <a:bodyPr lIns="43200" rIns="43200" tIns="43200" bIns="43200" anchor="t">
+            <a:noAutofit/>
+          </a:bodyPr>
+          <a:p>
+            <a:r>
+              <a:rPr b="0" lang="en-US" sz="1150" spc="-1" strike="noStrike">
+                <a:solidFill>
+                  <a:srgbClr val="17212b"/>
+                </a:solidFill>
+                <a:latin typeface="Arial"/>
+              </a:rPr>
+              <a:t>Quarter bridge: 350 Ω, GF 2.0, 2.5 V excitation</a:t>
+            </a:r>
+            <a:endParaRPr b="0" lang="en-US" sz="1150" spc="-1" strike="noStrike">
+              <a:solidFill>
+                <a:srgbClr val="17212b"/>
+              </a:solidFill>
+              <a:latin typeface="Arial"/>
+            </a:endParaRPr>
+          </a:p>
+        </p:txBody>
+      </p:sp>
+      <p:sp>
+        <p:nvSpPr>
+          <p:cNvPr id="423" name=""/>
+          <p:cNvSpPr txBox="1"/>
+          <p:nvPr/>
+        </p:nvSpPr>
+        <p:spPr>
+          <a:xfrm>
+            <a:off x="9396000" y="4204800"/>
+            <a:ext cx="180000" cy="222480"/>
+          </a:xfrm>
+          <a:prstGeom prst="rect">
+            <a:avLst/>
+          </a:prstGeom>
+          <a:noFill/>
+          <a:ln w="0">
+            <a:noFill/>
+          </a:ln>
+        </p:spPr>
+        <p:txBody>
+          <a:bodyPr lIns="43200" rIns="43200" tIns="43200" bIns="43200" anchor="t">
+            <a:noAutofit/>
+          </a:bodyPr>
+          <a:p>
+            <a:r>
+              <a:rPr b="1" lang="en-US" sz="950" spc="-1" strike="noStrike">
+                <a:solidFill>
+                  <a:srgbClr val="167d8d"/>
+                </a:solidFill>
+                <a:latin typeface="Arial"/>
+              </a:rPr>
+              <a:t>●</a:t>
+            </a:r>
+            <a:endParaRPr b="1" lang="en-US" sz="950" spc="-1" strike="noStrike">
+              <a:solidFill>
+                <a:srgbClr val="167d8d"/>
+              </a:solidFill>
+              <a:latin typeface="Arial"/>
+            </a:endParaRPr>
+          </a:p>
+        </p:txBody>
+      </p:sp>
+      <p:sp>
+        <p:nvSpPr>
+          <p:cNvPr id="424" name=""/>
+          <p:cNvSpPr txBox="1"/>
+          <p:nvPr/>
+        </p:nvSpPr>
+        <p:spPr>
+          <a:xfrm>
+            <a:off x="9594000" y="4190400"/>
+            <a:ext cx="1962000" cy="576000"/>
+          </a:xfrm>
+          <a:prstGeom prst="rect">
+            <a:avLst/>
+          </a:prstGeom>
+          <a:noFill/>
+          <a:ln w="0">
+            <a:noFill/>
+          </a:ln>
+        </p:spPr>
+        <p:txBody>
+          <a:bodyPr lIns="43200" rIns="43200" tIns="43200" bIns="43200" anchor="t">
+            <a:noAutofit/>
+          </a:bodyPr>
+          <a:p>
+            <a:r>
+              <a:rPr b="0" lang="en-US" sz="1150" spc="-1" strike="noStrike">
+                <a:solidFill>
+                  <a:srgbClr val="17212b"/>
+                </a:solidFill>
+                <a:latin typeface="Arial"/>
+              </a:rPr>
+              <a:t>All 18 voltage graphs open automatically with the simulation launch</a:t>
+            </a:r>
+            <a:endParaRPr b="0" lang="en-US" sz="1150" spc="-1" strike="noStrike">
+              <a:solidFill>
+                <a:srgbClr val="17212b"/>
+              </a:solidFill>
+              <a:latin typeface="Arial"/>
+            </a:endParaRPr>
+          </a:p>
+        </p:txBody>
+      </p:sp>
+      <p:sp>
+        <p:nvSpPr>
+          <p:cNvPr id="425" name=""/>
+          <p:cNvSpPr txBox="1"/>
+          <p:nvPr/>
+        </p:nvSpPr>
+        <p:spPr>
+          <a:xfrm>
+            <a:off x="9396000" y="4687200"/>
+            <a:ext cx="180000" cy="222480"/>
+          </a:xfrm>
+          <a:prstGeom prst="rect">
+            <a:avLst/>
+          </a:prstGeom>
+          <a:noFill/>
+          <a:ln w="0">
+            <a:noFill/>
+          </a:ln>
+        </p:spPr>
+        <p:txBody>
+          <a:bodyPr lIns="43200" rIns="43200" tIns="43200" bIns="43200" anchor="t">
+            <a:noAutofit/>
+          </a:bodyPr>
+          <a:p>
+            <a:r>
+              <a:rPr b="1" lang="en-US" sz="950" spc="-1" strike="noStrike">
+                <a:solidFill>
+                  <a:srgbClr val="167d8d"/>
+                </a:solidFill>
+                <a:latin typeface="Arial"/>
+              </a:rPr>
+              <a:t>●</a:t>
+            </a:r>
+            <a:endParaRPr b="1" lang="en-US" sz="950" spc="-1" strike="noStrike">
+              <a:solidFill>
+                <a:srgbClr val="167d8d"/>
+              </a:solidFill>
+              <a:latin typeface="Arial"/>
+            </a:endParaRPr>
+          </a:p>
+        </p:txBody>
+      </p:sp>
+      <p:sp>
+        <p:nvSpPr>
+          <p:cNvPr id="426" name=""/>
+          <p:cNvSpPr txBox="1"/>
+          <p:nvPr/>
+        </p:nvSpPr>
+        <p:spPr>
+          <a:xfrm>
+            <a:off x="9594000" y="4672800"/>
+            <a:ext cx="1962000" cy="576000"/>
+          </a:xfrm>
+          <a:prstGeom prst="rect">
+            <a:avLst/>
+          </a:prstGeom>
+          <a:noFill/>
+          <a:ln w="0">
+            <a:noFill/>
+          </a:ln>
+        </p:spPr>
+        <p:txBody>
+          <a:bodyPr lIns="43200" rIns="43200" tIns="43200" bIns="43200" anchor="t">
+            <a:noAutofit/>
+          </a:bodyPr>
+          <a:p>
+            <a:r>
+              <a:rPr b="0" lang="en-US" sz="1150" spc="-1" strike="noStrike">
+                <a:solidFill>
+                  <a:srgbClr val="17212b"/>
+                </a:solidFill>
+                <a:latin typeface="Arial"/>
+              </a:rPr>
+              <a:t>Pose-derived readings remain available without a command</a:t>
+            </a:r>
+            <a:endParaRPr b="0" lang="en-US" sz="1150" spc="-1" strike="noStrike">
+              <a:solidFill>
+                <a:srgbClr val="17212b"/>
+              </a:solidFill>
+              <a:latin typeface="Arial"/>
+            </a:endParaRPr>
+          </a:p>
+        </p:txBody>
+      </p:sp>
+      <p:sp>
+        <p:nvSpPr>
+          <p:cNvPr id="427" name=""/>
+          <p:cNvSpPr txBox="1"/>
+          <p:nvPr/>
+        </p:nvSpPr>
+        <p:spPr>
+          <a:xfrm>
+            <a:off x="9432000" y="5328000"/>
+            <a:ext cx="2088000" cy="678600"/>
+          </a:xfrm>
+          <a:prstGeom prst="rect">
+            <a:avLst/>
+          </a:prstGeom>
+          <a:noFill/>
+          <a:ln w="0">
+            <a:noFill/>
+          </a:ln>
+        </p:spPr>
+        <p:txBody>
+          <a:bodyPr lIns="43200" rIns="43200" tIns="43200" bIns="43200" anchor="t">
+            <a:noAutofit/>
+          </a:bodyPr>
+          <a:p>
+            <a:r>
+              <a:rPr b="0" lang="en-US" sz="1050" spc="-1" strike="noStrike">
+                <a:solidFill>
+                  <a:srgbClr val="44515e"/>
+                </a:solidFill>
+                <a:latin typeface="Arial"/>
+              </a:rPr>
+              <a:t>Live voltage graph captured from /soft_snake/module_N/sensors/... topics.</a:t>
+            </a:r>
+            <a:endParaRPr b="0" lang="en-US" sz="1050" spc="-1" strike="noStrike">
+              <a:solidFill>
+                <a:srgbClr val="44515e"/>
               </a:solidFill>
               <a:latin typeface="Arial"/>
             </a:endParaRPr>
@@ -10290,7 +10578,7 @@
       </p:grpSpPr>
       <p:sp>
         <p:nvSpPr>
-          <p:cNvPr id="420" name=""/>
+          <p:cNvPr id="428" name=""/>
           <p:cNvSpPr/>
           <p:nvPr/>
         </p:nvSpPr>
@@ -10315,7 +10603,7 @@
       </p:sp>
       <p:sp>
         <p:nvSpPr>
-          <p:cNvPr id="421" name=""/>
+          <p:cNvPr id="429" name=""/>
           <p:cNvSpPr/>
           <p:nvPr/>
         </p:nvSpPr>
@@ -10340,7 +10628,7 @@
       </p:sp>
       <p:sp>
         <p:nvSpPr>
-          <p:cNvPr id="422" name=""/>
+          <p:cNvPr id="430" name=""/>
           <p:cNvSpPr txBox="1"/>
           <p:nvPr/>
         </p:nvSpPr>
@@ -10369,7 +10657,7 @@
                 </a:solidFill>
                 <a:latin typeface="Arial"/>
               </a:rPr>
-              <a:t>Current Outcome</a:t>
+              <a:t>Next Research Steps</a:t>
             </a:r>
             <a:endParaRPr b="1" lang="en-US" sz="2400" spc="-1" strike="noStrike">
               <a:solidFill>
@@ -10382,7 +10670,7 @@
       </p:sp>
       <p:sp>
         <p:nvSpPr>
-          <p:cNvPr id="423" name=""/>
+          <p:cNvPr id="431" name=""/>
           <p:cNvSpPr/>
           <p:nvPr/>
         </p:nvSpPr>
@@ -10410,7 +10698,7 @@
       </p:sp>
       <p:sp>
         <p:nvSpPr>
-          <p:cNvPr id="424" name=""/>
+          <p:cNvPr id="432" name=""/>
           <p:cNvSpPr txBox="1"/>
           <p:nvPr/>
         </p:nvSpPr>
@@ -10442,7 +10730,7 @@
                 </a:solidFill>
                 <a:latin typeface="Arial"/>
               </a:rPr>
-              <a:t>CONCLUSION</a:t>
+              <a:t>FORWARD PLAN</a:t>
             </a:r>
             <a:endParaRPr b="1" lang="en-US" sz="800" spc="-1" strike="noStrike">
               <a:solidFill>
@@ -10455,7 +10743,7 @@
       </p:sp>
       <p:sp>
         <p:nvSpPr>
-          <p:cNvPr id="425" name=""/>
+          <p:cNvPr id="433" name=""/>
           <p:cNvSpPr txBox="1"/>
           <p:nvPr/>
         </p:nvSpPr>
@@ -10497,7 +10785,7 @@
       </p:sp>
       <p:sp>
         <p:nvSpPr>
-          <p:cNvPr id="426" name=""/>
+          <p:cNvPr id="434" name=""/>
           <p:cNvSpPr txBox="1"/>
           <p:nvPr/>
         </p:nvSpPr>
@@ -10542,14 +10830,39 @@
       </p:sp>
       <p:sp>
         <p:nvSpPr>
-          <p:cNvPr id="427" name=""/>
-          <p:cNvSpPr txBox="1"/>
-          <p:nvPr/>
-        </p:nvSpPr>
-        <p:spPr>
-          <a:xfrm>
-            <a:off x="720000" y="1116000"/>
-            <a:ext cx="10620000" cy="440280"/>
+          <p:cNvPr id="435" name=""/>
+          <p:cNvSpPr/>
+          <p:nvPr/>
+        </p:nvSpPr>
+        <p:spPr>
+          <a:xfrm>
+            <a:off x="468000" y="954000"/>
+            <a:ext cx="720000" cy="630000"/>
+          </a:xfrm>
+          <a:prstGeom prst="roundRect">
+            <a:avLst/>
+          </a:prstGeom>
+          <a:solidFill>
+            <a:srgbClr val="500000"/>
+          </a:solidFill>
+          <a:ln w="7200">
+            <a:solidFill>
+              <a:srgbClr val="500000"/>
+            </a:solidFill>
+            <a:round/>
+          </a:ln>
+        </p:spPr>
+      </p:sp>
+      <p:sp>
+        <p:nvSpPr>
+          <p:cNvPr id="436" name=""/>
+          <p:cNvSpPr txBox="1"/>
+          <p:nvPr/>
+        </p:nvSpPr>
+        <p:spPr>
+          <a:xfrm>
+            <a:off x="486000" y="1090800"/>
+            <a:ext cx="684000" cy="384120"/>
           </a:xfrm>
           <a:prstGeom prst="rect">
             <a:avLst/>
@@ -10568,15 +10881,57 @@
               <a:buNone/>
             </a:pPr>
             <a:r>
-              <a:rPr b="1" lang="en-US" sz="2500" spc="-1" strike="noStrike">
+              <a:rPr b="1" lang="en-US" sz="2100" spc="-1" strike="noStrike">
+                <a:solidFill>
+                  <a:srgbClr val="ffffff"/>
+                </a:solidFill>
+                <a:latin typeface="Arial"/>
+              </a:rPr>
+              <a:t>01</a:t>
+            </a:r>
+            <a:endParaRPr b="1" lang="en-US" sz="2100" spc="-1" strike="noStrike">
+              <a:solidFill>
+                <a:srgbClr val="ffffff"/>
+              </a:solidFill>
+              <a:latin typeface="Arial"/>
+            </a:endParaRPr>
+          </a:p>
+        </p:txBody>
+      </p:sp>
+      <p:sp>
+        <p:nvSpPr>
+          <p:cNvPr id="437" name=""/>
+          <p:cNvSpPr txBox="1"/>
+          <p:nvPr/>
+        </p:nvSpPr>
+        <p:spPr>
+          <a:xfrm>
+            <a:off x="1368000" y="997200"/>
+            <a:ext cx="2592000" cy="446400"/>
+          </a:xfrm>
+          <a:prstGeom prst="rect">
+            <a:avLst/>
+          </a:prstGeom>
+          <a:noFill/>
+          <a:ln w="0">
+            <a:noFill/>
+          </a:ln>
+        </p:spPr>
+        <p:txBody>
+          <a:bodyPr lIns="43200" rIns="43200" tIns="43200" bIns="43200" anchor="t">
+            <a:noAutofit/>
+          </a:bodyPr>
+          <a:p>
+            <a:r>
+              <a:rPr b="1" lang="en-US" sz="1450" spc="-1" strike="noStrike">
                 <a:solidFill>
                   <a:srgbClr val="500000"/>
                 </a:solidFill>
                 <a:latin typeface="Arial"/>
               </a:rPr>
-              <a:t>A reproducible six-disc research platform now connects</a:t>
-            </a:r>
-            <a:endParaRPr b="1" lang="en-US" sz="2500" spc="-1" strike="noStrike">
+              <a:t>Physical gauge selection</a:t>
+            </a:r>
+            <a:endParaRPr b="1" lang="en-US" sz="1450" spc="-1" strike="noStrike">
               <a:solidFill>
                 <a:srgbClr val="500000"/>
               </a:solidFill>
@@ -10587,80 +10942,38 @@
       </p:sp>
       <p:sp>
         <p:nvSpPr>
-          <p:cNvPr id="428" name=""/>
-          <p:cNvSpPr txBox="1"/>
-          <p:nvPr/>
-        </p:nvSpPr>
-        <p:spPr>
-          <a:xfrm>
-            <a:off x="1440000" y="1800000"/>
-            <a:ext cx="2160000" cy="257400"/>
-          </a:xfrm>
-          <a:prstGeom prst="rect">
-            <a:avLst/>
-          </a:prstGeom>
-          <a:noFill/>
-          <a:ln w="0">
-            <a:noFill/>
-          </a:ln>
-        </p:spPr>
-        <p:txBody>
-          <a:bodyPr lIns="43200" rIns="43200" tIns="43200" bIns="43200" anchor="t">
-            <a:noAutofit/>
-          </a:bodyPr>
-          <a:p>
-            <a:r>
-              <a:rPr b="1" lang="en-US" sz="1200" spc="-1" strike="noStrike">
-                <a:solidFill>
-                  <a:srgbClr val="167d8d"/>
-                </a:solidFill>
-                <a:latin typeface="Arial"/>
-              </a:rPr>
-              <a:t>CONTROL</a:t>
-            </a:r>
-            <a:endParaRPr b="1" lang="en-US" sz="1200" spc="-1" strike="noStrike">
-              <a:solidFill>
-                <a:srgbClr val="167d8d"/>
-              </a:solidFill>
-              <a:latin typeface="Arial"/>
-            </a:endParaRPr>
-          </a:p>
-        </p:txBody>
-      </p:sp>
-      <p:sp>
-        <p:nvSpPr>
-          <p:cNvPr id="429" name=""/>
-          <p:cNvSpPr txBox="1"/>
-          <p:nvPr/>
-        </p:nvSpPr>
-        <p:spPr>
-          <a:xfrm>
-            <a:off x="3672000" y="1771200"/>
-            <a:ext cx="6840000" cy="329040"/>
-          </a:xfrm>
-          <a:prstGeom prst="rect">
-            <a:avLst/>
-          </a:prstGeom>
-          <a:noFill/>
-          <a:ln w="0">
-            <a:noFill/>
-          </a:ln>
-        </p:spPr>
-        <p:txBody>
-          <a:bodyPr lIns="43200" rIns="43200" tIns="43200" bIns="43200" anchor="t">
-            <a:noAutofit/>
-          </a:bodyPr>
-          <a:p>
-            <a:r>
-              <a:rPr b="0" lang="en-US" sz="1700" spc="-1" strike="noStrike">
+          <p:cNvPr id="438" name=""/>
+          <p:cNvSpPr txBox="1"/>
+          <p:nvPr/>
+        </p:nvSpPr>
+        <p:spPr>
+          <a:xfrm>
+            <a:off x="4104000" y="997200"/>
+            <a:ext cx="7164000" cy="464400"/>
+          </a:xfrm>
+          <a:prstGeom prst="rect">
+            <a:avLst/>
+          </a:prstGeom>
+          <a:noFill/>
+          <a:ln w="0">
+            <a:noFill/>
+          </a:ln>
+        </p:spPr>
+        <p:txBody>
+          <a:bodyPr lIns="43200" rIns="43200" tIns="43200" bIns="43200" anchor="t">
+            <a:noAutofit/>
+          </a:bodyPr>
+          <a:p>
+            <a:r>
+              <a:rPr b="0" lang="en-US" sz="1200" spc="-1" strike="noStrike">
                 <a:solidFill>
                   <a:srgbClr val="17212b"/>
                 </a:solidFill>
                 <a:latin typeface="Arial"/>
               </a:rPr>
-              <a:t>Position + calibrated torque admittance</a:t>
-            </a:r>
-            <a:endParaRPr b="0" lang="en-US" sz="1700" spc="-1" strike="noStrike">
+              <a:t>Choose a commercial gauge, substrate, adhesive, and temperature compensation strategy.</a:t>
+            </a:r>
+            <a:endParaRPr b="0" lang="en-US" sz="1200" spc="-1" strike="noStrike">
               <a:solidFill>
                 <a:srgbClr val="17212b"/>
               </a:solidFill>
@@ -10671,21 +10984,759 @@
       </p:sp>
       <p:sp>
         <p:nvSpPr>
-          <p:cNvPr id="430" name=""/>
+          <p:cNvPr id="439" name=""/>
           <p:cNvSpPr/>
           <p:nvPr/>
         </p:nvSpPr>
         <p:spPr>
           <a:xfrm>
-            <a:off x="1440000" y="2178000"/>
-            <a:ext cx="9072000" cy="0"/>
-          </a:xfrm>
-          <a:prstGeom prst="line">
-            <a:avLst/>
-          </a:prstGeom>
+            <a:off x="468000" y="1944000"/>
+            <a:ext cx="720000" cy="630000"/>
+          </a:xfrm>
+          <a:prstGeom prst="roundRect">
+            <a:avLst/>
+          </a:prstGeom>
+          <a:solidFill>
+            <a:srgbClr val="500000"/>
+          </a:solidFill>
           <a:ln w="7200">
             <a:solidFill>
-              <a:srgbClr val="d7d2cc"/>
+              <a:srgbClr val="500000"/>
+            </a:solidFill>
+            <a:round/>
+          </a:ln>
+        </p:spPr>
+      </p:sp>
+      <p:sp>
+        <p:nvSpPr>
+          <p:cNvPr id="440" name=""/>
+          <p:cNvSpPr txBox="1"/>
+          <p:nvPr/>
+        </p:nvSpPr>
+        <p:spPr>
+          <a:xfrm>
+            <a:off x="486000" y="2080800"/>
+            <a:ext cx="684000" cy="384120"/>
+          </a:xfrm>
+          <a:prstGeom prst="rect">
+            <a:avLst/>
+          </a:prstGeom>
+          <a:noFill/>
+          <a:ln w="0">
+            <a:noFill/>
+          </a:ln>
+        </p:spPr>
+        <p:txBody>
+          <a:bodyPr lIns="43200" rIns="43200" tIns="43200" bIns="43200" anchor="t">
+            <a:noAutofit/>
+          </a:bodyPr>
+          <a:p>
+            <a:pPr algn="r">
+              <a:buNone/>
+            </a:pPr>
+            <a:r>
+              <a:rPr b="1" lang="en-US" sz="2100" spc="-1" strike="noStrike">
+                <a:solidFill>
+                  <a:srgbClr val="ffffff"/>
+                </a:solidFill>
+                <a:latin typeface="Arial"/>
+              </a:rPr>
+              <a:t>02</a:t>
+            </a:r>
+            <a:endParaRPr b="1" lang="en-US" sz="2100" spc="-1" strike="noStrike">
+              <a:solidFill>
+                <a:srgbClr val="ffffff"/>
+              </a:solidFill>
+              <a:latin typeface="Arial"/>
+            </a:endParaRPr>
+          </a:p>
+        </p:txBody>
+      </p:sp>
+      <p:sp>
+        <p:nvSpPr>
+          <p:cNvPr id="441" name=""/>
+          <p:cNvSpPr txBox="1"/>
+          <p:nvPr/>
+        </p:nvSpPr>
+        <p:spPr>
+          <a:xfrm>
+            <a:off x="1368000" y="1987200"/>
+            <a:ext cx="2592000" cy="446400"/>
+          </a:xfrm>
+          <a:prstGeom prst="rect">
+            <a:avLst/>
+          </a:prstGeom>
+          <a:noFill/>
+          <a:ln w="0">
+            <a:noFill/>
+          </a:ln>
+        </p:spPr>
+        <p:txBody>
+          <a:bodyPr lIns="43200" rIns="43200" tIns="43200" bIns="43200" anchor="t">
+            <a:noAutofit/>
+          </a:bodyPr>
+          <a:p>
+            <a:r>
+              <a:rPr b="1" lang="en-US" sz="1450" spc="-1" strike="noStrike">
+                <a:solidFill>
+                  <a:srgbClr val="500000"/>
+                </a:solidFill>
+                <a:latin typeface="Arial"/>
+              </a:rPr>
+              <a:t>Bench calibration</a:t>
+            </a:r>
+            <a:endParaRPr b="1" lang="en-US" sz="1450" spc="-1" strike="noStrike">
+              <a:solidFill>
+                <a:srgbClr val="500000"/>
+              </a:solidFill>
+              <a:latin typeface="Arial"/>
+            </a:endParaRPr>
+          </a:p>
+        </p:txBody>
+      </p:sp>
+      <p:sp>
+        <p:nvSpPr>
+          <p:cNvPr id="442" name=""/>
+          <p:cNvSpPr txBox="1"/>
+          <p:nvPr/>
+        </p:nvSpPr>
+        <p:spPr>
+          <a:xfrm>
+            <a:off x="4104000" y="1987200"/>
+            <a:ext cx="7164000" cy="464400"/>
+          </a:xfrm>
+          <a:prstGeom prst="rect">
+            <a:avLst/>
+          </a:prstGeom>
+          <a:noFill/>
+          <a:ln w="0">
+            <a:noFill/>
+          </a:ln>
+        </p:spPr>
+        <p:txBody>
+          <a:bodyPr lIns="43200" rIns="43200" tIns="43200" bIns="43200" anchor="t">
+            <a:noAutofit/>
+          </a:bodyPr>
+          <a:p>
+            <a:r>
+              <a:rPr b="0" lang="en-US" sz="1200" spc="-1" strike="noStrike">
+                <a:solidFill>
+                  <a:srgbClr val="17212b"/>
+                </a:solidFill>
+                <a:latin typeface="Arial"/>
+              </a:rPr>
+              <a:t>Measure real strain and bridge voltage against known curvature and loading.</a:t>
+            </a:r>
+            <a:endParaRPr b="0" lang="en-US" sz="1200" spc="-1" strike="noStrike">
+              <a:solidFill>
+                <a:srgbClr val="17212b"/>
+              </a:solidFill>
+              <a:latin typeface="Arial"/>
+            </a:endParaRPr>
+          </a:p>
+        </p:txBody>
+      </p:sp>
+      <p:sp>
+        <p:nvSpPr>
+          <p:cNvPr id="443" name=""/>
+          <p:cNvSpPr/>
+          <p:nvPr/>
+        </p:nvSpPr>
+        <p:spPr>
+          <a:xfrm>
+            <a:off x="468000" y="2934000"/>
+            <a:ext cx="720000" cy="630000"/>
+          </a:xfrm>
+          <a:prstGeom prst="roundRect">
+            <a:avLst/>
+          </a:prstGeom>
+          <a:solidFill>
+            <a:srgbClr val="500000"/>
+          </a:solidFill>
+          <a:ln w="7200">
+            <a:solidFill>
+              <a:srgbClr val="500000"/>
+            </a:solidFill>
+            <a:round/>
+          </a:ln>
+        </p:spPr>
+      </p:sp>
+      <p:sp>
+        <p:nvSpPr>
+          <p:cNvPr id="444" name=""/>
+          <p:cNvSpPr txBox="1"/>
+          <p:nvPr/>
+        </p:nvSpPr>
+        <p:spPr>
+          <a:xfrm>
+            <a:off x="486000" y="3070800"/>
+            <a:ext cx="684000" cy="384120"/>
+          </a:xfrm>
+          <a:prstGeom prst="rect">
+            <a:avLst/>
+          </a:prstGeom>
+          <a:noFill/>
+          <a:ln w="0">
+            <a:noFill/>
+          </a:ln>
+        </p:spPr>
+        <p:txBody>
+          <a:bodyPr lIns="43200" rIns="43200" tIns="43200" bIns="43200" anchor="t">
+            <a:noAutofit/>
+          </a:bodyPr>
+          <a:p>
+            <a:pPr algn="r">
+              <a:buNone/>
+            </a:pPr>
+            <a:r>
+              <a:rPr b="1" lang="en-US" sz="2100" spc="-1" strike="noStrike">
+                <a:solidFill>
+                  <a:srgbClr val="ffffff"/>
+                </a:solidFill>
+                <a:latin typeface="Arial"/>
+              </a:rPr>
+              <a:t>03</a:t>
+            </a:r>
+            <a:endParaRPr b="1" lang="en-US" sz="2100" spc="-1" strike="noStrike">
+              <a:solidFill>
+                <a:srgbClr val="ffffff"/>
+              </a:solidFill>
+              <a:latin typeface="Arial"/>
+            </a:endParaRPr>
+          </a:p>
+        </p:txBody>
+      </p:sp>
+      <p:sp>
+        <p:nvSpPr>
+          <p:cNvPr id="445" name=""/>
+          <p:cNvSpPr txBox="1"/>
+          <p:nvPr/>
+        </p:nvSpPr>
+        <p:spPr>
+          <a:xfrm>
+            <a:off x="1368000" y="2977200"/>
+            <a:ext cx="2592000" cy="501480"/>
+          </a:xfrm>
+          <a:prstGeom prst="rect">
+            <a:avLst/>
+          </a:prstGeom>
+          <a:noFill/>
+          <a:ln w="0">
+            <a:noFill/>
+          </a:ln>
+        </p:spPr>
+        <p:txBody>
+          <a:bodyPr lIns="43200" rIns="43200" tIns="43200" bIns="43200" anchor="t">
+            <a:noAutofit/>
+          </a:bodyPr>
+          <a:p>
+            <a:r>
+              <a:rPr b="1" lang="en-US" sz="1450" spc="-1" strike="noStrike">
+                <a:solidFill>
+                  <a:srgbClr val="500000"/>
+                </a:solidFill>
+                <a:latin typeface="Arial"/>
+              </a:rPr>
+              <a:t>Independent shape validation</a:t>
+            </a:r>
+            <a:endParaRPr b="1" lang="en-US" sz="1450" spc="-1" strike="noStrike">
+              <a:solidFill>
+                <a:srgbClr val="500000"/>
+              </a:solidFill>
+              <a:latin typeface="Arial"/>
+            </a:endParaRPr>
+          </a:p>
+        </p:txBody>
+      </p:sp>
+      <p:sp>
+        <p:nvSpPr>
+          <p:cNvPr id="446" name=""/>
+          <p:cNvSpPr txBox="1"/>
+          <p:nvPr/>
+        </p:nvSpPr>
+        <p:spPr>
+          <a:xfrm>
+            <a:off x="4104000" y="2977200"/>
+            <a:ext cx="7164000" cy="464400"/>
+          </a:xfrm>
+          <a:prstGeom prst="rect">
+            <a:avLst/>
+          </a:prstGeom>
+          <a:noFill/>
+          <a:ln w="0">
+            <a:noFill/>
+          </a:ln>
+        </p:spPr>
+        <p:txBody>
+          <a:bodyPr lIns="43200" rIns="43200" tIns="43200" bIns="43200" anchor="t">
+            <a:noAutofit/>
+          </a:bodyPr>
+          <a:p>
+            <a:r>
+              <a:rPr b="0" lang="en-US" sz="1200" spc="-1" strike="noStrike">
+                <a:solidFill>
+                  <a:srgbClr val="17212b"/>
+                </a:solidFill>
+                <a:latin typeface="Arial"/>
+              </a:rPr>
+              <a:t>Compare reconstructed curvature with motion capture or vision—not the same pose source.</a:t>
+            </a:r>
+            <a:endParaRPr b="0" lang="en-US" sz="1200" spc="-1" strike="noStrike">
+              <a:solidFill>
+                <a:srgbClr val="17212b"/>
+              </a:solidFill>
+              <a:latin typeface="Arial"/>
+            </a:endParaRPr>
+          </a:p>
+        </p:txBody>
+      </p:sp>
+      <p:sp>
+        <p:nvSpPr>
+          <p:cNvPr id="447" name=""/>
+          <p:cNvSpPr/>
+          <p:nvPr/>
+        </p:nvSpPr>
+        <p:spPr>
+          <a:xfrm>
+            <a:off x="468000" y="3924000"/>
+            <a:ext cx="720000" cy="630000"/>
+          </a:xfrm>
+          <a:prstGeom prst="roundRect">
+            <a:avLst/>
+          </a:prstGeom>
+          <a:solidFill>
+            <a:srgbClr val="500000"/>
+          </a:solidFill>
+          <a:ln w="7200">
+            <a:solidFill>
+              <a:srgbClr val="500000"/>
+            </a:solidFill>
+            <a:round/>
+          </a:ln>
+        </p:spPr>
+      </p:sp>
+      <p:sp>
+        <p:nvSpPr>
+          <p:cNvPr id="448" name=""/>
+          <p:cNvSpPr txBox="1"/>
+          <p:nvPr/>
+        </p:nvSpPr>
+        <p:spPr>
+          <a:xfrm>
+            <a:off x="486000" y="4060800"/>
+            <a:ext cx="684000" cy="384120"/>
+          </a:xfrm>
+          <a:prstGeom prst="rect">
+            <a:avLst/>
+          </a:prstGeom>
+          <a:noFill/>
+          <a:ln w="0">
+            <a:noFill/>
+          </a:ln>
+        </p:spPr>
+        <p:txBody>
+          <a:bodyPr lIns="43200" rIns="43200" tIns="43200" bIns="43200" anchor="t">
+            <a:noAutofit/>
+          </a:bodyPr>
+          <a:p>
+            <a:pPr algn="r">
+              <a:buNone/>
+            </a:pPr>
+            <a:r>
+              <a:rPr b="1" lang="en-US" sz="2100" spc="-1" strike="noStrike">
+                <a:solidFill>
+                  <a:srgbClr val="ffffff"/>
+                </a:solidFill>
+                <a:latin typeface="Arial"/>
+              </a:rPr>
+              <a:t>04</a:t>
+            </a:r>
+            <a:endParaRPr b="1" lang="en-US" sz="2100" spc="-1" strike="noStrike">
+              <a:solidFill>
+                <a:srgbClr val="ffffff"/>
+              </a:solidFill>
+              <a:latin typeface="Arial"/>
+            </a:endParaRPr>
+          </a:p>
+        </p:txBody>
+      </p:sp>
+      <p:sp>
+        <p:nvSpPr>
+          <p:cNvPr id="449" name=""/>
+          <p:cNvSpPr txBox="1"/>
+          <p:nvPr/>
+        </p:nvSpPr>
+        <p:spPr>
+          <a:xfrm>
+            <a:off x="1368000" y="3967200"/>
+            <a:ext cx="2592000" cy="501480"/>
+          </a:xfrm>
+          <a:prstGeom prst="rect">
+            <a:avLst/>
+          </a:prstGeom>
+          <a:noFill/>
+          <a:ln w="0">
+            <a:noFill/>
+          </a:ln>
+        </p:spPr>
+        <p:txBody>
+          <a:bodyPr lIns="43200" rIns="43200" tIns="43200" bIns="43200" anchor="t">
+            <a:noAutofit/>
+          </a:bodyPr>
+          <a:p>
+            <a:r>
+              <a:rPr b="1" lang="en-US" sz="1450" spc="-1" strike="noStrike">
+                <a:solidFill>
+                  <a:srgbClr val="500000"/>
+                </a:solidFill>
+                <a:latin typeface="Arial"/>
+              </a:rPr>
+              <a:t>Loaded and directional trials</a:t>
+            </a:r>
+            <a:endParaRPr b="1" lang="en-US" sz="1450" spc="-1" strike="noStrike">
+              <a:solidFill>
+                <a:srgbClr val="500000"/>
+              </a:solidFill>
+              <a:latin typeface="Arial"/>
+            </a:endParaRPr>
+          </a:p>
+        </p:txBody>
+      </p:sp>
+      <p:sp>
+        <p:nvSpPr>
+          <p:cNvPr id="450" name=""/>
+          <p:cNvSpPr txBox="1"/>
+          <p:nvPr/>
+        </p:nvSpPr>
+        <p:spPr>
+          <a:xfrm>
+            <a:off x="4104000" y="3967200"/>
+            <a:ext cx="7164000" cy="464400"/>
+          </a:xfrm>
+          <a:prstGeom prst="rect">
+            <a:avLst/>
+          </a:prstGeom>
+          <a:noFill/>
+          <a:ln w="0">
+            <a:noFill/>
+          </a:ln>
+        </p:spPr>
+        <p:txBody>
+          <a:bodyPr lIns="43200" rIns="43200" tIns="43200" bIns="43200" anchor="t">
+            <a:noAutofit/>
+          </a:bodyPr>
+          <a:p>
+            <a:r>
+              <a:rPr b="0" lang="en-US" sz="1200" spc="-1" strike="noStrike">
+                <a:solidFill>
+                  <a:srgbClr val="17212b"/>
+                </a:solidFill>
+                <a:latin typeface="Arial"/>
+              </a:rPr>
+              <a:t>Repeat across θ, negative torque, payloads, disturbances, and repeated cycles.</a:t>
+            </a:r>
+            <a:endParaRPr b="0" lang="en-US" sz="1200" spc="-1" strike="noStrike">
+              <a:solidFill>
+                <a:srgbClr val="17212b"/>
+              </a:solidFill>
+              <a:latin typeface="Arial"/>
+            </a:endParaRPr>
+          </a:p>
+        </p:txBody>
+      </p:sp>
+      <p:sp>
+        <p:nvSpPr>
+          <p:cNvPr id="451" name=""/>
+          <p:cNvSpPr/>
+          <p:nvPr/>
+        </p:nvSpPr>
+        <p:spPr>
+          <a:xfrm>
+            <a:off x="468000" y="4914000"/>
+            <a:ext cx="720000" cy="630000"/>
+          </a:xfrm>
+          <a:prstGeom prst="roundRect">
+            <a:avLst/>
+          </a:prstGeom>
+          <a:solidFill>
+            <a:srgbClr val="500000"/>
+          </a:solidFill>
+          <a:ln w="7200">
+            <a:solidFill>
+              <a:srgbClr val="500000"/>
+            </a:solidFill>
+            <a:round/>
+          </a:ln>
+        </p:spPr>
+      </p:sp>
+      <p:sp>
+        <p:nvSpPr>
+          <p:cNvPr id="452" name=""/>
+          <p:cNvSpPr txBox="1"/>
+          <p:nvPr/>
+        </p:nvSpPr>
+        <p:spPr>
+          <a:xfrm>
+            <a:off x="486000" y="5050800"/>
+            <a:ext cx="684000" cy="384120"/>
+          </a:xfrm>
+          <a:prstGeom prst="rect">
+            <a:avLst/>
+          </a:prstGeom>
+          <a:noFill/>
+          <a:ln w="0">
+            <a:noFill/>
+          </a:ln>
+        </p:spPr>
+        <p:txBody>
+          <a:bodyPr lIns="43200" rIns="43200" tIns="43200" bIns="43200" anchor="t">
+            <a:noAutofit/>
+          </a:bodyPr>
+          <a:p>
+            <a:pPr algn="r">
+              <a:buNone/>
+            </a:pPr>
+            <a:r>
+              <a:rPr b="1" lang="en-US" sz="2100" spc="-1" strike="noStrike">
+                <a:solidFill>
+                  <a:srgbClr val="ffffff"/>
+                </a:solidFill>
+                <a:latin typeface="Arial"/>
+              </a:rPr>
+              <a:t>05</a:t>
+            </a:r>
+            <a:endParaRPr b="1" lang="en-US" sz="2100" spc="-1" strike="noStrike">
+              <a:solidFill>
+                <a:srgbClr val="ffffff"/>
+              </a:solidFill>
+              <a:latin typeface="Arial"/>
+            </a:endParaRPr>
+          </a:p>
+        </p:txBody>
+      </p:sp>
+      <p:sp>
+        <p:nvSpPr>
+          <p:cNvPr id="453" name=""/>
+          <p:cNvSpPr txBox="1"/>
+          <p:nvPr/>
+        </p:nvSpPr>
+        <p:spPr>
+          <a:xfrm>
+            <a:off x="1368000" y="4957200"/>
+            <a:ext cx="2592000" cy="446400"/>
+          </a:xfrm>
+          <a:prstGeom prst="rect">
+            <a:avLst/>
+          </a:prstGeom>
+          <a:noFill/>
+          <a:ln w="0">
+            <a:noFill/>
+          </a:ln>
+        </p:spPr>
+        <p:txBody>
+          <a:bodyPr lIns="43200" rIns="43200" tIns="43200" bIns="43200" anchor="t">
+            <a:noAutofit/>
+          </a:bodyPr>
+          <a:p>
+            <a:r>
+              <a:rPr b="1" lang="en-US" sz="1450" spc="-1" strike="noStrike">
+                <a:solidFill>
+                  <a:srgbClr val="500000"/>
+                </a:solidFill>
+                <a:latin typeface="Arial"/>
+              </a:rPr>
+              <a:t>Uncertainty and statistics</a:t>
+            </a:r>
+            <a:endParaRPr b="1" lang="en-US" sz="1450" spc="-1" strike="noStrike">
+              <a:solidFill>
+                <a:srgbClr val="500000"/>
+              </a:solidFill>
+              <a:latin typeface="Arial"/>
+            </a:endParaRPr>
+          </a:p>
+        </p:txBody>
+      </p:sp>
+      <p:sp>
+        <p:nvSpPr>
+          <p:cNvPr id="454" name=""/>
+          <p:cNvSpPr txBox="1"/>
+          <p:nvPr/>
+        </p:nvSpPr>
+        <p:spPr>
+          <a:xfrm>
+            <a:off x="4104000" y="4957200"/>
+            <a:ext cx="7164000" cy="464400"/>
+          </a:xfrm>
+          <a:prstGeom prst="rect">
+            <a:avLst/>
+          </a:prstGeom>
+          <a:noFill/>
+          <a:ln w="0">
+            <a:noFill/>
+          </a:ln>
+        </p:spPr>
+        <p:txBody>
+          <a:bodyPr lIns="43200" rIns="43200" tIns="43200" bIns="43200" anchor="t">
+            <a:noAutofit/>
+          </a:bodyPr>
+          <a:p>
+            <a:r>
+              <a:rPr b="0" lang="en-US" sz="1200" spc="-1" strike="noStrike">
+                <a:solidFill>
+                  <a:srgbClr val="17212b"/>
+                </a:solidFill>
+                <a:latin typeface="Arial"/>
+              </a:rPr>
+              <a:t>Report repeatability, hysteresis, drift, confidence intervals, and failure limits.</a:t>
+            </a:r>
+            <a:endParaRPr b="0" lang="en-US" sz="1200" spc="-1" strike="noStrike">
+              <a:solidFill>
+                <a:srgbClr val="17212b"/>
+              </a:solidFill>
+              <a:latin typeface="Arial"/>
+            </a:endParaRPr>
+          </a:p>
+        </p:txBody>
+      </p:sp>
+    </p:spTree>
+  </p:cSld>
+  <mc:AlternateContent>
+    <mc:Choice Requires="p14">
+      <p:transition spd="slow" p14:dur="2000"/>
+    </mc:Choice>
+    <mc:Fallback>
+      <p:transition spd="slow"/>
+    </mc:Fallback>
+  </mc:AlternateContent>
+</p:sld>
+</file>
+
+<file path=ppt/slides/slide17.xml><?xml version="1.0" encoding="utf-8"?>
+<p:sld xmlns:a="http://schemas.openxmlformats.org/drawingml/2006/main" xmlns:p="http://schemas.openxmlformats.org/presentationml/2006/main" xmlns:r="http://schemas.openxmlformats.org/officeDocument/2006/relationships" xmlns:p14="http://schemas.microsoft.com/office/powerpoint/2010/main" xmlns:p15="http://schemas.microsoft.com/office/powerpoint/2012/main" xmlns:mc="http://schemas.openxmlformats.org/markup-compatibility/2006">
+  <p:cSld>
+    <p:spTree>
+      <p:nvGrpSpPr>
+        <p:cNvPr id="1" name=""/>
+        <p:cNvGrpSpPr/>
+        <p:nvPr/>
+      </p:nvGrpSpPr>
+      <p:grpSpPr>
+        <a:xfrm>
+          <a:off x="0" y="0"/>
+          <a:ext cx="0" cy="0"/>
+          <a:chOff x="0" y="0"/>
+          <a:chExt cx="0" cy="0"/>
+        </a:xfrm>
+      </p:grpSpPr>
+      <p:sp>
+        <p:nvSpPr>
+          <p:cNvPr id="455" name=""/>
+          <p:cNvSpPr/>
+          <p:nvPr/>
+        </p:nvSpPr>
+        <p:spPr>
+          <a:xfrm>
+            <a:off x="0" y="0"/>
+            <a:ext cx="12192120" cy="6858000"/>
+          </a:xfrm>
+          <a:prstGeom prst="rect">
+            <a:avLst/>
+          </a:prstGeom>
+          <a:solidFill>
+            <a:srgbClr val="f4f2ef"/>
+          </a:solidFill>
+          <a:ln w="7200">
+            <a:solidFill>
+              <a:srgbClr val="f4f2ef"/>
+            </a:solidFill>
+            <a:round/>
+          </a:ln>
+        </p:spPr>
+      </p:sp>
+      <p:sp>
+        <p:nvSpPr>
+          <p:cNvPr id="456" name=""/>
+          <p:cNvSpPr/>
+          <p:nvPr/>
+        </p:nvSpPr>
+        <p:spPr>
+          <a:xfrm>
+            <a:off x="0" y="0"/>
+            <a:ext cx="126000" cy="6858000"/>
+          </a:xfrm>
+          <a:prstGeom prst="rect">
+            <a:avLst/>
+          </a:prstGeom>
+          <a:solidFill>
+            <a:srgbClr val="500000"/>
+          </a:solidFill>
+          <a:ln w="7200">
+            <a:solidFill>
+              <a:srgbClr val="500000"/>
+            </a:solidFill>
+            <a:round/>
+          </a:ln>
+        </p:spPr>
+      </p:sp>
+      <p:sp>
+        <p:nvSpPr>
+          <p:cNvPr id="457" name=""/>
+          <p:cNvSpPr txBox="1"/>
+          <p:nvPr/>
+        </p:nvSpPr>
+        <p:spPr>
+          <a:xfrm>
+            <a:off x="414000" y="234000"/>
+            <a:ext cx="11052000" cy="426600"/>
+          </a:xfrm>
+          <a:prstGeom prst="rect">
+            <a:avLst/>
+          </a:prstGeom>
+          <a:noFill/>
+          <a:ln w="0">
+            <a:noFill/>
+          </a:ln>
+        </p:spPr>
+        <p:txBody>
+          <a:bodyPr lIns="43200" rIns="43200" tIns="43200" bIns="43200" anchor="t">
+            <a:noAutofit/>
+          </a:bodyPr>
+          <a:p>
+            <a:r>
+              <a:rPr b="1" lang="en-US" sz="2400" spc="-1" strike="noStrike">
+                <a:solidFill>
+                  <a:srgbClr val="500000"/>
+                </a:solidFill>
+                <a:latin typeface="Arial"/>
+              </a:rPr>
+              <a:t>Current Outcome</a:t>
+            </a:r>
+            <a:endParaRPr b="1" lang="en-US" sz="2400" spc="-1" strike="noStrike">
+              <a:solidFill>
+                <a:srgbClr val="500000"/>
+              </a:solidFill>
+              <a:latin typeface="Arial"/>
+            </a:endParaRPr>
+          </a:p>
+        </p:txBody>
+      </p:sp>
+      <p:sp>
+        <p:nvSpPr>
+          <p:cNvPr id="458" name=""/>
+          <p:cNvSpPr/>
+          <p:nvPr/>
+        </p:nvSpPr>
+        <p:spPr>
+          <a:xfrm>
+            <a:off x="414000" y="702000"/>
+            <a:ext cx="11178000" cy="0"/>
+          </a:xfrm>
+          <a:prstGeom prst="line">
+            <a:avLst/>
+          </a:prstGeom>
+          <a:ln w="14400">
+            <a:solidFill>
+              <a:srgbClr val="d6a84b"/>
             </a:solidFill>
             <a:round/>
           </a:ln>
@@ -10699,13 +11750,190 @@
       </p:sp>
       <p:sp>
         <p:nvSpPr>
-          <p:cNvPr id="431" name=""/>
-          <p:cNvSpPr txBox="1"/>
-          <p:nvPr/>
-        </p:nvSpPr>
-        <p:spPr>
-          <a:xfrm>
-            <a:off x="1440000" y="2538000"/>
+          <p:cNvPr id="459" name=""/>
+          <p:cNvSpPr txBox="1"/>
+          <p:nvPr/>
+        </p:nvSpPr>
+        <p:spPr>
+          <a:xfrm>
+            <a:off x="9000000" y="90000"/>
+            <a:ext cx="2520000" cy="201240"/>
+          </a:xfrm>
+          <a:prstGeom prst="rect">
+            <a:avLst/>
+          </a:prstGeom>
+          <a:noFill/>
+          <a:ln w="0">
+            <a:noFill/>
+          </a:ln>
+        </p:spPr>
+        <p:txBody>
+          <a:bodyPr lIns="43200" rIns="43200" tIns="43200" bIns="43200" anchor="t">
+            <a:noAutofit/>
+          </a:bodyPr>
+          <a:p>
+            <a:pPr algn="just">
+              <a:buNone/>
+            </a:pPr>
+            <a:r>
+              <a:rPr b="1" lang="en-US" sz="800" spc="-1" strike="noStrike">
+                <a:solidFill>
+                  <a:srgbClr val="44515e"/>
+                </a:solidFill>
+                <a:latin typeface="Arial"/>
+              </a:rPr>
+              <a:t>CONCLUSION</a:t>
+            </a:r>
+            <a:endParaRPr b="1" lang="en-US" sz="800" spc="-1" strike="noStrike">
+              <a:solidFill>
+                <a:srgbClr val="44515e"/>
+              </a:solidFill>
+              <a:latin typeface="Arial"/>
+            </a:endParaRPr>
+          </a:p>
+        </p:txBody>
+      </p:sp>
+      <p:sp>
+        <p:nvSpPr>
+          <p:cNvPr id="460" name=""/>
+          <p:cNvSpPr txBox="1"/>
+          <p:nvPr/>
+        </p:nvSpPr>
+        <p:spPr>
+          <a:xfrm>
+            <a:off x="414000" y="6642000"/>
+            <a:ext cx="7560000" cy="193320"/>
+          </a:xfrm>
+          <a:prstGeom prst="rect">
+            <a:avLst/>
+          </a:prstGeom>
+          <a:noFill/>
+          <a:ln w="0">
+            <a:noFill/>
+          </a:ln>
+        </p:spPr>
+        <p:txBody>
+          <a:bodyPr lIns="43200" rIns="43200" tIns="43200" bIns="43200" anchor="t">
+            <a:noAutofit/>
+          </a:bodyPr>
+          <a:p>
+            <a:r>
+              <a:rPr b="0" lang="en-US" sz="750" spc="-1" strike="noStrike">
+                <a:solidFill>
+                  <a:srgbClr val="44515e"/>
+                </a:solidFill>
+                <a:latin typeface="Arial"/>
+              </a:rPr>
+              <a:t>Soft continuum limb research progress  •  17</a:t>
+            </a:r>
+            <a:endParaRPr b="0" lang="en-US" sz="750" spc="-1" strike="noStrike">
+              <a:solidFill>
+                <a:srgbClr val="44515e"/>
+              </a:solidFill>
+              <a:latin typeface="Arial"/>
+            </a:endParaRPr>
+          </a:p>
+        </p:txBody>
+      </p:sp>
+      <p:sp>
+        <p:nvSpPr>
+          <p:cNvPr id="461" name=""/>
+          <p:cNvSpPr txBox="1"/>
+          <p:nvPr/>
+        </p:nvSpPr>
+        <p:spPr>
+          <a:xfrm>
+            <a:off x="9000000" y="6642000"/>
+            <a:ext cx="2556000" cy="193320"/>
+          </a:xfrm>
+          <a:prstGeom prst="rect">
+            <a:avLst/>
+          </a:prstGeom>
+          <a:noFill/>
+          <a:ln w="0">
+            <a:noFill/>
+          </a:ln>
+        </p:spPr>
+        <p:txBody>
+          <a:bodyPr lIns="43200" rIns="43200" tIns="43200" bIns="43200" anchor="t">
+            <a:noAutofit/>
+          </a:bodyPr>
+          <a:p>
+            <a:pPr algn="just">
+              <a:buNone/>
+            </a:pPr>
+            <a:r>
+              <a:rPr b="0" lang="en-US" sz="750" spc="-1" strike="noStrike">
+                <a:solidFill>
+                  <a:srgbClr val="44515e"/>
+                </a:solidFill>
+                <a:latin typeface="Arial"/>
+              </a:rPr>
+              <a:t>ETID / MSET research</a:t>
+            </a:r>
+            <a:endParaRPr b="0" lang="en-US" sz="750" spc="-1" strike="noStrike">
+              <a:solidFill>
+                <a:srgbClr val="44515e"/>
+              </a:solidFill>
+              <a:latin typeface="Arial"/>
+            </a:endParaRPr>
+          </a:p>
+        </p:txBody>
+      </p:sp>
+      <p:sp>
+        <p:nvSpPr>
+          <p:cNvPr id="462" name=""/>
+          <p:cNvSpPr txBox="1"/>
+          <p:nvPr/>
+        </p:nvSpPr>
+        <p:spPr>
+          <a:xfrm>
+            <a:off x="720000" y="1116000"/>
+            <a:ext cx="10620000" cy="440280"/>
+          </a:xfrm>
+          <a:prstGeom prst="rect">
+            <a:avLst/>
+          </a:prstGeom>
+          <a:noFill/>
+          <a:ln w="0">
+            <a:noFill/>
+          </a:ln>
+        </p:spPr>
+        <p:txBody>
+          <a:bodyPr lIns="43200" rIns="43200" tIns="43200" bIns="43200" anchor="t">
+            <a:noAutofit/>
+          </a:bodyPr>
+          <a:p>
+            <a:pPr algn="r">
+              <a:buNone/>
+            </a:pPr>
+            <a:r>
+              <a:rPr b="1" lang="en-US" sz="2500" spc="-1" strike="noStrike">
+                <a:solidFill>
+                  <a:srgbClr val="500000"/>
+                </a:solidFill>
+                <a:latin typeface="Arial"/>
+              </a:rPr>
+              <a:t>A reproducible six-disc research platform now connects</a:t>
+            </a:r>
+            <a:endParaRPr b="1" lang="en-US" sz="2500" spc="-1" strike="noStrike">
+              <a:solidFill>
+                <a:srgbClr val="500000"/>
+              </a:solidFill>
+              <a:latin typeface="Arial"/>
+            </a:endParaRPr>
+          </a:p>
+        </p:txBody>
+      </p:sp>
+      <p:sp>
+        <p:nvSpPr>
+          <p:cNvPr id="463" name=""/>
+          <p:cNvSpPr txBox="1"/>
+          <p:nvPr/>
+        </p:nvSpPr>
+        <p:spPr>
+          <a:xfrm>
+            <a:off x="1440000" y="1800000"/>
             <a:ext cx="2160000" cy="257400"/>
           </a:xfrm>
           <a:prstGeom prst="rect">
@@ -10728,7 +11956,7 @@
                 </a:solidFill>
                 <a:latin typeface="Arial"/>
               </a:rPr>
-              <a:t>SHAPE</a:t>
+              <a:t>CONTROL</a:t>
             </a:r>
             <a:endParaRPr b="1" lang="en-US" sz="1200" spc="-1" strike="noStrike">
               <a:solidFill>
@@ -10741,13 +11969,13 @@
       </p:sp>
       <p:sp>
         <p:nvSpPr>
-          <p:cNvPr id="432" name=""/>
-          <p:cNvSpPr txBox="1"/>
-          <p:nvPr/>
-        </p:nvSpPr>
-        <p:spPr>
-          <a:xfrm>
-            <a:off x="3672000" y="2509200"/>
+          <p:cNvPr id="464" name=""/>
+          <p:cNvSpPr txBox="1"/>
+          <p:nvPr/>
+        </p:nvSpPr>
+        <p:spPr>
+          <a:xfrm>
+            <a:off x="3672000" y="1771200"/>
             <a:ext cx="6840000" cy="329040"/>
           </a:xfrm>
           <a:prstGeom prst="rect">
@@ -10770,7 +11998,7 @@
                 </a:solidFill>
                 <a:latin typeface="Arial"/>
               </a:rPr>
-              <a:t>Synchronized five-interval constant-curvature target</a:t>
+              <a:t>Position + torque admittance + minimum-energy circle</a:t>
             </a:r>
             <a:endParaRPr b="0" lang="en-US" sz="1700" spc="-1" strike="noStrike">
               <a:solidFill>
@@ -10783,13 +12011,13 @@
       </p:sp>
       <p:sp>
         <p:nvSpPr>
-          <p:cNvPr id="433" name=""/>
+          <p:cNvPr id="465" name=""/>
           <p:cNvSpPr/>
           <p:nvPr/>
         </p:nvSpPr>
         <p:spPr>
           <a:xfrm>
-            <a:off x="1440000" y="2916000"/>
+            <a:off x="1440000" y="2178000"/>
             <a:ext cx="9072000" cy="0"/>
           </a:xfrm>
           <a:prstGeom prst="line">
@@ -10811,13 +12039,13 @@
       </p:sp>
       <p:sp>
         <p:nvSpPr>
-          <p:cNvPr id="434" name=""/>
-          <p:cNvSpPr txBox="1"/>
-          <p:nvPr/>
-        </p:nvSpPr>
-        <p:spPr>
-          <a:xfrm>
-            <a:off x="1440000" y="3276000"/>
+          <p:cNvPr id="466" name=""/>
+          <p:cNvSpPr txBox="1"/>
+          <p:nvPr/>
+        </p:nvSpPr>
+        <p:spPr>
+          <a:xfrm>
+            <a:off x="1440000" y="2538000"/>
             <a:ext cx="2160000" cy="257400"/>
           </a:xfrm>
           <a:prstGeom prst="rect">
@@ -10840,7 +12068,7 @@
                 </a:solidFill>
                 <a:latin typeface="Arial"/>
               </a:rPr>
-              <a:t>SENSING</a:t>
+              <a:t>SHAPE</a:t>
             </a:r>
             <a:endParaRPr b="1" lang="en-US" sz="1200" spc="-1" strike="noStrike">
               <a:solidFill>
@@ -10853,13 +12081,13 @@
       </p:sp>
       <p:sp>
         <p:nvSpPr>
-          <p:cNvPr id="435" name=""/>
-          <p:cNvSpPr txBox="1"/>
-          <p:nvPr/>
-        </p:nvSpPr>
-        <p:spPr>
-          <a:xfrm>
-            <a:off x="3672000" y="3247200"/>
+          <p:cNvPr id="467" name=""/>
+          <p:cNvSpPr txBox="1"/>
+          <p:nvPr/>
+        </p:nvSpPr>
+        <p:spPr>
+          <a:xfrm>
+            <a:off x="3672000" y="2509200"/>
             <a:ext cx="6840000" cy="329040"/>
           </a:xfrm>
           <a:prstGeom prst="rect">
@@ -10882,7 +12110,7 @@
                 </a:solidFill>
                 <a:latin typeface="Arial"/>
               </a:rPr>
-              <a:t>Six pose-derived strain channels + bridge voltages</a:t>
+              <a:t>Synchronized five-interval constant-curvature target</a:t>
             </a:r>
             <a:endParaRPr b="0" lang="en-US" sz="1700" spc="-1" strike="noStrike">
               <a:solidFill>
@@ -10895,13 +12123,13 @@
       </p:sp>
       <p:sp>
         <p:nvSpPr>
-          <p:cNvPr id="436" name=""/>
+          <p:cNvPr id="468" name=""/>
           <p:cNvSpPr/>
           <p:nvPr/>
         </p:nvSpPr>
         <p:spPr>
           <a:xfrm>
-            <a:off x="1440000" y="3654000"/>
+            <a:off x="1440000" y="2916000"/>
             <a:ext cx="9072000" cy="0"/>
           </a:xfrm>
           <a:prstGeom prst="line">
@@ -10923,13 +12151,13 @@
       </p:sp>
       <p:sp>
         <p:nvSpPr>
-          <p:cNvPr id="437" name=""/>
-          <p:cNvSpPr txBox="1"/>
-          <p:nvPr/>
-        </p:nvSpPr>
-        <p:spPr>
-          <a:xfrm>
-            <a:off x="1440000" y="4014000"/>
+          <p:cNvPr id="469" name=""/>
+          <p:cNvSpPr txBox="1"/>
+          <p:nvPr/>
+        </p:nvSpPr>
+        <p:spPr>
+          <a:xfrm>
+            <a:off x="1440000" y="3276000"/>
             <a:ext cx="2160000" cy="257400"/>
           </a:xfrm>
           <a:prstGeom prst="rect">
@@ -10952,7 +12180,7 @@
                 </a:solidFill>
                 <a:latin typeface="Arial"/>
               </a:rPr>
-              <a:t>VISUALIZATION</a:t>
+              <a:t>SENSING</a:t>
             </a:r>
             <a:endParaRPr b="1" lang="en-US" sz="1200" spc="-1" strike="noStrike">
               <a:solidFill>
@@ -10965,13 +12193,13 @@
       </p:sp>
       <p:sp>
         <p:nvSpPr>
-          <p:cNvPr id="438" name=""/>
-          <p:cNvSpPr txBox="1"/>
-          <p:nvPr/>
-        </p:nvSpPr>
-        <p:spPr>
-          <a:xfrm>
-            <a:off x="3672000" y="3985200"/>
+          <p:cNvPr id="470" name=""/>
+          <p:cNvSpPr txBox="1"/>
+          <p:nvPr/>
+        </p:nvSpPr>
+        <p:spPr>
+          <a:xfrm>
+            <a:off x="3672000" y="3247200"/>
             <a:ext cx="6840000" cy="329040"/>
           </a:xfrm>
           <a:prstGeom prst="rect">
@@ -10994,7 +12222,7 @@
                 </a:solidFill>
                 <a:latin typeface="Arial"/>
               </a:rPr>
-              <a:t>Isaac Sim + sensor-driven RViz reconstruction</a:t>
+              <a:t>Six pose-derived strain channels + bridge voltages</a:t>
             </a:r>
             <a:endParaRPr b="0" lang="en-US" sz="1700" spc="-1" strike="noStrike">
               <a:solidFill>
@@ -11007,13 +12235,13 @@
       </p:sp>
       <p:sp>
         <p:nvSpPr>
-          <p:cNvPr id="439" name=""/>
+          <p:cNvPr id="471" name=""/>
           <p:cNvSpPr/>
           <p:nvPr/>
         </p:nvSpPr>
         <p:spPr>
           <a:xfrm>
-            <a:off x="1440000" y="4392000"/>
+            <a:off x="1440000" y="3654000"/>
             <a:ext cx="9072000" cy="0"/>
           </a:xfrm>
           <a:prstGeom prst="line">
@@ -11035,7 +12263,119 @@
       </p:sp>
       <p:sp>
         <p:nvSpPr>
-          <p:cNvPr id="440" name=""/>
+          <p:cNvPr id="472" name=""/>
+          <p:cNvSpPr txBox="1"/>
+          <p:nvPr/>
+        </p:nvSpPr>
+        <p:spPr>
+          <a:xfrm>
+            <a:off x="1440000" y="4014000"/>
+            <a:ext cx="2160000" cy="257400"/>
+          </a:xfrm>
+          <a:prstGeom prst="rect">
+            <a:avLst/>
+          </a:prstGeom>
+          <a:noFill/>
+          <a:ln w="0">
+            <a:noFill/>
+          </a:ln>
+        </p:spPr>
+        <p:txBody>
+          <a:bodyPr lIns="43200" rIns="43200" tIns="43200" bIns="43200" anchor="t">
+            <a:noAutofit/>
+          </a:bodyPr>
+          <a:p>
+            <a:r>
+              <a:rPr b="1" lang="en-US" sz="1200" spc="-1" strike="noStrike">
+                <a:solidFill>
+                  <a:srgbClr val="167d8d"/>
+                </a:solidFill>
+                <a:latin typeface="Arial"/>
+              </a:rPr>
+              <a:t>VISUALIZATION</a:t>
+            </a:r>
+            <a:endParaRPr b="1" lang="en-US" sz="1200" spc="-1" strike="noStrike">
+              <a:solidFill>
+                <a:srgbClr val="167d8d"/>
+              </a:solidFill>
+              <a:latin typeface="Arial"/>
+            </a:endParaRPr>
+          </a:p>
+        </p:txBody>
+      </p:sp>
+      <p:sp>
+        <p:nvSpPr>
+          <p:cNvPr id="473" name=""/>
+          <p:cNvSpPr txBox="1"/>
+          <p:nvPr/>
+        </p:nvSpPr>
+        <p:spPr>
+          <a:xfrm>
+            <a:off x="3672000" y="3985200"/>
+            <a:ext cx="6840000" cy="329040"/>
+          </a:xfrm>
+          <a:prstGeom prst="rect">
+            <a:avLst/>
+          </a:prstGeom>
+          <a:noFill/>
+          <a:ln w="0">
+            <a:noFill/>
+          </a:ln>
+        </p:spPr>
+        <p:txBody>
+          <a:bodyPr lIns="43200" rIns="43200" tIns="43200" bIns="43200" anchor="t">
+            <a:noAutofit/>
+          </a:bodyPr>
+          <a:p>
+            <a:r>
+              <a:rPr b="0" lang="en-US" sz="1700" spc="-1" strike="noStrike">
+                <a:solidFill>
+                  <a:srgbClr val="17212b"/>
+                </a:solidFill>
+                <a:latin typeface="Arial"/>
+              </a:rPr>
+              <a:t>Isaac Sim + sensor-driven RViz reconstruction</a:t>
+            </a:r>
+            <a:endParaRPr b="0" lang="en-US" sz="1700" spc="-1" strike="noStrike">
+              <a:solidFill>
+                <a:srgbClr val="17212b"/>
+              </a:solidFill>
+              <a:latin typeface="Arial"/>
+            </a:endParaRPr>
+          </a:p>
+        </p:txBody>
+      </p:sp>
+      <p:sp>
+        <p:nvSpPr>
+          <p:cNvPr id="474" name=""/>
+          <p:cNvSpPr/>
+          <p:nvPr/>
+        </p:nvSpPr>
+        <p:spPr>
+          <a:xfrm>
+            <a:off x="1440000" y="4392000"/>
+            <a:ext cx="9072000" cy="0"/>
+          </a:xfrm>
+          <a:prstGeom prst="line">
+            <a:avLst/>
+          </a:prstGeom>
+          <a:ln w="7200">
+            <a:solidFill>
+              <a:srgbClr val="d7d2cc"/>
+            </a:solidFill>
+            <a:round/>
+          </a:ln>
+        </p:spPr>
+        <p:style>
+          <a:lnRef idx="0"/>
+          <a:fillRef idx="0"/>
+          <a:effectRef idx="0"/>
+          <a:fontRef idx="minor"/>
+        </p:style>
+      </p:sp>
+      <p:sp>
+        <p:nvSpPr>
+          <p:cNvPr id="475" name=""/>
           <p:cNvSpPr txBox="1"/>
           <p:nvPr/>
         </p:nvSpPr>
@@ -11077,7 +12417,7 @@
       </p:sp>
       <p:sp>
         <p:nvSpPr>
-          <p:cNvPr id="441" name=""/>
+          <p:cNvPr id="476" name=""/>
           <p:cNvSpPr txBox="1"/>
           <p:nvPr/>
         </p:nvSpPr>
@@ -11119,7 +12459,7 @@
       </p:sp>
       <p:sp>
         <p:nvSpPr>
-          <p:cNvPr id="442" name=""/>
+          <p:cNvPr id="477" name=""/>
           <p:cNvSpPr txBox="1"/>
           <p:nvPr/>
         </p:nvSpPr>

--- a/research_documentation/soft_limb_progress_update_working.pptx
+++ b/research_documentation/soft_limb_progress_update_working.pptx
@@ -22,6 +22,7 @@
     <p:sldId id="270" r:id="rId17"/>
     <p:sldId id="271" r:id="rId18"/>
     <p:sldId id="272" r:id="rId19"/>
+    <p:sldId id="273" r:id="rId20"/>
   </p:sldIdLst>
   <p:sldSz cx="12192000" cy="6858000"/>
   <p:notesSz cx="7772400" cy="10058400"/>
@@ -79,7 +80,7 @@
         <p:txBody>
           <a:bodyPr/>
           <a:p>
-            <a:fld id="{D0F6F42B-F9D3-4959-B0EF-C8B3300B9879}" type="slidenum">
+            <a:fld id="{79BEC0A9-350E-4E96-A76F-82DCC8F9FCB6}" type="slidenum">
               <a:t>&lt;#&gt;</a:t>
             </a:fld>
           </a:p>
@@ -267,7 +268,7 @@
         <p:txBody>
           <a:bodyPr/>
           <a:p>
-            <a:fld id="{297BBA29-AB69-4BF7-B7E9-732F1321C543}" type="slidenum">
+            <a:fld id="{E8A190BF-B15C-4C46-9129-F9310B125067}" type="slidenum">
               <a:t>&lt;#&gt;</a:t>
             </a:fld>
           </a:p>
@@ -523,7 +524,7 @@
         <p:txBody>
           <a:bodyPr/>
           <a:p>
-            <a:fld id="{4B62A288-E93D-4234-8DEA-97C51F157F39}" type="slidenum">
+            <a:fld id="{80306D43-B6DE-43A4-81C6-209C3B9C2E0D}" type="slidenum">
               <a:t>&lt;#&gt;</a:t>
             </a:fld>
           </a:p>
@@ -847,7 +848,7 @@
         <p:txBody>
           <a:bodyPr/>
           <a:p>
-            <a:fld id="{07DAD7E1-DB38-43CC-994A-323BC2310848}" type="slidenum">
+            <a:fld id="{B2A1B79E-7B38-4051-9450-E5B9804DC3FF}" type="slidenum">
               <a:t>&lt;#&gt;</a:t>
             </a:fld>
           </a:p>
@@ -1004,7 +1005,7 @@
         <p:txBody>
           <a:bodyPr/>
           <a:p>
-            <a:fld id="{57953C76-1931-47A2-A488-5544262E8DD1}" type="slidenum">
+            <a:fld id="{3E4DFF0E-2A8C-4EC1-B418-18A4E9F2BC43}" type="slidenum">
               <a:t>&lt;#&gt;</a:t>
             </a:fld>
           </a:p>
@@ -1158,7 +1159,7 @@
         <p:txBody>
           <a:bodyPr/>
           <a:p>
-            <a:fld id="{3CD704F0-6496-4F15-96EE-DAF6E83C5EA3}" type="slidenum">
+            <a:fld id="{11AF6E0D-9916-43B8-9B23-60BE00275321}" type="slidenum">
               <a:t>&lt;#&gt;</a:t>
             </a:fld>
           </a:p>
@@ -1346,7 +1347,7 @@
         <p:txBody>
           <a:bodyPr/>
           <a:p>
-            <a:fld id="{AA2A2338-3C5A-4D38-B238-D0AF5E190CFA}" type="slidenum">
+            <a:fld id="{45DCA342-447B-438B-8E8B-FB4CA5EACCF3}" type="slidenum">
               <a:t>&lt;#&gt;</a:t>
             </a:fld>
           </a:p>
@@ -1466,7 +1467,7 @@
         <p:txBody>
           <a:bodyPr/>
           <a:p>
-            <a:fld id="{816ED094-7BC1-436F-A95D-114060D51BFD}" type="slidenum">
+            <a:fld id="{6362ED4C-5D37-4716-9A06-7A1B34DD2ADB}" type="slidenum">
               <a:t>&lt;#&gt;</a:t>
             </a:fld>
           </a:p>
@@ -1586,7 +1587,7 @@
         <p:txBody>
           <a:bodyPr/>
           <a:p>
-            <a:fld id="{984107D1-27EC-4F61-BA96-EE8E1D61B2B8}" type="slidenum">
+            <a:fld id="{49775FD1-5EF4-4A48-AD17-FF7E8927DB4A}" type="slidenum">
               <a:t>&lt;#&gt;</a:t>
             </a:fld>
           </a:p>
@@ -1808,7 +1809,7 @@
         <p:txBody>
           <a:bodyPr/>
           <a:p>
-            <a:fld id="{CD267EF9-BABE-4D25-A6F5-D6D3D928C247}" type="slidenum">
+            <a:fld id="{9F83ABF5-84E8-485F-A265-9CBEA3730EB1}" type="slidenum">
               <a:t>&lt;#&gt;</a:t>
             </a:fld>
           </a:p>
@@ -2030,7 +2031,7 @@
         <p:txBody>
           <a:bodyPr/>
           <a:p>
-            <a:fld id="{D7666C0C-8D4E-434C-9947-C42FC27894E4}" type="slidenum">
+            <a:fld id="{FCF61140-8F27-47B7-A7E1-8AA0A090188C}" type="slidenum">
               <a:t>&lt;#&gt;</a:t>
             </a:fld>
           </a:p>
@@ -2252,7 +2253,7 @@
         <p:txBody>
           <a:bodyPr/>
           <a:p>
-            <a:fld id="{EB135813-19E7-4E0E-8377-27DDBE6887FF}" type="slidenum">
+            <a:fld id="{8FBCED1E-3B9B-4CA0-AA47-F950517B59B1}" type="slidenum">
               <a:t>&lt;#&gt;</a:t>
             </a:fld>
           </a:p>
@@ -2664,7 +2665,7 @@
             <a:pPr algn="r">
               <a:buNone/>
             </a:pPr>
-            <a:fld id="{000E7DEE-A548-45E9-9D1B-413A0EE8F5DB}" type="slidenum">
+            <a:fld id="{55DFBBF5-CAA6-49E4-8202-79D427FA0778}" type="slidenum">
               <a:rPr b="0" lang="en-US" sz="1400" spc="-1" strike="noStrike">
                 <a:latin typeface="Times New Roman"/>
               </a:rPr>
@@ -10657,7 +10658,7 @@
                 </a:solidFill>
                 <a:latin typeface="Arial"/>
               </a:rPr>
-              <a:t>Next Research Steps</a:t>
+              <a:t>Twelve-Disc Quadruped: Hybrid Control</a:t>
             </a:r>
             <a:endParaRPr b="1" lang="en-US" sz="2400" spc="-1" strike="noStrike">
               <a:solidFill>
@@ -10730,7 +10731,7 @@
                 </a:solidFill>
                 <a:latin typeface="Arial"/>
               </a:rPr>
-              <a:t>FORWARD PLAN</a:t>
+              <a:t>INTEGRATION</a:t>
             </a:r>
             <a:endParaRPr b="1" lang="en-US" sz="800" spc="-1" strike="noStrike">
               <a:solidFill>
@@ -10836,10 +10837,35 @@
         </p:nvSpPr>
         <p:spPr>
           <a:xfrm>
-            <a:off x="468000" y="954000"/>
-            <a:ext cx="720000" cy="630000"/>
+            <a:off x="432000" y="972000"/>
+            <a:ext cx="3528000" cy="810000"/>
           </a:xfrm>
           <a:prstGeom prst="roundRect">
+            <a:avLst/>
+          </a:prstGeom>
+          <a:solidFill>
+            <a:srgbClr val="ffffff"/>
+          </a:solidFill>
+          <a:ln w="7200">
+            <a:solidFill>
+              <a:srgbClr val="d7d2cc"/>
+            </a:solidFill>
+            <a:round/>
+          </a:ln>
+        </p:spPr>
+      </p:sp>
+      <p:sp>
+        <p:nvSpPr>
+          <p:cNvPr id="436" name=""/>
+          <p:cNvSpPr/>
+          <p:nvPr/>
+        </p:nvSpPr>
+        <p:spPr>
+          <a:xfrm>
+            <a:off x="432000" y="972000"/>
+            <a:ext cx="57600" cy="810000"/>
+          </a:xfrm>
+          <a:prstGeom prst="rect">
             <a:avLst/>
           </a:prstGeom>
           <a:solidFill>
@@ -10855,83 +10881,38 @@
       </p:sp>
       <p:sp>
         <p:nvSpPr>
-          <p:cNvPr id="436" name=""/>
-          <p:cNvSpPr txBox="1"/>
-          <p:nvPr/>
-        </p:nvSpPr>
-        <p:spPr>
-          <a:xfrm>
-            <a:off x="486000" y="1090800"/>
-            <a:ext cx="684000" cy="384120"/>
-          </a:xfrm>
-          <a:prstGeom prst="rect">
-            <a:avLst/>
-          </a:prstGeom>
-          <a:noFill/>
-          <a:ln w="0">
-            <a:noFill/>
-          </a:ln>
-        </p:spPr>
-        <p:txBody>
-          <a:bodyPr lIns="43200" rIns="43200" tIns="43200" bIns="43200" anchor="t">
-            <a:noAutofit/>
-          </a:bodyPr>
-          <a:p>
-            <a:pPr algn="r">
-              <a:buNone/>
-            </a:pPr>
-            <a:r>
-              <a:rPr b="1" lang="en-US" sz="2100" spc="-1" strike="noStrike">
-                <a:solidFill>
-                  <a:srgbClr val="ffffff"/>
-                </a:solidFill>
-                <a:latin typeface="Arial"/>
-              </a:rPr>
-              <a:t>01</a:t>
-            </a:r>
-            <a:endParaRPr b="1" lang="en-US" sz="2100" spc="-1" strike="noStrike">
-              <a:solidFill>
-                <a:srgbClr val="ffffff"/>
-              </a:solidFill>
-              <a:latin typeface="Arial"/>
-            </a:endParaRPr>
-          </a:p>
-        </p:txBody>
-      </p:sp>
-      <p:sp>
-        <p:nvSpPr>
           <p:cNvPr id="437" name=""/>
           <p:cNvSpPr txBox="1"/>
           <p:nvPr/>
         </p:nvSpPr>
         <p:spPr>
           <a:xfrm>
-            <a:off x="1368000" y="997200"/>
-            <a:ext cx="2592000" cy="446400"/>
-          </a:xfrm>
-          <a:prstGeom prst="rect">
-            <a:avLst/>
-          </a:prstGeom>
-          <a:noFill/>
-          <a:ln w="0">
-            <a:noFill/>
-          </a:ln>
-        </p:spPr>
-        <p:txBody>
-          <a:bodyPr lIns="43200" rIns="43200" tIns="43200" bIns="43200" anchor="t">
-            <a:noAutofit/>
-          </a:bodyPr>
-          <a:p>
-            <a:r>
-              <a:rPr b="1" lang="en-US" sz="1450" spc="-1" strike="noStrike">
+            <a:off x="594000" y="1072800"/>
+            <a:ext cx="3294000" cy="414720"/>
+          </a:xfrm>
+          <a:prstGeom prst="rect">
+            <a:avLst/>
+          </a:prstGeom>
+          <a:noFill/>
+          <a:ln w="0">
+            <a:noFill/>
+          </a:ln>
+        </p:spPr>
+        <p:txBody>
+          <a:bodyPr lIns="43200" rIns="43200" tIns="43200" bIns="43200" anchor="t">
+            <a:noAutofit/>
+          </a:bodyPr>
+          <a:p>
+            <a:r>
+              <a:rPr b="1" lang="en-US" sz="2300" spc="-1" strike="noStrike">
                 <a:solidFill>
                   <a:srgbClr val="500000"/>
                 </a:solidFill>
                 <a:latin typeface="Arial"/>
               </a:rPr>
-              <a:t>Physical gauge selection</a:t>
-            </a:r>
-            <a:endParaRPr b="1" lang="en-US" sz="1450" spc="-1" strike="noStrike">
+              <a:t>5</a:t>
+            </a:r>
+            <a:endParaRPr b="1" lang="en-US" sz="2300" spc="-1" strike="noStrike">
               <a:solidFill>
                 <a:srgbClr val="500000"/>
               </a:solidFill>
@@ -10948,34 +10929,34 @@
         </p:nvSpPr>
         <p:spPr>
           <a:xfrm>
-            <a:off x="4104000" y="997200"/>
-            <a:ext cx="7164000" cy="464400"/>
-          </a:xfrm>
-          <a:prstGeom prst="rect">
-            <a:avLst/>
-          </a:prstGeom>
-          <a:noFill/>
-          <a:ln w="0">
-            <a:noFill/>
-          </a:ln>
-        </p:spPr>
-        <p:txBody>
-          <a:bodyPr lIns="43200" rIns="43200" tIns="43200" bIns="43200" anchor="t">
-            <a:noAutofit/>
-          </a:bodyPr>
-          <a:p>
-            <a:r>
-              <a:rPr b="0" lang="en-US" sz="1200" spc="-1" strike="noStrike">
-                <a:solidFill>
-                  <a:srgbClr val="17212b"/>
-                </a:solidFill>
-                <a:latin typeface="Arial"/>
-              </a:rPr>
-              <a:t>Choose a commercial gauge, substrate, adhesive, and temperature compensation strategy.</a:t>
-            </a:r>
-            <a:endParaRPr b="0" lang="en-US" sz="1200" spc="-1" strike="noStrike">
-              <a:solidFill>
-                <a:srgbClr val="17212b"/>
+            <a:off x="594000" y="1396800"/>
+            <a:ext cx="3294000" cy="234720"/>
+          </a:xfrm>
+          <a:prstGeom prst="rect">
+            <a:avLst/>
+          </a:prstGeom>
+          <a:noFill/>
+          <a:ln w="0">
+            <a:noFill/>
+          </a:ln>
+        </p:spPr>
+        <p:txBody>
+          <a:bodyPr lIns="43200" rIns="43200" tIns="43200" bIns="43200" anchor="t">
+            <a:noAutofit/>
+          </a:bodyPr>
+          <a:p>
+            <a:r>
+              <a:rPr b="0" lang="en-US" sz="1050" spc="-1" strike="noStrike">
+                <a:solidFill>
+                  <a:srgbClr val="44515e"/>
+                </a:solidFill>
+                <a:latin typeface="Arial"/>
+              </a:rPr>
+              <a:t>12-disc robot members</a:t>
+            </a:r>
+            <a:endParaRPr b="0" lang="en-US" sz="1050" spc="-1" strike="noStrike">
+              <a:solidFill>
+                <a:srgbClr val="44515e"/>
               </a:solidFill>
               <a:latin typeface="Arial"/>
             </a:endParaRPr>
@@ -10990,18 +10971,18 @@
         </p:nvSpPr>
         <p:spPr>
           <a:xfrm>
-            <a:off x="468000" y="1944000"/>
-            <a:ext cx="720000" cy="630000"/>
+            <a:off x="4212000" y="972000"/>
+            <a:ext cx="3528000" cy="810000"/>
           </a:xfrm>
           <a:prstGeom prst="roundRect">
             <a:avLst/>
           </a:prstGeom>
           <a:solidFill>
-            <a:srgbClr val="500000"/>
+            <a:srgbClr val="ffffff"/>
           </a:solidFill>
           <a:ln w="7200">
             <a:solidFill>
-              <a:srgbClr val="500000"/>
+              <a:srgbClr val="d7d2cc"/>
             </a:solidFill>
             <a:round/>
           </a:ln>
@@ -11010,152 +10991,23 @@
       <p:sp>
         <p:nvSpPr>
           <p:cNvPr id="440" name=""/>
-          <p:cNvSpPr txBox="1"/>
-          <p:nvPr/>
-        </p:nvSpPr>
-        <p:spPr>
-          <a:xfrm>
-            <a:off x="486000" y="2080800"/>
-            <a:ext cx="684000" cy="384120"/>
-          </a:xfrm>
-          <a:prstGeom prst="rect">
-            <a:avLst/>
-          </a:prstGeom>
-          <a:noFill/>
-          <a:ln w="0">
-            <a:noFill/>
-          </a:ln>
-        </p:spPr>
-        <p:txBody>
-          <a:bodyPr lIns="43200" rIns="43200" tIns="43200" bIns="43200" anchor="t">
-            <a:noAutofit/>
-          </a:bodyPr>
-          <a:p>
-            <a:pPr algn="r">
-              <a:buNone/>
-            </a:pPr>
-            <a:r>
-              <a:rPr b="1" lang="en-US" sz="2100" spc="-1" strike="noStrike">
-                <a:solidFill>
-                  <a:srgbClr val="ffffff"/>
-                </a:solidFill>
-                <a:latin typeface="Arial"/>
-              </a:rPr>
-              <a:t>02</a:t>
-            </a:r>
-            <a:endParaRPr b="1" lang="en-US" sz="2100" spc="-1" strike="noStrike">
-              <a:solidFill>
-                <a:srgbClr val="ffffff"/>
-              </a:solidFill>
-              <a:latin typeface="Arial"/>
-            </a:endParaRPr>
-          </a:p>
-        </p:txBody>
-      </p:sp>
-      <p:sp>
-        <p:nvSpPr>
-          <p:cNvPr id="441" name=""/>
-          <p:cNvSpPr txBox="1"/>
-          <p:nvPr/>
-        </p:nvSpPr>
-        <p:spPr>
-          <a:xfrm>
-            <a:off x="1368000" y="1987200"/>
-            <a:ext cx="2592000" cy="446400"/>
-          </a:xfrm>
-          <a:prstGeom prst="rect">
-            <a:avLst/>
-          </a:prstGeom>
-          <a:noFill/>
-          <a:ln w="0">
-            <a:noFill/>
-          </a:ln>
-        </p:spPr>
-        <p:txBody>
-          <a:bodyPr lIns="43200" rIns="43200" tIns="43200" bIns="43200" anchor="t">
-            <a:noAutofit/>
-          </a:bodyPr>
-          <a:p>
-            <a:r>
-              <a:rPr b="1" lang="en-US" sz="1450" spc="-1" strike="noStrike">
-                <a:solidFill>
-                  <a:srgbClr val="500000"/>
-                </a:solidFill>
-                <a:latin typeface="Arial"/>
-              </a:rPr>
-              <a:t>Bench calibration</a:t>
-            </a:r>
-            <a:endParaRPr b="1" lang="en-US" sz="1450" spc="-1" strike="noStrike">
-              <a:solidFill>
-                <a:srgbClr val="500000"/>
-              </a:solidFill>
-              <a:latin typeface="Arial"/>
-            </a:endParaRPr>
-          </a:p>
-        </p:txBody>
-      </p:sp>
-      <p:sp>
-        <p:nvSpPr>
-          <p:cNvPr id="442" name=""/>
-          <p:cNvSpPr txBox="1"/>
-          <p:nvPr/>
-        </p:nvSpPr>
-        <p:spPr>
-          <a:xfrm>
-            <a:off x="4104000" y="1987200"/>
-            <a:ext cx="7164000" cy="464400"/>
-          </a:xfrm>
-          <a:prstGeom prst="rect">
-            <a:avLst/>
-          </a:prstGeom>
-          <a:noFill/>
-          <a:ln w="0">
-            <a:noFill/>
-          </a:ln>
-        </p:spPr>
-        <p:txBody>
-          <a:bodyPr lIns="43200" rIns="43200" tIns="43200" bIns="43200" anchor="t">
-            <a:noAutofit/>
-          </a:bodyPr>
-          <a:p>
-            <a:r>
-              <a:rPr b="0" lang="en-US" sz="1200" spc="-1" strike="noStrike">
-                <a:solidFill>
-                  <a:srgbClr val="17212b"/>
-                </a:solidFill>
-                <a:latin typeface="Arial"/>
-              </a:rPr>
-              <a:t>Measure real strain and bridge voltage against known curvature and loading.</a:t>
-            </a:r>
-            <a:endParaRPr b="0" lang="en-US" sz="1200" spc="-1" strike="noStrike">
-              <a:solidFill>
-                <a:srgbClr val="17212b"/>
-              </a:solidFill>
-              <a:latin typeface="Arial"/>
-            </a:endParaRPr>
-          </a:p>
-        </p:txBody>
-      </p:sp>
-      <p:sp>
-        <p:nvSpPr>
-          <p:cNvPr id="443" name=""/>
           <p:cNvSpPr/>
           <p:nvPr/>
         </p:nvSpPr>
         <p:spPr>
           <a:xfrm>
-            <a:off x="468000" y="2934000"/>
-            <a:ext cx="720000" cy="630000"/>
-          </a:xfrm>
-          <a:prstGeom prst="roundRect">
+            <a:off x="4212000" y="972000"/>
+            <a:ext cx="57600" cy="810000"/>
+          </a:xfrm>
+          <a:prstGeom prst="rect">
             <a:avLst/>
           </a:prstGeom>
           <a:solidFill>
-            <a:srgbClr val="500000"/>
+            <a:srgbClr val="167d8d"/>
           </a:solidFill>
           <a:ln w="7200">
             <a:solidFill>
-              <a:srgbClr val="500000"/>
+              <a:srgbClr val="167d8d"/>
             </a:solidFill>
             <a:round/>
           </a:ln>
@@ -11163,153 +11015,108 @@
       </p:sp>
       <p:sp>
         <p:nvSpPr>
-          <p:cNvPr id="444" name=""/>
-          <p:cNvSpPr txBox="1"/>
-          <p:nvPr/>
-        </p:nvSpPr>
-        <p:spPr>
-          <a:xfrm>
-            <a:off x="486000" y="3070800"/>
-            <a:ext cx="684000" cy="384120"/>
-          </a:xfrm>
-          <a:prstGeom prst="rect">
-            <a:avLst/>
-          </a:prstGeom>
-          <a:noFill/>
-          <a:ln w="0">
-            <a:noFill/>
-          </a:ln>
-        </p:spPr>
-        <p:txBody>
-          <a:bodyPr lIns="43200" rIns="43200" tIns="43200" bIns="43200" anchor="t">
-            <a:noAutofit/>
-          </a:bodyPr>
-          <a:p>
-            <a:pPr algn="r">
-              <a:buNone/>
-            </a:pPr>
-            <a:r>
-              <a:rPr b="1" lang="en-US" sz="2100" spc="-1" strike="noStrike">
-                <a:solidFill>
-                  <a:srgbClr val="ffffff"/>
-                </a:solidFill>
-                <a:latin typeface="Arial"/>
-              </a:rPr>
-              <a:t>03</a:t>
-            </a:r>
-            <a:endParaRPr b="1" lang="en-US" sz="2100" spc="-1" strike="noStrike">
-              <a:solidFill>
-                <a:srgbClr val="ffffff"/>
-              </a:solidFill>
-              <a:latin typeface="Arial"/>
-            </a:endParaRPr>
-          </a:p>
-        </p:txBody>
-      </p:sp>
-      <p:sp>
-        <p:nvSpPr>
-          <p:cNvPr id="445" name=""/>
-          <p:cNvSpPr txBox="1"/>
-          <p:nvPr/>
-        </p:nvSpPr>
-        <p:spPr>
-          <a:xfrm>
-            <a:off x="1368000" y="2977200"/>
-            <a:ext cx="2592000" cy="501480"/>
-          </a:xfrm>
-          <a:prstGeom prst="rect">
-            <a:avLst/>
-          </a:prstGeom>
-          <a:noFill/>
-          <a:ln w="0">
-            <a:noFill/>
-          </a:ln>
-        </p:spPr>
-        <p:txBody>
-          <a:bodyPr lIns="43200" rIns="43200" tIns="43200" bIns="43200" anchor="t">
-            <a:noAutofit/>
-          </a:bodyPr>
-          <a:p>
-            <a:r>
-              <a:rPr b="1" lang="en-US" sz="1450" spc="-1" strike="noStrike">
-                <a:solidFill>
-                  <a:srgbClr val="500000"/>
-                </a:solidFill>
-                <a:latin typeface="Arial"/>
-              </a:rPr>
-              <a:t>Independent shape validation</a:t>
-            </a:r>
-            <a:endParaRPr b="1" lang="en-US" sz="1450" spc="-1" strike="noStrike">
-              <a:solidFill>
-                <a:srgbClr val="500000"/>
-              </a:solidFill>
-              <a:latin typeface="Arial"/>
-            </a:endParaRPr>
-          </a:p>
-        </p:txBody>
-      </p:sp>
-      <p:sp>
-        <p:nvSpPr>
-          <p:cNvPr id="446" name=""/>
-          <p:cNvSpPr txBox="1"/>
-          <p:nvPr/>
-        </p:nvSpPr>
-        <p:spPr>
-          <a:xfrm>
-            <a:off x="4104000" y="2977200"/>
-            <a:ext cx="7164000" cy="464400"/>
-          </a:xfrm>
-          <a:prstGeom prst="rect">
-            <a:avLst/>
-          </a:prstGeom>
-          <a:noFill/>
-          <a:ln w="0">
-            <a:noFill/>
-          </a:ln>
-        </p:spPr>
-        <p:txBody>
-          <a:bodyPr lIns="43200" rIns="43200" tIns="43200" bIns="43200" anchor="t">
-            <a:noAutofit/>
-          </a:bodyPr>
-          <a:p>
-            <a:r>
-              <a:rPr b="0" lang="en-US" sz="1200" spc="-1" strike="noStrike">
-                <a:solidFill>
-                  <a:srgbClr val="17212b"/>
-                </a:solidFill>
-                <a:latin typeface="Arial"/>
-              </a:rPr>
-              <a:t>Compare reconstructed curvature with motion capture or vision—not the same pose source.</a:t>
-            </a:r>
-            <a:endParaRPr b="0" lang="en-US" sz="1200" spc="-1" strike="noStrike">
-              <a:solidFill>
-                <a:srgbClr val="17212b"/>
-              </a:solidFill>
-              <a:latin typeface="Arial"/>
-            </a:endParaRPr>
-          </a:p>
-        </p:txBody>
-      </p:sp>
-      <p:sp>
-        <p:nvSpPr>
-          <p:cNvPr id="447" name=""/>
+          <p:cNvPr id="441" name=""/>
+          <p:cNvSpPr txBox="1"/>
+          <p:nvPr/>
+        </p:nvSpPr>
+        <p:spPr>
+          <a:xfrm>
+            <a:off x="4374000" y="1072800"/>
+            <a:ext cx="3294000" cy="414720"/>
+          </a:xfrm>
+          <a:prstGeom prst="rect">
+            <a:avLst/>
+          </a:prstGeom>
+          <a:noFill/>
+          <a:ln w="0">
+            <a:noFill/>
+          </a:ln>
+        </p:spPr>
+        <p:txBody>
+          <a:bodyPr lIns="43200" rIns="43200" tIns="43200" bIns="43200" anchor="t">
+            <a:noAutofit/>
+          </a:bodyPr>
+          <a:p>
+            <a:r>
+              <a:rPr b="1" lang="en-US" sz="2300" spc="-1" strike="noStrike">
+                <a:solidFill>
+                  <a:srgbClr val="167d8d"/>
+                </a:solidFill>
+                <a:latin typeface="Arial"/>
+              </a:rPr>
+              <a:t>11</a:t>
+            </a:r>
+            <a:endParaRPr b="1" lang="en-US" sz="2300" spc="-1" strike="noStrike">
+              <a:solidFill>
+                <a:srgbClr val="167d8d"/>
+              </a:solidFill>
+              <a:latin typeface="Arial"/>
+            </a:endParaRPr>
+          </a:p>
+        </p:txBody>
+      </p:sp>
+      <p:sp>
+        <p:nvSpPr>
+          <p:cNvPr id="442" name=""/>
+          <p:cNvSpPr txBox="1"/>
+          <p:nvPr/>
+        </p:nvSpPr>
+        <p:spPr>
+          <a:xfrm>
+            <a:off x="4374000" y="1396800"/>
+            <a:ext cx="3294000" cy="234720"/>
+          </a:xfrm>
+          <a:prstGeom prst="rect">
+            <a:avLst/>
+          </a:prstGeom>
+          <a:noFill/>
+          <a:ln w="0">
+            <a:noFill/>
+          </a:ln>
+        </p:spPr>
+        <p:txBody>
+          <a:bodyPr lIns="43200" rIns="43200" tIns="43200" bIns="43200" anchor="t">
+            <a:noAutofit/>
+          </a:bodyPr>
+          <a:p>
+            <a:r>
+              <a:rPr b="0" lang="en-US" sz="1050" spc="-1" strike="noStrike">
+                <a:solidFill>
+                  <a:srgbClr val="44515e"/>
+                </a:solidFill>
+                <a:latin typeface="Arial"/>
+              </a:rPr>
+              <a:t>physical intervals per member</a:t>
+            </a:r>
+            <a:endParaRPr b="0" lang="en-US" sz="1050" spc="-1" strike="noStrike">
+              <a:solidFill>
+                <a:srgbClr val="44515e"/>
+              </a:solidFill>
+              <a:latin typeface="Arial"/>
+            </a:endParaRPr>
+          </a:p>
+        </p:txBody>
+      </p:sp>
+      <p:sp>
+        <p:nvSpPr>
+          <p:cNvPr id="443" name=""/>
           <p:cNvSpPr/>
           <p:nvPr/>
         </p:nvSpPr>
         <p:spPr>
           <a:xfrm>
-            <a:off x="468000" y="3924000"/>
-            <a:ext cx="720000" cy="630000"/>
+            <a:off x="7992000" y="972000"/>
+            <a:ext cx="3528000" cy="810000"/>
           </a:xfrm>
           <a:prstGeom prst="roundRect">
             <a:avLst/>
           </a:prstGeom>
           <a:solidFill>
-            <a:srgbClr val="500000"/>
+            <a:srgbClr val="ffffff"/>
           </a:solidFill>
           <a:ln w="7200">
             <a:solidFill>
-              <a:srgbClr val="500000"/>
+              <a:srgbClr val="d7d2cc"/>
             </a:solidFill>
             <a:round/>
           </a:ln>
@@ -11317,153 +11124,24 @@
       </p:sp>
       <p:sp>
         <p:nvSpPr>
-          <p:cNvPr id="448" name=""/>
-          <p:cNvSpPr txBox="1"/>
-          <p:nvPr/>
-        </p:nvSpPr>
-        <p:spPr>
-          <a:xfrm>
-            <a:off x="486000" y="4060800"/>
-            <a:ext cx="684000" cy="384120"/>
-          </a:xfrm>
-          <a:prstGeom prst="rect">
-            <a:avLst/>
-          </a:prstGeom>
-          <a:noFill/>
-          <a:ln w="0">
-            <a:noFill/>
-          </a:ln>
-        </p:spPr>
-        <p:txBody>
-          <a:bodyPr lIns="43200" rIns="43200" tIns="43200" bIns="43200" anchor="t">
-            <a:noAutofit/>
-          </a:bodyPr>
-          <a:p>
-            <a:pPr algn="r">
-              <a:buNone/>
-            </a:pPr>
-            <a:r>
-              <a:rPr b="1" lang="en-US" sz="2100" spc="-1" strike="noStrike">
-                <a:solidFill>
-                  <a:srgbClr val="ffffff"/>
-                </a:solidFill>
-                <a:latin typeface="Arial"/>
-              </a:rPr>
-              <a:t>04</a:t>
-            </a:r>
-            <a:endParaRPr b="1" lang="en-US" sz="2100" spc="-1" strike="noStrike">
-              <a:solidFill>
-                <a:srgbClr val="ffffff"/>
-              </a:solidFill>
-              <a:latin typeface="Arial"/>
-            </a:endParaRPr>
-          </a:p>
-        </p:txBody>
-      </p:sp>
-      <p:sp>
-        <p:nvSpPr>
-          <p:cNvPr id="449" name=""/>
-          <p:cNvSpPr txBox="1"/>
-          <p:nvPr/>
-        </p:nvSpPr>
-        <p:spPr>
-          <a:xfrm>
-            <a:off x="1368000" y="3967200"/>
-            <a:ext cx="2592000" cy="501480"/>
-          </a:xfrm>
-          <a:prstGeom prst="rect">
-            <a:avLst/>
-          </a:prstGeom>
-          <a:noFill/>
-          <a:ln w="0">
-            <a:noFill/>
-          </a:ln>
-        </p:spPr>
-        <p:txBody>
-          <a:bodyPr lIns="43200" rIns="43200" tIns="43200" bIns="43200" anchor="t">
-            <a:noAutofit/>
-          </a:bodyPr>
-          <a:p>
-            <a:r>
-              <a:rPr b="1" lang="en-US" sz="1450" spc="-1" strike="noStrike">
-                <a:solidFill>
-                  <a:srgbClr val="500000"/>
-                </a:solidFill>
-                <a:latin typeface="Arial"/>
-              </a:rPr>
-              <a:t>Loaded and directional trials</a:t>
-            </a:r>
-            <a:endParaRPr b="1" lang="en-US" sz="1450" spc="-1" strike="noStrike">
-              <a:solidFill>
-                <a:srgbClr val="500000"/>
-              </a:solidFill>
-              <a:latin typeface="Arial"/>
-            </a:endParaRPr>
-          </a:p>
-        </p:txBody>
-      </p:sp>
-      <p:sp>
-        <p:nvSpPr>
-          <p:cNvPr id="450" name=""/>
-          <p:cNvSpPr txBox="1"/>
-          <p:nvPr/>
-        </p:nvSpPr>
-        <p:spPr>
-          <a:xfrm>
-            <a:off x="4104000" y="3967200"/>
-            <a:ext cx="7164000" cy="464400"/>
-          </a:xfrm>
-          <a:prstGeom prst="rect">
-            <a:avLst/>
-          </a:prstGeom>
-          <a:noFill/>
-          <a:ln w="0">
-            <a:noFill/>
-          </a:ln>
-        </p:spPr>
-        <p:txBody>
-          <a:bodyPr lIns="43200" rIns="43200" tIns="43200" bIns="43200" anchor="t">
-            <a:noAutofit/>
-          </a:bodyPr>
-          <a:p>
-            <a:r>
-              <a:rPr b="0" lang="en-US" sz="1200" spc="-1" strike="noStrike">
-                <a:solidFill>
-                  <a:srgbClr val="17212b"/>
-                </a:solidFill>
-                <a:latin typeface="Arial"/>
-              </a:rPr>
-              <a:t>Repeat across θ, negative torque, payloads, disturbances, and repeated cycles.</a:t>
-            </a:r>
-            <a:endParaRPr b="0" lang="en-US" sz="1200" spc="-1" strike="noStrike">
-              <a:solidFill>
-                <a:srgbClr val="17212b"/>
-              </a:solidFill>
-              <a:latin typeface="Arial"/>
-            </a:endParaRPr>
-          </a:p>
-        </p:txBody>
-      </p:sp>
-      <p:sp>
-        <p:nvSpPr>
-          <p:cNvPr id="451" name=""/>
+          <p:cNvPr id="444" name=""/>
           <p:cNvSpPr/>
           <p:nvPr/>
         </p:nvSpPr>
         <p:spPr>
           <a:xfrm>
-            <a:off x="468000" y="4914000"/>
-            <a:ext cx="720000" cy="630000"/>
-          </a:xfrm>
-          <a:prstGeom prst="roundRect">
+            <a:off x="7992000" y="972000"/>
+            <a:ext cx="57600" cy="810000"/>
+          </a:xfrm>
+          <a:prstGeom prst="rect">
             <a:avLst/>
           </a:prstGeom>
           <a:solidFill>
-            <a:srgbClr val="500000"/>
+            <a:srgbClr val="d6a84b"/>
           </a:solidFill>
           <a:ln w="7200">
             <a:solidFill>
-              <a:srgbClr val="500000"/>
+              <a:srgbClr val="d6a84b"/>
             </a:solidFill>
             <a:round/>
           </a:ln>
@@ -11471,43 +11149,334 @@
       </p:sp>
       <p:sp>
         <p:nvSpPr>
+          <p:cNvPr id="445" name=""/>
+          <p:cNvSpPr txBox="1"/>
+          <p:nvPr/>
+        </p:nvSpPr>
+        <p:spPr>
+          <a:xfrm>
+            <a:off x="8154000" y="1072800"/>
+            <a:ext cx="3294000" cy="414720"/>
+          </a:xfrm>
+          <a:prstGeom prst="rect">
+            <a:avLst/>
+          </a:prstGeom>
+          <a:noFill/>
+          <a:ln w="0">
+            <a:noFill/>
+          </a:ln>
+        </p:spPr>
+        <p:txBody>
+          <a:bodyPr lIns="43200" rIns="43200" tIns="43200" bIns="43200" anchor="t">
+            <a:noAutofit/>
+          </a:bodyPr>
+          <a:p>
+            <a:r>
+              <a:rPr b="1" lang="en-US" sz="2300" spc="-1" strike="noStrike">
+                <a:solidFill>
+                  <a:srgbClr val="d6a84b"/>
+                </a:solidFill>
+                <a:latin typeface="Arial"/>
+              </a:rPr>
+              <a:t>1 N·m → 180°</a:t>
+            </a:r>
+            <a:endParaRPr b="1" lang="en-US" sz="2300" spc="-1" strike="noStrike">
+              <a:solidFill>
+                <a:srgbClr val="d6a84b"/>
+              </a:solidFill>
+              <a:latin typeface="Arial"/>
+            </a:endParaRPr>
+          </a:p>
+        </p:txBody>
+      </p:sp>
+      <p:sp>
+        <p:nvSpPr>
+          <p:cNvPr id="446" name=""/>
+          <p:cNvSpPr txBox="1"/>
+          <p:nvPr/>
+        </p:nvSpPr>
+        <p:spPr>
+          <a:xfrm>
+            <a:off x="8154000" y="1396800"/>
+            <a:ext cx="3294000" cy="234720"/>
+          </a:xfrm>
+          <a:prstGeom prst="rect">
+            <a:avLst/>
+          </a:prstGeom>
+          <a:noFill/>
+          <a:ln w="0">
+            <a:noFill/>
+          </a:ln>
+        </p:spPr>
+        <p:txBody>
+          <a:bodyPr lIns="43200" rIns="43200" tIns="43200" bIns="43200" anchor="t">
+            <a:noAutofit/>
+          </a:bodyPr>
+          <a:p>
+            <a:r>
+              <a:rPr b="0" lang="en-US" sz="1050" spc="-1" strike="noStrike">
+                <a:solidFill>
+                  <a:srgbClr val="44515e"/>
+                </a:solidFill>
+                <a:latin typeface="Arial"/>
+              </a:rPr>
+              <a:t>command-admittance scale</a:t>
+            </a:r>
+            <a:endParaRPr b="0" lang="en-US" sz="1050" spc="-1" strike="noStrike">
+              <a:solidFill>
+                <a:srgbClr val="44515e"/>
+              </a:solidFill>
+              <a:latin typeface="Arial"/>
+            </a:endParaRPr>
+          </a:p>
+        </p:txBody>
+      </p:sp>
+      <p:sp>
+        <p:nvSpPr>
+          <p:cNvPr id="447" name=""/>
+          <p:cNvSpPr txBox="1"/>
+          <p:nvPr/>
+        </p:nvSpPr>
+        <p:spPr>
+          <a:xfrm>
+            <a:off x="504000" y="2178000"/>
+            <a:ext cx="7020000" cy="342720"/>
+          </a:xfrm>
+          <a:prstGeom prst="rect">
+            <a:avLst/>
+          </a:prstGeom>
+          <a:noFill/>
+          <a:ln w="0">
+            <a:noFill/>
+          </a:ln>
+        </p:spPr>
+        <p:txBody>
+          <a:bodyPr lIns="43200" rIns="43200" tIns="43200" bIns="43200" anchor="t">
+            <a:noAutofit/>
+          </a:bodyPr>
+          <a:p>
+            <a:r>
+              <a:rPr b="1" lang="en-US" sz="1800" spc="-1" strike="noStrike">
+                <a:solidFill>
+                  <a:srgbClr val="500000"/>
+                </a:solidFill>
+                <a:latin typeface="Arial"/>
+              </a:rPr>
+              <a:t>Stable original assembly with a new control interface</a:t>
+            </a:r>
+            <a:endParaRPr b="1" lang="en-US" sz="1800" spc="-1" strike="noStrike">
+              <a:solidFill>
+                <a:srgbClr val="500000"/>
+              </a:solidFill>
+              <a:latin typeface="Arial"/>
+            </a:endParaRPr>
+          </a:p>
+        </p:txBody>
+      </p:sp>
+      <p:sp>
+        <p:nvSpPr>
+          <p:cNvPr id="448" name=""/>
+          <p:cNvSpPr txBox="1"/>
+          <p:nvPr/>
+        </p:nvSpPr>
+        <p:spPr>
+          <a:xfrm>
+            <a:off x="504000" y="2570400"/>
+            <a:ext cx="180000" cy="239040"/>
+          </a:xfrm>
+          <a:prstGeom prst="rect">
+            <a:avLst/>
+          </a:prstGeom>
+          <a:noFill/>
+          <a:ln w="0">
+            <a:noFill/>
+          </a:ln>
+        </p:spPr>
+        <p:txBody>
+          <a:bodyPr lIns="43200" rIns="43200" tIns="43200" bIns="43200" anchor="t">
+            <a:noAutofit/>
+          </a:bodyPr>
+          <a:p>
+            <a:r>
+              <a:rPr b="1" lang="en-US" sz="1080" spc="-1" strike="noStrike">
+                <a:solidFill>
+                  <a:srgbClr val="167d8d"/>
+                </a:solidFill>
+                <a:latin typeface="Arial"/>
+              </a:rPr>
+              <a:t>●</a:t>
+            </a:r>
+            <a:endParaRPr b="1" lang="en-US" sz="1080" spc="-1" strike="noStrike">
+              <a:solidFill>
+                <a:srgbClr val="167d8d"/>
+              </a:solidFill>
+              <a:latin typeface="Arial"/>
+            </a:endParaRPr>
+          </a:p>
+        </p:txBody>
+      </p:sp>
+      <p:sp>
+        <p:nvSpPr>
+          <p:cNvPr id="449" name=""/>
+          <p:cNvSpPr txBox="1"/>
+          <p:nvPr/>
+        </p:nvSpPr>
+        <p:spPr>
+          <a:xfrm>
+            <a:off x="702000" y="2556000"/>
+            <a:ext cx="7362000" cy="410400"/>
+          </a:xfrm>
+          <a:prstGeom prst="rect">
+            <a:avLst/>
+          </a:prstGeom>
+          <a:noFill/>
+          <a:ln w="0">
+            <a:noFill/>
+          </a:ln>
+        </p:spPr>
+        <p:txBody>
+          <a:bodyPr lIns="43200" rIns="43200" tIns="43200" bIns="43200" anchor="t">
+            <a:noAutofit/>
+          </a:bodyPr>
+          <a:p>
+            <a:r>
+              <a:rPr b="0" lang="en-US" sz="1280" spc="-1" strike="noStrike">
+                <a:solidFill>
+                  <a:srgbClr val="17212b"/>
+                </a:solidFill>
+                <a:latin typeface="Arial"/>
+              </a:rPr>
+              <a:t>Working simulator regenerated directly from the old grounded quadruped.</a:t>
+            </a:r>
+            <a:endParaRPr b="0" lang="en-US" sz="1280" spc="-1" strike="noStrike">
+              <a:solidFill>
+                <a:srgbClr val="17212b"/>
+              </a:solidFill>
+              <a:latin typeface="Arial"/>
+            </a:endParaRPr>
+          </a:p>
+        </p:txBody>
+      </p:sp>
+      <p:sp>
+        <p:nvSpPr>
+          <p:cNvPr id="450" name=""/>
+          <p:cNvSpPr txBox="1"/>
+          <p:nvPr/>
+        </p:nvSpPr>
+        <p:spPr>
+          <a:xfrm>
+            <a:off x="504000" y="2984400"/>
+            <a:ext cx="180000" cy="239040"/>
+          </a:xfrm>
+          <a:prstGeom prst="rect">
+            <a:avLst/>
+          </a:prstGeom>
+          <a:noFill/>
+          <a:ln w="0">
+            <a:noFill/>
+          </a:ln>
+        </p:spPr>
+        <p:txBody>
+          <a:bodyPr lIns="43200" rIns="43200" tIns="43200" bIns="43200" anchor="t">
+            <a:noAutofit/>
+          </a:bodyPr>
+          <a:p>
+            <a:r>
+              <a:rPr b="1" lang="en-US" sz="1080" spc="-1" strike="noStrike">
+                <a:solidFill>
+                  <a:srgbClr val="167d8d"/>
+                </a:solidFill>
+                <a:latin typeface="Arial"/>
+              </a:rPr>
+              <a:t>●</a:t>
+            </a:r>
+            <a:endParaRPr b="1" lang="en-US" sz="1080" spc="-1" strike="noStrike">
+              <a:solidFill>
+                <a:srgbClr val="167d8d"/>
+              </a:solidFill>
+              <a:latin typeface="Arial"/>
+            </a:endParaRPr>
+          </a:p>
+        </p:txBody>
+      </p:sp>
+      <p:sp>
+        <p:nvSpPr>
+          <p:cNvPr id="451" name=""/>
+          <p:cNvSpPr txBox="1"/>
+          <p:nvPr/>
+        </p:nvSpPr>
+        <p:spPr>
+          <a:xfrm>
+            <a:off x="702000" y="2970000"/>
+            <a:ext cx="7362000" cy="410400"/>
+          </a:xfrm>
+          <a:prstGeom prst="rect">
+            <a:avLst/>
+          </a:prstGeom>
+          <a:noFill/>
+          <a:ln w="0">
+            <a:noFill/>
+          </a:ln>
+        </p:spPr>
+        <p:txBody>
+          <a:bodyPr lIns="43200" rIns="43200" tIns="43200" bIns="43200" anchor="t">
+            <a:noAutofit/>
+          </a:bodyPr>
+          <a:p>
+            <a:r>
+              <a:rPr b="0" lang="en-US" sz="1280" spc="-1" strike="noStrike">
+                <a:solidFill>
+                  <a:srgbClr val="17212b"/>
+                </a:solidFill>
+                <a:latin typeface="Arial"/>
+              </a:rPr>
+              <a:t>USD, height, positions, ±90° placement, attachments, and camera are retained.</a:t>
+            </a:r>
+            <a:endParaRPr b="0" lang="en-US" sz="1280" spc="-1" strike="noStrike">
+              <a:solidFill>
+                <a:srgbClr val="17212b"/>
+              </a:solidFill>
+              <a:latin typeface="Arial"/>
+            </a:endParaRPr>
+          </a:p>
+        </p:txBody>
+      </p:sp>
+      <p:sp>
+        <p:nvSpPr>
           <p:cNvPr id="452" name=""/>
           <p:cNvSpPr txBox="1"/>
           <p:nvPr/>
         </p:nvSpPr>
         <p:spPr>
           <a:xfrm>
-            <a:off x="486000" y="5050800"/>
-            <a:ext cx="684000" cy="384120"/>
-          </a:xfrm>
-          <a:prstGeom prst="rect">
-            <a:avLst/>
-          </a:prstGeom>
-          <a:noFill/>
-          <a:ln w="0">
-            <a:noFill/>
-          </a:ln>
-        </p:spPr>
-        <p:txBody>
-          <a:bodyPr lIns="43200" rIns="43200" tIns="43200" bIns="43200" anchor="t">
-            <a:noAutofit/>
-          </a:bodyPr>
-          <a:p>
-            <a:pPr algn="r">
-              <a:buNone/>
-            </a:pPr>
-            <a:r>
-              <a:rPr b="1" lang="en-US" sz="2100" spc="-1" strike="noStrike">
-                <a:solidFill>
-                  <a:srgbClr val="ffffff"/>
-                </a:solidFill>
-                <a:latin typeface="Arial"/>
-              </a:rPr>
-              <a:t>05</a:t>
-            </a:r>
-            <a:endParaRPr b="1" lang="en-US" sz="2100" spc="-1" strike="noStrike">
-              <a:solidFill>
-                <a:srgbClr val="ffffff"/>
+            <a:off x="504000" y="3398400"/>
+            <a:ext cx="180000" cy="239040"/>
+          </a:xfrm>
+          <a:prstGeom prst="rect">
+            <a:avLst/>
+          </a:prstGeom>
+          <a:noFill/>
+          <a:ln w="0">
+            <a:noFill/>
+          </a:ln>
+        </p:spPr>
+        <p:txBody>
+          <a:bodyPr lIns="43200" rIns="43200" tIns="43200" bIns="43200" anchor="t">
+            <a:noAutofit/>
+          </a:bodyPr>
+          <a:p>
+            <a:r>
+              <a:rPr b="1" lang="en-US" sz="1080" spc="-1" strike="noStrike">
+                <a:solidFill>
+                  <a:srgbClr val="167d8d"/>
+                </a:solidFill>
+                <a:latin typeface="Arial"/>
+              </a:rPr>
+              <a:t>●</a:t>
+            </a:r>
+            <a:endParaRPr b="1" lang="en-US" sz="1080" spc="-1" strike="noStrike">
+              <a:solidFill>
+                <a:srgbClr val="167d8d"/>
               </a:solidFill>
               <a:latin typeface="Arial"/>
             </a:endParaRPr>
@@ -11522,32 +11491,939 @@
         </p:nvSpPr>
         <p:spPr>
           <a:xfrm>
-            <a:off x="1368000" y="4957200"/>
-            <a:ext cx="2592000" cy="446400"/>
-          </a:xfrm>
-          <a:prstGeom prst="rect">
-            <a:avLst/>
-          </a:prstGeom>
-          <a:noFill/>
-          <a:ln w="0">
-            <a:noFill/>
-          </a:ln>
-        </p:spPr>
-        <p:txBody>
-          <a:bodyPr lIns="43200" rIns="43200" tIns="43200" bIns="43200" anchor="t">
-            <a:noAutofit/>
-          </a:bodyPr>
-          <a:p>
-            <a:r>
-              <a:rPr b="1" lang="en-US" sz="1450" spc="-1" strike="noStrike">
+            <a:off x="702000" y="3384000"/>
+            <a:ext cx="7362000" cy="410400"/>
+          </a:xfrm>
+          <a:prstGeom prst="rect">
+            <a:avLst/>
+          </a:prstGeom>
+          <a:noFill/>
+          <a:ln w="0">
+            <a:noFill/>
+          </a:ln>
+        </p:spPr>
+        <p:txBody>
+          <a:bodyPr lIns="43200" rIns="43200" tIns="43200" bIns="43200" anchor="t">
+            <a:noAutofit/>
+          </a:bodyPr>
+          <a:p>
+            <a:r>
+              <a:rPr b="0" lang="en-US" sz="1280" spc="-1" strike="noStrike">
+                <a:solidFill>
+                  <a:srgbClr val="17212b"/>
+                </a:solidFill>
+                <a:latin typeface="Arial"/>
+              </a:rPr>
+              <a:t>Left legs: net 180° axial rotation; right legs: net 360° after an additional 180°.</a:t>
+            </a:r>
+            <a:endParaRPr b="0" lang="en-US" sz="1280" spc="-1" strike="noStrike">
+              <a:solidFill>
+                <a:srgbClr val="17212b"/>
+              </a:solidFill>
+              <a:latin typeface="Arial"/>
+            </a:endParaRPr>
+          </a:p>
+        </p:txBody>
+      </p:sp>
+      <p:sp>
+        <p:nvSpPr>
+          <p:cNvPr id="454" name=""/>
+          <p:cNvSpPr txBox="1"/>
+          <p:nvPr/>
+        </p:nvSpPr>
+        <p:spPr>
+          <a:xfrm>
+            <a:off x="504000" y="3812400"/>
+            <a:ext cx="180000" cy="239040"/>
+          </a:xfrm>
+          <a:prstGeom prst="rect">
+            <a:avLst/>
+          </a:prstGeom>
+          <a:noFill/>
+          <a:ln w="0">
+            <a:noFill/>
+          </a:ln>
+        </p:spPr>
+        <p:txBody>
+          <a:bodyPr lIns="43200" rIns="43200" tIns="43200" bIns="43200" anchor="t">
+            <a:noAutofit/>
+          </a:bodyPr>
+          <a:p>
+            <a:r>
+              <a:rPr b="1" lang="en-US" sz="1080" spc="-1" strike="noStrike">
+                <a:solidFill>
+                  <a:srgbClr val="167d8d"/>
+                </a:solidFill>
+                <a:latin typeface="Arial"/>
+              </a:rPr>
+              <a:t>●</a:t>
+            </a:r>
+            <a:endParaRPr b="1" lang="en-US" sz="1080" spc="-1" strike="noStrike">
+              <a:solidFill>
+                <a:srgbClr val="167d8d"/>
+              </a:solidFill>
+              <a:latin typeface="Arial"/>
+            </a:endParaRPr>
+          </a:p>
+        </p:txBody>
+      </p:sp>
+      <p:sp>
+        <p:nvSpPr>
+          <p:cNvPr id="455" name=""/>
+          <p:cNvSpPr txBox="1"/>
+          <p:nvPr/>
+        </p:nvSpPr>
+        <p:spPr>
+          <a:xfrm>
+            <a:off x="702000" y="3798000"/>
+            <a:ext cx="7362000" cy="410400"/>
+          </a:xfrm>
+          <a:prstGeom prst="rect">
+            <a:avLst/>
+          </a:prstGeom>
+          <a:noFill/>
+          <a:ln w="0">
+            <a:noFill/>
+          </a:ln>
+        </p:spPr>
+        <p:txBody>
+          <a:bodyPr lIns="43200" rIns="43200" tIns="43200" bIns="43200" anchor="t">
+            <a:noAutofit/>
+          </a:bodyPr>
+          <a:p>
+            <a:r>
+              <a:rPr b="0" lang="en-US" sz="1280" spc="-1" strike="noStrike">
+                <a:solidFill>
+                  <a:srgbClr val="17212b"/>
+                </a:solidFill>
+                <a:latin typeface="Arial"/>
+              </a:rPr>
+              <a:t>Joint limits, friction, solver settings, and body lock are unchanged.</a:t>
+            </a:r>
+            <a:endParaRPr b="0" lang="en-US" sz="1280" spc="-1" strike="noStrike">
+              <a:solidFill>
+                <a:srgbClr val="17212b"/>
+              </a:solidFill>
+              <a:latin typeface="Arial"/>
+            </a:endParaRPr>
+          </a:p>
+        </p:txBody>
+      </p:sp>
+      <p:sp>
+        <p:nvSpPr>
+          <p:cNvPr id="456" name=""/>
+          <p:cNvSpPr txBox="1"/>
+          <p:nvPr/>
+        </p:nvSpPr>
+        <p:spPr>
+          <a:xfrm>
+            <a:off x="504000" y="4226400"/>
+            <a:ext cx="180000" cy="239040"/>
+          </a:xfrm>
+          <a:prstGeom prst="rect">
+            <a:avLst/>
+          </a:prstGeom>
+          <a:noFill/>
+          <a:ln w="0">
+            <a:noFill/>
+          </a:ln>
+        </p:spPr>
+        <p:txBody>
+          <a:bodyPr lIns="43200" rIns="43200" tIns="43200" bIns="43200" anchor="t">
+            <a:noAutofit/>
+          </a:bodyPr>
+          <a:p>
+            <a:r>
+              <a:rPr b="1" lang="en-US" sz="1080" spc="-1" strike="noStrike">
+                <a:solidFill>
+                  <a:srgbClr val="167d8d"/>
+                </a:solidFill>
+                <a:latin typeface="Arial"/>
+              </a:rPr>
+              <a:t>●</a:t>
+            </a:r>
+            <a:endParaRPr b="1" lang="en-US" sz="1080" spc="-1" strike="noStrike">
+              <a:solidFill>
+                <a:srgbClr val="167d8d"/>
+              </a:solidFill>
+              <a:latin typeface="Arial"/>
+            </a:endParaRPr>
+          </a:p>
+        </p:txBody>
+      </p:sp>
+      <p:sp>
+        <p:nvSpPr>
+          <p:cNvPr id="457" name=""/>
+          <p:cNvSpPr txBox="1"/>
+          <p:nvPr/>
+        </p:nvSpPr>
+        <p:spPr>
+          <a:xfrm>
+            <a:off x="702000" y="4212000"/>
+            <a:ext cx="7362000" cy="410400"/>
+          </a:xfrm>
+          <a:prstGeom prst="rect">
+            <a:avLst/>
+          </a:prstGeom>
+          <a:noFill/>
+          <a:ln w="0">
+            <a:noFill/>
+          </a:ln>
+        </p:spPr>
+        <p:txBody>
+          <a:bodyPr lIns="43200" rIns="43200" tIns="43200" bIns="43200" anchor="t">
+            <a:noAutofit/>
+          </a:bodyPr>
+          <a:p>
+            <a:r>
+              <a:rPr b="0" lang="en-US" sz="1280" spc="-1" strike="noStrike">
+                <a:solidFill>
+                  <a:srgbClr val="17212b"/>
+                </a:solidFill>
+                <a:latin typeface="Arial"/>
+              </a:rPr>
+              <a:t>Phi is a bounded torque-admittance command; theta remains held position.</a:t>
+            </a:r>
+            <a:endParaRPr b="0" lang="en-US" sz="1280" spc="-1" strike="noStrike">
+              <a:solidFill>
+                <a:srgbClr val="17212b"/>
+              </a:solidFill>
+              <a:latin typeface="Arial"/>
+            </a:endParaRPr>
+          </a:p>
+        </p:txBody>
+      </p:sp>
+      <p:sp>
+        <p:nvSpPr>
+          <p:cNvPr id="458" name=""/>
+          <p:cNvSpPr txBox="1"/>
+          <p:nvPr/>
+        </p:nvSpPr>
+        <p:spPr>
+          <a:xfrm>
+            <a:off x="504000" y="4640400"/>
+            <a:ext cx="180000" cy="239040"/>
+          </a:xfrm>
+          <a:prstGeom prst="rect">
+            <a:avLst/>
+          </a:prstGeom>
+          <a:noFill/>
+          <a:ln w="0">
+            <a:noFill/>
+          </a:ln>
+        </p:spPr>
+        <p:txBody>
+          <a:bodyPr lIns="43200" rIns="43200" tIns="43200" bIns="43200" anchor="t">
+            <a:noAutofit/>
+          </a:bodyPr>
+          <a:p>
+            <a:r>
+              <a:rPr b="1" lang="en-US" sz="1080" spc="-1" strike="noStrike">
+                <a:solidFill>
+                  <a:srgbClr val="167d8d"/>
+                </a:solidFill>
+                <a:latin typeface="Arial"/>
+              </a:rPr>
+              <a:t>●</a:t>
+            </a:r>
+            <a:endParaRPr b="1" lang="en-US" sz="1080" spc="-1" strike="noStrike">
+              <a:solidFill>
+                <a:srgbClr val="167d8d"/>
+              </a:solidFill>
+              <a:latin typeface="Arial"/>
+            </a:endParaRPr>
+          </a:p>
+        </p:txBody>
+      </p:sp>
+      <p:sp>
+        <p:nvSpPr>
+          <p:cNvPr id="459" name=""/>
+          <p:cNvSpPr txBox="1"/>
+          <p:nvPr/>
+        </p:nvSpPr>
+        <p:spPr>
+          <a:xfrm>
+            <a:off x="702000" y="4626000"/>
+            <a:ext cx="7362000" cy="410400"/>
+          </a:xfrm>
+          <a:prstGeom prst="rect">
+            <a:avLst/>
+          </a:prstGeom>
+          <a:noFill/>
+          <a:ln w="0">
+            <a:noFill/>
+          </a:ln>
+        </p:spPr>
+        <p:txBody>
+          <a:bodyPr lIns="43200" rIns="43200" tIns="43200" bIns="43200" anchor="t">
+            <a:noAutofit/>
+          </a:bodyPr>
+          <a:p>
+            <a:r>
+              <a:rPr b="0" lang="en-US" sz="1280" spc="-1" strike="noStrike">
+                <a:solidFill>
+                  <a:srgbClr val="17212b"/>
+                </a:solidFill>
+                <a:latin typeface="Arial"/>
+              </a:rPr>
+              <a:t>The base gets 1/11 of total bend; each later A/B joint gets 1/22.</a:t>
+            </a:r>
+            <a:endParaRPr b="0" lang="en-US" sz="1280" spc="-1" strike="noStrike">
+              <a:solidFill>
+                <a:srgbClr val="17212b"/>
+              </a:solidFill>
+              <a:latin typeface="Arial"/>
+            </a:endParaRPr>
+          </a:p>
+        </p:txBody>
+      </p:sp>
+      <p:sp>
+        <p:nvSpPr>
+          <p:cNvPr id="460" name=""/>
+          <p:cNvSpPr txBox="1"/>
+          <p:nvPr/>
+        </p:nvSpPr>
+        <p:spPr>
+          <a:xfrm>
+            <a:off x="504000" y="5054400"/>
+            <a:ext cx="180000" cy="239040"/>
+          </a:xfrm>
+          <a:prstGeom prst="rect">
+            <a:avLst/>
+          </a:prstGeom>
+          <a:noFill/>
+          <a:ln w="0">
+            <a:noFill/>
+          </a:ln>
+        </p:spPr>
+        <p:txBody>
+          <a:bodyPr lIns="43200" rIns="43200" tIns="43200" bIns="43200" anchor="t">
+            <a:noAutofit/>
+          </a:bodyPr>
+          <a:p>
+            <a:r>
+              <a:rPr b="1" lang="en-US" sz="1080" spc="-1" strike="noStrike">
+                <a:solidFill>
+                  <a:srgbClr val="167d8d"/>
+                </a:solidFill>
+                <a:latin typeface="Arial"/>
+              </a:rPr>
+              <a:t>●</a:t>
+            </a:r>
+            <a:endParaRPr b="1" lang="en-US" sz="1080" spc="-1" strike="noStrike">
+              <a:solidFill>
+                <a:srgbClr val="167d8d"/>
+              </a:solidFill>
+              <a:latin typeface="Arial"/>
+            </a:endParaRPr>
+          </a:p>
+        </p:txBody>
+      </p:sp>
+      <p:sp>
+        <p:nvSpPr>
+          <p:cNvPr id="461" name=""/>
+          <p:cNvSpPr txBox="1"/>
+          <p:nvPr/>
+        </p:nvSpPr>
+        <p:spPr>
+          <a:xfrm>
+            <a:off x="702000" y="5040000"/>
+            <a:ext cx="7362000" cy="410400"/>
+          </a:xfrm>
+          <a:prstGeom prst="rect">
+            <a:avLst/>
+          </a:prstGeom>
+          <a:noFill/>
+          <a:ln w="0">
+            <a:noFill/>
+          </a:ln>
+        </p:spPr>
+        <p:txBody>
+          <a:bodyPr lIns="43200" rIns="43200" tIns="43200" bIns="43200" anchor="t">
+            <a:noAutofit/>
+          </a:bodyPr>
+          <a:p>
+            <a:r>
+              <a:rPr b="0" lang="en-US" sz="1280" spc="-1" strike="noStrike">
+                <a:solidFill>
+                  <a:srgbClr val="17212b"/>
+                </a:solidFill>
+                <a:latin typeface="Arial"/>
+              </a:rPr>
+              <a:t>Torque is limited to ±1.0 N·m and slewed at 10.0 N·m/s.</a:t>
+            </a:r>
+            <a:endParaRPr b="0" lang="en-US" sz="1280" spc="-1" strike="noStrike">
+              <a:solidFill>
+                <a:srgbClr val="17212b"/>
+              </a:solidFill>
+              <a:latin typeface="Arial"/>
+            </a:endParaRPr>
+          </a:p>
+        </p:txBody>
+      </p:sp>
+      <p:sp>
+        <p:nvSpPr>
+          <p:cNvPr id="462" name=""/>
+          <p:cNvSpPr txBox="1"/>
+          <p:nvPr/>
+        </p:nvSpPr>
+        <p:spPr>
+          <a:xfrm>
+            <a:off x="504000" y="5468400"/>
+            <a:ext cx="180000" cy="239040"/>
+          </a:xfrm>
+          <a:prstGeom prst="rect">
+            <a:avLst/>
+          </a:prstGeom>
+          <a:noFill/>
+          <a:ln w="0">
+            <a:noFill/>
+          </a:ln>
+        </p:spPr>
+        <p:txBody>
+          <a:bodyPr lIns="43200" rIns="43200" tIns="43200" bIns="43200" anchor="t">
+            <a:noAutofit/>
+          </a:bodyPr>
+          <a:p>
+            <a:r>
+              <a:rPr b="1" lang="en-US" sz="1080" spc="-1" strike="noStrike">
+                <a:solidFill>
+                  <a:srgbClr val="167d8d"/>
+                </a:solidFill>
+                <a:latin typeface="Arial"/>
+              </a:rPr>
+              <a:t>●</a:t>
+            </a:r>
+            <a:endParaRPr b="1" lang="en-US" sz="1080" spc="-1" strike="noStrike">
+              <a:solidFill>
+                <a:srgbClr val="167d8d"/>
+              </a:solidFill>
+              <a:latin typeface="Arial"/>
+            </a:endParaRPr>
+          </a:p>
+        </p:txBody>
+      </p:sp>
+      <p:sp>
+        <p:nvSpPr>
+          <p:cNvPr id="463" name=""/>
+          <p:cNvSpPr txBox="1"/>
+          <p:nvPr/>
+        </p:nvSpPr>
+        <p:spPr>
+          <a:xfrm>
+            <a:off x="702000" y="5454000"/>
+            <a:ext cx="7362000" cy="410400"/>
+          </a:xfrm>
+          <a:prstGeom prst="rect">
+            <a:avLst/>
+          </a:prstGeom>
+          <a:noFill/>
+          <a:ln w="0">
+            <a:noFill/>
+          </a:ln>
+        </p:spPr>
+        <p:txBody>
+          <a:bodyPr lIns="43200" rIns="43200" tIns="43200" bIns="43200" anchor="t">
+            <a:noAutofit/>
+          </a:bodyPr>
+          <a:p>
+            <a:r>
+              <a:rPr b="0" lang="en-US" sz="1280" spc="-1" strike="noStrike">
+                <a:solidFill>
+                  <a:srgbClr val="17212b"/>
+                </a:solidFill>
+                <a:latin typeface="Arial"/>
+              </a:rPr>
+              <a:t>Immense-stiffness gains: roll 20M/42k; yaw 30M/51k.</a:t>
+            </a:r>
+            <a:endParaRPr b="0" lang="en-US" sz="1280" spc="-1" strike="noStrike">
+              <a:solidFill>
+                <a:srgbClr val="17212b"/>
+              </a:solidFill>
+              <a:latin typeface="Arial"/>
+            </a:endParaRPr>
+          </a:p>
+        </p:txBody>
+      </p:sp>
+      <p:sp>
+        <p:nvSpPr>
+          <p:cNvPr id="464" name=""/>
+          <p:cNvSpPr txBox="1"/>
+          <p:nvPr/>
+        </p:nvSpPr>
+        <p:spPr>
+          <a:xfrm>
+            <a:off x="504000" y="5882400"/>
+            <a:ext cx="180000" cy="239040"/>
+          </a:xfrm>
+          <a:prstGeom prst="rect">
+            <a:avLst/>
+          </a:prstGeom>
+          <a:noFill/>
+          <a:ln w="0">
+            <a:noFill/>
+          </a:ln>
+        </p:spPr>
+        <p:txBody>
+          <a:bodyPr lIns="43200" rIns="43200" tIns="43200" bIns="43200" anchor="t">
+            <a:noAutofit/>
+          </a:bodyPr>
+          <a:p>
+            <a:r>
+              <a:rPr b="1" lang="en-US" sz="1080" spc="-1" strike="noStrike">
+                <a:solidFill>
+                  <a:srgbClr val="167d8d"/>
+                </a:solidFill>
+                <a:latin typeface="Arial"/>
+              </a:rPr>
+              <a:t>●</a:t>
+            </a:r>
+            <a:endParaRPr b="1" lang="en-US" sz="1080" spc="-1" strike="noStrike">
+              <a:solidFill>
+                <a:srgbClr val="167d8d"/>
+              </a:solidFill>
+              <a:latin typeface="Arial"/>
+            </a:endParaRPr>
+          </a:p>
+        </p:txBody>
+      </p:sp>
+      <p:sp>
+        <p:nvSpPr>
+          <p:cNvPr id="465" name=""/>
+          <p:cNvSpPr txBox="1"/>
+          <p:nvPr/>
+        </p:nvSpPr>
+        <p:spPr>
+          <a:xfrm>
+            <a:off x="702000" y="5868000"/>
+            <a:ext cx="7362000" cy="410400"/>
+          </a:xfrm>
+          <a:prstGeom prst="rect">
+            <a:avLst/>
+          </a:prstGeom>
+          <a:noFill/>
+          <a:ln w="0">
+            <a:noFill/>
+          </a:ln>
+        </p:spPr>
+        <p:txBody>
+          <a:bodyPr lIns="43200" rIns="43200" tIns="43200" bIns="43200" anchor="t">
+            <a:noAutofit/>
+          </a:bodyPr>
+          <a:p>
+            <a:r>
+              <a:rPr b="0" lang="en-US" sz="1280" spc="-1" strike="noStrike">
+                <a:solidFill>
+                  <a:srgbClr val="17212b"/>
+                </a:solidFill>
+                <a:latin typeface="Arial"/>
+              </a:rPr>
+              <a:t>Rigid-body damping is 5.0 linear / 25.0 angular; neutral theta is 0°.</a:t>
+            </a:r>
+            <a:endParaRPr b="0" lang="en-US" sz="1280" spc="-1" strike="noStrike">
+              <a:solidFill>
+                <a:srgbClr val="17212b"/>
+              </a:solidFill>
+              <a:latin typeface="Arial"/>
+            </a:endParaRPr>
+          </a:p>
+        </p:txBody>
+      </p:sp>
+      <p:sp>
+        <p:nvSpPr>
+          <p:cNvPr id="466" name=""/>
+          <p:cNvSpPr txBox="1"/>
+          <p:nvPr/>
+        </p:nvSpPr>
+        <p:spPr>
+          <a:xfrm>
+            <a:off x="504000" y="6296400"/>
+            <a:ext cx="180000" cy="239040"/>
+          </a:xfrm>
+          <a:prstGeom prst="rect">
+            <a:avLst/>
+          </a:prstGeom>
+          <a:noFill/>
+          <a:ln w="0">
+            <a:noFill/>
+          </a:ln>
+        </p:spPr>
+        <p:txBody>
+          <a:bodyPr lIns="43200" rIns="43200" tIns="43200" bIns="43200" anchor="t">
+            <a:noAutofit/>
+          </a:bodyPr>
+          <a:p>
+            <a:r>
+              <a:rPr b="1" lang="en-US" sz="1080" spc="-1" strike="noStrike">
+                <a:solidFill>
+                  <a:srgbClr val="167d8d"/>
+                </a:solidFill>
+                <a:latin typeface="Arial"/>
+              </a:rPr>
+              <a:t>●</a:t>
+            </a:r>
+            <a:endParaRPr b="1" lang="en-US" sz="1080" spc="-1" strike="noStrike">
+              <a:solidFill>
+                <a:srgbClr val="167d8d"/>
+              </a:solidFill>
+              <a:latin typeface="Arial"/>
+            </a:endParaRPr>
+          </a:p>
+        </p:txBody>
+      </p:sp>
+      <p:sp>
+        <p:nvSpPr>
+          <p:cNvPr id="467" name=""/>
+          <p:cNvSpPr txBox="1"/>
+          <p:nvPr/>
+        </p:nvSpPr>
+        <p:spPr>
+          <a:xfrm>
+            <a:off x="702000" y="6282000"/>
+            <a:ext cx="7362000" cy="410400"/>
+          </a:xfrm>
+          <a:prstGeom prst="rect">
+            <a:avLst/>
+          </a:prstGeom>
+          <a:noFill/>
+          <a:ln w="0">
+            <a:noFill/>
+          </a:ln>
+        </p:spPr>
+        <p:txBody>
+          <a:bodyPr lIns="43200" rIns="43200" tIns="43200" bIns="43200" anchor="t">
+            <a:noAutofit/>
+          </a:bodyPr>
+          <a:p>
+            <a:r>
+              <a:rPr b="0" lang="en-US" sz="1280" spc="-1" strike="noStrike">
+                <a:solidFill>
+                  <a:srgbClr val="17212b"/>
+                </a:solidFill>
+                <a:latin typeface="Arial"/>
+              </a:rPr>
+              <a:t>The downward-bending standing posture uses positive torque on all four legs.</a:t>
+            </a:r>
+            <a:endParaRPr b="0" lang="en-US" sz="1280" spc="-1" strike="noStrike">
+              <a:solidFill>
+                <a:srgbClr val="17212b"/>
+              </a:solidFill>
+              <a:latin typeface="Arial"/>
+            </a:endParaRPr>
+          </a:p>
+        </p:txBody>
+      </p:sp>
+      <p:sp>
+        <p:nvSpPr>
+          <p:cNvPr id="468" name=""/>
+          <p:cNvSpPr txBox="1"/>
+          <p:nvPr/>
+        </p:nvSpPr>
+        <p:spPr>
+          <a:xfrm>
+            <a:off x="504000" y="6710400"/>
+            <a:ext cx="180000" cy="239040"/>
+          </a:xfrm>
+          <a:prstGeom prst="rect">
+            <a:avLst/>
+          </a:prstGeom>
+          <a:noFill/>
+          <a:ln w="0">
+            <a:noFill/>
+          </a:ln>
+        </p:spPr>
+        <p:txBody>
+          <a:bodyPr lIns="43200" rIns="43200" tIns="43200" bIns="43200" anchor="t">
+            <a:noAutofit/>
+          </a:bodyPr>
+          <a:p>
+            <a:r>
+              <a:rPr b="1" lang="en-US" sz="1080" spc="-1" strike="noStrike">
+                <a:solidFill>
+                  <a:srgbClr val="167d8d"/>
+                </a:solidFill>
+                <a:latin typeface="Arial"/>
+              </a:rPr>
+              <a:t>●</a:t>
+            </a:r>
+            <a:endParaRPr b="1" lang="en-US" sz="1080" spc="-1" strike="noStrike">
+              <a:solidFill>
+                <a:srgbClr val="167d8d"/>
+              </a:solidFill>
+              <a:latin typeface="Arial"/>
+            </a:endParaRPr>
+          </a:p>
+        </p:txBody>
+      </p:sp>
+      <p:sp>
+        <p:nvSpPr>
+          <p:cNvPr id="469" name=""/>
+          <p:cNvSpPr txBox="1"/>
+          <p:nvPr/>
+        </p:nvSpPr>
+        <p:spPr>
+          <a:xfrm>
+            <a:off x="702000" y="6696000"/>
+            <a:ext cx="7362000" cy="410400"/>
+          </a:xfrm>
+          <a:prstGeom prst="rect">
+            <a:avLst/>
+          </a:prstGeom>
+          <a:noFill/>
+          <a:ln w="0">
+            <a:noFill/>
+          </a:ln>
+        </p:spPr>
+        <p:txBody>
+          <a:bodyPr lIns="43200" rIns="43200" tIns="43200" bIns="43200" anchor="t">
+            <a:noAutofit/>
+          </a:bodyPr>
+          <a:p>
+            <a:r>
+              <a:rPr b="0" lang="en-US" sz="1280" spc="-1" strike="noStrike">
+                <a:solidFill>
+                  <a:srgbClr val="17212b"/>
+                </a:solidFill>
+                <a:latin typeface="Arial"/>
+              </a:rPr>
+              <a:t>Disc-orientation PI feedback compensates load: Kp 1.2, Ki 4.0/s.</a:t>
+            </a:r>
+            <a:endParaRPr b="0" lang="en-US" sz="1280" spc="-1" strike="noStrike">
+              <a:solidFill>
+                <a:srgbClr val="17212b"/>
+              </a:solidFill>
+              <a:latin typeface="Arial"/>
+            </a:endParaRPr>
+          </a:p>
+        </p:txBody>
+      </p:sp>
+      <p:sp>
+        <p:nvSpPr>
+          <p:cNvPr id="470" name=""/>
+          <p:cNvSpPr txBox="1"/>
+          <p:nvPr/>
+        </p:nvSpPr>
+        <p:spPr>
+          <a:xfrm>
+            <a:off x="504000" y="7124400"/>
+            <a:ext cx="180000" cy="239040"/>
+          </a:xfrm>
+          <a:prstGeom prst="rect">
+            <a:avLst/>
+          </a:prstGeom>
+          <a:noFill/>
+          <a:ln w="0">
+            <a:noFill/>
+          </a:ln>
+        </p:spPr>
+        <p:txBody>
+          <a:bodyPr lIns="43200" rIns="43200" tIns="43200" bIns="43200" anchor="t">
+            <a:noAutofit/>
+          </a:bodyPr>
+          <a:p>
+            <a:r>
+              <a:rPr b="1" lang="en-US" sz="1080" spc="-1" strike="noStrike">
+                <a:solidFill>
+                  <a:srgbClr val="167d8d"/>
+                </a:solidFill>
+                <a:latin typeface="Arial"/>
+              </a:rPr>
+              <a:t>●</a:t>
+            </a:r>
+            <a:endParaRPr b="1" lang="en-US" sz="1080" spc="-1" strike="noStrike">
+              <a:solidFill>
+                <a:srgbClr val="167d8d"/>
+              </a:solidFill>
+              <a:latin typeface="Arial"/>
+            </a:endParaRPr>
+          </a:p>
+        </p:txBody>
+      </p:sp>
+      <p:sp>
+        <p:nvSpPr>
+          <p:cNvPr id="471" name=""/>
+          <p:cNvSpPr txBox="1"/>
+          <p:nvPr/>
+        </p:nvSpPr>
+        <p:spPr>
+          <a:xfrm>
+            <a:off x="702000" y="7110000"/>
+            <a:ext cx="7362000" cy="410400"/>
+          </a:xfrm>
+          <a:prstGeom prst="rect">
+            <a:avLst/>
+          </a:prstGeom>
+          <a:noFill/>
+          <a:ln w="0">
+            <a:noFill/>
+          </a:ln>
+        </p:spPr>
+        <p:txBody>
+          <a:bodyPr lIns="43200" rIns="43200" tIns="43200" bIns="43200" anchor="t">
+            <a:noAutofit/>
+          </a:bodyPr>
+          <a:p>
+            <a:r>
+              <a:rPr b="0" lang="en-US" sz="1280" spc="-1" strike="noStrike">
+                <a:solidFill>
+                  <a:srgbClr val="17212b"/>
+                </a:solidFill>
+                <a:latin typeface="Arial"/>
+              </a:rPr>
+              <a:t>Responsive playback: 120 Hz physics, render every 2 steps (60 Hz), 24/6 solver.</a:t>
+            </a:r>
+            <a:endParaRPr b="0" lang="en-US" sz="1280" spc="-1" strike="noStrike">
+              <a:solidFill>
+                <a:srgbClr val="17212b"/>
+              </a:solidFill>
+              <a:latin typeface="Arial"/>
+            </a:endParaRPr>
+          </a:p>
+        </p:txBody>
+      </p:sp>
+      <p:sp>
+        <p:nvSpPr>
+          <p:cNvPr id="472" name=""/>
+          <p:cNvSpPr txBox="1"/>
+          <p:nvPr/>
+        </p:nvSpPr>
+        <p:spPr>
+          <a:xfrm>
+            <a:off x="504000" y="7538400"/>
+            <a:ext cx="180000" cy="239040"/>
+          </a:xfrm>
+          <a:prstGeom prst="rect">
+            <a:avLst/>
+          </a:prstGeom>
+          <a:noFill/>
+          <a:ln w="0">
+            <a:noFill/>
+          </a:ln>
+        </p:spPr>
+        <p:txBody>
+          <a:bodyPr lIns="43200" rIns="43200" tIns="43200" bIns="43200" anchor="t">
+            <a:noAutofit/>
+          </a:bodyPr>
+          <a:p>
+            <a:r>
+              <a:rPr b="1" lang="en-US" sz="1080" spc="-1" strike="noStrike">
+                <a:solidFill>
+                  <a:srgbClr val="167d8d"/>
+                </a:solidFill>
+                <a:latin typeface="Arial"/>
+              </a:rPr>
+              <a:t>●</a:t>
+            </a:r>
+            <a:endParaRPr b="1" lang="en-US" sz="1080" spc="-1" strike="noStrike">
+              <a:solidFill>
+                <a:srgbClr val="167d8d"/>
+              </a:solidFill>
+              <a:latin typeface="Arial"/>
+            </a:endParaRPr>
+          </a:p>
+        </p:txBody>
+      </p:sp>
+      <p:sp>
+        <p:nvSpPr>
+          <p:cNvPr id="473" name=""/>
+          <p:cNvSpPr txBox="1"/>
+          <p:nvPr/>
+        </p:nvSpPr>
+        <p:spPr>
+          <a:xfrm>
+            <a:off x="702000" y="7524000"/>
+            <a:ext cx="7362000" cy="410400"/>
+          </a:xfrm>
+          <a:prstGeom prst="rect">
+            <a:avLst/>
+          </a:prstGeom>
+          <a:noFill/>
+          <a:ln w="0">
+            <a:noFill/>
+          </a:ln>
+        </p:spPr>
+        <p:txBody>
+          <a:bodyPr lIns="43200" rIns="43200" tIns="43200" bIns="43200" anchor="t">
+            <a:noAutofit/>
+          </a:bodyPr>
+          <a:p>
+            <a:r>
+              <a:rPr b="0" lang="en-US" sz="1280" spc="-1" strike="noStrike">
+                <a:solidFill>
+                  <a:srgbClr val="17212b"/>
+                </a:solidFill>
+                <a:latin typeface="Arial"/>
+              </a:rPr>
+              <a:t>+0.50 N·m: 5 s near target; 10 s final bends 89.34° to 89.95°.</a:t>
+            </a:r>
+            <a:endParaRPr b="0" lang="en-US" sz="1280" spc="-1" strike="noStrike">
+              <a:solidFill>
+                <a:srgbClr val="17212b"/>
+              </a:solidFill>
+              <a:latin typeface="Arial"/>
+            </a:endParaRPr>
+          </a:p>
+        </p:txBody>
+      </p:sp>
+      <p:sp>
+        <p:nvSpPr>
+          <p:cNvPr id="474" name=""/>
+          <p:cNvSpPr/>
+          <p:nvPr/>
+        </p:nvSpPr>
+        <p:spPr>
+          <a:xfrm>
+            <a:off x="8388000" y="2196000"/>
+            <a:ext cx="3096000" cy="2952000"/>
+          </a:xfrm>
+          <a:prstGeom prst="roundRect">
+            <a:avLst/>
+          </a:prstGeom>
+          <a:solidFill>
+            <a:srgbClr val="ffffff"/>
+          </a:solidFill>
+          <a:ln w="7200">
+            <a:solidFill>
+              <a:srgbClr val="d7d2cc"/>
+            </a:solidFill>
+            <a:round/>
+          </a:ln>
+        </p:spPr>
+      </p:sp>
+      <p:sp>
+        <p:nvSpPr>
+          <p:cNvPr id="475" name=""/>
+          <p:cNvSpPr txBox="1"/>
+          <p:nvPr/>
+        </p:nvSpPr>
+        <p:spPr>
+          <a:xfrm>
+            <a:off x="8604000" y="2412000"/>
+            <a:ext cx="2664000" cy="329040"/>
+          </a:xfrm>
+          <a:prstGeom prst="rect">
+            <a:avLst/>
+          </a:prstGeom>
+          <a:noFill/>
+          <a:ln w="0">
+            <a:noFill/>
+          </a:ln>
+        </p:spPr>
+        <p:txBody>
+          <a:bodyPr lIns="43200" rIns="43200" tIns="43200" bIns="43200" anchor="t">
+            <a:noAutofit/>
+          </a:bodyPr>
+          <a:p>
+            <a:r>
+              <a:rPr b="1" lang="en-US" sz="1700" spc="-1" strike="noStrike">
                 <a:solidFill>
                   <a:srgbClr val="500000"/>
                 </a:solidFill>
                 <a:latin typeface="Arial"/>
               </a:rPr>
-              <a:t>Uncertainty and statistics</a:t>
-            </a:r>
-            <a:endParaRPr b="1" lang="en-US" sz="1450" spc="-1" strike="noStrike">
+              <a:t>Validation boundary</a:t>
+            </a:r>
+            <a:endParaRPr b="1" lang="en-US" sz="1700" spc="-1" strike="noStrike">
               <a:solidFill>
                 <a:srgbClr val="500000"/>
               </a:solidFill>
@@ -11558,38 +12434,38 @@
       </p:sp>
       <p:sp>
         <p:nvSpPr>
-          <p:cNvPr id="454" name=""/>
-          <p:cNvSpPr txBox="1"/>
-          <p:nvPr/>
-        </p:nvSpPr>
-        <p:spPr>
-          <a:xfrm>
-            <a:off x="4104000" y="4957200"/>
-            <a:ext cx="7164000" cy="464400"/>
-          </a:xfrm>
-          <a:prstGeom prst="rect">
-            <a:avLst/>
-          </a:prstGeom>
-          <a:noFill/>
-          <a:ln w="0">
-            <a:noFill/>
-          </a:ln>
-        </p:spPr>
-        <p:txBody>
-          <a:bodyPr lIns="43200" rIns="43200" tIns="43200" bIns="43200" anchor="t">
-            <a:noAutofit/>
-          </a:bodyPr>
-          <a:p>
-            <a:r>
-              <a:rPr b="0" lang="en-US" sz="1200" spc="-1" strike="noStrike">
+          <p:cNvPr id="476" name=""/>
+          <p:cNvSpPr txBox="1"/>
+          <p:nvPr/>
+        </p:nvSpPr>
+        <p:spPr>
+          <a:xfrm>
+            <a:off x="8604000" y="2808000"/>
+            <a:ext cx="2592000" cy="1724400"/>
+          </a:xfrm>
+          <a:prstGeom prst="rect">
+            <a:avLst/>
+          </a:prstGeom>
+          <a:noFill/>
+          <a:ln w="0">
+            <a:noFill/>
+          </a:ln>
+        </p:spPr>
+        <p:txBody>
+          <a:bodyPr lIns="43200" rIns="43200" tIns="43200" bIns="43200" anchor="t">
+            <a:noAutofit/>
+          </a:bodyPr>
+          <a:p>
+            <a:r>
+              <a:rPr b="0" lang="en-US" sz="1300" spc="-1" strike="noStrike">
                 <a:solidFill>
                   <a:srgbClr val="17212b"/>
                 </a:solidFill>
                 <a:latin typeface="Arial"/>
               </a:rPr>
-              <a:t>Report repeatability, hysteresis, drift, confidence intervals, and failure limits.</a:t>
-            </a:r>
-            <a:endParaRPr b="0" lang="en-US" sz="1200" spc="-1" strike="noStrike">
+              <a:t>The 1 N·m → 180° law is a simulated command mapping, not raw or calibrated physical torque. Leg-angle tracking is simulation-only; hardware validation, broad contact stability, and locomotion remain future tests.</a:t>
+            </a:r>
+            <a:endParaRPr b="0" lang="en-US" sz="1300" spc="-1" strike="noStrike">
               <a:solidFill>
                 <a:srgbClr val="17212b"/>
               </a:solidFill>
@@ -11630,7 +12506,7 @@
       </p:grpSpPr>
       <p:sp>
         <p:nvSpPr>
-          <p:cNvPr id="455" name=""/>
+          <p:cNvPr id="477" name=""/>
           <p:cNvSpPr/>
           <p:nvPr/>
         </p:nvSpPr>
@@ -11655,7 +12531,7 @@
       </p:sp>
       <p:sp>
         <p:nvSpPr>
-          <p:cNvPr id="456" name=""/>
+          <p:cNvPr id="478" name=""/>
           <p:cNvSpPr/>
           <p:nvPr/>
         </p:nvSpPr>
@@ -11680,7 +12556,7 @@
       </p:sp>
       <p:sp>
         <p:nvSpPr>
-          <p:cNvPr id="457" name=""/>
+          <p:cNvPr id="479" name=""/>
           <p:cNvSpPr txBox="1"/>
           <p:nvPr/>
         </p:nvSpPr>
@@ -11709,7 +12585,7 @@
                 </a:solidFill>
                 <a:latin typeface="Arial"/>
               </a:rPr>
-              <a:t>Current Outcome</a:t>
+              <a:t>Next Research Steps</a:t>
             </a:r>
             <a:endParaRPr b="1" lang="en-US" sz="2400" spc="-1" strike="noStrike">
               <a:solidFill>
@@ -11722,7 +12598,7 @@
       </p:sp>
       <p:sp>
         <p:nvSpPr>
-          <p:cNvPr id="458" name=""/>
+          <p:cNvPr id="480" name=""/>
           <p:cNvSpPr/>
           <p:nvPr/>
         </p:nvSpPr>
@@ -11750,7 +12626,7 @@
       </p:sp>
       <p:sp>
         <p:nvSpPr>
-          <p:cNvPr id="459" name=""/>
+          <p:cNvPr id="481" name=""/>
           <p:cNvSpPr txBox="1"/>
           <p:nvPr/>
         </p:nvSpPr>
@@ -11782,7 +12658,7 @@
                 </a:solidFill>
                 <a:latin typeface="Arial"/>
               </a:rPr>
-              <a:t>CONCLUSION</a:t>
+              <a:t>FORWARD PLAN</a:t>
             </a:r>
             <a:endParaRPr b="1" lang="en-US" sz="800" spc="-1" strike="noStrike">
               <a:solidFill>
@@ -11795,7 +12671,7 @@
       </p:sp>
       <p:sp>
         <p:nvSpPr>
-          <p:cNvPr id="460" name=""/>
+          <p:cNvPr id="482" name=""/>
           <p:cNvSpPr txBox="1"/>
           <p:nvPr/>
         </p:nvSpPr>
@@ -11837,7 +12713,7 @@
       </p:sp>
       <p:sp>
         <p:nvSpPr>
-          <p:cNvPr id="461" name=""/>
+          <p:cNvPr id="483" name=""/>
           <p:cNvSpPr txBox="1"/>
           <p:nvPr/>
         </p:nvSpPr>
@@ -11882,14 +12758,39 @@
       </p:sp>
       <p:sp>
         <p:nvSpPr>
-          <p:cNvPr id="462" name=""/>
-          <p:cNvSpPr txBox="1"/>
-          <p:nvPr/>
-        </p:nvSpPr>
-        <p:spPr>
-          <a:xfrm>
-            <a:off x="720000" y="1116000"/>
-            <a:ext cx="10620000" cy="440280"/>
+          <p:cNvPr id="484" name=""/>
+          <p:cNvSpPr/>
+          <p:nvPr/>
+        </p:nvSpPr>
+        <p:spPr>
+          <a:xfrm>
+            <a:off x="468000" y="954000"/>
+            <a:ext cx="720000" cy="630000"/>
+          </a:xfrm>
+          <a:prstGeom prst="roundRect">
+            <a:avLst/>
+          </a:prstGeom>
+          <a:solidFill>
+            <a:srgbClr val="500000"/>
+          </a:solidFill>
+          <a:ln w="7200">
+            <a:solidFill>
+              <a:srgbClr val="500000"/>
+            </a:solidFill>
+            <a:round/>
+          </a:ln>
+        </p:spPr>
+      </p:sp>
+      <p:sp>
+        <p:nvSpPr>
+          <p:cNvPr id="485" name=""/>
+          <p:cNvSpPr txBox="1"/>
+          <p:nvPr/>
+        </p:nvSpPr>
+        <p:spPr>
+          <a:xfrm>
+            <a:off x="486000" y="1090800"/>
+            <a:ext cx="684000" cy="384120"/>
           </a:xfrm>
           <a:prstGeom prst="rect">
             <a:avLst/>
@@ -11908,15 +12809,57 @@
               <a:buNone/>
             </a:pPr>
             <a:r>
-              <a:rPr b="1" lang="en-US" sz="2500" spc="-1" strike="noStrike">
+              <a:rPr b="1" lang="en-US" sz="2100" spc="-1" strike="noStrike">
+                <a:solidFill>
+                  <a:srgbClr val="ffffff"/>
+                </a:solidFill>
+                <a:latin typeface="Arial"/>
+              </a:rPr>
+              <a:t>01</a:t>
+            </a:r>
+            <a:endParaRPr b="1" lang="en-US" sz="2100" spc="-1" strike="noStrike">
+              <a:solidFill>
+                <a:srgbClr val="ffffff"/>
+              </a:solidFill>
+              <a:latin typeface="Arial"/>
+            </a:endParaRPr>
+          </a:p>
+        </p:txBody>
+      </p:sp>
+      <p:sp>
+        <p:nvSpPr>
+          <p:cNvPr id="486" name=""/>
+          <p:cNvSpPr txBox="1"/>
+          <p:nvPr/>
+        </p:nvSpPr>
+        <p:spPr>
+          <a:xfrm>
+            <a:off x="1368000" y="997200"/>
+            <a:ext cx="2592000" cy="446400"/>
+          </a:xfrm>
+          <a:prstGeom prst="rect">
+            <a:avLst/>
+          </a:prstGeom>
+          <a:noFill/>
+          <a:ln w="0">
+            <a:noFill/>
+          </a:ln>
+        </p:spPr>
+        <p:txBody>
+          <a:bodyPr lIns="43200" rIns="43200" tIns="43200" bIns="43200" anchor="t">
+            <a:noAutofit/>
+          </a:bodyPr>
+          <a:p>
+            <a:r>
+              <a:rPr b="1" lang="en-US" sz="1450" spc="-1" strike="noStrike">
                 <a:solidFill>
                   <a:srgbClr val="500000"/>
                 </a:solidFill>
                 <a:latin typeface="Arial"/>
               </a:rPr>
-              <a:t>A reproducible six-disc research platform now connects</a:t>
-            </a:r>
-            <a:endParaRPr b="1" lang="en-US" sz="2500" spc="-1" strike="noStrike">
+              <a:t>Physical gauge selection</a:t>
+            </a:r>
+            <a:endParaRPr b="1" lang="en-US" sz="1450" spc="-1" strike="noStrike">
               <a:solidFill>
                 <a:srgbClr val="500000"/>
               </a:solidFill>
@@ -11927,80 +12870,38 @@
       </p:sp>
       <p:sp>
         <p:nvSpPr>
-          <p:cNvPr id="463" name=""/>
-          <p:cNvSpPr txBox="1"/>
-          <p:nvPr/>
-        </p:nvSpPr>
-        <p:spPr>
-          <a:xfrm>
-            <a:off x="1440000" y="1800000"/>
-            <a:ext cx="2160000" cy="257400"/>
-          </a:xfrm>
-          <a:prstGeom prst="rect">
-            <a:avLst/>
-          </a:prstGeom>
-          <a:noFill/>
-          <a:ln w="0">
-            <a:noFill/>
-          </a:ln>
-        </p:spPr>
-        <p:txBody>
-          <a:bodyPr lIns="43200" rIns="43200" tIns="43200" bIns="43200" anchor="t">
-            <a:noAutofit/>
-          </a:bodyPr>
-          <a:p>
-            <a:r>
-              <a:rPr b="1" lang="en-US" sz="1200" spc="-1" strike="noStrike">
-                <a:solidFill>
-                  <a:srgbClr val="167d8d"/>
-                </a:solidFill>
-                <a:latin typeface="Arial"/>
-              </a:rPr>
-              <a:t>CONTROL</a:t>
-            </a:r>
-            <a:endParaRPr b="1" lang="en-US" sz="1200" spc="-1" strike="noStrike">
-              <a:solidFill>
-                <a:srgbClr val="167d8d"/>
-              </a:solidFill>
-              <a:latin typeface="Arial"/>
-            </a:endParaRPr>
-          </a:p>
-        </p:txBody>
-      </p:sp>
-      <p:sp>
-        <p:nvSpPr>
-          <p:cNvPr id="464" name=""/>
-          <p:cNvSpPr txBox="1"/>
-          <p:nvPr/>
-        </p:nvSpPr>
-        <p:spPr>
-          <a:xfrm>
-            <a:off x="3672000" y="1771200"/>
-            <a:ext cx="6840000" cy="329040"/>
-          </a:xfrm>
-          <a:prstGeom prst="rect">
-            <a:avLst/>
-          </a:prstGeom>
-          <a:noFill/>
-          <a:ln w="0">
-            <a:noFill/>
-          </a:ln>
-        </p:spPr>
-        <p:txBody>
-          <a:bodyPr lIns="43200" rIns="43200" tIns="43200" bIns="43200" anchor="t">
-            <a:noAutofit/>
-          </a:bodyPr>
-          <a:p>
-            <a:r>
-              <a:rPr b="0" lang="en-US" sz="1700" spc="-1" strike="noStrike">
+          <p:cNvPr id="487" name=""/>
+          <p:cNvSpPr txBox="1"/>
+          <p:nvPr/>
+        </p:nvSpPr>
+        <p:spPr>
+          <a:xfrm>
+            <a:off x="4104000" y="997200"/>
+            <a:ext cx="7164000" cy="464400"/>
+          </a:xfrm>
+          <a:prstGeom prst="rect">
+            <a:avLst/>
+          </a:prstGeom>
+          <a:noFill/>
+          <a:ln w="0">
+            <a:noFill/>
+          </a:ln>
+        </p:spPr>
+        <p:txBody>
+          <a:bodyPr lIns="43200" rIns="43200" tIns="43200" bIns="43200" anchor="t">
+            <a:noAutofit/>
+          </a:bodyPr>
+          <a:p>
+            <a:r>
+              <a:rPr b="0" lang="en-US" sz="1200" spc="-1" strike="noStrike">
                 <a:solidFill>
                   <a:srgbClr val="17212b"/>
                 </a:solidFill>
                 <a:latin typeface="Arial"/>
               </a:rPr>
-              <a:t>Position + torque admittance + minimum-energy circle</a:t>
-            </a:r>
-            <a:endParaRPr b="0" lang="en-US" sz="1700" spc="-1" strike="noStrike">
+              <a:t>Choose a commercial gauge, substrate, adhesive, and temperature compensation strategy.</a:t>
+            </a:r>
+            <a:endParaRPr b="0" lang="en-US" sz="1200" spc="-1" strike="noStrike">
               <a:solidFill>
                 <a:srgbClr val="17212b"/>
               </a:solidFill>
@@ -12011,21 +12912,759 @@
       </p:sp>
       <p:sp>
         <p:nvSpPr>
-          <p:cNvPr id="465" name=""/>
+          <p:cNvPr id="488" name=""/>
           <p:cNvSpPr/>
           <p:nvPr/>
         </p:nvSpPr>
         <p:spPr>
           <a:xfrm>
-            <a:off x="1440000" y="2178000"/>
-            <a:ext cx="9072000" cy="0"/>
-          </a:xfrm>
-          <a:prstGeom prst="line">
-            <a:avLst/>
-          </a:prstGeom>
+            <a:off x="468000" y="1944000"/>
+            <a:ext cx="720000" cy="630000"/>
+          </a:xfrm>
+          <a:prstGeom prst="roundRect">
+            <a:avLst/>
+          </a:prstGeom>
+          <a:solidFill>
+            <a:srgbClr val="500000"/>
+          </a:solidFill>
           <a:ln w="7200">
             <a:solidFill>
-              <a:srgbClr val="d7d2cc"/>
+              <a:srgbClr val="500000"/>
+            </a:solidFill>
+            <a:round/>
+          </a:ln>
+        </p:spPr>
+      </p:sp>
+      <p:sp>
+        <p:nvSpPr>
+          <p:cNvPr id="489" name=""/>
+          <p:cNvSpPr txBox="1"/>
+          <p:nvPr/>
+        </p:nvSpPr>
+        <p:spPr>
+          <a:xfrm>
+            <a:off x="486000" y="2080800"/>
+            <a:ext cx="684000" cy="384120"/>
+          </a:xfrm>
+          <a:prstGeom prst="rect">
+            <a:avLst/>
+          </a:prstGeom>
+          <a:noFill/>
+          <a:ln w="0">
+            <a:noFill/>
+          </a:ln>
+        </p:spPr>
+        <p:txBody>
+          <a:bodyPr lIns="43200" rIns="43200" tIns="43200" bIns="43200" anchor="t">
+            <a:noAutofit/>
+          </a:bodyPr>
+          <a:p>
+            <a:pPr algn="r">
+              <a:buNone/>
+            </a:pPr>
+            <a:r>
+              <a:rPr b="1" lang="en-US" sz="2100" spc="-1" strike="noStrike">
+                <a:solidFill>
+                  <a:srgbClr val="ffffff"/>
+                </a:solidFill>
+                <a:latin typeface="Arial"/>
+              </a:rPr>
+              <a:t>02</a:t>
+            </a:r>
+            <a:endParaRPr b="1" lang="en-US" sz="2100" spc="-1" strike="noStrike">
+              <a:solidFill>
+                <a:srgbClr val="ffffff"/>
+              </a:solidFill>
+              <a:latin typeface="Arial"/>
+            </a:endParaRPr>
+          </a:p>
+        </p:txBody>
+      </p:sp>
+      <p:sp>
+        <p:nvSpPr>
+          <p:cNvPr id="490" name=""/>
+          <p:cNvSpPr txBox="1"/>
+          <p:nvPr/>
+        </p:nvSpPr>
+        <p:spPr>
+          <a:xfrm>
+            <a:off x="1368000" y="1987200"/>
+            <a:ext cx="2592000" cy="446400"/>
+          </a:xfrm>
+          <a:prstGeom prst="rect">
+            <a:avLst/>
+          </a:prstGeom>
+          <a:noFill/>
+          <a:ln w="0">
+            <a:noFill/>
+          </a:ln>
+        </p:spPr>
+        <p:txBody>
+          <a:bodyPr lIns="43200" rIns="43200" tIns="43200" bIns="43200" anchor="t">
+            <a:noAutofit/>
+          </a:bodyPr>
+          <a:p>
+            <a:r>
+              <a:rPr b="1" lang="en-US" sz="1450" spc="-1" strike="noStrike">
+                <a:solidFill>
+                  <a:srgbClr val="500000"/>
+                </a:solidFill>
+                <a:latin typeface="Arial"/>
+              </a:rPr>
+              <a:t>Bench calibration</a:t>
+            </a:r>
+            <a:endParaRPr b="1" lang="en-US" sz="1450" spc="-1" strike="noStrike">
+              <a:solidFill>
+                <a:srgbClr val="500000"/>
+              </a:solidFill>
+              <a:latin typeface="Arial"/>
+            </a:endParaRPr>
+          </a:p>
+        </p:txBody>
+      </p:sp>
+      <p:sp>
+        <p:nvSpPr>
+          <p:cNvPr id="491" name=""/>
+          <p:cNvSpPr txBox="1"/>
+          <p:nvPr/>
+        </p:nvSpPr>
+        <p:spPr>
+          <a:xfrm>
+            <a:off x="4104000" y="1987200"/>
+            <a:ext cx="7164000" cy="464400"/>
+          </a:xfrm>
+          <a:prstGeom prst="rect">
+            <a:avLst/>
+          </a:prstGeom>
+          <a:noFill/>
+          <a:ln w="0">
+            <a:noFill/>
+          </a:ln>
+        </p:spPr>
+        <p:txBody>
+          <a:bodyPr lIns="43200" rIns="43200" tIns="43200" bIns="43200" anchor="t">
+            <a:noAutofit/>
+          </a:bodyPr>
+          <a:p>
+            <a:r>
+              <a:rPr b="0" lang="en-US" sz="1200" spc="-1" strike="noStrike">
+                <a:solidFill>
+                  <a:srgbClr val="17212b"/>
+                </a:solidFill>
+                <a:latin typeface="Arial"/>
+              </a:rPr>
+              <a:t>Measure real strain and bridge voltage against known curvature and loading.</a:t>
+            </a:r>
+            <a:endParaRPr b="0" lang="en-US" sz="1200" spc="-1" strike="noStrike">
+              <a:solidFill>
+                <a:srgbClr val="17212b"/>
+              </a:solidFill>
+              <a:latin typeface="Arial"/>
+            </a:endParaRPr>
+          </a:p>
+        </p:txBody>
+      </p:sp>
+      <p:sp>
+        <p:nvSpPr>
+          <p:cNvPr id="492" name=""/>
+          <p:cNvSpPr/>
+          <p:nvPr/>
+        </p:nvSpPr>
+        <p:spPr>
+          <a:xfrm>
+            <a:off x="468000" y="2934000"/>
+            <a:ext cx="720000" cy="630000"/>
+          </a:xfrm>
+          <a:prstGeom prst="roundRect">
+            <a:avLst/>
+          </a:prstGeom>
+          <a:solidFill>
+            <a:srgbClr val="500000"/>
+          </a:solidFill>
+          <a:ln w="7200">
+            <a:solidFill>
+              <a:srgbClr val="500000"/>
+            </a:solidFill>
+            <a:round/>
+          </a:ln>
+        </p:spPr>
+      </p:sp>
+      <p:sp>
+        <p:nvSpPr>
+          <p:cNvPr id="493" name=""/>
+          <p:cNvSpPr txBox="1"/>
+          <p:nvPr/>
+        </p:nvSpPr>
+        <p:spPr>
+          <a:xfrm>
+            <a:off x="486000" y="3070800"/>
+            <a:ext cx="684000" cy="384120"/>
+          </a:xfrm>
+          <a:prstGeom prst="rect">
+            <a:avLst/>
+          </a:prstGeom>
+          <a:noFill/>
+          <a:ln w="0">
+            <a:noFill/>
+          </a:ln>
+        </p:spPr>
+        <p:txBody>
+          <a:bodyPr lIns="43200" rIns="43200" tIns="43200" bIns="43200" anchor="t">
+            <a:noAutofit/>
+          </a:bodyPr>
+          <a:p>
+            <a:pPr algn="r">
+              <a:buNone/>
+            </a:pPr>
+            <a:r>
+              <a:rPr b="1" lang="en-US" sz="2100" spc="-1" strike="noStrike">
+                <a:solidFill>
+                  <a:srgbClr val="ffffff"/>
+                </a:solidFill>
+                <a:latin typeface="Arial"/>
+              </a:rPr>
+              <a:t>03</a:t>
+            </a:r>
+            <a:endParaRPr b="1" lang="en-US" sz="2100" spc="-1" strike="noStrike">
+              <a:solidFill>
+                <a:srgbClr val="ffffff"/>
+              </a:solidFill>
+              <a:latin typeface="Arial"/>
+            </a:endParaRPr>
+          </a:p>
+        </p:txBody>
+      </p:sp>
+      <p:sp>
+        <p:nvSpPr>
+          <p:cNvPr id="494" name=""/>
+          <p:cNvSpPr txBox="1"/>
+          <p:nvPr/>
+        </p:nvSpPr>
+        <p:spPr>
+          <a:xfrm>
+            <a:off x="1368000" y="2977200"/>
+            <a:ext cx="2592000" cy="501480"/>
+          </a:xfrm>
+          <a:prstGeom prst="rect">
+            <a:avLst/>
+          </a:prstGeom>
+          <a:noFill/>
+          <a:ln w="0">
+            <a:noFill/>
+          </a:ln>
+        </p:spPr>
+        <p:txBody>
+          <a:bodyPr lIns="43200" rIns="43200" tIns="43200" bIns="43200" anchor="t">
+            <a:noAutofit/>
+          </a:bodyPr>
+          <a:p>
+            <a:r>
+              <a:rPr b="1" lang="en-US" sz="1450" spc="-1" strike="noStrike">
+                <a:solidFill>
+                  <a:srgbClr val="500000"/>
+                </a:solidFill>
+                <a:latin typeface="Arial"/>
+              </a:rPr>
+              <a:t>Independent shape validation</a:t>
+            </a:r>
+            <a:endParaRPr b="1" lang="en-US" sz="1450" spc="-1" strike="noStrike">
+              <a:solidFill>
+                <a:srgbClr val="500000"/>
+              </a:solidFill>
+              <a:latin typeface="Arial"/>
+            </a:endParaRPr>
+          </a:p>
+        </p:txBody>
+      </p:sp>
+      <p:sp>
+        <p:nvSpPr>
+          <p:cNvPr id="495" name=""/>
+          <p:cNvSpPr txBox="1"/>
+          <p:nvPr/>
+        </p:nvSpPr>
+        <p:spPr>
+          <a:xfrm>
+            <a:off x="4104000" y="2977200"/>
+            <a:ext cx="7164000" cy="464400"/>
+          </a:xfrm>
+          <a:prstGeom prst="rect">
+            <a:avLst/>
+          </a:prstGeom>
+          <a:noFill/>
+          <a:ln w="0">
+            <a:noFill/>
+          </a:ln>
+        </p:spPr>
+        <p:txBody>
+          <a:bodyPr lIns="43200" rIns="43200" tIns="43200" bIns="43200" anchor="t">
+            <a:noAutofit/>
+          </a:bodyPr>
+          <a:p>
+            <a:r>
+              <a:rPr b="0" lang="en-US" sz="1200" spc="-1" strike="noStrike">
+                <a:solidFill>
+                  <a:srgbClr val="17212b"/>
+                </a:solidFill>
+                <a:latin typeface="Arial"/>
+              </a:rPr>
+              <a:t>Compare reconstructed curvature with motion capture or vision—not the same pose source.</a:t>
+            </a:r>
+            <a:endParaRPr b="0" lang="en-US" sz="1200" spc="-1" strike="noStrike">
+              <a:solidFill>
+                <a:srgbClr val="17212b"/>
+              </a:solidFill>
+              <a:latin typeface="Arial"/>
+            </a:endParaRPr>
+          </a:p>
+        </p:txBody>
+      </p:sp>
+      <p:sp>
+        <p:nvSpPr>
+          <p:cNvPr id="496" name=""/>
+          <p:cNvSpPr/>
+          <p:nvPr/>
+        </p:nvSpPr>
+        <p:spPr>
+          <a:xfrm>
+            <a:off x="468000" y="3924000"/>
+            <a:ext cx="720000" cy="630000"/>
+          </a:xfrm>
+          <a:prstGeom prst="roundRect">
+            <a:avLst/>
+          </a:prstGeom>
+          <a:solidFill>
+            <a:srgbClr val="500000"/>
+          </a:solidFill>
+          <a:ln w="7200">
+            <a:solidFill>
+              <a:srgbClr val="500000"/>
+            </a:solidFill>
+            <a:round/>
+          </a:ln>
+        </p:spPr>
+      </p:sp>
+      <p:sp>
+        <p:nvSpPr>
+          <p:cNvPr id="497" name=""/>
+          <p:cNvSpPr txBox="1"/>
+          <p:nvPr/>
+        </p:nvSpPr>
+        <p:spPr>
+          <a:xfrm>
+            <a:off x="486000" y="4060800"/>
+            <a:ext cx="684000" cy="384120"/>
+          </a:xfrm>
+          <a:prstGeom prst="rect">
+            <a:avLst/>
+          </a:prstGeom>
+          <a:noFill/>
+          <a:ln w="0">
+            <a:noFill/>
+          </a:ln>
+        </p:spPr>
+        <p:txBody>
+          <a:bodyPr lIns="43200" rIns="43200" tIns="43200" bIns="43200" anchor="t">
+            <a:noAutofit/>
+          </a:bodyPr>
+          <a:p>
+            <a:pPr algn="r">
+              <a:buNone/>
+            </a:pPr>
+            <a:r>
+              <a:rPr b="1" lang="en-US" sz="2100" spc="-1" strike="noStrike">
+                <a:solidFill>
+                  <a:srgbClr val="ffffff"/>
+                </a:solidFill>
+                <a:latin typeface="Arial"/>
+              </a:rPr>
+              <a:t>04</a:t>
+            </a:r>
+            <a:endParaRPr b="1" lang="en-US" sz="2100" spc="-1" strike="noStrike">
+              <a:solidFill>
+                <a:srgbClr val="ffffff"/>
+              </a:solidFill>
+              <a:latin typeface="Arial"/>
+            </a:endParaRPr>
+          </a:p>
+        </p:txBody>
+      </p:sp>
+      <p:sp>
+        <p:nvSpPr>
+          <p:cNvPr id="498" name=""/>
+          <p:cNvSpPr txBox="1"/>
+          <p:nvPr/>
+        </p:nvSpPr>
+        <p:spPr>
+          <a:xfrm>
+            <a:off x="1368000" y="3967200"/>
+            <a:ext cx="2592000" cy="501480"/>
+          </a:xfrm>
+          <a:prstGeom prst="rect">
+            <a:avLst/>
+          </a:prstGeom>
+          <a:noFill/>
+          <a:ln w="0">
+            <a:noFill/>
+          </a:ln>
+        </p:spPr>
+        <p:txBody>
+          <a:bodyPr lIns="43200" rIns="43200" tIns="43200" bIns="43200" anchor="t">
+            <a:noAutofit/>
+          </a:bodyPr>
+          <a:p>
+            <a:r>
+              <a:rPr b="1" lang="en-US" sz="1450" spc="-1" strike="noStrike">
+                <a:solidFill>
+                  <a:srgbClr val="500000"/>
+                </a:solidFill>
+                <a:latin typeface="Arial"/>
+              </a:rPr>
+              <a:t>Loaded and directional trials</a:t>
+            </a:r>
+            <a:endParaRPr b="1" lang="en-US" sz="1450" spc="-1" strike="noStrike">
+              <a:solidFill>
+                <a:srgbClr val="500000"/>
+              </a:solidFill>
+              <a:latin typeface="Arial"/>
+            </a:endParaRPr>
+          </a:p>
+        </p:txBody>
+      </p:sp>
+      <p:sp>
+        <p:nvSpPr>
+          <p:cNvPr id="499" name=""/>
+          <p:cNvSpPr txBox="1"/>
+          <p:nvPr/>
+        </p:nvSpPr>
+        <p:spPr>
+          <a:xfrm>
+            <a:off x="4104000" y="3967200"/>
+            <a:ext cx="7164000" cy="464400"/>
+          </a:xfrm>
+          <a:prstGeom prst="rect">
+            <a:avLst/>
+          </a:prstGeom>
+          <a:noFill/>
+          <a:ln w="0">
+            <a:noFill/>
+          </a:ln>
+        </p:spPr>
+        <p:txBody>
+          <a:bodyPr lIns="43200" rIns="43200" tIns="43200" bIns="43200" anchor="t">
+            <a:noAutofit/>
+          </a:bodyPr>
+          <a:p>
+            <a:r>
+              <a:rPr b="0" lang="en-US" sz="1200" spc="-1" strike="noStrike">
+                <a:solidFill>
+                  <a:srgbClr val="17212b"/>
+                </a:solidFill>
+                <a:latin typeface="Arial"/>
+              </a:rPr>
+              <a:t>Repeat across θ, negative torque, payloads, disturbances, and repeated cycles.</a:t>
+            </a:r>
+            <a:endParaRPr b="0" lang="en-US" sz="1200" spc="-1" strike="noStrike">
+              <a:solidFill>
+                <a:srgbClr val="17212b"/>
+              </a:solidFill>
+              <a:latin typeface="Arial"/>
+            </a:endParaRPr>
+          </a:p>
+        </p:txBody>
+      </p:sp>
+      <p:sp>
+        <p:nvSpPr>
+          <p:cNvPr id="500" name=""/>
+          <p:cNvSpPr/>
+          <p:nvPr/>
+        </p:nvSpPr>
+        <p:spPr>
+          <a:xfrm>
+            <a:off x="468000" y="4914000"/>
+            <a:ext cx="720000" cy="630000"/>
+          </a:xfrm>
+          <a:prstGeom prst="roundRect">
+            <a:avLst/>
+          </a:prstGeom>
+          <a:solidFill>
+            <a:srgbClr val="500000"/>
+          </a:solidFill>
+          <a:ln w="7200">
+            <a:solidFill>
+              <a:srgbClr val="500000"/>
+            </a:solidFill>
+            <a:round/>
+          </a:ln>
+        </p:spPr>
+      </p:sp>
+      <p:sp>
+        <p:nvSpPr>
+          <p:cNvPr id="501" name=""/>
+          <p:cNvSpPr txBox="1"/>
+          <p:nvPr/>
+        </p:nvSpPr>
+        <p:spPr>
+          <a:xfrm>
+            <a:off x="486000" y="5050800"/>
+            <a:ext cx="684000" cy="384120"/>
+          </a:xfrm>
+          <a:prstGeom prst="rect">
+            <a:avLst/>
+          </a:prstGeom>
+          <a:noFill/>
+          <a:ln w="0">
+            <a:noFill/>
+          </a:ln>
+        </p:spPr>
+        <p:txBody>
+          <a:bodyPr lIns="43200" rIns="43200" tIns="43200" bIns="43200" anchor="t">
+            <a:noAutofit/>
+          </a:bodyPr>
+          <a:p>
+            <a:pPr algn="r">
+              <a:buNone/>
+            </a:pPr>
+            <a:r>
+              <a:rPr b="1" lang="en-US" sz="2100" spc="-1" strike="noStrike">
+                <a:solidFill>
+                  <a:srgbClr val="ffffff"/>
+                </a:solidFill>
+                <a:latin typeface="Arial"/>
+              </a:rPr>
+              <a:t>05</a:t>
+            </a:r>
+            <a:endParaRPr b="1" lang="en-US" sz="2100" spc="-1" strike="noStrike">
+              <a:solidFill>
+                <a:srgbClr val="ffffff"/>
+              </a:solidFill>
+              <a:latin typeface="Arial"/>
+            </a:endParaRPr>
+          </a:p>
+        </p:txBody>
+      </p:sp>
+      <p:sp>
+        <p:nvSpPr>
+          <p:cNvPr id="502" name=""/>
+          <p:cNvSpPr txBox="1"/>
+          <p:nvPr/>
+        </p:nvSpPr>
+        <p:spPr>
+          <a:xfrm>
+            <a:off x="1368000" y="4957200"/>
+            <a:ext cx="2592000" cy="446400"/>
+          </a:xfrm>
+          <a:prstGeom prst="rect">
+            <a:avLst/>
+          </a:prstGeom>
+          <a:noFill/>
+          <a:ln w="0">
+            <a:noFill/>
+          </a:ln>
+        </p:spPr>
+        <p:txBody>
+          <a:bodyPr lIns="43200" rIns="43200" tIns="43200" bIns="43200" anchor="t">
+            <a:noAutofit/>
+          </a:bodyPr>
+          <a:p>
+            <a:r>
+              <a:rPr b="1" lang="en-US" sz="1450" spc="-1" strike="noStrike">
+                <a:solidFill>
+                  <a:srgbClr val="500000"/>
+                </a:solidFill>
+                <a:latin typeface="Arial"/>
+              </a:rPr>
+              <a:t>Uncertainty and statistics</a:t>
+            </a:r>
+            <a:endParaRPr b="1" lang="en-US" sz="1450" spc="-1" strike="noStrike">
+              <a:solidFill>
+                <a:srgbClr val="500000"/>
+              </a:solidFill>
+              <a:latin typeface="Arial"/>
+            </a:endParaRPr>
+          </a:p>
+        </p:txBody>
+      </p:sp>
+      <p:sp>
+        <p:nvSpPr>
+          <p:cNvPr id="503" name=""/>
+          <p:cNvSpPr txBox="1"/>
+          <p:nvPr/>
+        </p:nvSpPr>
+        <p:spPr>
+          <a:xfrm>
+            <a:off x="4104000" y="4957200"/>
+            <a:ext cx="7164000" cy="464400"/>
+          </a:xfrm>
+          <a:prstGeom prst="rect">
+            <a:avLst/>
+          </a:prstGeom>
+          <a:noFill/>
+          <a:ln w="0">
+            <a:noFill/>
+          </a:ln>
+        </p:spPr>
+        <p:txBody>
+          <a:bodyPr lIns="43200" rIns="43200" tIns="43200" bIns="43200" anchor="t">
+            <a:noAutofit/>
+          </a:bodyPr>
+          <a:p>
+            <a:r>
+              <a:rPr b="0" lang="en-US" sz="1200" spc="-1" strike="noStrike">
+                <a:solidFill>
+                  <a:srgbClr val="17212b"/>
+                </a:solidFill>
+                <a:latin typeface="Arial"/>
+              </a:rPr>
+              <a:t>Report repeatability, hysteresis, drift, confidence intervals, and failure limits.</a:t>
+            </a:r>
+            <a:endParaRPr b="0" lang="en-US" sz="1200" spc="-1" strike="noStrike">
+              <a:solidFill>
+                <a:srgbClr val="17212b"/>
+              </a:solidFill>
+              <a:latin typeface="Arial"/>
+            </a:endParaRPr>
+          </a:p>
+        </p:txBody>
+      </p:sp>
+    </p:spTree>
+  </p:cSld>
+  <mc:AlternateContent>
+    <mc:Choice Requires="p14">
+      <p:transition spd="slow" p14:dur="2000"/>
+    </mc:Choice>
+    <mc:Fallback>
+      <p:transition spd="slow"/>
+    </mc:Fallback>
+  </mc:AlternateContent>
+</p:sld>
+</file>
+
+<file path=ppt/slides/slide18.xml><?xml version="1.0" encoding="utf-8"?>
+<p:sld xmlns:a="http://schemas.openxmlformats.org/drawingml/2006/main" xmlns:p="http://schemas.openxmlformats.org/presentationml/2006/main" xmlns:r="http://schemas.openxmlformats.org/officeDocument/2006/relationships" xmlns:p14="http://schemas.microsoft.com/office/powerpoint/2010/main" xmlns:p15="http://schemas.microsoft.com/office/powerpoint/2012/main" xmlns:mc="http://schemas.openxmlformats.org/markup-compatibility/2006">
+  <p:cSld>
+    <p:spTree>
+      <p:nvGrpSpPr>
+        <p:cNvPr id="1" name=""/>
+        <p:cNvGrpSpPr/>
+        <p:nvPr/>
+      </p:nvGrpSpPr>
+      <p:grpSpPr>
+        <a:xfrm>
+          <a:off x="0" y="0"/>
+          <a:ext cx="0" cy="0"/>
+          <a:chOff x="0" y="0"/>
+          <a:chExt cx="0" cy="0"/>
+        </a:xfrm>
+      </p:grpSpPr>
+      <p:sp>
+        <p:nvSpPr>
+          <p:cNvPr id="504" name=""/>
+          <p:cNvSpPr/>
+          <p:nvPr/>
+        </p:nvSpPr>
+        <p:spPr>
+          <a:xfrm>
+            <a:off x="0" y="0"/>
+            <a:ext cx="12192120" cy="6858000"/>
+          </a:xfrm>
+          <a:prstGeom prst="rect">
+            <a:avLst/>
+          </a:prstGeom>
+          <a:solidFill>
+            <a:srgbClr val="f4f2ef"/>
+          </a:solidFill>
+          <a:ln w="7200">
+            <a:solidFill>
+              <a:srgbClr val="f4f2ef"/>
+            </a:solidFill>
+            <a:round/>
+          </a:ln>
+        </p:spPr>
+      </p:sp>
+      <p:sp>
+        <p:nvSpPr>
+          <p:cNvPr id="505" name=""/>
+          <p:cNvSpPr/>
+          <p:nvPr/>
+        </p:nvSpPr>
+        <p:spPr>
+          <a:xfrm>
+            <a:off x="0" y="0"/>
+            <a:ext cx="126000" cy="6858000"/>
+          </a:xfrm>
+          <a:prstGeom prst="rect">
+            <a:avLst/>
+          </a:prstGeom>
+          <a:solidFill>
+            <a:srgbClr val="500000"/>
+          </a:solidFill>
+          <a:ln w="7200">
+            <a:solidFill>
+              <a:srgbClr val="500000"/>
+            </a:solidFill>
+            <a:round/>
+          </a:ln>
+        </p:spPr>
+      </p:sp>
+      <p:sp>
+        <p:nvSpPr>
+          <p:cNvPr id="506" name=""/>
+          <p:cNvSpPr txBox="1"/>
+          <p:nvPr/>
+        </p:nvSpPr>
+        <p:spPr>
+          <a:xfrm>
+            <a:off x="414000" y="234000"/>
+            <a:ext cx="11052000" cy="426600"/>
+          </a:xfrm>
+          <a:prstGeom prst="rect">
+            <a:avLst/>
+          </a:prstGeom>
+          <a:noFill/>
+          <a:ln w="0">
+            <a:noFill/>
+          </a:ln>
+        </p:spPr>
+        <p:txBody>
+          <a:bodyPr lIns="43200" rIns="43200" tIns="43200" bIns="43200" anchor="t">
+            <a:noAutofit/>
+          </a:bodyPr>
+          <a:p>
+            <a:r>
+              <a:rPr b="1" lang="en-US" sz="2400" spc="-1" strike="noStrike">
+                <a:solidFill>
+                  <a:srgbClr val="500000"/>
+                </a:solidFill>
+                <a:latin typeface="Arial"/>
+              </a:rPr>
+              <a:t>Current Outcome</a:t>
+            </a:r>
+            <a:endParaRPr b="1" lang="en-US" sz="2400" spc="-1" strike="noStrike">
+              <a:solidFill>
+                <a:srgbClr val="500000"/>
+              </a:solidFill>
+              <a:latin typeface="Arial"/>
+            </a:endParaRPr>
+          </a:p>
+        </p:txBody>
+      </p:sp>
+      <p:sp>
+        <p:nvSpPr>
+          <p:cNvPr id="507" name=""/>
+          <p:cNvSpPr/>
+          <p:nvPr/>
+        </p:nvSpPr>
+        <p:spPr>
+          <a:xfrm>
+            <a:off x="414000" y="702000"/>
+            <a:ext cx="11178000" cy="0"/>
+          </a:xfrm>
+          <a:prstGeom prst="line">
+            <a:avLst/>
+          </a:prstGeom>
+          <a:ln w="14400">
+            <a:solidFill>
+              <a:srgbClr val="d6a84b"/>
             </a:solidFill>
             <a:round/>
           </a:ln>
@@ -12039,13 +13678,190 @@
       </p:sp>
       <p:sp>
         <p:nvSpPr>
-          <p:cNvPr id="466" name=""/>
-          <p:cNvSpPr txBox="1"/>
-          <p:nvPr/>
-        </p:nvSpPr>
-        <p:spPr>
-          <a:xfrm>
-            <a:off x="1440000" y="2538000"/>
+          <p:cNvPr id="508" name=""/>
+          <p:cNvSpPr txBox="1"/>
+          <p:nvPr/>
+        </p:nvSpPr>
+        <p:spPr>
+          <a:xfrm>
+            <a:off x="9000000" y="90000"/>
+            <a:ext cx="2520000" cy="201240"/>
+          </a:xfrm>
+          <a:prstGeom prst="rect">
+            <a:avLst/>
+          </a:prstGeom>
+          <a:noFill/>
+          <a:ln w="0">
+            <a:noFill/>
+          </a:ln>
+        </p:spPr>
+        <p:txBody>
+          <a:bodyPr lIns="43200" rIns="43200" tIns="43200" bIns="43200" anchor="t">
+            <a:noAutofit/>
+          </a:bodyPr>
+          <a:p>
+            <a:pPr algn="just">
+              <a:buNone/>
+            </a:pPr>
+            <a:r>
+              <a:rPr b="1" lang="en-US" sz="800" spc="-1" strike="noStrike">
+                <a:solidFill>
+                  <a:srgbClr val="44515e"/>
+                </a:solidFill>
+                <a:latin typeface="Arial"/>
+              </a:rPr>
+              <a:t>CONCLUSION</a:t>
+            </a:r>
+            <a:endParaRPr b="1" lang="en-US" sz="800" spc="-1" strike="noStrike">
+              <a:solidFill>
+                <a:srgbClr val="44515e"/>
+              </a:solidFill>
+              <a:latin typeface="Arial"/>
+            </a:endParaRPr>
+          </a:p>
+        </p:txBody>
+      </p:sp>
+      <p:sp>
+        <p:nvSpPr>
+          <p:cNvPr id="509" name=""/>
+          <p:cNvSpPr txBox="1"/>
+          <p:nvPr/>
+        </p:nvSpPr>
+        <p:spPr>
+          <a:xfrm>
+            <a:off x="414000" y="6642000"/>
+            <a:ext cx="7560000" cy="193320"/>
+          </a:xfrm>
+          <a:prstGeom prst="rect">
+            <a:avLst/>
+          </a:prstGeom>
+          <a:noFill/>
+          <a:ln w="0">
+            <a:noFill/>
+          </a:ln>
+        </p:spPr>
+        <p:txBody>
+          <a:bodyPr lIns="43200" rIns="43200" tIns="43200" bIns="43200" anchor="t">
+            <a:noAutofit/>
+          </a:bodyPr>
+          <a:p>
+            <a:r>
+              <a:rPr b="0" lang="en-US" sz="750" spc="-1" strike="noStrike">
+                <a:solidFill>
+                  <a:srgbClr val="44515e"/>
+                </a:solidFill>
+                <a:latin typeface="Arial"/>
+              </a:rPr>
+              <a:t>Soft continuum limb research progress  •  18</a:t>
+            </a:r>
+            <a:endParaRPr b="0" lang="en-US" sz="750" spc="-1" strike="noStrike">
+              <a:solidFill>
+                <a:srgbClr val="44515e"/>
+              </a:solidFill>
+              <a:latin typeface="Arial"/>
+            </a:endParaRPr>
+          </a:p>
+        </p:txBody>
+      </p:sp>
+      <p:sp>
+        <p:nvSpPr>
+          <p:cNvPr id="510" name=""/>
+          <p:cNvSpPr txBox="1"/>
+          <p:nvPr/>
+        </p:nvSpPr>
+        <p:spPr>
+          <a:xfrm>
+            <a:off x="9000000" y="6642000"/>
+            <a:ext cx="2556000" cy="193320"/>
+          </a:xfrm>
+          <a:prstGeom prst="rect">
+            <a:avLst/>
+          </a:prstGeom>
+          <a:noFill/>
+          <a:ln w="0">
+            <a:noFill/>
+          </a:ln>
+        </p:spPr>
+        <p:txBody>
+          <a:bodyPr lIns="43200" rIns="43200" tIns="43200" bIns="43200" anchor="t">
+            <a:noAutofit/>
+          </a:bodyPr>
+          <a:p>
+            <a:pPr algn="just">
+              <a:buNone/>
+            </a:pPr>
+            <a:r>
+              <a:rPr b="0" lang="en-US" sz="750" spc="-1" strike="noStrike">
+                <a:solidFill>
+                  <a:srgbClr val="44515e"/>
+                </a:solidFill>
+                <a:latin typeface="Arial"/>
+              </a:rPr>
+              <a:t>ETID / MSET research</a:t>
+            </a:r>
+            <a:endParaRPr b="0" lang="en-US" sz="750" spc="-1" strike="noStrike">
+              <a:solidFill>
+                <a:srgbClr val="44515e"/>
+              </a:solidFill>
+              <a:latin typeface="Arial"/>
+            </a:endParaRPr>
+          </a:p>
+        </p:txBody>
+      </p:sp>
+      <p:sp>
+        <p:nvSpPr>
+          <p:cNvPr id="511" name=""/>
+          <p:cNvSpPr txBox="1"/>
+          <p:nvPr/>
+        </p:nvSpPr>
+        <p:spPr>
+          <a:xfrm>
+            <a:off x="720000" y="1116000"/>
+            <a:ext cx="10620000" cy="440280"/>
+          </a:xfrm>
+          <a:prstGeom prst="rect">
+            <a:avLst/>
+          </a:prstGeom>
+          <a:noFill/>
+          <a:ln w="0">
+            <a:noFill/>
+          </a:ln>
+        </p:spPr>
+        <p:txBody>
+          <a:bodyPr lIns="43200" rIns="43200" tIns="43200" bIns="43200" anchor="t">
+            <a:noAutofit/>
+          </a:bodyPr>
+          <a:p>
+            <a:pPr algn="r">
+              <a:buNone/>
+            </a:pPr>
+            <a:r>
+              <a:rPr b="1" lang="en-US" sz="2500" spc="-1" strike="noStrike">
+                <a:solidFill>
+                  <a:srgbClr val="500000"/>
+                </a:solidFill>
+                <a:latin typeface="Arial"/>
+              </a:rPr>
+              <a:t>A reproducible six-disc research platform now connects</a:t>
+            </a:r>
+            <a:endParaRPr b="1" lang="en-US" sz="2500" spc="-1" strike="noStrike">
+              <a:solidFill>
+                <a:srgbClr val="500000"/>
+              </a:solidFill>
+              <a:latin typeface="Arial"/>
+            </a:endParaRPr>
+          </a:p>
+        </p:txBody>
+      </p:sp>
+      <p:sp>
+        <p:nvSpPr>
+          <p:cNvPr id="512" name=""/>
+          <p:cNvSpPr txBox="1"/>
+          <p:nvPr/>
+        </p:nvSpPr>
+        <p:spPr>
+          <a:xfrm>
+            <a:off x="1440000" y="1800000"/>
             <a:ext cx="2160000" cy="257400"/>
           </a:xfrm>
           <a:prstGeom prst="rect">
@@ -12068,7 +13884,7 @@
                 </a:solidFill>
                 <a:latin typeface="Arial"/>
               </a:rPr>
-              <a:t>SHAPE</a:t>
+              <a:t>CONTROL</a:t>
             </a:r>
             <a:endParaRPr b="1" lang="en-US" sz="1200" spc="-1" strike="noStrike">
               <a:solidFill>
@@ -12081,13 +13897,13 @@
       </p:sp>
       <p:sp>
         <p:nvSpPr>
-          <p:cNvPr id="467" name=""/>
-          <p:cNvSpPr txBox="1"/>
-          <p:nvPr/>
-        </p:nvSpPr>
-        <p:spPr>
-          <a:xfrm>
-            <a:off x="3672000" y="2509200"/>
+          <p:cNvPr id="513" name=""/>
+          <p:cNvSpPr txBox="1"/>
+          <p:nvPr/>
+        </p:nvSpPr>
+        <p:spPr>
+          <a:xfrm>
+            <a:off x="3672000" y="1771200"/>
             <a:ext cx="6840000" cy="329040"/>
           </a:xfrm>
           <a:prstGeom prst="rect">
@@ -12110,7 +13926,7 @@
                 </a:solidFill>
                 <a:latin typeface="Arial"/>
               </a:rPr>
-              <a:t>Synchronized five-interval constant-curvature target</a:t>
+              <a:t>Position + torque admittance + minimum-energy circle</a:t>
             </a:r>
             <a:endParaRPr b="0" lang="en-US" sz="1700" spc="-1" strike="noStrike">
               <a:solidFill>
@@ -12123,13 +13939,13 @@
       </p:sp>
       <p:sp>
         <p:nvSpPr>
-          <p:cNvPr id="468" name=""/>
+          <p:cNvPr id="514" name=""/>
           <p:cNvSpPr/>
           <p:nvPr/>
         </p:nvSpPr>
         <p:spPr>
           <a:xfrm>
-            <a:off x="1440000" y="2916000"/>
+            <a:off x="1440000" y="2178000"/>
             <a:ext cx="9072000" cy="0"/>
           </a:xfrm>
           <a:prstGeom prst="line">
@@ -12151,13 +13967,13 @@
       </p:sp>
       <p:sp>
         <p:nvSpPr>
-          <p:cNvPr id="469" name=""/>
-          <p:cNvSpPr txBox="1"/>
-          <p:nvPr/>
-        </p:nvSpPr>
-        <p:spPr>
-          <a:xfrm>
-            <a:off x="1440000" y="3276000"/>
+          <p:cNvPr id="515" name=""/>
+          <p:cNvSpPr txBox="1"/>
+          <p:nvPr/>
+        </p:nvSpPr>
+        <p:spPr>
+          <a:xfrm>
+            <a:off x="1440000" y="2538000"/>
             <a:ext cx="2160000" cy="257400"/>
           </a:xfrm>
           <a:prstGeom prst="rect">
@@ -12180,7 +13996,7 @@
                 </a:solidFill>
                 <a:latin typeface="Arial"/>
               </a:rPr>
-              <a:t>SENSING</a:t>
+              <a:t>SHAPE</a:t>
             </a:r>
             <a:endParaRPr b="1" lang="en-US" sz="1200" spc="-1" strike="noStrike">
               <a:solidFill>
@@ -12193,13 +14009,13 @@
       </p:sp>
       <p:sp>
         <p:nvSpPr>
-          <p:cNvPr id="470" name=""/>
-          <p:cNvSpPr txBox="1"/>
-          <p:nvPr/>
-        </p:nvSpPr>
-        <p:spPr>
-          <a:xfrm>
-            <a:off x="3672000" y="3247200"/>
+          <p:cNvPr id="516" name=""/>
+          <p:cNvSpPr txBox="1"/>
+          <p:nvPr/>
+        </p:nvSpPr>
+        <p:spPr>
+          <a:xfrm>
+            <a:off x="3672000" y="2509200"/>
             <a:ext cx="6840000" cy="329040"/>
           </a:xfrm>
           <a:prstGeom prst="rect">
@@ -12222,7 +14038,7 @@
                 </a:solidFill>
                 <a:latin typeface="Arial"/>
               </a:rPr>
-              <a:t>Six pose-derived strain channels + bridge voltages</a:t>
+              <a:t>Synchronized five-interval constant-curvature target</a:t>
             </a:r>
             <a:endParaRPr b="0" lang="en-US" sz="1700" spc="-1" strike="noStrike">
               <a:solidFill>
@@ -12235,13 +14051,13 @@
       </p:sp>
       <p:sp>
         <p:nvSpPr>
-          <p:cNvPr id="471" name=""/>
+          <p:cNvPr id="517" name=""/>
           <p:cNvSpPr/>
           <p:nvPr/>
         </p:nvSpPr>
         <p:spPr>
           <a:xfrm>
-            <a:off x="1440000" y="3654000"/>
+            <a:off x="1440000" y="2916000"/>
             <a:ext cx="9072000" cy="0"/>
           </a:xfrm>
           <a:prstGeom prst="line">
@@ -12263,13 +14079,13 @@
       </p:sp>
       <p:sp>
         <p:nvSpPr>
-          <p:cNvPr id="472" name=""/>
-          <p:cNvSpPr txBox="1"/>
-          <p:nvPr/>
-        </p:nvSpPr>
-        <p:spPr>
-          <a:xfrm>
-            <a:off x="1440000" y="4014000"/>
+          <p:cNvPr id="518" name=""/>
+          <p:cNvSpPr txBox="1"/>
+          <p:nvPr/>
+        </p:nvSpPr>
+        <p:spPr>
+          <a:xfrm>
+            <a:off x="1440000" y="3276000"/>
             <a:ext cx="2160000" cy="257400"/>
           </a:xfrm>
           <a:prstGeom prst="rect">
@@ -12292,7 +14108,7 @@
                 </a:solidFill>
                 <a:latin typeface="Arial"/>
               </a:rPr>
-              <a:t>VISUALIZATION</a:t>
+              <a:t>SENSING</a:t>
             </a:r>
             <a:endParaRPr b="1" lang="en-US" sz="1200" spc="-1" strike="noStrike">
               <a:solidFill>
@@ -12305,13 +14121,13 @@
       </p:sp>
       <p:sp>
         <p:nvSpPr>
-          <p:cNvPr id="473" name=""/>
-          <p:cNvSpPr txBox="1"/>
-          <p:nvPr/>
-        </p:nvSpPr>
-        <p:spPr>
-          <a:xfrm>
-            <a:off x="3672000" y="3985200"/>
+          <p:cNvPr id="519" name=""/>
+          <p:cNvSpPr txBox="1"/>
+          <p:nvPr/>
+        </p:nvSpPr>
+        <p:spPr>
+          <a:xfrm>
+            <a:off x="3672000" y="3247200"/>
             <a:ext cx="6840000" cy="329040"/>
           </a:xfrm>
           <a:prstGeom prst="rect">
@@ -12334,7 +14150,7 @@
                 </a:solidFill>
                 <a:latin typeface="Arial"/>
               </a:rPr>
-              <a:t>Isaac Sim + sensor-driven RViz reconstruction</a:t>
+              <a:t>Six pose-derived strain channels + bridge voltages</a:t>
             </a:r>
             <a:endParaRPr b="0" lang="en-US" sz="1700" spc="-1" strike="noStrike">
               <a:solidFill>
@@ -12347,13 +14163,13 @@
       </p:sp>
       <p:sp>
         <p:nvSpPr>
-          <p:cNvPr id="474" name=""/>
+          <p:cNvPr id="520" name=""/>
           <p:cNvSpPr/>
           <p:nvPr/>
         </p:nvSpPr>
         <p:spPr>
           <a:xfrm>
-            <a:off x="1440000" y="4392000"/>
+            <a:off x="1440000" y="3654000"/>
             <a:ext cx="9072000" cy="0"/>
           </a:xfrm>
           <a:prstGeom prst="line">
@@ -12375,7 +14191,119 @@
       </p:sp>
       <p:sp>
         <p:nvSpPr>
-          <p:cNvPr id="475" name=""/>
+          <p:cNvPr id="521" name=""/>
+          <p:cNvSpPr txBox="1"/>
+          <p:nvPr/>
+        </p:nvSpPr>
+        <p:spPr>
+          <a:xfrm>
+            <a:off x="1440000" y="4014000"/>
+            <a:ext cx="2160000" cy="257400"/>
+          </a:xfrm>
+          <a:prstGeom prst="rect">
+            <a:avLst/>
+          </a:prstGeom>
+          <a:noFill/>
+          <a:ln w="0">
+            <a:noFill/>
+          </a:ln>
+        </p:spPr>
+        <p:txBody>
+          <a:bodyPr lIns="43200" rIns="43200" tIns="43200" bIns="43200" anchor="t">
+            <a:noAutofit/>
+          </a:bodyPr>
+          <a:p>
+            <a:r>
+              <a:rPr b="1" lang="en-US" sz="1200" spc="-1" strike="noStrike">
+                <a:solidFill>
+                  <a:srgbClr val="167d8d"/>
+                </a:solidFill>
+                <a:latin typeface="Arial"/>
+              </a:rPr>
+              <a:t>INTEGRATION</a:t>
+            </a:r>
+            <a:endParaRPr b="1" lang="en-US" sz="1200" spc="-1" strike="noStrike">
+              <a:solidFill>
+                <a:srgbClr val="167d8d"/>
+              </a:solidFill>
+              <a:latin typeface="Arial"/>
+            </a:endParaRPr>
+          </a:p>
+        </p:txBody>
+      </p:sp>
+      <p:sp>
+        <p:nvSpPr>
+          <p:cNvPr id="522" name=""/>
+          <p:cNvSpPr txBox="1"/>
+          <p:nvPr/>
+        </p:nvSpPr>
+        <p:spPr>
+          <a:xfrm>
+            <a:off x="3672000" y="3985200"/>
+            <a:ext cx="6840000" cy="329040"/>
+          </a:xfrm>
+          <a:prstGeom prst="rect">
+            <a:avLst/>
+          </a:prstGeom>
+          <a:noFill/>
+          <a:ln w="0">
+            <a:noFill/>
+          </a:ln>
+        </p:spPr>
+        <p:txBody>
+          <a:bodyPr lIns="43200" rIns="43200" tIns="43200" bIns="43200" anchor="t">
+            <a:noAutofit/>
+          </a:bodyPr>
+          <a:p>
+            <a:r>
+              <a:rPr b="0" lang="en-US" sz="1700" spc="-1" strike="noStrike">
+                <a:solidFill>
+                  <a:srgbClr val="17212b"/>
+                </a:solidFill>
+                <a:latin typeface="Arial"/>
+              </a:rPr>
+              <a:t>Verified limb reused in a five-member quadruped</a:t>
+            </a:r>
+            <a:endParaRPr b="0" lang="en-US" sz="1700" spc="-1" strike="noStrike">
+              <a:solidFill>
+                <a:srgbClr val="17212b"/>
+              </a:solidFill>
+              <a:latin typeface="Arial"/>
+            </a:endParaRPr>
+          </a:p>
+        </p:txBody>
+      </p:sp>
+      <p:sp>
+        <p:nvSpPr>
+          <p:cNvPr id="523" name=""/>
+          <p:cNvSpPr/>
+          <p:nvPr/>
+        </p:nvSpPr>
+        <p:spPr>
+          <a:xfrm>
+            <a:off x="1440000" y="4392000"/>
+            <a:ext cx="9072000" cy="0"/>
+          </a:xfrm>
+          <a:prstGeom prst="line">
+            <a:avLst/>
+          </a:prstGeom>
+          <a:ln w="7200">
+            <a:solidFill>
+              <a:srgbClr val="d7d2cc"/>
+            </a:solidFill>
+            <a:round/>
+          </a:ln>
+        </p:spPr>
+        <p:style>
+          <a:lnRef idx="0"/>
+          <a:fillRef idx="0"/>
+          <a:effectRef idx="0"/>
+          <a:fontRef idx="minor"/>
+        </p:style>
+      </p:sp>
+      <p:sp>
+        <p:nvSpPr>
+          <p:cNvPr id="524" name=""/>
           <p:cNvSpPr txBox="1"/>
           <p:nvPr/>
         </p:nvSpPr>
@@ -12417,7 +14345,7 @@
       </p:sp>
       <p:sp>
         <p:nvSpPr>
-          <p:cNvPr id="476" name=""/>
+          <p:cNvPr id="525" name=""/>
           <p:cNvSpPr txBox="1"/>
           <p:nvPr/>
         </p:nvSpPr>
@@ -12459,7 +14387,7 @@
       </p:sp>
       <p:sp>
         <p:nvSpPr>
-          <p:cNvPr id="477" name=""/>
+          <p:cNvPr id="526" name=""/>
           <p:cNvSpPr txBox="1"/>
           <p:nvPr/>
         </p:nvSpPr>
